--- a/slides/pptx/第06回_社内へのお披露目と12か月計画.pptx
+++ b/slides/pptx/第06回_社内へのお披露目と12か月計画.pptx
@@ -12,9 +12,14 @@
     <p:sldId id="260" r:id="rId6"/>
     <p:sldId id="261" r:id="rId7"/>
     <p:sldId id="262" r:id="rId8"/>
+    <p:sldId id="263" r:id="rId9"/>
+    <p:sldId id="264" r:id="rId10"/>
+    <p:sldId id="265" r:id="rId11"/>
+    <p:sldId id="266" r:id="rId12"/>
+    <p:sldId id="267" r:id="rId13"/>
   </p:sldIdLst>
   <p:notesMasterIdLst>
-    <p:notesMasterId r:id="rId9"/>
+    <p:notesMasterId r:id="rId14"/>
   </p:notesMasterIdLst>
   <p:sldSz cx="12192000" cy="6858000"/>
   <p:notesSz cx="6858000" cy="12192000"/>
@@ -508,8 +513,7 @@
           <a:p>
             <a:r>
               <a:rPr lang="en-US" dirty="0"/>
-              <a:t>この5回で作ったものを、社内に開きます。ここから先は、会社の話になります。
-【ゴール】社長ご自身の言葉で、社員のみなさんに「うちはAIをこう使う」を説明します。</a:t>
+              <a:t>この回だけ、参加者が違う。冒頭で講師から趣旨説明をして、社員の緊張をほぐす。「評価の場ではありません」と明言する。</a:t>
             </a:r>
             <a:endParaRPr lang="en-US" dirty="0"/>
           </a:p>
@@ -533,6 +537,270 @@
             <a:fld id="{F7021451-1387-4CA6-816F-3879F97B5CBC}" type="slidenum">
               <a:rPr lang="en-US"/>
               <a:t>1</a:t>
+            </a:fld>
+            <a:endParaRPr lang="en-US"/>
+          </a:p>
+        </p:txBody>
+      </p:sp>
+    </p:spTree>
+    <p:extLst>
+      <p:ext uri="{BB962C8B-B14F-4D97-AF65-F5344CB8AC3E}">
+        <p14:creationId xmlns:p14="http://schemas.microsoft.com/office/powerpoint/2010/main" val="1024086991"/>
+      </p:ext>
+    </p:extLst>
+  </p:cSld>
+  <p:clrMapOvr>
+    <a:masterClrMapping/>
+  </p:clrMapOvr>
+</p:notes>
+</file>
+
+<file path=ppt/notesSlides/notesSlide10.xml><?xml version="1.0" encoding="utf-8"?>
+<p:notes xmlns:a="http://schemas.openxmlformats.org/drawingml/2006/main" xmlns:r="http://schemas.openxmlformats.org/officeDocument/2006/relationships" xmlns:p="http://schemas.openxmlformats.org/presentationml/2006/main">
+  <p:cSld>
+    <p:spTree>
+      <p:nvGrpSpPr>
+        <p:cNvPr id="1" name=""/>
+        <p:cNvGrpSpPr/>
+        <p:nvPr/>
+      </p:nvGrpSpPr>
+      <p:grpSpPr>
+        <a:xfrm>
+          <a:off x="0" y="0"/>
+          <a:ext cx="0" cy="0"/>
+          <a:chOff x="0" y="0"/>
+          <a:chExt cx="0" cy="0"/>
+        </a:xfrm>
+      </p:grpSpPr>
+      <p:sp>
+        <p:nvSpPr>
+          <p:cNvPr id="2" name="Slide Image Placeholder 1"/>
+          <p:cNvSpPr>
+            <a:spLocks noGrp="1" noRot="1" noChangeAspect="1"/>
+          </p:cNvSpPr>
+          <p:nvPr>
+            <p:ph type="sldImg"/>
+          </p:nvPr>
+        </p:nvSpPr>
+        <p:spPr/>
+      </p:sp>
+      <p:sp>
+        <p:nvSpPr>
+          <p:cNvPr id="3" name="Notes Placeholder 2"/>
+          <p:cNvSpPr>
+            <a:spLocks noGrp="1"/>
+          </p:cNvSpPr>
+          <p:nvPr>
+            <p:ph type="body" idx="1"/>
+          </p:nvPr>
+        </p:nvSpPr>
+        <p:spPr/>
+        <p:txBody>
+          <a:bodyPr/>
+          <a:lstStyle/>
+          <a:p>
+            <a:r>
+              <a:rPr lang="en-US" dirty="0"/>
+              <a:t>第12回の日程を、社員がいるこの場で押さえる。後から調整すると、また集まらない。</a:t>
+            </a:r>
+            <a:endParaRPr lang="en-US" dirty="0"/>
+          </a:p>
+        </p:txBody>
+      </p:sp>
+      <p:sp>
+        <p:nvSpPr>
+          <p:cNvPr id="4" name="Slide Number Placeholder 3"/>
+          <p:cNvSpPr>
+            <a:spLocks noGrp="1"/>
+          </p:cNvSpPr>
+          <p:nvPr>
+            <p:ph type="sldNum" sz="quarter" idx="10"/>
+          </p:nvPr>
+        </p:nvSpPr>
+        <p:spPr/>
+        <p:txBody>
+          <a:bodyPr/>
+          <a:lstStyle/>
+          <a:p>
+            <a:fld id="{F7021451-1387-4CA6-816F-3879F97B5CBC}" type="slidenum">
+              <a:rPr lang="en-US"/>
+              <a:t>10</a:t>
+            </a:fld>
+            <a:endParaRPr lang="en-US"/>
+          </a:p>
+        </p:txBody>
+      </p:sp>
+    </p:spTree>
+    <p:extLst>
+      <p:ext uri="{BB962C8B-B14F-4D97-AF65-F5344CB8AC3E}">
+        <p14:creationId xmlns:p14="http://schemas.microsoft.com/office/powerpoint/2010/main" val="1024086991"/>
+      </p:ext>
+    </p:extLst>
+  </p:cSld>
+  <p:clrMapOvr>
+    <a:masterClrMapping/>
+  </p:clrMapOvr>
+</p:notes>
+</file>
+
+<file path=ppt/notesSlides/notesSlide11.xml><?xml version="1.0" encoding="utf-8"?>
+<p:notes xmlns:a="http://schemas.openxmlformats.org/drawingml/2006/main" xmlns:r="http://schemas.openxmlformats.org/officeDocument/2006/relationships" xmlns:p="http://schemas.openxmlformats.org/presentationml/2006/main">
+  <p:cSld>
+    <p:spTree>
+      <p:nvGrpSpPr>
+        <p:cNvPr id="1" name=""/>
+        <p:cNvGrpSpPr/>
+        <p:nvPr/>
+      </p:nvGrpSpPr>
+      <p:grpSpPr>
+        <a:xfrm>
+          <a:off x="0" y="0"/>
+          <a:ext cx="0" cy="0"/>
+          <a:chOff x="0" y="0"/>
+          <a:chExt cx="0" cy="0"/>
+        </a:xfrm>
+      </p:grpSpPr>
+      <p:sp>
+        <p:nvSpPr>
+          <p:cNvPr id="2" name="Slide Image Placeholder 1"/>
+          <p:cNvSpPr>
+            <a:spLocks noGrp="1" noRot="1" noChangeAspect="1"/>
+          </p:cNvSpPr>
+          <p:nvPr>
+            <p:ph type="sldImg"/>
+          </p:nvPr>
+        </p:nvSpPr>
+        <p:spPr/>
+      </p:sp>
+      <p:sp>
+        <p:nvSpPr>
+          <p:cNvPr id="3" name="Notes Placeholder 2"/>
+          <p:cNvSpPr>
+            <a:spLocks noGrp="1"/>
+          </p:cNvSpPr>
+          <p:nvPr>
+            <p:ph type="body" idx="1"/>
+          </p:nvPr>
+        </p:nvSpPr>
+        <p:spPr/>
+        <p:txBody>
+          <a:bodyPr/>
+          <a:lstStyle/>
+          <a:p>
+            <a:r>
+              <a:rPr lang="en-US" dirty="0"/>
+              <a:t>事前の壁打ち（1週間前・別枠30分）を省略しない。ここを飛ばすと当日が崩れる。特にこの質問への答えは、必ず声に出して練習してもらう。</a:t>
+            </a:r>
+            <a:endParaRPr lang="en-US" dirty="0"/>
+          </a:p>
+        </p:txBody>
+      </p:sp>
+      <p:sp>
+        <p:nvSpPr>
+          <p:cNvPr id="4" name="Slide Number Placeholder 3"/>
+          <p:cNvSpPr>
+            <a:spLocks noGrp="1"/>
+          </p:cNvSpPr>
+          <p:nvPr>
+            <p:ph type="sldNum" sz="quarter" idx="10"/>
+          </p:nvPr>
+        </p:nvSpPr>
+        <p:spPr/>
+        <p:txBody>
+          <a:bodyPr/>
+          <a:lstStyle/>
+          <a:p>
+            <a:fld id="{F7021451-1387-4CA6-816F-3879F97B5CBC}" type="slidenum">
+              <a:rPr lang="en-US"/>
+              <a:t>11</a:t>
+            </a:fld>
+            <a:endParaRPr lang="en-US"/>
+          </a:p>
+        </p:txBody>
+      </p:sp>
+    </p:spTree>
+    <p:extLst>
+      <p:ext uri="{BB962C8B-B14F-4D97-AF65-F5344CB8AC3E}">
+        <p14:creationId xmlns:p14="http://schemas.microsoft.com/office/powerpoint/2010/main" val="1024086991"/>
+      </p:ext>
+    </p:extLst>
+  </p:cSld>
+  <p:clrMapOvr>
+    <a:masterClrMapping/>
+  </p:clrMapOvr>
+</p:notes>
+</file>
+
+<file path=ppt/notesSlides/notesSlide12.xml><?xml version="1.0" encoding="utf-8"?>
+<p:notes xmlns:a="http://schemas.openxmlformats.org/drawingml/2006/main" xmlns:r="http://schemas.openxmlformats.org/officeDocument/2006/relationships" xmlns:p="http://schemas.openxmlformats.org/presentationml/2006/main">
+  <p:cSld>
+    <p:spTree>
+      <p:nvGrpSpPr>
+        <p:cNvPr id="1" name=""/>
+        <p:cNvGrpSpPr/>
+        <p:nvPr/>
+      </p:nvGrpSpPr>
+      <p:grpSpPr>
+        <a:xfrm>
+          <a:off x="0" y="0"/>
+          <a:ext cx="0" cy="0"/>
+          <a:chOff x="0" y="0"/>
+          <a:chExt cx="0" cy="0"/>
+        </a:xfrm>
+      </p:grpSpPr>
+      <p:sp>
+        <p:nvSpPr>
+          <p:cNvPr id="2" name="Slide Image Placeholder 1"/>
+          <p:cNvSpPr>
+            <a:spLocks noGrp="1" noRot="1" noChangeAspect="1"/>
+          </p:cNvSpPr>
+          <p:nvPr>
+            <p:ph type="sldImg"/>
+          </p:nvPr>
+        </p:nvSpPr>
+        <p:spPr/>
+      </p:sp>
+      <p:sp>
+        <p:nvSpPr>
+          <p:cNvPr id="3" name="Notes Placeholder 2"/>
+          <p:cNvSpPr>
+            <a:spLocks noGrp="1"/>
+          </p:cNvSpPr>
+          <p:nvPr>
+            <p:ph type="body" idx="1"/>
+          </p:nvPr>
+        </p:nvSpPr>
+        <p:spPr/>
+        <p:txBody>
+          <a:bodyPr/>
+          <a:lstStyle/>
+          <a:p>
+            <a:r>
+              <a:rPr lang="en-US" dirty="0"/>
+              <a:t>社長の宿題。1つだけ、を強調する。ロードマップ全部を動かそうとして、結局何も動かない会社が多い。</a:t>
+            </a:r>
+            <a:endParaRPr lang="en-US" dirty="0"/>
+          </a:p>
+        </p:txBody>
+      </p:sp>
+      <p:sp>
+        <p:nvSpPr>
+          <p:cNvPr id="4" name="Slide Number Placeholder 3"/>
+          <p:cNvSpPr>
+            <a:spLocks noGrp="1"/>
+          </p:cNvSpPr>
+          <p:nvPr>
+            <p:ph type="sldNum" sz="quarter" idx="10"/>
+          </p:nvPr>
+        </p:nvSpPr>
+        <p:spPr/>
+        <p:txBody>
+          <a:bodyPr/>
+          <a:lstStyle/>
+          <a:p>
+            <a:fld id="{F7021451-1387-4CA6-816F-3879F97B5CBC}" type="slidenum">
+              <a:rPr lang="en-US"/>
+              <a:t>12</a:t>
             </a:fld>
             <a:endParaRPr lang="en-US"/>
           </a:p>
@@ -597,7 +865,7 @@
           <a:p>
             <a:r>
               <a:rPr lang="en-US" dirty="0"/>
-              <a:t>ここは30秒で。今日の到達点だけ言って、すぐ本題へ。</a:t>
+              <a:t>社員に向けた導入。社長が何をやってきたかを、講師から3行で説明する。社長本人が話し始める前の助走をつくる。</a:t>
             </a:r>
             <a:endParaRPr lang="en-US" dirty="0"/>
           </a:p>
@@ -685,7 +953,7 @@
           <a:p>
             <a:r>
               <a:rPr lang="en-US" dirty="0"/>
-              <a:t>先に結論を言わず、受講者の実物を題材にしてこの型に当てはめて見せる。</a:t>
+              <a:t>「今日の主役は社長です」と言い切る。講師は司会と補佐に回ることを、社員の前で宣言しておくと、このあと社長が話しやすくなる。</a:t>
             </a:r>
             <a:endParaRPr lang="en-US" dirty="0"/>
           </a:p>
@@ -773,7 +1041,7 @@
           <a:p>
             <a:r>
               <a:rPr lang="en-US" dirty="0"/>
-              <a:t>必ず左（失敗例）から。自分の失敗として話す。うまくいく例だけ見せると、受講者は自分の失敗を言わなくなる。</a:t>
+              <a:t>社長に話してもらう。講師はスライドを送るだけ。4項目それぞれ、どの業務から生まれたかを社長の言葉で。</a:t>
             </a:r>
             <a:endParaRPr lang="en-US" dirty="0"/>
           </a:p>
@@ -861,7 +1129,7 @@
           <a:p>
             <a:r>
               <a:rPr lang="en-US" dirty="0"/>
-              <a:t>ここから講師は口頭指示のみ。画面を操作するのは必ず受講者。歯がゆくても手を出さない。</a:t>
+              <a:t>ロードマップは社員退席後に完成させるが、枠組みだけここで見せる。「やめる基準」の行を指差して、無理には続けないことを社員に伝えると安心される。</a:t>
             </a:r>
             <a:endParaRPr lang="en-US" dirty="0"/>
           </a:p>
@@ -949,7 +1217,7 @@
           <a:p>
             <a:r>
               <a:rPr lang="en-US" dirty="0"/>
-              <a:t>ここは資料を読み上げない。自分の言葉と、匿名事例で話す。</a:t>
+              <a:t>4つの質問は、聞かれる前にこちらから出す。先回りして出すと、場の空気が一気にほぐれる。ここは講師が読み上げてよい。</a:t>
             </a:r>
             <a:endParaRPr lang="en-US" dirty="0"/>
           </a:p>
@@ -1037,7 +1305,7 @@
           <a:p>
             <a:r>
               <a:rPr lang="en-US" dirty="0"/>
-              <a:t>その場でカレンダーに入れてもらう。口頭の約束で終わらせない。</a:t>
+              <a:t>1つ目（人が減らされるのか）だけは、必ず社長に答えていただく。事前の壁打ちで準備済みのはず。講師は口を出さない。残り3つは講師が事実を示してよい。</a:t>
             </a:r>
             <a:endParaRPr lang="en-US" dirty="0"/>
           </a:p>
@@ -1061,6 +1329,182 @@
             <a:fld id="{F7021451-1387-4CA6-816F-3879F97B5CBC}" type="slidenum">
               <a:rPr lang="en-US"/>
               <a:t>7</a:t>
+            </a:fld>
+            <a:endParaRPr lang="en-US"/>
+          </a:p>
+        </p:txBody>
+      </p:sp>
+    </p:spTree>
+    <p:extLst>
+      <p:ext uri="{BB962C8B-B14F-4D97-AF65-F5344CB8AC3E}">
+        <p14:creationId xmlns:p14="http://schemas.microsoft.com/office/powerpoint/2010/main" val="1024086991"/>
+      </p:ext>
+    </p:extLst>
+  </p:cSld>
+  <p:clrMapOvr>
+    <a:masterClrMapping/>
+  </p:clrMapOvr>
+</p:notes>
+</file>
+
+<file path=ppt/notesSlides/notesSlide8.xml><?xml version="1.0" encoding="utf-8"?>
+<p:notes xmlns:a="http://schemas.openxmlformats.org/drawingml/2006/main" xmlns:r="http://schemas.openxmlformats.org/officeDocument/2006/relationships" xmlns:p="http://schemas.openxmlformats.org/presentationml/2006/main">
+  <p:cSld>
+    <p:spTree>
+      <p:nvGrpSpPr>
+        <p:cNvPr id="1" name=""/>
+        <p:cNvGrpSpPr/>
+        <p:nvPr/>
+      </p:nvGrpSpPr>
+      <p:grpSpPr>
+        <a:xfrm>
+          <a:off x="0" y="0"/>
+          <a:ext cx="0" cy="0"/>
+          <a:chOff x="0" y="0"/>
+          <a:chExt cx="0" cy="0"/>
+        </a:xfrm>
+      </p:grpSpPr>
+      <p:sp>
+        <p:nvSpPr>
+          <p:cNvPr id="2" name="Slide Image Placeholder 1"/>
+          <p:cNvSpPr>
+            <a:spLocks noGrp="1" noRot="1" noChangeAspect="1"/>
+          </p:cNvSpPr>
+          <p:nvPr>
+            <p:ph type="sldImg"/>
+          </p:nvPr>
+        </p:nvSpPr>
+        <p:spPr/>
+      </p:sp>
+      <p:sp>
+        <p:nvSpPr>
+          <p:cNvPr id="3" name="Notes Placeholder 2"/>
+          <p:cNvSpPr>
+            <a:spLocks noGrp="1"/>
+          </p:cNvSpPr>
+          <p:nvPr>
+            <p:ph type="body" idx="1"/>
+          </p:nvPr>
+        </p:nvSpPr>
+        <p:spPr/>
+        <p:txBody>
+          <a:bodyPr/>
+          <a:lstStyle/>
+          <a:p>
+            <a:r>
+              <a:rPr lang="en-US" dirty="0"/>
+              <a:t>反発が出たら記録に徹する。その場で論破しない。出た不安は第11回の体制設計の入力になる。</a:t>
+            </a:r>
+            <a:endParaRPr lang="en-US" dirty="0"/>
+          </a:p>
+        </p:txBody>
+      </p:sp>
+      <p:sp>
+        <p:nvSpPr>
+          <p:cNvPr id="4" name="Slide Number Placeholder 3"/>
+          <p:cNvSpPr>
+            <a:spLocks noGrp="1"/>
+          </p:cNvSpPr>
+          <p:nvPr>
+            <p:ph type="sldNum" sz="quarter" idx="10"/>
+          </p:nvPr>
+        </p:nvSpPr>
+        <p:spPr/>
+        <p:txBody>
+          <a:bodyPr/>
+          <a:lstStyle/>
+          <a:p>
+            <a:fld id="{F7021451-1387-4CA6-816F-3879F97B5CBC}" type="slidenum">
+              <a:rPr lang="en-US"/>
+              <a:t>8</a:t>
+            </a:fld>
+            <a:endParaRPr lang="en-US"/>
+          </a:p>
+        </p:txBody>
+      </p:sp>
+    </p:spTree>
+    <p:extLst>
+      <p:ext uri="{BB962C8B-B14F-4D97-AF65-F5344CB8AC3E}">
+        <p14:creationId xmlns:p14="http://schemas.microsoft.com/office/powerpoint/2010/main" val="1024086991"/>
+      </p:ext>
+    </p:extLst>
+  </p:cSld>
+  <p:clrMapOvr>
+    <a:masterClrMapping/>
+  </p:clrMapOvr>
+</p:notes>
+</file>
+
+<file path=ppt/notesSlides/notesSlide9.xml><?xml version="1.0" encoding="utf-8"?>
+<p:notes xmlns:a="http://schemas.openxmlformats.org/drawingml/2006/main" xmlns:r="http://schemas.openxmlformats.org/officeDocument/2006/relationships" xmlns:p="http://schemas.openxmlformats.org/presentationml/2006/main">
+  <p:cSld>
+    <p:spTree>
+      <p:nvGrpSpPr>
+        <p:cNvPr id="1" name=""/>
+        <p:cNvGrpSpPr/>
+        <p:nvPr/>
+      </p:nvGrpSpPr>
+      <p:grpSpPr>
+        <a:xfrm>
+          <a:off x="0" y="0"/>
+          <a:ext cx="0" cy="0"/>
+          <a:chOff x="0" y="0"/>
+          <a:chExt cx="0" cy="0"/>
+        </a:xfrm>
+      </p:grpSpPr>
+      <p:sp>
+        <p:nvSpPr>
+          <p:cNvPr id="2" name="Slide Image Placeholder 1"/>
+          <p:cNvSpPr>
+            <a:spLocks noGrp="1" noRot="1" noChangeAspect="1"/>
+          </p:cNvSpPr>
+          <p:nvPr>
+            <p:ph type="sldImg"/>
+          </p:nvPr>
+        </p:nvSpPr>
+        <p:spPr/>
+      </p:sp>
+      <p:sp>
+        <p:nvSpPr>
+          <p:cNvPr id="3" name="Notes Placeholder 2"/>
+          <p:cNvSpPr>
+            <a:spLocks noGrp="1"/>
+          </p:cNvSpPr>
+          <p:nvPr>
+            <p:ph type="body" idx="1"/>
+          </p:nvPr>
+        </p:nvSpPr>
+        <p:spPr/>
+        <p:txBody>
+          <a:bodyPr/>
+          <a:lstStyle/>
+          <a:p>
+            <a:r>
+              <a:rPr lang="en-US" dirty="0"/>
+              <a:t>社員がいる時間は1時間強。ロードマップ作成は退席後。時間配分を間違えると、社員の前で内輪の作業を始めることになる。</a:t>
+            </a:r>
+            <a:endParaRPr lang="en-US" dirty="0"/>
+          </a:p>
+        </p:txBody>
+      </p:sp>
+      <p:sp>
+        <p:nvSpPr>
+          <p:cNvPr id="4" name="Slide Number Placeholder 3"/>
+          <p:cNvSpPr>
+            <a:spLocks noGrp="1"/>
+          </p:cNvSpPr>
+          <p:nvPr>
+            <p:ph type="sldNum" sz="quarter" idx="10"/>
+          </p:nvPr>
+        </p:nvSpPr>
+        <p:spPr/>
+        <p:txBody>
+          <a:bodyPr/>
+          <a:lstStyle/>
+          <a:p>
+            <a:fld id="{F7021451-1387-4CA6-816F-3879F97B5CBC}" type="slidenum">
+              <a:rPr lang="en-US"/>
+              <a:t>9</a:t>
             </a:fld>
             <a:endParaRPr lang="en-US"/>
           </a:p>
@@ -1680,6 +2124,1284 @@
 </p:sld>
 </file>
 
+<file path=ppt/slides/slide10.xml><?xml version="1.0" encoding="utf-8"?>
+<p:sld xmlns:a="http://schemas.openxmlformats.org/drawingml/2006/main" xmlns:r="http://schemas.openxmlformats.org/officeDocument/2006/relationships" xmlns:p="http://schemas.openxmlformats.org/presentationml/2006/main">
+  <p:cSld name="Slide 10">
+    <p:bg>
+      <p:bgPr>
+        <a:solidFill>
+          <a:srgbClr val="F6F2EA"/>
+        </a:solidFill>
+      </p:bgPr>
+    </p:bg>
+    <p:spTree>
+      <p:nvGrpSpPr>
+        <p:cNvPr id="1" name=""/>
+        <p:cNvGrpSpPr/>
+        <p:nvPr/>
+      </p:nvGrpSpPr>
+      <p:grpSpPr>
+        <a:xfrm>
+          <a:off x="0" y="0"/>
+          <a:ext cx="0" cy="0"/>
+          <a:chOff x="0" y="0"/>
+          <a:chExt cx="0" cy="0"/>
+        </a:xfrm>
+      </p:grpSpPr>
+      <p:sp>
+        <p:nvSpPr>
+          <p:cNvPr id="2" name="Text 0"/>
+          <p:cNvSpPr txBox="1"/>
+          <p:nvPr/>
+        </p:nvSpPr>
+        <p:spPr>
+          <a:xfrm>
+            <a:off x="777240" y="566928"/>
+            <a:ext cx="10607040" cy="274320"/>
+          </a:xfrm>
+          <a:prstGeom prst="rect">
+            <a:avLst/>
+          </a:prstGeom>
+          <a:noFill/>
+          <a:ln/>
+        </p:spPr>
+        <p:txBody>
+          <a:bodyPr wrap="square" lIns="0" tIns="0" rIns="0" bIns="0" rtlCol="0" anchor="ctr"/>
+          <a:lstStyle/>
+          <a:p>
+            <a:pPr indent="0" marL="0">
+              <a:buNone/>
+            </a:pPr>
+            <a:r>
+              <a:rPr lang="en-US" sz="1100" b="1" spc="250" kern="0" dirty="0">
+                <a:solidFill>
+                  <a:srgbClr val="3B6B4A"/>
+                </a:solidFill>
+                <a:latin typeface="Yu Gothic" pitchFamily="34" charset="0"/>
+                <a:ea typeface="Yu Gothic" pitchFamily="34" charset="-122"/>
+                <a:cs typeface="Yu Gothic" pitchFamily="34" charset="-120"/>
+              </a:rPr>
+              <a:t>業務への組み込み</a:t>
+            </a:r>
+            <a:endParaRPr lang="en-US" sz="1100" dirty="0"/>
+          </a:p>
+        </p:txBody>
+      </p:sp>
+      <p:sp>
+        <p:nvSpPr>
+          <p:cNvPr id="3" name="Text 1"/>
+          <p:cNvSpPr txBox="1"/>
+          <p:nvPr/>
+        </p:nvSpPr>
+        <p:spPr>
+          <a:xfrm>
+            <a:off x="777240" y="896112"/>
+            <a:ext cx="10607040" cy="640080"/>
+          </a:xfrm>
+          <a:prstGeom prst="rect">
+            <a:avLst/>
+          </a:prstGeom>
+          <a:noFill/>
+          <a:ln/>
+        </p:spPr>
+        <p:txBody>
+          <a:bodyPr wrap="square" lIns="0" tIns="0" rIns="0" bIns="0" rtlCol="0" anchor="ctr"/>
+          <a:lstStyle/>
+          <a:p>
+            <a:pPr indent="0" marL="0">
+              <a:buNone/>
+            </a:pPr>
+            <a:r>
+              <a:rPr lang="en-US" sz="2600" b="1" dirty="0">
+                <a:solidFill>
+                  <a:srgbClr val="23201D"/>
+                </a:solidFill>
+                <a:latin typeface="Yu Gothic" pitchFamily="34" charset="0"/>
+                <a:ea typeface="Yu Gothic" pitchFamily="34" charset="-122"/>
+                <a:cs typeface="Yu Gothic" pitchFamily="34" charset="-120"/>
+              </a:rPr>
+              <a:t>この場で決めること</a:t>
+            </a:r>
+            <a:endParaRPr lang="en-US" sz="2600" dirty="0"/>
+          </a:p>
+        </p:txBody>
+      </p:sp>
+      <p:sp>
+        <p:nvSpPr>
+          <p:cNvPr id="4" name="Text 2"/>
+          <p:cNvSpPr txBox="1"/>
+          <p:nvPr/>
+        </p:nvSpPr>
+        <p:spPr>
+          <a:xfrm>
+            <a:off x="777240" y="1572768"/>
+            <a:ext cx="10607040" cy="320040"/>
+          </a:xfrm>
+          <a:prstGeom prst="rect">
+            <a:avLst/>
+          </a:prstGeom>
+          <a:noFill/>
+          <a:ln/>
+        </p:spPr>
+        <p:txBody>
+          <a:bodyPr wrap="square" lIns="0" tIns="0" rIns="0" bIns="0" rtlCol="0" anchor="ctr"/>
+          <a:lstStyle/>
+          <a:p>
+            <a:pPr indent="0" marL="0">
+              <a:buNone/>
+            </a:pPr>
+            <a:r>
+              <a:rPr lang="en-US" sz="1250" b="1" dirty="0">
+                <a:solidFill>
+                  <a:srgbClr val="3B6B4A"/>
+                </a:solidFill>
+                <a:latin typeface="Yu Gothic" pitchFamily="34" charset="0"/>
+                <a:ea typeface="Yu Gothic" pitchFamily="34" charset="-122"/>
+                <a:cs typeface="Yu Gothic" pitchFamily="34" charset="-120"/>
+              </a:rPr>
+              <a:t>ここを決めないと、持ち帰っても使われません。紙に書きます。</a:t>
+            </a:r>
+            <a:endParaRPr lang="en-US" sz="1250" dirty="0"/>
+          </a:p>
+        </p:txBody>
+      </p:sp>
+      <p:sp>
+        <p:nvSpPr>
+          <p:cNvPr id="5" name="Shape 3"/>
+          <p:cNvSpPr/>
+          <p:nvPr/>
+        </p:nvSpPr>
+        <p:spPr>
+          <a:xfrm>
+            <a:off x="777240" y="2103120"/>
+            <a:ext cx="10607040" cy="914400"/>
+          </a:xfrm>
+          <a:prstGeom prst="rect">
+            <a:avLst/>
+          </a:prstGeom>
+          <a:solidFill>
+            <a:srgbClr val="FFFFFF"/>
+          </a:solidFill>
+          <a:ln w="12700">
+            <a:solidFill>
+              <a:srgbClr val="EDE7DB"/>
+            </a:solidFill>
+            <a:prstDash val="solid"/>
+          </a:ln>
+        </p:spPr>
+      </p:sp>
+      <p:sp>
+        <p:nvSpPr>
+          <p:cNvPr id="6" name="Shape 4"/>
+          <p:cNvSpPr/>
+          <p:nvPr/>
+        </p:nvSpPr>
+        <p:spPr>
+          <a:xfrm>
+            <a:off x="777240" y="2103120"/>
+            <a:ext cx="54864" cy="914400"/>
+          </a:xfrm>
+          <a:prstGeom prst="rect">
+            <a:avLst/>
+          </a:prstGeom>
+          <a:solidFill>
+            <a:srgbClr val="3B6B4A"/>
+          </a:solidFill>
+          <a:ln w="12700">
+            <a:solidFill>
+              <a:srgbClr val="333333"/>
+            </a:solidFill>
+            <a:prstDash val="solid"/>
+          </a:ln>
+        </p:spPr>
+      </p:sp>
+      <p:sp>
+        <p:nvSpPr>
+          <p:cNvPr id="7" name="Text 5"/>
+          <p:cNvSpPr txBox="1"/>
+          <p:nvPr/>
+        </p:nvSpPr>
+        <p:spPr>
+          <a:xfrm>
+            <a:off x="1143000" y="2176272"/>
+            <a:ext cx="2757830" cy="768096"/>
+          </a:xfrm>
+          <a:prstGeom prst="rect">
+            <a:avLst/>
+          </a:prstGeom>
+          <a:noFill/>
+          <a:ln/>
+        </p:spPr>
+        <p:txBody>
+          <a:bodyPr wrap="square" lIns="0" tIns="0" rIns="0" bIns="0" rtlCol="0" anchor="ctr"/>
+          <a:lstStyle/>
+          <a:p>
+            <a:pPr indent="0" marL="0">
+              <a:buNone/>
+            </a:pPr>
+            <a:r>
+              <a:rPr lang="en-US" sz="1400" b="1" dirty="0">
+                <a:solidFill>
+                  <a:srgbClr val="3B6B4A"/>
+                </a:solidFill>
+                <a:latin typeface="Yu Gothic" pitchFamily="34" charset="0"/>
+                <a:ea typeface="Yu Gothic" pitchFamily="34" charset="-122"/>
+                <a:cs typeface="Yu Gothic" pitchFamily="34" charset="-120"/>
+              </a:rPr>
+              <a:t>次に渡す相手</a:t>
+            </a:r>
+            <a:endParaRPr lang="en-US" sz="1400" dirty="0"/>
+          </a:p>
+        </p:txBody>
+      </p:sp>
+      <p:sp>
+        <p:nvSpPr>
+          <p:cNvPr id="8" name="Text 6"/>
+          <p:cNvSpPr txBox="1"/>
+          <p:nvPr/>
+        </p:nvSpPr>
+        <p:spPr>
+          <a:xfrm>
+            <a:off x="4006901" y="2176272"/>
+            <a:ext cx="7011619" cy="768096"/>
+          </a:xfrm>
+          <a:prstGeom prst="rect">
+            <a:avLst/>
+          </a:prstGeom>
+          <a:noFill/>
+          <a:ln/>
+        </p:spPr>
+        <p:txBody>
+          <a:bodyPr wrap="square" lIns="0" tIns="0" rIns="0" bIns="0" rtlCol="0" anchor="ctr"/>
+          <a:lstStyle/>
+          <a:p>
+            <a:pPr indent="0" marL="0">
+              <a:lnSpc>
+                <a:spcPct val="130000"/>
+              </a:lnSpc>
+              <a:buNone/>
+            </a:pPr>
+            <a:r>
+              <a:rPr lang="en-US" sz="1250" dirty="0">
+                <a:solidFill>
+                  <a:srgbClr val="3F3933"/>
+                </a:solidFill>
+                <a:latin typeface="Yu Gothic" pitchFamily="34" charset="0"/>
+                <a:ea typeface="Yu Gothic" pitchFamily="34" charset="-122"/>
+                <a:cs typeface="Yu Gothic" pitchFamily="34" charset="-120"/>
+              </a:rPr>
+              <a:t>0〜3か月で誰に広げるか。実名で決めます</a:t>
+            </a:r>
+            <a:endParaRPr lang="en-US" sz="1250" dirty="0"/>
+          </a:p>
+        </p:txBody>
+      </p:sp>
+      <p:sp>
+        <p:nvSpPr>
+          <p:cNvPr id="9" name="Shape 7"/>
+          <p:cNvSpPr/>
+          <p:nvPr/>
+        </p:nvSpPr>
+        <p:spPr>
+          <a:xfrm>
+            <a:off x="777240" y="3154680"/>
+            <a:ext cx="10607040" cy="914400"/>
+          </a:xfrm>
+          <a:prstGeom prst="rect">
+            <a:avLst/>
+          </a:prstGeom>
+          <a:solidFill>
+            <a:srgbClr val="FFFFFF"/>
+          </a:solidFill>
+          <a:ln w="12700">
+            <a:solidFill>
+              <a:srgbClr val="EDE7DB"/>
+            </a:solidFill>
+            <a:prstDash val="solid"/>
+          </a:ln>
+        </p:spPr>
+      </p:sp>
+      <p:sp>
+        <p:nvSpPr>
+          <p:cNvPr id="10" name="Shape 8"/>
+          <p:cNvSpPr/>
+          <p:nvPr/>
+        </p:nvSpPr>
+        <p:spPr>
+          <a:xfrm>
+            <a:off x="777240" y="3154680"/>
+            <a:ext cx="54864" cy="914400"/>
+          </a:xfrm>
+          <a:prstGeom prst="rect">
+            <a:avLst/>
+          </a:prstGeom>
+          <a:solidFill>
+            <a:srgbClr val="3B6B4A"/>
+          </a:solidFill>
+          <a:ln w="12700">
+            <a:solidFill>
+              <a:srgbClr val="333333"/>
+            </a:solidFill>
+            <a:prstDash val="solid"/>
+          </a:ln>
+        </p:spPr>
+      </p:sp>
+      <p:sp>
+        <p:nvSpPr>
+          <p:cNvPr id="11" name="Text 9"/>
+          <p:cNvSpPr txBox="1"/>
+          <p:nvPr/>
+        </p:nvSpPr>
+        <p:spPr>
+          <a:xfrm>
+            <a:off x="1143000" y="3227832"/>
+            <a:ext cx="2757830" cy="768096"/>
+          </a:xfrm>
+          <a:prstGeom prst="rect">
+            <a:avLst/>
+          </a:prstGeom>
+          <a:noFill/>
+          <a:ln/>
+        </p:spPr>
+        <p:txBody>
+          <a:bodyPr wrap="square" lIns="0" tIns="0" rIns="0" bIns="0" rtlCol="0" anchor="ctr"/>
+          <a:lstStyle/>
+          <a:p>
+            <a:pPr indent="0" marL="0">
+              <a:buNone/>
+            </a:pPr>
+            <a:r>
+              <a:rPr lang="en-US" sz="1400" b="1" dirty="0">
+                <a:solidFill>
+                  <a:srgbClr val="3B6B4A"/>
+                </a:solidFill>
+                <a:latin typeface="Yu Gothic" pitchFamily="34" charset="0"/>
+                <a:ea typeface="Yu Gothic" pitchFamily="34" charset="-122"/>
+                <a:cs typeface="Yu Gothic" pitchFamily="34" charset="-120"/>
+              </a:rPr>
+              <a:t>困ったときの相談先</a:t>
+            </a:r>
+            <a:endParaRPr lang="en-US" sz="1400" dirty="0"/>
+          </a:p>
+        </p:txBody>
+      </p:sp>
+      <p:sp>
+        <p:nvSpPr>
+          <p:cNvPr id="12" name="Text 10"/>
+          <p:cNvSpPr txBox="1"/>
+          <p:nvPr/>
+        </p:nvSpPr>
+        <p:spPr>
+          <a:xfrm>
+            <a:off x="4006901" y="3227832"/>
+            <a:ext cx="7011619" cy="768096"/>
+          </a:xfrm>
+          <a:prstGeom prst="rect">
+            <a:avLst/>
+          </a:prstGeom>
+          <a:noFill/>
+          <a:ln/>
+        </p:spPr>
+        <p:txBody>
+          <a:bodyPr wrap="square" lIns="0" tIns="0" rIns="0" bIns="0" rtlCol="0" anchor="ctr"/>
+          <a:lstStyle/>
+          <a:p>
+            <a:pPr indent="0" marL="0">
+              <a:lnSpc>
+                <a:spcPct val="130000"/>
+              </a:lnSpc>
+              <a:buNone/>
+            </a:pPr>
+            <a:r>
+              <a:rPr lang="en-US" sz="1250" dirty="0">
+                <a:solidFill>
+                  <a:srgbClr val="3F3933"/>
+                </a:solidFill>
+                <a:latin typeface="Yu Gothic" pitchFamily="34" charset="0"/>
+                <a:ea typeface="Yu Gothic" pitchFamily="34" charset="-122"/>
+                <a:cs typeface="Yu Gothic" pitchFamily="34" charset="-120"/>
+              </a:rPr>
+              <a:t>社内の誰に聞けばよいかを、社員に明示します</a:t>
+            </a:r>
+            <a:endParaRPr lang="en-US" sz="1250" dirty="0"/>
+          </a:p>
+        </p:txBody>
+      </p:sp>
+      <p:sp>
+        <p:nvSpPr>
+          <p:cNvPr id="13" name="Shape 11"/>
+          <p:cNvSpPr/>
+          <p:nvPr/>
+        </p:nvSpPr>
+        <p:spPr>
+          <a:xfrm>
+            <a:off x="777240" y="4206240"/>
+            <a:ext cx="10607040" cy="914400"/>
+          </a:xfrm>
+          <a:prstGeom prst="rect">
+            <a:avLst/>
+          </a:prstGeom>
+          <a:solidFill>
+            <a:srgbClr val="FFFFFF"/>
+          </a:solidFill>
+          <a:ln w="12700">
+            <a:solidFill>
+              <a:srgbClr val="EDE7DB"/>
+            </a:solidFill>
+            <a:prstDash val="solid"/>
+          </a:ln>
+        </p:spPr>
+      </p:sp>
+      <p:sp>
+        <p:nvSpPr>
+          <p:cNvPr id="14" name="Shape 12"/>
+          <p:cNvSpPr/>
+          <p:nvPr/>
+        </p:nvSpPr>
+        <p:spPr>
+          <a:xfrm>
+            <a:off x="777240" y="4206240"/>
+            <a:ext cx="54864" cy="914400"/>
+          </a:xfrm>
+          <a:prstGeom prst="rect">
+            <a:avLst/>
+          </a:prstGeom>
+          <a:solidFill>
+            <a:srgbClr val="3B6B4A"/>
+          </a:solidFill>
+          <a:ln w="12700">
+            <a:solidFill>
+              <a:srgbClr val="333333"/>
+            </a:solidFill>
+            <a:prstDash val="solid"/>
+          </a:ln>
+        </p:spPr>
+      </p:sp>
+      <p:sp>
+        <p:nvSpPr>
+          <p:cNvPr id="15" name="Text 13"/>
+          <p:cNvSpPr txBox="1"/>
+          <p:nvPr/>
+        </p:nvSpPr>
+        <p:spPr>
+          <a:xfrm>
+            <a:off x="1143000" y="4279392"/>
+            <a:ext cx="2757830" cy="768096"/>
+          </a:xfrm>
+          <a:prstGeom prst="rect">
+            <a:avLst/>
+          </a:prstGeom>
+          <a:noFill/>
+          <a:ln/>
+        </p:spPr>
+        <p:txBody>
+          <a:bodyPr wrap="square" lIns="0" tIns="0" rIns="0" bIns="0" rtlCol="0" anchor="ctr"/>
+          <a:lstStyle/>
+          <a:p>
+            <a:pPr indent="0" marL="0">
+              <a:buNone/>
+            </a:pPr>
+            <a:r>
+              <a:rPr lang="en-US" sz="1400" b="1" dirty="0">
+                <a:solidFill>
+                  <a:srgbClr val="3B6B4A"/>
+                </a:solidFill>
+                <a:latin typeface="Yu Gothic" pitchFamily="34" charset="0"/>
+                <a:ea typeface="Yu Gothic" pitchFamily="34" charset="-122"/>
+                <a:cs typeface="Yu Gothic" pitchFamily="34" charset="-120"/>
+              </a:rPr>
+              <a:t>次に集まる日</a:t>
+            </a:r>
+            <a:endParaRPr lang="en-US" sz="1400" dirty="0"/>
+          </a:p>
+        </p:txBody>
+      </p:sp>
+      <p:sp>
+        <p:nvSpPr>
+          <p:cNvPr id="16" name="Text 14"/>
+          <p:cNvSpPr txBox="1"/>
+          <p:nvPr/>
+        </p:nvSpPr>
+        <p:spPr>
+          <a:xfrm>
+            <a:off x="4006901" y="4279392"/>
+            <a:ext cx="7011619" cy="768096"/>
+          </a:xfrm>
+          <a:prstGeom prst="rect">
+            <a:avLst/>
+          </a:prstGeom>
+          <a:noFill/>
+          <a:ln/>
+        </p:spPr>
+        <p:txBody>
+          <a:bodyPr wrap="square" lIns="0" tIns="0" rIns="0" bIns="0" rtlCol="0" anchor="ctr"/>
+          <a:lstStyle/>
+          <a:p>
+            <a:pPr indent="0" marL="0">
+              <a:lnSpc>
+                <a:spcPct val="130000"/>
+              </a:lnSpc>
+              <a:buNone/>
+            </a:pPr>
+            <a:r>
+              <a:rPr lang="en-US" sz="1250" dirty="0">
+                <a:solidFill>
+                  <a:srgbClr val="3F3933"/>
+                </a:solidFill>
+                <a:latin typeface="Yu Gothic" pitchFamily="34" charset="0"/>
+                <a:ea typeface="Yu Gothic" pitchFamily="34" charset="-122"/>
+                <a:cs typeface="Yu Gothic" pitchFamily="34" charset="-120"/>
+              </a:rPr>
+              <a:t>第12回の社内お披露目の日程を、いまこの場で押さえます</a:t>
+            </a:r>
+            <a:endParaRPr lang="en-US" sz="1250" dirty="0"/>
+          </a:p>
+        </p:txBody>
+      </p:sp>
+      <p:sp>
+        <p:nvSpPr>
+          <p:cNvPr id="17" name="Text 15"/>
+          <p:cNvSpPr txBox="1"/>
+          <p:nvPr/>
+        </p:nvSpPr>
+        <p:spPr>
+          <a:xfrm>
+            <a:off x="777240" y="6382512"/>
+            <a:ext cx="7424928" cy="256032"/>
+          </a:xfrm>
+          <a:prstGeom prst="rect">
+            <a:avLst/>
+          </a:prstGeom>
+          <a:noFill/>
+          <a:ln/>
+        </p:spPr>
+        <p:txBody>
+          <a:bodyPr wrap="square" lIns="0" tIns="0" rIns="0" bIns="0" rtlCol="0" anchor="ctr"/>
+          <a:lstStyle/>
+          <a:p>
+            <a:pPr indent="0" marL="0">
+              <a:buNone/>
+            </a:pPr>
+            <a:r>
+              <a:rPr lang="en-US" sz="900" dirty="0">
+                <a:solidFill>
+                  <a:srgbClr val="8A8177"/>
+                </a:solidFill>
+                <a:latin typeface="Yu Gothic" pitchFamily="34" charset="0"/>
+                <a:ea typeface="Yu Gothic" pitchFamily="34" charset="-122"/>
+                <a:cs typeface="Yu Gothic" pitchFamily="34" charset="-120"/>
+              </a:rPr>
+              <a:t>第6回　社内へのお披露目と12か月計画</a:t>
+            </a:r>
+            <a:endParaRPr lang="en-US" sz="900" dirty="0"/>
+          </a:p>
+        </p:txBody>
+      </p:sp>
+      <p:sp>
+        <p:nvSpPr>
+          <p:cNvPr id="18" name="Text 16"/>
+          <p:cNvSpPr txBox="1"/>
+          <p:nvPr/>
+        </p:nvSpPr>
+        <p:spPr>
+          <a:xfrm>
+            <a:off x="8202168" y="6382512"/>
+            <a:ext cx="3182112" cy="256032"/>
+          </a:xfrm>
+          <a:prstGeom prst="rect">
+            <a:avLst/>
+          </a:prstGeom>
+          <a:noFill/>
+          <a:ln/>
+        </p:spPr>
+        <p:txBody>
+          <a:bodyPr wrap="square" lIns="0" tIns="0" rIns="0" bIns="0" rtlCol="0" anchor="ctr"/>
+          <a:lstStyle/>
+          <a:p>
+            <a:pPr algn="r" indent="0" marL="0">
+              <a:buNone/>
+            </a:pPr>
+            <a:r>
+              <a:rPr lang="en-US" sz="900" dirty="0">
+                <a:solidFill>
+                  <a:srgbClr val="8A8177"/>
+                </a:solidFill>
+                <a:latin typeface="Yu Gothic" pitchFamily="34" charset="0"/>
+                <a:ea typeface="Yu Gothic" pitchFamily="34" charset="-122"/>
+                <a:cs typeface="Yu Gothic" pitchFamily="34" charset="-120"/>
+              </a:rPr>
+              <a:t>組み込み</a:t>
+            </a:r>
+            <a:endParaRPr lang="en-US" sz="900" dirty="0"/>
+          </a:p>
+        </p:txBody>
+      </p:sp>
+    </p:spTree>
+  </p:cSld>
+  <p:clrMapOvr>
+    <a:masterClrMapping/>
+  </p:clrMapOvr>
+</p:sld>
+</file>
+
+<file path=ppt/slides/slide11.xml><?xml version="1.0" encoding="utf-8"?>
+<p:sld xmlns:a="http://schemas.openxmlformats.org/drawingml/2006/main" xmlns:r="http://schemas.openxmlformats.org/officeDocument/2006/relationships" xmlns:p="http://schemas.openxmlformats.org/presentationml/2006/main">
+  <p:cSld name="Slide 11">
+    <p:bg>
+      <p:bgPr>
+        <a:solidFill>
+          <a:srgbClr val="F6F2EA"/>
+        </a:solidFill>
+      </p:bgPr>
+    </p:bg>
+    <p:spTree>
+      <p:nvGrpSpPr>
+        <p:cNvPr id="1" name=""/>
+        <p:cNvGrpSpPr/>
+        <p:nvPr/>
+      </p:nvGrpSpPr>
+      <p:grpSpPr>
+        <a:xfrm>
+          <a:off x="0" y="0"/>
+          <a:ext cx="0" cy="0"/>
+          <a:chOff x="0" y="0"/>
+          <a:chExt cx="0" cy="0"/>
+        </a:xfrm>
+      </p:grpSpPr>
+      <p:sp>
+        <p:nvSpPr>
+          <p:cNvPr id="2" name="Text 0"/>
+          <p:cNvSpPr txBox="1"/>
+          <p:nvPr/>
+        </p:nvSpPr>
+        <p:spPr>
+          <a:xfrm>
+            <a:off x="777240" y="566928"/>
+            <a:ext cx="10607040" cy="274320"/>
+          </a:xfrm>
+          <a:prstGeom prst="rect">
+            <a:avLst/>
+          </a:prstGeom>
+          <a:noFill/>
+          <a:ln/>
+        </p:spPr>
+        <p:txBody>
+          <a:bodyPr wrap="square" lIns="0" tIns="0" rIns="0" bIns="0" rtlCol="0" anchor="ctr"/>
+          <a:lstStyle/>
+          <a:p>
+            <a:pPr indent="0" marL="0">
+              <a:buNone/>
+            </a:pPr>
+            <a:r>
+              <a:rPr lang="en-US" sz="1100" b="1" spc="250" kern="0" dirty="0">
+                <a:solidFill>
+                  <a:srgbClr val="B04A2F"/>
+                </a:solidFill>
+                <a:latin typeface="Yu Gothic" pitchFamily="34" charset="0"/>
+                <a:ea typeface="Yu Gothic" pitchFamily="34" charset="-122"/>
+                <a:cs typeface="Yu Gothic" pitchFamily="34" charset="-120"/>
+              </a:rPr>
+              <a:t>ここだけは</a:t>
+            </a:r>
+            <a:endParaRPr lang="en-US" sz="1100" dirty="0"/>
+          </a:p>
+        </p:txBody>
+      </p:sp>
+      <p:sp>
+        <p:nvSpPr>
+          <p:cNvPr id="3" name="Text 1"/>
+          <p:cNvSpPr txBox="1"/>
+          <p:nvPr/>
+        </p:nvSpPr>
+        <p:spPr>
+          <a:xfrm>
+            <a:off x="777240" y="1097280"/>
+            <a:ext cx="10607040" cy="640080"/>
+          </a:xfrm>
+          <a:prstGeom prst="rect">
+            <a:avLst/>
+          </a:prstGeom>
+          <a:noFill/>
+          <a:ln/>
+        </p:spPr>
+        <p:txBody>
+          <a:bodyPr wrap="square" lIns="0" tIns="0" rIns="0" bIns="0" rtlCol="0" anchor="ctr"/>
+          <a:lstStyle/>
+          <a:p>
+            <a:pPr indent="0" marL="0">
+              <a:buNone/>
+            </a:pPr>
+            <a:r>
+              <a:rPr lang="en-US" sz="2600" b="1" dirty="0">
+                <a:solidFill>
+                  <a:srgbClr val="23201D"/>
+                </a:solidFill>
+                <a:latin typeface="Yu Gothic" pitchFamily="34" charset="0"/>
+                <a:ea typeface="Yu Gothic" pitchFamily="34" charset="-122"/>
+                <a:cs typeface="Yu Gothic" pitchFamily="34" charset="-120"/>
+              </a:rPr>
+              <a:t>「人が減らされるのか」に、講師が答えてはいけません</a:t>
+            </a:r>
+            <a:endParaRPr lang="en-US" sz="2600" dirty="0"/>
+          </a:p>
+        </p:txBody>
+      </p:sp>
+      <p:sp>
+        <p:nvSpPr>
+          <p:cNvPr id="4" name="Shape 2"/>
+          <p:cNvSpPr/>
+          <p:nvPr/>
+        </p:nvSpPr>
+        <p:spPr>
+          <a:xfrm>
+            <a:off x="777240" y="2148840"/>
+            <a:ext cx="64008" cy="2194560"/>
+          </a:xfrm>
+          <a:prstGeom prst="rect">
+            <a:avLst/>
+          </a:prstGeom>
+          <a:solidFill>
+            <a:srgbClr val="B04A2F"/>
+          </a:solidFill>
+          <a:ln w="12700">
+            <a:solidFill>
+              <a:srgbClr val="333333"/>
+            </a:solidFill>
+            <a:prstDash val="solid"/>
+          </a:ln>
+        </p:spPr>
+      </p:sp>
+      <p:sp>
+        <p:nvSpPr>
+          <p:cNvPr id="5" name="Text 3"/>
+          <p:cNvSpPr txBox="1"/>
+          <p:nvPr/>
+        </p:nvSpPr>
+        <p:spPr>
+          <a:xfrm>
+            <a:off x="1188720" y="2148840"/>
+            <a:ext cx="9966960" cy="2194560"/>
+          </a:xfrm>
+          <a:prstGeom prst="rect">
+            <a:avLst/>
+          </a:prstGeom>
+          <a:noFill/>
+          <a:ln/>
+        </p:spPr>
+        <p:txBody>
+          <a:bodyPr wrap="square" lIns="0" tIns="0" rIns="0" bIns="0" rtlCol="0" anchor="ctr"/>
+          <a:lstStyle/>
+          <a:p>
+            <a:pPr indent="0" marL="0">
+              <a:lnSpc>
+                <a:spcPct val="160000"/>
+              </a:lnSpc>
+              <a:buNone/>
+            </a:pPr>
+            <a:r>
+              <a:rPr lang="en-US" sz="1650" dirty="0">
+                <a:solidFill>
+                  <a:srgbClr val="3F3933"/>
+                </a:solidFill>
+                <a:latin typeface="Yu Gothic" pitchFamily="34" charset="0"/>
+                <a:ea typeface="Yu Gothic" pitchFamily="34" charset="-122"/>
+                <a:cs typeface="Yu Gothic" pitchFamily="34" charset="-120"/>
+              </a:rPr>
+              <a:t>この質問は必ず出ます。そして、社長ご自身が答えたかどうかを社員は見ています。講師が代わりに答えると、それは外部の人の言い分になり、誰も信じません。事前の壁打ちで、この質問への答えを必ず準備しておいてください。</a:t>
+            </a:r>
+            <a:endParaRPr lang="en-US" sz="1650" dirty="0"/>
+          </a:p>
+        </p:txBody>
+      </p:sp>
+      <p:sp>
+        <p:nvSpPr>
+          <p:cNvPr id="6" name="Shape 4"/>
+          <p:cNvSpPr/>
+          <p:nvPr/>
+        </p:nvSpPr>
+        <p:spPr>
+          <a:xfrm>
+            <a:off x="777240" y="4709160"/>
+            <a:ext cx="10607040" cy="960120"/>
+          </a:xfrm>
+          <a:prstGeom prst="rect">
+            <a:avLst/>
+          </a:prstGeom>
+          <a:solidFill>
+            <a:srgbClr val="EDE7DB"/>
+          </a:solidFill>
+          <a:ln w="12700">
+            <a:solidFill>
+              <a:srgbClr val="333333"/>
+            </a:solidFill>
+            <a:prstDash val="solid"/>
+          </a:ln>
+        </p:spPr>
+      </p:sp>
+      <p:sp>
+        <p:nvSpPr>
+          <p:cNvPr id="7" name="Text 5"/>
+          <p:cNvSpPr txBox="1"/>
+          <p:nvPr/>
+        </p:nvSpPr>
+        <p:spPr>
+          <a:xfrm>
+            <a:off x="1051560" y="4800600"/>
+            <a:ext cx="1463040" cy="256032"/>
+          </a:xfrm>
+          <a:prstGeom prst="rect">
+            <a:avLst/>
+          </a:prstGeom>
+          <a:noFill/>
+          <a:ln/>
+        </p:spPr>
+        <p:txBody>
+          <a:bodyPr wrap="square" lIns="0" tIns="0" rIns="0" bIns="0" rtlCol="0" anchor="ctr"/>
+          <a:lstStyle/>
+          <a:p>
+            <a:pPr indent="0" marL="0">
+              <a:buNone/>
+            </a:pPr>
+            <a:r>
+              <a:rPr lang="en-US" sz="900" b="1" spc="150" kern="0" dirty="0">
+                <a:solidFill>
+                  <a:srgbClr val="B04A2F"/>
+                </a:solidFill>
+                <a:latin typeface="Yu Gothic" pitchFamily="34" charset="0"/>
+                <a:ea typeface="Yu Gothic" pitchFamily="34" charset="-122"/>
+                <a:cs typeface="Yu Gothic" pitchFamily="34" charset="-120"/>
+              </a:rPr>
+              <a:t>他社では</a:t>
+            </a:r>
+            <a:endParaRPr lang="en-US" sz="900" dirty="0"/>
+          </a:p>
+        </p:txBody>
+      </p:sp>
+      <p:sp>
+        <p:nvSpPr>
+          <p:cNvPr id="8" name="Text 6"/>
+          <p:cNvSpPr txBox="1"/>
+          <p:nvPr/>
+        </p:nvSpPr>
+        <p:spPr>
+          <a:xfrm>
+            <a:off x="1051560" y="5029200"/>
+            <a:ext cx="10058400" cy="566928"/>
+          </a:xfrm>
+          <a:prstGeom prst="rect">
+            <a:avLst/>
+          </a:prstGeom>
+          <a:noFill/>
+          <a:ln/>
+        </p:spPr>
+        <p:txBody>
+          <a:bodyPr wrap="square" lIns="0" tIns="0" rIns="0" bIns="0" rtlCol="0" anchor="ctr"/>
+          <a:lstStyle/>
+          <a:p>
+            <a:pPr indent="0" marL="0">
+              <a:lnSpc>
+                <a:spcPct val="130000"/>
+              </a:lnSpc>
+              <a:buNone/>
+            </a:pPr>
+            <a:r>
+              <a:rPr lang="en-US" sz="1250" dirty="0">
+                <a:solidFill>
+                  <a:srgbClr val="3F3933"/>
+                </a:solidFill>
+                <a:latin typeface="Yu Gothic" pitchFamily="34" charset="0"/>
+                <a:ea typeface="Yu Gothic" pitchFamily="34" charset="-122"/>
+                <a:cs typeface="Yu Gothic" pitchFamily="34" charset="-120"/>
+              </a:rPr>
+              <a:t>お披露目で最も強く反対した社員を、後に推進担当にした会社があります。反対の理由がいちばん具体的だったため、設計が現実的になりました。</a:t>
+            </a:r>
+            <a:endParaRPr lang="en-US" sz="1250" dirty="0"/>
+          </a:p>
+        </p:txBody>
+      </p:sp>
+      <p:sp>
+        <p:nvSpPr>
+          <p:cNvPr id="9" name="Text 7"/>
+          <p:cNvSpPr txBox="1"/>
+          <p:nvPr/>
+        </p:nvSpPr>
+        <p:spPr>
+          <a:xfrm>
+            <a:off x="777240" y="6382512"/>
+            <a:ext cx="7424928" cy="256032"/>
+          </a:xfrm>
+          <a:prstGeom prst="rect">
+            <a:avLst/>
+          </a:prstGeom>
+          <a:noFill/>
+          <a:ln/>
+        </p:spPr>
+        <p:txBody>
+          <a:bodyPr wrap="square" lIns="0" tIns="0" rIns="0" bIns="0" rtlCol="0" anchor="ctr"/>
+          <a:lstStyle/>
+          <a:p>
+            <a:pPr indent="0" marL="0">
+              <a:buNone/>
+            </a:pPr>
+            <a:r>
+              <a:rPr lang="en-US" sz="900" dirty="0">
+                <a:solidFill>
+                  <a:srgbClr val="8A8177"/>
+                </a:solidFill>
+                <a:latin typeface="Yu Gothic" pitchFamily="34" charset="0"/>
+                <a:ea typeface="Yu Gothic" pitchFamily="34" charset="-122"/>
+                <a:cs typeface="Yu Gothic" pitchFamily="34" charset="-120"/>
+              </a:rPr>
+              <a:t>第6回　社内へのお披露目と12か月計画</a:t>
+            </a:r>
+            <a:endParaRPr lang="en-US" sz="900" dirty="0"/>
+          </a:p>
+        </p:txBody>
+      </p:sp>
+      <p:sp>
+        <p:nvSpPr>
+          <p:cNvPr id="10" name="Text 8"/>
+          <p:cNvSpPr txBox="1"/>
+          <p:nvPr/>
+        </p:nvSpPr>
+        <p:spPr>
+          <a:xfrm>
+            <a:off x="8202168" y="6382512"/>
+            <a:ext cx="3182112" cy="256032"/>
+          </a:xfrm>
+          <a:prstGeom prst="rect">
+            <a:avLst/>
+          </a:prstGeom>
+          <a:noFill/>
+          <a:ln/>
+        </p:spPr>
+        <p:txBody>
+          <a:bodyPr wrap="square" lIns="0" tIns="0" rIns="0" bIns="0" rtlCol="0" anchor="ctr"/>
+          <a:lstStyle/>
+          <a:p>
+            <a:pPr algn="r" indent="0" marL="0">
+              <a:buNone/>
+            </a:pPr>
+            <a:r>
+              <a:rPr lang="en-US" sz="900" dirty="0">
+                <a:solidFill>
+                  <a:srgbClr val="8A8177"/>
+                </a:solidFill>
+                <a:latin typeface="Yu Gothic" pitchFamily="34" charset="0"/>
+                <a:ea typeface="Yu Gothic" pitchFamily="34" charset="-122"/>
+                <a:cs typeface="Yu Gothic" pitchFamily="34" charset="-120"/>
+              </a:rPr>
+              <a:t>ここだけは</a:t>
+            </a:r>
+            <a:endParaRPr lang="en-US" sz="900" dirty="0"/>
+          </a:p>
+        </p:txBody>
+      </p:sp>
+    </p:spTree>
+  </p:cSld>
+  <p:clrMapOvr>
+    <a:masterClrMapping/>
+  </p:clrMapOvr>
+</p:sld>
+</file>
+
+<file path=ppt/slides/slide12.xml><?xml version="1.0" encoding="utf-8"?>
+<p:sld xmlns:a="http://schemas.openxmlformats.org/drawingml/2006/main" xmlns:r="http://schemas.openxmlformats.org/officeDocument/2006/relationships" xmlns:p="http://schemas.openxmlformats.org/presentationml/2006/main">
+  <p:cSld name="Slide 12">
+    <p:bg>
+      <p:bgPr>
+        <a:solidFill>
+          <a:srgbClr val="23201D"/>
+        </a:solidFill>
+      </p:bgPr>
+    </p:bg>
+    <p:spTree>
+      <p:nvGrpSpPr>
+        <p:cNvPr id="1" name=""/>
+        <p:cNvGrpSpPr/>
+        <p:nvPr/>
+      </p:nvGrpSpPr>
+      <p:grpSpPr>
+        <a:xfrm>
+          <a:off x="0" y="0"/>
+          <a:ext cx="0" cy="0"/>
+          <a:chOff x="0" y="0"/>
+          <a:chExt cx="0" cy="0"/>
+        </a:xfrm>
+      </p:grpSpPr>
+      <p:sp>
+        <p:nvSpPr>
+          <p:cNvPr id="2" name="Text 0"/>
+          <p:cNvSpPr txBox="1"/>
+          <p:nvPr/>
+        </p:nvSpPr>
+        <p:spPr>
+          <a:xfrm>
+            <a:off x="777240" y="1280160"/>
+            <a:ext cx="10607040" cy="365760"/>
+          </a:xfrm>
+          <a:prstGeom prst="rect">
+            <a:avLst/>
+          </a:prstGeom>
+          <a:noFill/>
+          <a:ln/>
+        </p:spPr>
+        <p:txBody>
+          <a:bodyPr wrap="square" lIns="0" tIns="0" rIns="0" bIns="0" rtlCol="0" anchor="ctr"/>
+          <a:lstStyle/>
+          <a:p>
+            <a:pPr indent="0" marL="0">
+              <a:buNone/>
+            </a:pPr>
+            <a:r>
+              <a:rPr lang="en-US" sz="1200" b="1" spc="300" kern="0" dirty="0">
+                <a:solidFill>
+                  <a:srgbClr val="B04A2F"/>
+                </a:solidFill>
+                <a:latin typeface="Yu Gothic" pitchFamily="34" charset="0"/>
+                <a:ea typeface="Yu Gothic" pitchFamily="34" charset="-122"/>
+                <a:cs typeface="Yu Gothic" pitchFamily="34" charset="-120"/>
+              </a:rPr>
+              <a:t>今日の宿題</a:t>
+            </a:r>
+            <a:endParaRPr lang="en-US" sz="1200" dirty="0"/>
+          </a:p>
+        </p:txBody>
+      </p:sp>
+      <p:sp>
+        <p:nvSpPr>
+          <p:cNvPr id="3" name="Text 1"/>
+          <p:cNvSpPr txBox="1"/>
+          <p:nvPr/>
+        </p:nvSpPr>
+        <p:spPr>
+          <a:xfrm>
+            <a:off x="777240" y="1691640"/>
+            <a:ext cx="10607040" cy="640080"/>
+          </a:xfrm>
+          <a:prstGeom prst="rect">
+            <a:avLst/>
+          </a:prstGeom>
+          <a:noFill/>
+          <a:ln/>
+        </p:spPr>
+        <p:txBody>
+          <a:bodyPr wrap="square" lIns="0" tIns="0" rIns="0" bIns="0" rtlCol="0" anchor="ctr"/>
+          <a:lstStyle/>
+          <a:p>
+            <a:pPr indent="0" marL="0">
+              <a:buNone/>
+            </a:pPr>
+            <a:r>
+              <a:rPr lang="en-US" sz="3200" b="1" dirty="0">
+                <a:solidFill>
+                  <a:srgbClr val="FFFFFF"/>
+                </a:solidFill>
+                <a:latin typeface="Yu Gothic" pitchFamily="34" charset="0"/>
+                <a:ea typeface="Yu Gothic" pitchFamily="34" charset="-122"/>
+                <a:cs typeface="Yu Gothic" pitchFamily="34" charset="-120"/>
+              </a:rPr>
+              <a:t>ひとつだけ</a:t>
+            </a:r>
+            <a:endParaRPr lang="en-US" sz="3200" dirty="0"/>
+          </a:p>
+        </p:txBody>
+      </p:sp>
+      <p:sp>
+        <p:nvSpPr>
+          <p:cNvPr id="4" name="Shape 2"/>
+          <p:cNvSpPr/>
+          <p:nvPr/>
+        </p:nvSpPr>
+        <p:spPr>
+          <a:xfrm>
+            <a:off x="777240" y="2651760"/>
+            <a:ext cx="10607040" cy="1371600"/>
+          </a:xfrm>
+          <a:prstGeom prst="rect">
+            <a:avLst/>
+          </a:prstGeom>
+          <a:solidFill>
+            <a:srgbClr val="2E2A26"/>
+          </a:solidFill>
+          <a:ln w="12700">
+            <a:solidFill>
+              <a:srgbClr val="B04A2F"/>
+            </a:solidFill>
+            <a:prstDash val="solid"/>
+          </a:ln>
+        </p:spPr>
+      </p:sp>
+      <p:sp>
+        <p:nvSpPr>
+          <p:cNvPr id="5" name="Text 3"/>
+          <p:cNvSpPr txBox="1"/>
+          <p:nvPr/>
+        </p:nvSpPr>
+        <p:spPr>
+          <a:xfrm>
+            <a:off x="1234440" y="2743200"/>
+            <a:ext cx="9692640" cy="1188720"/>
+          </a:xfrm>
+          <a:prstGeom prst="rect">
+            <a:avLst/>
+          </a:prstGeom>
+          <a:noFill/>
+          <a:ln/>
+        </p:spPr>
+        <p:txBody>
+          <a:bodyPr wrap="square" lIns="0" tIns="0" rIns="0" bIns="0" rtlCol="0" anchor="ctr"/>
+          <a:lstStyle/>
+          <a:p>
+            <a:pPr indent="0" marL="0">
+              <a:lnSpc>
+                <a:spcPct val="140000"/>
+              </a:lnSpc>
+              <a:buNone/>
+            </a:pPr>
+            <a:r>
+              <a:rPr lang="en-US" sz="1900" b="1" dirty="0">
+                <a:solidFill>
+                  <a:srgbClr val="FFFFFF"/>
+                </a:solidFill>
+                <a:latin typeface="Yu Gothic" pitchFamily="34" charset="0"/>
+                <a:ea typeface="Yu Gothic" pitchFamily="34" charset="-122"/>
+                <a:cs typeface="Yu Gothic" pitchFamily="34" charset="-120"/>
+              </a:rPr>
+              <a:t>12か月ロードマップの0〜3か月に書いたことを、1つだけ着手する。</a:t>
+            </a:r>
+            <a:endParaRPr lang="en-US" sz="1900" dirty="0"/>
+          </a:p>
+        </p:txBody>
+      </p:sp>
+      <p:sp>
+        <p:nvSpPr>
+          <p:cNvPr id="6" name="Text 4"/>
+          <p:cNvSpPr txBox="1"/>
+          <p:nvPr/>
+        </p:nvSpPr>
+        <p:spPr>
+          <a:xfrm>
+            <a:off x="777240" y="4297680"/>
+            <a:ext cx="10607040" cy="274320"/>
+          </a:xfrm>
+          <a:prstGeom prst="rect">
+            <a:avLst/>
+          </a:prstGeom>
+          <a:noFill/>
+          <a:ln/>
+        </p:spPr>
+        <p:txBody>
+          <a:bodyPr wrap="square" lIns="0" tIns="0" rIns="0" bIns="0" rtlCol="0" anchor="ctr"/>
+          <a:lstStyle/>
+          <a:p>
+            <a:pPr indent="0" marL="0">
+              <a:buNone/>
+            </a:pPr>
+            <a:r>
+              <a:rPr lang="en-US" sz="1000" b="1" spc="200" kern="0" dirty="0">
+                <a:solidFill>
+                  <a:srgbClr val="B04A2F"/>
+                </a:solidFill>
+                <a:latin typeface="Yu Gothic" pitchFamily="34" charset="0"/>
+                <a:ea typeface="Yu Gothic" pitchFamily="34" charset="-122"/>
+                <a:cs typeface="Yu Gothic" pitchFamily="34" charset="-120"/>
+              </a:rPr>
+              <a:t>なぜこの宿題か</a:t>
+            </a:r>
+            <a:endParaRPr lang="en-US" sz="1000" dirty="0"/>
+          </a:p>
+        </p:txBody>
+      </p:sp>
+      <p:sp>
+        <p:nvSpPr>
+          <p:cNvPr id="7" name="Text 5"/>
+          <p:cNvSpPr txBox="1"/>
+          <p:nvPr/>
+        </p:nvSpPr>
+        <p:spPr>
+          <a:xfrm>
+            <a:off x="777240" y="4572000"/>
+            <a:ext cx="9546336" cy="914400"/>
+          </a:xfrm>
+          <a:prstGeom prst="rect">
+            <a:avLst/>
+          </a:prstGeom>
+          <a:noFill/>
+          <a:ln/>
+        </p:spPr>
+        <p:txBody>
+          <a:bodyPr wrap="square" lIns="0" tIns="0" rIns="0" bIns="0" rtlCol="0" anchor="ctr"/>
+          <a:lstStyle/>
+          <a:p>
+            <a:pPr indent="0" marL="0">
+              <a:lnSpc>
+                <a:spcPct val="145000"/>
+              </a:lnSpc>
+              <a:buNone/>
+            </a:pPr>
+            <a:r>
+              <a:rPr lang="en-US" sz="1350" dirty="0">
+                <a:solidFill>
+                  <a:srgbClr val="CFC6B8"/>
+                </a:solidFill>
+                <a:latin typeface="Yu Gothic" pitchFamily="34" charset="0"/>
+                <a:ea typeface="Yu Gothic" pitchFamily="34" charset="-122"/>
+                <a:cs typeface="Yu Gothic" pitchFamily="34" charset="-120"/>
+              </a:rPr>
+              <a:t>ロードマップは書いた時点では紙です。1つでも着手すると、計画が動いているものになります。増やさず、1つだけで構いません。</a:t>
+            </a:r>
+            <a:endParaRPr lang="en-US" sz="1350" dirty="0"/>
+          </a:p>
+        </p:txBody>
+      </p:sp>
+      <p:sp>
+        <p:nvSpPr>
+          <p:cNvPr id="8" name="Text 6"/>
+          <p:cNvSpPr txBox="1"/>
+          <p:nvPr/>
+        </p:nvSpPr>
+        <p:spPr>
+          <a:xfrm>
+            <a:off x="777240" y="6382512"/>
+            <a:ext cx="10607040" cy="256032"/>
+          </a:xfrm>
+          <a:prstGeom prst="rect">
+            <a:avLst/>
+          </a:prstGeom>
+          <a:noFill/>
+          <a:ln/>
+        </p:spPr>
+        <p:txBody>
+          <a:bodyPr wrap="square" lIns="0" tIns="0" rIns="0" bIns="0" rtlCol="0" anchor="ctr"/>
+          <a:lstStyle/>
+          <a:p>
+            <a:pPr indent="0" marL="0">
+              <a:buNone/>
+            </a:pPr>
+            <a:r>
+              <a:rPr lang="en-US" sz="900" dirty="0">
+                <a:solidFill>
+                  <a:srgbClr val="6E6558"/>
+                </a:solidFill>
+                <a:latin typeface="Yu Gothic" pitchFamily="34" charset="0"/>
+                <a:ea typeface="Yu Gothic" pitchFamily="34" charset="-122"/>
+                <a:cs typeface="Yu Gothic" pitchFamily="34" charset="-120"/>
+              </a:rPr>
+              <a:t>第6回　社内へのお披露目と12か月計画</a:t>
+            </a:r>
+            <a:endParaRPr lang="en-US" sz="900" dirty="0"/>
+          </a:p>
+        </p:txBody>
+      </p:sp>
+    </p:spTree>
+  </p:cSld>
+  <p:clrMapOvr>
+    <a:masterClrMapping/>
+  </p:clrMapOvr>
+</p:sld>
+</file>
+
 <file path=ppt/slides/slide2.xml><?xml version="1.0" encoding="utf-8"?>
 <p:sld xmlns:a="http://schemas.openxmlformats.org/drawingml/2006/main" xmlns:r="http://schemas.openxmlformats.org/officeDocument/2006/relationships" xmlns:p="http://schemas.openxmlformats.org/presentationml/2006/main">
   <p:cSld name="Slide 2">
@@ -1712,7 +3434,7 @@
         </p:nvSpPr>
         <p:spPr>
           <a:xfrm>
-            <a:off x="777240" y="777240"/>
+            <a:off x="777240" y="566928"/>
             <a:ext cx="10607040" cy="274320"/>
           </a:xfrm>
           <a:prstGeom prst="rect">
@@ -1737,7 +3459,7 @@
                 <a:ea typeface="Yu Gothic" pitchFamily="34" charset="-122"/>
                 <a:cs typeface="Yu Gothic" pitchFamily="34" charset="-120"/>
               </a:rPr>
-              <a:t>今日のゴール</a:t>
+              <a:t>今日の出発点</a:t>
             </a:r>
             <a:endParaRPr lang="en-US" sz="1100" dirty="0"/>
           </a:p>
@@ -1751,27 +3473,24 @@
         </p:nvSpPr>
         <p:spPr>
           <a:xfrm>
-            <a:off x="777240" y="1280160"/>
-            <a:ext cx="9758477" cy="1828800"/>
-          </a:xfrm>
-          <a:prstGeom prst="rect">
-            <a:avLst/>
-          </a:prstGeom>
-          <a:noFill/>
-          <a:ln/>
-        </p:spPr>
-        <p:txBody>
-          <a:bodyPr wrap="square" lIns="0" tIns="0" rIns="0" bIns="0" rtlCol="0" anchor="ctr"/>
-          <a:lstStyle/>
-          <a:p>
-            <a:pPr indent="0" marL="0">
-              <a:lnSpc>
-                <a:spcPct val="145000"/>
-              </a:lnSpc>
-              <a:buNone/>
-            </a:pPr>
-            <a:r>
-              <a:rPr lang="en-US" sz="2800" b="1" dirty="0">
+            <a:off x="777240" y="896112"/>
+            <a:ext cx="10607040" cy="640080"/>
+          </a:xfrm>
+          <a:prstGeom prst="rect">
+            <a:avLst/>
+          </a:prstGeom>
+          <a:noFill/>
+          <a:ln/>
+        </p:spPr>
+        <p:txBody>
+          <a:bodyPr wrap="square" lIns="0" tIns="0" rIns="0" bIns="0" rtlCol="0" anchor="ctr"/>
+          <a:lstStyle/>
+          <a:p>
+            <a:pPr indent="0" marL="0">
+              <a:buNone/>
+            </a:pPr>
+            <a:r>
+              <a:rPr lang="en-US" sz="2600" b="1" dirty="0">
                 <a:solidFill>
                   <a:srgbClr val="23201D"/>
                 </a:solidFill>
@@ -1779,9 +3498,9 @@
                 <a:ea typeface="Yu Gothic" pitchFamily="34" charset="-122"/>
                 <a:cs typeface="Yu Gothic" pitchFamily="34" charset="-120"/>
               </a:rPr>
-              <a:t>社長ご自身の言葉で、社員のみなさんに「うちはAIをこう使う」を説明します。</a:t>
-            </a:r>
-            <a:endParaRPr lang="en-US" sz="2800" dirty="0"/>
+              <a:t>ここまでは、社長と講師だけの話でした。</a:t>
+            </a:r>
+            <a:endParaRPr lang="en-US" sz="2600" dirty="0"/>
           </a:p>
         </p:txBody>
       </p:sp>
@@ -1793,14 +3512,323 @@
         </p:nvSpPr>
         <p:spPr>
           <a:xfrm>
-            <a:off x="777240" y="3429000"/>
-            <a:ext cx="10607040" cy="18288"/>
+            <a:off x="777240" y="1783080"/>
+            <a:ext cx="10607040" cy="713232"/>
           </a:xfrm>
           <a:prstGeom prst="rect">
             <a:avLst/>
           </a:prstGeom>
           <a:solidFill>
-            <a:srgbClr val="EDE7DB"/>
+            <a:srgbClr val="FFFFFF"/>
+          </a:solidFill>
+          <a:ln w="12700">
+            <a:solidFill>
+              <a:srgbClr val="EDE7DB"/>
+            </a:solidFill>
+            <a:prstDash val="solid"/>
+          </a:ln>
+        </p:spPr>
+      </p:sp>
+      <p:sp>
+        <p:nvSpPr>
+          <p:cNvPr id="5" name="Text 3"/>
+          <p:cNvSpPr txBox="1"/>
+          <p:nvPr/>
+        </p:nvSpPr>
+        <p:spPr>
+          <a:xfrm>
+            <a:off x="1051560" y="1783080"/>
+            <a:ext cx="365760" cy="713232"/>
+          </a:xfrm>
+          <a:prstGeom prst="rect">
+            <a:avLst/>
+          </a:prstGeom>
+          <a:noFill/>
+          <a:ln/>
+        </p:spPr>
+        <p:txBody>
+          <a:bodyPr wrap="square" lIns="0" tIns="0" rIns="0" bIns="0" rtlCol="0" anchor="ctr"/>
+          <a:lstStyle/>
+          <a:p>
+            <a:pPr indent="0" marL="0">
+              <a:buNone/>
+            </a:pPr>
+            <a:r>
+              <a:rPr lang="en-US" sz="1400" dirty="0">
+                <a:solidFill>
+                  <a:srgbClr val="8A8177"/>
+                </a:solidFill>
+                <a:latin typeface="Yu Gothic" pitchFamily="34" charset="0"/>
+                <a:ea typeface="Yu Gothic" pitchFamily="34" charset="-122"/>
+                <a:cs typeface="Yu Gothic" pitchFamily="34" charset="-120"/>
+              </a:rPr>
+              <a:t>―</a:t>
+            </a:r>
+            <a:endParaRPr lang="en-US" sz="1400" dirty="0"/>
+          </a:p>
+        </p:txBody>
+      </p:sp>
+      <p:sp>
+        <p:nvSpPr>
+          <p:cNvPr id="6" name="Text 4"/>
+          <p:cNvSpPr txBox="1"/>
+          <p:nvPr/>
+        </p:nvSpPr>
+        <p:spPr>
+          <a:xfrm>
+            <a:off x="1508760" y="1783080"/>
+            <a:ext cx="9601200" cy="713232"/>
+          </a:xfrm>
+          <a:prstGeom prst="rect">
+            <a:avLst/>
+          </a:prstGeom>
+          <a:noFill/>
+          <a:ln/>
+        </p:spPr>
+        <p:txBody>
+          <a:bodyPr wrap="square" lIns="0" tIns="0" rIns="0" bIns="0" rtlCol="0" anchor="ctr"/>
+          <a:lstStyle/>
+          <a:p>
+            <a:pPr indent="0" marL="0">
+              <a:buNone/>
+            </a:pPr>
+            <a:r>
+              <a:rPr lang="en-US" sz="1500" dirty="0">
+                <a:solidFill>
+                  <a:srgbClr val="23201D"/>
+                </a:solidFill>
+                <a:latin typeface="Yu Gothic" pitchFamily="34" charset="0"/>
+                <a:ea typeface="Yu Gothic" pitchFamily="34" charset="-122"/>
+                <a:cs typeface="Yu Gothic" pitchFamily="34" charset="-120"/>
+              </a:rPr>
+              <a:t>作ったものは動いている。ただ、知っているのは社長だけ</a:t>
+            </a:r>
+            <a:endParaRPr lang="en-US" sz="1500" dirty="0"/>
+          </a:p>
+        </p:txBody>
+      </p:sp>
+      <p:sp>
+        <p:nvSpPr>
+          <p:cNvPr id="7" name="Shape 5"/>
+          <p:cNvSpPr/>
+          <p:nvPr/>
+        </p:nvSpPr>
+        <p:spPr>
+          <a:xfrm>
+            <a:off x="777240" y="2624328"/>
+            <a:ext cx="10607040" cy="713232"/>
+          </a:xfrm>
+          <a:prstGeom prst="rect">
+            <a:avLst/>
+          </a:prstGeom>
+          <a:solidFill>
+            <a:srgbClr val="FFFFFF"/>
+          </a:solidFill>
+          <a:ln w="12700">
+            <a:solidFill>
+              <a:srgbClr val="EDE7DB"/>
+            </a:solidFill>
+            <a:prstDash val="solid"/>
+          </a:ln>
+        </p:spPr>
+      </p:sp>
+      <p:sp>
+        <p:nvSpPr>
+          <p:cNvPr id="8" name="Text 6"/>
+          <p:cNvSpPr txBox="1"/>
+          <p:nvPr/>
+        </p:nvSpPr>
+        <p:spPr>
+          <a:xfrm>
+            <a:off x="1051560" y="2624328"/>
+            <a:ext cx="365760" cy="713232"/>
+          </a:xfrm>
+          <a:prstGeom prst="rect">
+            <a:avLst/>
+          </a:prstGeom>
+          <a:noFill/>
+          <a:ln/>
+        </p:spPr>
+        <p:txBody>
+          <a:bodyPr wrap="square" lIns="0" tIns="0" rIns="0" bIns="0" rtlCol="0" anchor="ctr"/>
+          <a:lstStyle/>
+          <a:p>
+            <a:pPr indent="0" marL="0">
+              <a:buNone/>
+            </a:pPr>
+            <a:r>
+              <a:rPr lang="en-US" sz="1400" dirty="0">
+                <a:solidFill>
+                  <a:srgbClr val="8A8177"/>
+                </a:solidFill>
+                <a:latin typeface="Yu Gothic" pitchFamily="34" charset="0"/>
+                <a:ea typeface="Yu Gothic" pitchFamily="34" charset="-122"/>
+                <a:cs typeface="Yu Gothic" pitchFamily="34" charset="-120"/>
+              </a:rPr>
+              <a:t>―</a:t>
+            </a:r>
+            <a:endParaRPr lang="en-US" sz="1400" dirty="0"/>
+          </a:p>
+        </p:txBody>
+      </p:sp>
+      <p:sp>
+        <p:nvSpPr>
+          <p:cNvPr id="9" name="Text 7"/>
+          <p:cNvSpPr txBox="1"/>
+          <p:nvPr/>
+        </p:nvSpPr>
+        <p:spPr>
+          <a:xfrm>
+            <a:off x="1508760" y="2624328"/>
+            <a:ext cx="9601200" cy="713232"/>
+          </a:xfrm>
+          <a:prstGeom prst="rect">
+            <a:avLst/>
+          </a:prstGeom>
+          <a:noFill/>
+          <a:ln/>
+        </p:spPr>
+        <p:txBody>
+          <a:bodyPr wrap="square" lIns="0" tIns="0" rIns="0" bIns="0" rtlCol="0" anchor="ctr"/>
+          <a:lstStyle/>
+          <a:p>
+            <a:pPr indent="0" marL="0">
+              <a:buNone/>
+            </a:pPr>
+            <a:r>
+              <a:rPr lang="en-US" sz="1500" dirty="0">
+                <a:solidFill>
+                  <a:srgbClr val="23201D"/>
+                </a:solidFill>
+                <a:latin typeface="Yu Gothic" pitchFamily="34" charset="0"/>
+                <a:ea typeface="Yu Gothic" pitchFamily="34" charset="-122"/>
+                <a:cs typeface="Yu Gothic" pitchFamily="34" charset="-120"/>
+              </a:rPr>
+              <a:t>社員から見ると、何が起きているのか分からない</a:t>
+            </a:r>
+            <a:endParaRPr lang="en-US" sz="1500" dirty="0"/>
+          </a:p>
+        </p:txBody>
+      </p:sp>
+      <p:sp>
+        <p:nvSpPr>
+          <p:cNvPr id="10" name="Shape 8"/>
+          <p:cNvSpPr/>
+          <p:nvPr/>
+        </p:nvSpPr>
+        <p:spPr>
+          <a:xfrm>
+            <a:off x="777240" y="3465576"/>
+            <a:ext cx="10607040" cy="713232"/>
+          </a:xfrm>
+          <a:prstGeom prst="rect">
+            <a:avLst/>
+          </a:prstGeom>
+          <a:solidFill>
+            <a:srgbClr val="FFFFFF"/>
+          </a:solidFill>
+          <a:ln w="12700">
+            <a:solidFill>
+              <a:srgbClr val="EDE7DB"/>
+            </a:solidFill>
+            <a:prstDash val="solid"/>
+          </a:ln>
+        </p:spPr>
+      </p:sp>
+      <p:sp>
+        <p:nvSpPr>
+          <p:cNvPr id="11" name="Text 9"/>
+          <p:cNvSpPr txBox="1"/>
+          <p:nvPr/>
+        </p:nvSpPr>
+        <p:spPr>
+          <a:xfrm>
+            <a:off x="1051560" y="3465576"/>
+            <a:ext cx="365760" cy="713232"/>
+          </a:xfrm>
+          <a:prstGeom prst="rect">
+            <a:avLst/>
+          </a:prstGeom>
+          <a:noFill/>
+          <a:ln/>
+        </p:spPr>
+        <p:txBody>
+          <a:bodyPr wrap="square" lIns="0" tIns="0" rIns="0" bIns="0" rtlCol="0" anchor="ctr"/>
+          <a:lstStyle/>
+          <a:p>
+            <a:pPr indent="0" marL="0">
+              <a:buNone/>
+            </a:pPr>
+            <a:r>
+              <a:rPr lang="en-US" sz="1400" dirty="0">
+                <a:solidFill>
+                  <a:srgbClr val="8A8177"/>
+                </a:solidFill>
+                <a:latin typeface="Yu Gothic" pitchFamily="34" charset="0"/>
+                <a:ea typeface="Yu Gothic" pitchFamily="34" charset="-122"/>
+                <a:cs typeface="Yu Gothic" pitchFamily="34" charset="-120"/>
+              </a:rPr>
+              <a:t>―</a:t>
+            </a:r>
+            <a:endParaRPr lang="en-US" sz="1400" dirty="0"/>
+          </a:p>
+        </p:txBody>
+      </p:sp>
+      <p:sp>
+        <p:nvSpPr>
+          <p:cNvPr id="12" name="Text 10"/>
+          <p:cNvSpPr txBox="1"/>
+          <p:nvPr/>
+        </p:nvSpPr>
+        <p:spPr>
+          <a:xfrm>
+            <a:off x="1508760" y="3465576"/>
+            <a:ext cx="9601200" cy="713232"/>
+          </a:xfrm>
+          <a:prstGeom prst="rect">
+            <a:avLst/>
+          </a:prstGeom>
+          <a:noFill/>
+          <a:ln/>
+        </p:spPr>
+        <p:txBody>
+          <a:bodyPr wrap="square" lIns="0" tIns="0" rIns="0" bIns="0" rtlCol="0" anchor="ctr"/>
+          <a:lstStyle/>
+          <a:p>
+            <a:pPr indent="0" marL="0">
+              <a:buNone/>
+            </a:pPr>
+            <a:r>
+              <a:rPr lang="en-US" sz="1500" dirty="0">
+                <a:solidFill>
+                  <a:srgbClr val="23201D"/>
+                </a:solidFill>
+                <a:latin typeface="Yu Gothic" pitchFamily="34" charset="0"/>
+                <a:ea typeface="Yu Gothic" pitchFamily="34" charset="-122"/>
+                <a:cs typeface="Yu Gothic" pitchFamily="34" charset="-120"/>
+              </a:rPr>
+              <a:t>だから今日は、社長ご自身の言葉で説明していただきます</a:t>
+            </a:r>
+            <a:endParaRPr lang="en-US" sz="1500" dirty="0"/>
+          </a:p>
+        </p:txBody>
+      </p:sp>
+      <p:sp>
+        <p:nvSpPr>
+          <p:cNvPr id="13" name="Shape 11"/>
+          <p:cNvSpPr/>
+          <p:nvPr/>
+        </p:nvSpPr>
+        <p:spPr>
+          <a:xfrm>
+            <a:off x="777240" y="4526280"/>
+            <a:ext cx="10607040" cy="914400"/>
+          </a:xfrm>
+          <a:prstGeom prst="rect">
+            <a:avLst/>
+          </a:prstGeom>
+          <a:solidFill>
+            <a:srgbClr val="B04A2F"/>
           </a:solidFill>
           <a:ln w="12700">
             <a:solidFill>
@@ -1812,14 +3840,14 @@
       </p:sp>
       <p:sp>
         <p:nvSpPr>
-          <p:cNvPr id="5" name="Text 3"/>
-          <p:cNvSpPr txBox="1"/>
-          <p:nvPr/>
-        </p:nvSpPr>
-        <p:spPr>
-          <a:xfrm>
-            <a:off x="777240" y="3657600"/>
-            <a:ext cx="9015984" cy="822960"/>
+          <p:cNvPr id="14" name="Text 12"/>
+          <p:cNvSpPr txBox="1"/>
+          <p:nvPr/>
+        </p:nvSpPr>
+        <p:spPr>
+          <a:xfrm>
+            <a:off x="1143000" y="4526280"/>
+            <a:ext cx="9875520" cy="914400"/>
           </a:xfrm>
           <a:prstGeom prst="rect">
             <a:avLst/>
@@ -1833,84 +3861,59 @@
           <a:p>
             <a:pPr indent="0" marL="0">
               <a:lnSpc>
-                <a:spcPct val="140000"/>
+                <a:spcPct val="130000"/>
               </a:lnSpc>
               <a:buNone/>
             </a:pPr>
             <a:r>
-              <a:rPr lang="en-US" sz="1500" dirty="0">
-                <a:solidFill>
-                  <a:srgbClr val="5A534A"/>
-                </a:solidFill>
-                <a:latin typeface="Yu Gothic" pitchFamily="34" charset="0"/>
-                <a:ea typeface="Yu Gothic" pitchFamily="34" charset="-122"/>
-                <a:cs typeface="Yu Gothic" pitchFamily="34" charset="-120"/>
-              </a:rPr>
-              <a:t>この5回で作ったものを、社内に開きます。ここから先は、会社の話になります。</a:t>
-            </a:r>
-            <a:endParaRPr lang="en-US" sz="1500" dirty="0"/>
-          </a:p>
-        </p:txBody>
-      </p:sp>
-      <p:sp>
-        <p:nvSpPr>
-          <p:cNvPr id="6" name="Shape 4"/>
-          <p:cNvSpPr/>
-          <p:nvPr/>
-        </p:nvSpPr>
-        <p:spPr>
-          <a:xfrm>
-            <a:off x="777240" y="4846320"/>
-            <a:ext cx="10607040" cy="777240"/>
-          </a:xfrm>
-          <a:prstGeom prst="rect">
-            <a:avLst/>
-          </a:prstGeom>
-          <a:solidFill>
-            <a:srgbClr val="EDE7DB"/>
-          </a:solidFill>
-          <a:ln w="12700">
-            <a:solidFill>
-              <a:srgbClr val="333333"/>
-            </a:solidFill>
-            <a:prstDash val="solid"/>
-          </a:ln>
-        </p:spPr>
-      </p:sp>
-      <p:sp>
-        <p:nvSpPr>
-          <p:cNvPr id="7" name="Text 5"/>
-          <p:cNvSpPr txBox="1"/>
-          <p:nvPr/>
-        </p:nvSpPr>
-        <p:spPr>
-          <a:xfrm>
-            <a:off x="960120" y="4956048"/>
-            <a:ext cx="1956816" cy="237744"/>
-          </a:xfrm>
-          <a:prstGeom prst="rect">
-            <a:avLst/>
-          </a:prstGeom>
-          <a:noFill/>
-          <a:ln/>
-        </p:spPr>
-        <p:txBody>
-          <a:bodyPr wrap="square" lIns="0" tIns="0" rIns="0" bIns="0" rtlCol="0" anchor="ctr"/>
-          <a:lstStyle/>
-          <a:p>
-            <a:pPr indent="0" marL="0">
-              <a:buNone/>
-            </a:pPr>
-            <a:r>
-              <a:rPr lang="en-US" sz="900" b="1" dirty="0">
-                <a:solidFill>
-                  <a:srgbClr val="B04A2F"/>
-                </a:solidFill>
-                <a:latin typeface="Yu Gothic" pitchFamily="34" charset="0"/>
-                <a:ea typeface="Yu Gothic" pitchFamily="34" charset="-122"/>
-                <a:cs typeface="Yu Gothic" pitchFamily="34" charset="-120"/>
-              </a:rPr>
-              <a:t>0-15分</a:t>
+              <a:rPr lang="en-US" sz="1800" b="1" dirty="0">
+                <a:solidFill>
+                  <a:srgbClr val="FFFFFF"/>
+                </a:solidFill>
+                <a:latin typeface="Yu Gothic" pitchFamily="34" charset="0"/>
+                <a:ea typeface="Yu Gothic" pitchFamily="34" charset="-122"/>
+                <a:cs typeface="Yu Gothic" pitchFamily="34" charset="-120"/>
+              </a:rPr>
+              <a:t>今日、社内に開きます。閉じたままだと、この先は止まります。</a:t>
+            </a:r>
+            <a:endParaRPr lang="en-US" sz="1800" dirty="0"/>
+          </a:p>
+        </p:txBody>
+      </p:sp>
+      <p:sp>
+        <p:nvSpPr>
+          <p:cNvPr id="15" name="Text 13"/>
+          <p:cNvSpPr txBox="1"/>
+          <p:nvPr/>
+        </p:nvSpPr>
+        <p:spPr>
+          <a:xfrm>
+            <a:off x="777240" y="6382512"/>
+            <a:ext cx="7424928" cy="256032"/>
+          </a:xfrm>
+          <a:prstGeom prst="rect">
+            <a:avLst/>
+          </a:prstGeom>
+          <a:noFill/>
+          <a:ln/>
+        </p:spPr>
+        <p:txBody>
+          <a:bodyPr wrap="square" lIns="0" tIns="0" rIns="0" bIns="0" rtlCol="0" anchor="ctr"/>
+          <a:lstStyle/>
+          <a:p>
+            <a:pPr indent="0" marL="0">
+              <a:buNone/>
+            </a:pPr>
+            <a:r>
+              <a:rPr lang="en-US" sz="900" dirty="0">
+                <a:solidFill>
+                  <a:srgbClr val="8A8177"/>
+                </a:solidFill>
+                <a:latin typeface="Yu Gothic" pitchFamily="34" charset="0"/>
+                <a:ea typeface="Yu Gothic" pitchFamily="34" charset="-122"/>
+                <a:cs typeface="Yu Gothic" pitchFamily="34" charset="-120"/>
+              </a:rPr>
+              <a:t>第6回　社内へのお披露目と12か月計画</a:t>
             </a:r>
             <a:endParaRPr lang="en-US" sz="900" dirty="0"/>
           </a:p>
@@ -1918,377 +3921,26 @@
       </p:sp>
       <p:sp>
         <p:nvSpPr>
-          <p:cNvPr id="8" name="Text 6"/>
-          <p:cNvSpPr txBox="1"/>
-          <p:nvPr/>
-        </p:nvSpPr>
-        <p:spPr>
-          <a:xfrm>
-            <a:off x="960120" y="5193792"/>
-            <a:ext cx="1956816" cy="365760"/>
-          </a:xfrm>
-          <a:prstGeom prst="rect">
-            <a:avLst/>
-          </a:prstGeom>
-          <a:noFill/>
-          <a:ln/>
-        </p:spPr>
-        <p:txBody>
-          <a:bodyPr wrap="square" lIns="0" tIns="0" rIns="0" bIns="0" rtlCol="0" anchor="ctr"/>
-          <a:lstStyle/>
-          <a:p>
-            <a:pPr indent="0" marL="0">
-              <a:buNone/>
-            </a:pPr>
-            <a:r>
-              <a:rPr lang="en-US" sz="1100" dirty="0">
-                <a:solidFill>
-                  <a:srgbClr val="23201D"/>
-                </a:solidFill>
-                <a:latin typeface="Yu Gothic" pitchFamily="34" charset="0"/>
-                <a:ea typeface="Yu Gothic" pitchFamily="34" charset="-122"/>
-                <a:cs typeface="Yu Gothic" pitchFamily="34" charset="-120"/>
-              </a:rPr>
-              <a:t>前回の宿題を実物で</a:t>
-            </a:r>
-            <a:endParaRPr lang="en-US" sz="1100" dirty="0"/>
-          </a:p>
-        </p:txBody>
-      </p:sp>
-      <p:sp>
-        <p:nvSpPr>
-          <p:cNvPr id="9" name="Text 7"/>
-          <p:cNvSpPr txBox="1"/>
-          <p:nvPr/>
-        </p:nvSpPr>
-        <p:spPr>
-          <a:xfrm>
-            <a:off x="3008376" y="4956048"/>
-            <a:ext cx="1956816" cy="237744"/>
-          </a:xfrm>
-          <a:prstGeom prst="rect">
-            <a:avLst/>
-          </a:prstGeom>
-          <a:noFill/>
-          <a:ln/>
-        </p:spPr>
-        <p:txBody>
-          <a:bodyPr wrap="square" lIns="0" tIns="0" rIns="0" bIns="0" rtlCol="0" anchor="ctr"/>
-          <a:lstStyle/>
-          <a:p>
-            <a:pPr indent="0" marL="0">
-              <a:buNone/>
-            </a:pPr>
-            <a:r>
-              <a:rPr lang="en-US" sz="900" b="1" dirty="0">
-                <a:solidFill>
-                  <a:srgbClr val="B04A2F"/>
-                </a:solidFill>
-                <a:latin typeface="Yu Gothic" pitchFamily="34" charset="0"/>
-                <a:ea typeface="Yu Gothic" pitchFamily="34" charset="-122"/>
-                <a:cs typeface="Yu Gothic" pitchFamily="34" charset="-120"/>
-              </a:rPr>
-              <a:t>15-35分</a:t>
-            </a:r>
-            <a:endParaRPr lang="en-US" sz="900" dirty="0"/>
-          </a:p>
-        </p:txBody>
-      </p:sp>
-      <p:sp>
-        <p:nvSpPr>
-          <p:cNvPr id="10" name="Text 8"/>
-          <p:cNvSpPr txBox="1"/>
-          <p:nvPr/>
-        </p:nvSpPr>
-        <p:spPr>
-          <a:xfrm>
-            <a:off x="3008376" y="5193792"/>
-            <a:ext cx="1956816" cy="365760"/>
-          </a:xfrm>
-          <a:prstGeom prst="rect">
-            <a:avLst/>
-          </a:prstGeom>
-          <a:noFill/>
-          <a:ln/>
-        </p:spPr>
-        <p:txBody>
-          <a:bodyPr wrap="square" lIns="0" tIns="0" rIns="0" bIns="0" rtlCol="0" anchor="ctr"/>
-          <a:lstStyle/>
-          <a:p>
-            <a:pPr indent="0" marL="0">
-              <a:buNone/>
-            </a:pPr>
-            <a:r>
-              <a:rPr lang="en-US" sz="1100" dirty="0">
-                <a:solidFill>
-                  <a:srgbClr val="23201D"/>
-                </a:solidFill>
-                <a:latin typeface="Yu Gothic" pitchFamily="34" charset="0"/>
-                <a:ea typeface="Yu Gothic" pitchFamily="34" charset="-122"/>
-                <a:cs typeface="Yu Gothic" pitchFamily="34" charset="-120"/>
-              </a:rPr>
-              <a:t>テーマとデモ</a:t>
-            </a:r>
-            <a:endParaRPr lang="en-US" sz="1100" dirty="0"/>
-          </a:p>
-        </p:txBody>
-      </p:sp>
-      <p:sp>
-        <p:nvSpPr>
-          <p:cNvPr id="11" name="Text 9"/>
-          <p:cNvSpPr txBox="1"/>
-          <p:nvPr/>
-        </p:nvSpPr>
-        <p:spPr>
-          <a:xfrm>
-            <a:off x="5056632" y="4956048"/>
-            <a:ext cx="1956816" cy="237744"/>
-          </a:xfrm>
-          <a:prstGeom prst="rect">
-            <a:avLst/>
-          </a:prstGeom>
-          <a:noFill/>
-          <a:ln/>
-        </p:spPr>
-        <p:txBody>
-          <a:bodyPr wrap="square" lIns="0" tIns="0" rIns="0" bIns="0" rtlCol="0" anchor="ctr"/>
-          <a:lstStyle/>
-          <a:p>
-            <a:pPr indent="0" marL="0">
-              <a:buNone/>
-            </a:pPr>
-            <a:r>
-              <a:rPr lang="en-US" sz="900" b="1" dirty="0">
-                <a:solidFill>
-                  <a:srgbClr val="B04A2F"/>
-                </a:solidFill>
-                <a:latin typeface="Yu Gothic" pitchFamily="34" charset="0"/>
-                <a:ea typeface="Yu Gothic" pitchFamily="34" charset="-122"/>
-                <a:cs typeface="Yu Gothic" pitchFamily="34" charset="-120"/>
-              </a:rPr>
-              <a:t>35-90分</a:t>
-            </a:r>
-            <a:endParaRPr lang="en-US" sz="900" dirty="0"/>
-          </a:p>
-        </p:txBody>
-      </p:sp>
-      <p:sp>
-        <p:nvSpPr>
-          <p:cNvPr id="12" name="Text 10"/>
-          <p:cNvSpPr txBox="1"/>
-          <p:nvPr/>
-        </p:nvSpPr>
-        <p:spPr>
-          <a:xfrm>
-            <a:off x="5056632" y="5193792"/>
-            <a:ext cx="1956816" cy="365760"/>
-          </a:xfrm>
-          <a:prstGeom prst="rect">
-            <a:avLst/>
-          </a:prstGeom>
-          <a:noFill/>
-          <a:ln/>
-        </p:spPr>
-        <p:txBody>
-          <a:bodyPr wrap="square" lIns="0" tIns="0" rIns="0" bIns="0" rtlCol="0" anchor="ctr"/>
-          <a:lstStyle/>
-          <a:p>
-            <a:pPr indent="0" marL="0">
-              <a:buNone/>
-            </a:pPr>
-            <a:r>
-              <a:rPr lang="en-US" sz="1100" dirty="0">
-                <a:solidFill>
-                  <a:srgbClr val="23201D"/>
-                </a:solidFill>
-                <a:latin typeface="Yu Gothic" pitchFamily="34" charset="0"/>
-                <a:ea typeface="Yu Gothic" pitchFamily="34" charset="-122"/>
-                <a:cs typeface="Yu Gothic" pitchFamily="34" charset="-120"/>
-              </a:rPr>
-              <a:t>一緒に手を動かす</a:t>
-            </a:r>
-            <a:endParaRPr lang="en-US" sz="1100" dirty="0"/>
-          </a:p>
-        </p:txBody>
-      </p:sp>
-      <p:sp>
-        <p:nvSpPr>
-          <p:cNvPr id="13" name="Text 11"/>
-          <p:cNvSpPr txBox="1"/>
-          <p:nvPr/>
-        </p:nvSpPr>
-        <p:spPr>
-          <a:xfrm>
-            <a:off x="7104888" y="4956048"/>
-            <a:ext cx="1956816" cy="237744"/>
-          </a:xfrm>
-          <a:prstGeom prst="rect">
-            <a:avLst/>
-          </a:prstGeom>
-          <a:noFill/>
-          <a:ln/>
-        </p:spPr>
-        <p:txBody>
-          <a:bodyPr wrap="square" lIns="0" tIns="0" rIns="0" bIns="0" rtlCol="0" anchor="ctr"/>
-          <a:lstStyle/>
-          <a:p>
-            <a:pPr indent="0" marL="0">
-              <a:buNone/>
-            </a:pPr>
-            <a:r>
-              <a:rPr lang="en-US" sz="900" b="1" dirty="0">
-                <a:solidFill>
-                  <a:srgbClr val="B04A2F"/>
-                </a:solidFill>
-                <a:latin typeface="Yu Gothic" pitchFamily="34" charset="0"/>
-                <a:ea typeface="Yu Gothic" pitchFamily="34" charset="-122"/>
-                <a:cs typeface="Yu Gothic" pitchFamily="34" charset="-120"/>
-              </a:rPr>
-              <a:t>90-105分</a:t>
-            </a:r>
-            <a:endParaRPr lang="en-US" sz="900" dirty="0"/>
-          </a:p>
-        </p:txBody>
-      </p:sp>
-      <p:sp>
-        <p:nvSpPr>
-          <p:cNvPr id="14" name="Text 12"/>
-          <p:cNvSpPr txBox="1"/>
-          <p:nvPr/>
-        </p:nvSpPr>
-        <p:spPr>
-          <a:xfrm>
-            <a:off x="7104888" y="5193792"/>
-            <a:ext cx="1956816" cy="365760"/>
-          </a:xfrm>
-          <a:prstGeom prst="rect">
-            <a:avLst/>
-          </a:prstGeom>
-          <a:noFill/>
-          <a:ln/>
-        </p:spPr>
-        <p:txBody>
-          <a:bodyPr wrap="square" lIns="0" tIns="0" rIns="0" bIns="0" rtlCol="0" anchor="ctr"/>
-          <a:lstStyle/>
-          <a:p>
-            <a:pPr indent="0" marL="0">
-              <a:buNone/>
-            </a:pPr>
-            <a:r>
-              <a:rPr lang="en-US" sz="1100" dirty="0">
-                <a:solidFill>
-                  <a:srgbClr val="23201D"/>
-                </a:solidFill>
-                <a:latin typeface="Yu Gothic" pitchFamily="34" charset="0"/>
-                <a:ea typeface="Yu Gothic" pitchFamily="34" charset="-122"/>
-                <a:cs typeface="Yu Gothic" pitchFamily="34" charset="-120"/>
-              </a:rPr>
-              <a:t>業務への組み込み</a:t>
-            </a:r>
-            <a:endParaRPr lang="en-US" sz="1100" dirty="0"/>
-          </a:p>
-        </p:txBody>
-      </p:sp>
-      <p:sp>
-        <p:nvSpPr>
-          <p:cNvPr id="15" name="Text 13"/>
-          <p:cNvSpPr txBox="1"/>
-          <p:nvPr/>
-        </p:nvSpPr>
-        <p:spPr>
-          <a:xfrm>
-            <a:off x="9153144" y="4956048"/>
-            <a:ext cx="1956816" cy="237744"/>
-          </a:xfrm>
-          <a:prstGeom prst="rect">
-            <a:avLst/>
-          </a:prstGeom>
-          <a:noFill/>
-          <a:ln/>
-        </p:spPr>
-        <p:txBody>
-          <a:bodyPr wrap="square" lIns="0" tIns="0" rIns="0" bIns="0" rtlCol="0" anchor="ctr"/>
-          <a:lstStyle/>
-          <a:p>
-            <a:pPr indent="0" marL="0">
-              <a:buNone/>
-            </a:pPr>
-            <a:r>
-              <a:rPr lang="en-US" sz="900" b="1" dirty="0">
-                <a:solidFill>
-                  <a:srgbClr val="B04A2F"/>
-                </a:solidFill>
-                <a:latin typeface="Yu Gothic" pitchFamily="34" charset="0"/>
-                <a:ea typeface="Yu Gothic" pitchFamily="34" charset="-122"/>
-                <a:cs typeface="Yu Gothic" pitchFamily="34" charset="-120"/>
-              </a:rPr>
-              <a:t>105-120分</a:t>
-            </a:r>
-            <a:endParaRPr lang="en-US" sz="900" dirty="0"/>
-          </a:p>
-        </p:txBody>
-      </p:sp>
-      <p:sp>
-        <p:nvSpPr>
           <p:cNvPr id="16" name="Text 14"/>
           <p:cNvSpPr txBox="1"/>
           <p:nvPr/>
         </p:nvSpPr>
         <p:spPr>
           <a:xfrm>
-            <a:off x="9153144" y="5193792"/>
-            <a:ext cx="1956816" cy="365760"/>
-          </a:xfrm>
-          <a:prstGeom prst="rect">
-            <a:avLst/>
-          </a:prstGeom>
-          <a:noFill/>
-          <a:ln/>
-        </p:spPr>
-        <p:txBody>
-          <a:bodyPr wrap="square" lIns="0" tIns="0" rIns="0" bIns="0" rtlCol="0" anchor="ctr"/>
-          <a:lstStyle/>
-          <a:p>
-            <a:pPr indent="0" marL="0">
-              <a:buNone/>
-            </a:pPr>
-            <a:r>
-              <a:rPr lang="en-US" sz="1100" dirty="0">
-                <a:solidFill>
-                  <a:srgbClr val="23201D"/>
-                </a:solidFill>
-                <a:latin typeface="Yu Gothic" pitchFamily="34" charset="0"/>
-                <a:ea typeface="Yu Gothic" pitchFamily="34" charset="-122"/>
-                <a:cs typeface="Yu Gothic" pitchFamily="34" charset="-120"/>
-              </a:rPr>
-              <a:t>宿題・記録</a:t>
-            </a:r>
-            <a:endParaRPr lang="en-US" sz="1100" dirty="0"/>
-          </a:p>
-        </p:txBody>
-      </p:sp>
-      <p:sp>
-        <p:nvSpPr>
-          <p:cNvPr id="17" name="Text 15"/>
-          <p:cNvSpPr txBox="1"/>
-          <p:nvPr/>
-        </p:nvSpPr>
-        <p:spPr>
-          <a:xfrm>
-            <a:off x="777240" y="6355080"/>
-            <a:ext cx="7424928" cy="274320"/>
-          </a:xfrm>
-          <a:prstGeom prst="rect">
-            <a:avLst/>
-          </a:prstGeom>
-          <a:noFill/>
-          <a:ln/>
-        </p:spPr>
-        <p:txBody>
-          <a:bodyPr wrap="square" lIns="0" tIns="0" rIns="0" bIns="0" rtlCol="0" anchor="ctr"/>
-          <a:lstStyle/>
-          <a:p>
-            <a:pPr indent="0" marL="0">
+            <a:off x="8202168" y="6382512"/>
+            <a:ext cx="3182112" cy="256032"/>
+          </a:xfrm>
+          <a:prstGeom prst="rect">
+            <a:avLst/>
+          </a:prstGeom>
+          <a:noFill/>
+          <a:ln/>
+        </p:spPr>
+        <p:txBody>
+          <a:bodyPr wrap="square" lIns="0" tIns="0" rIns="0" bIns="0" rtlCol="0" anchor="ctr"/>
+          <a:lstStyle/>
+          <a:p>
+            <a:pPr algn="r" indent="0" marL="0">
               <a:buNone/>
             </a:pPr>
             <a:r>
@@ -2300,46 +3952,7 @@
                 <a:ea typeface="Yu Gothic" pitchFamily="34" charset="-122"/>
                 <a:cs typeface="Yu Gothic" pitchFamily="34" charset="-120"/>
               </a:rPr>
-              <a:t>第6回　社内へのお披露目と12か月計画</a:t>
-            </a:r>
-            <a:endParaRPr lang="en-US" sz="900" dirty="0"/>
-          </a:p>
-        </p:txBody>
-      </p:sp>
-      <p:sp>
-        <p:nvSpPr>
-          <p:cNvPr id="18" name="Text 16"/>
-          <p:cNvSpPr txBox="1"/>
-          <p:nvPr/>
-        </p:nvSpPr>
-        <p:spPr>
-          <a:xfrm>
-            <a:off x="8202168" y="6355080"/>
-            <a:ext cx="3182112" cy="274320"/>
-          </a:xfrm>
-          <a:prstGeom prst="rect">
-            <a:avLst/>
-          </a:prstGeom>
-          <a:noFill/>
-          <a:ln/>
-        </p:spPr>
-        <p:txBody>
-          <a:bodyPr wrap="square" lIns="0" tIns="0" rIns="0" bIns="0" rtlCol="0" anchor="ctr"/>
-          <a:lstStyle/>
-          <a:p>
-            <a:pPr algn="r" indent="0" marL="0">
-              <a:buNone/>
-            </a:pPr>
-            <a:r>
-              <a:rPr lang="en-US" sz="900" dirty="0">
-                <a:solidFill>
-                  <a:srgbClr val="8A8177"/>
-                </a:solidFill>
-                <a:latin typeface="Yu Gothic" pitchFamily="34" charset="0"/>
-                <a:ea typeface="Yu Gothic" pitchFamily="34" charset="-122"/>
-                <a:cs typeface="Yu Gothic" pitchFamily="34" charset="-120"/>
-              </a:rPr>
-              <a:t>今日のゴール</a:t>
+              <a:t>出発点</a:t>
             </a:r>
             <a:endParaRPr lang="en-US" sz="900" dirty="0"/>
           </a:p>
@@ -2385,7 +3998,7 @@
         </p:nvSpPr>
         <p:spPr>
           <a:xfrm>
-            <a:off x="777240" y="640080"/>
+            <a:off x="777240" y="566928"/>
             <a:ext cx="10607040" cy="274320"/>
           </a:xfrm>
           <a:prstGeom prst="rect">
@@ -2410,7 +4023,7 @@
                 <a:ea typeface="Yu Gothic" pitchFamily="34" charset="-122"/>
                 <a:cs typeface="Yu Gothic" pitchFamily="34" charset="-120"/>
               </a:rPr>
-              <a:t>考え方</a:t>
+              <a:t>今日のゴール</a:t>
             </a:r>
             <a:endParaRPr lang="en-US" sz="1100" dirty="0"/>
           </a:p>
@@ -2424,24 +4037,27 @@
         </p:nvSpPr>
         <p:spPr>
           <a:xfrm>
-            <a:off x="777240" y="960120"/>
-            <a:ext cx="10607040" cy="640080"/>
-          </a:xfrm>
-          <a:prstGeom prst="rect">
-            <a:avLst/>
-          </a:prstGeom>
-          <a:noFill/>
-          <a:ln/>
-        </p:spPr>
-        <p:txBody>
-          <a:bodyPr wrap="square" lIns="0" tIns="0" rIns="0" bIns="0" rtlCol="0" anchor="ctr"/>
-          <a:lstStyle/>
-          <a:p>
-            <a:pPr indent="0" marL="0">
-              <a:buNone/>
-            </a:pPr>
-            <a:r>
-              <a:rPr lang="en-US" sz="2700" b="1" dirty="0">
+            <a:off x="777240" y="1143000"/>
+            <a:ext cx="9864547" cy="1645920"/>
+          </a:xfrm>
+          <a:prstGeom prst="rect">
+            <a:avLst/>
+          </a:prstGeom>
+          <a:noFill/>
+          <a:ln/>
+        </p:spPr>
+        <p:txBody>
+          <a:bodyPr wrap="square" lIns="0" tIns="0" rIns="0" bIns="0" rtlCol="0" anchor="ctr"/>
+          <a:lstStyle/>
+          <a:p>
+            <a:pPr indent="0" marL="0">
+              <a:lnSpc>
+                <a:spcPct val="145000"/>
+              </a:lnSpc>
+              <a:buNone/>
+            </a:pPr>
+            <a:r>
+              <a:rPr lang="en-US" sz="2600" b="1" dirty="0">
                 <a:solidFill>
                   <a:srgbClr val="23201D"/>
                 </a:solidFill>
@@ -2449,9 +4065,9 @@
                 <a:ea typeface="Yu Gothic" pitchFamily="34" charset="-122"/>
                 <a:cs typeface="Yu Gothic" pitchFamily="34" charset="-120"/>
               </a:rPr>
-              <a:t>この5回で作ったもの</a:t>
-            </a:r>
-            <a:endParaRPr lang="en-US" sz="2700" dirty="0"/>
+              <a:t>社長ご自身の言葉で、社員のみなさんに「うちはAIをこう使う」を説明します。</a:t>
+            </a:r>
+            <a:endParaRPr lang="en-US" sz="2600" dirty="0"/>
           </a:p>
         </p:txBody>
       </p:sp>
@@ -2463,18 +4079,18 @@
         </p:nvSpPr>
         <p:spPr>
           <a:xfrm>
-            <a:off x="777240" y="1783080"/>
-            <a:ext cx="10607040" cy="838962"/>
+            <a:off x="777240" y="3063240"/>
+            <a:ext cx="10607040" cy="18288"/>
           </a:xfrm>
           <a:prstGeom prst="rect">
             <a:avLst/>
           </a:prstGeom>
           <a:solidFill>
-            <a:srgbClr val="FFFFFF"/>
+            <a:srgbClr val="EDE7DB"/>
           </a:solidFill>
           <a:ln w="12700">
             <a:solidFill>
-              <a:srgbClr val="EDE7DB"/>
+              <a:srgbClr val="333333"/>
             </a:solidFill>
             <a:prstDash val="solid"/>
           </a:ln>
@@ -2482,24 +4098,66 @@
       </p:sp>
       <p:sp>
         <p:nvSpPr>
-          <p:cNvPr id="5" name="Shape 3"/>
+          <p:cNvPr id="5" name="Text 3"/>
+          <p:cNvSpPr txBox="1"/>
+          <p:nvPr/>
+        </p:nvSpPr>
+        <p:spPr>
+          <a:xfrm>
+            <a:off x="777240" y="3291840"/>
+            <a:ext cx="9334195" cy="1005840"/>
+          </a:xfrm>
+          <a:prstGeom prst="rect">
+            <a:avLst/>
+          </a:prstGeom>
+          <a:noFill/>
+          <a:ln/>
+        </p:spPr>
+        <p:txBody>
+          <a:bodyPr wrap="square" lIns="0" tIns="0" rIns="0" bIns="0" rtlCol="0" anchor="ctr"/>
+          <a:lstStyle/>
+          <a:p>
+            <a:pPr indent="0" marL="0">
+              <a:lnSpc>
+                <a:spcPct val="140000"/>
+              </a:lnSpc>
+              <a:buNone/>
+            </a:pPr>
+            <a:r>
+              <a:rPr lang="en-US" sz="1450" dirty="0">
+                <a:solidFill>
+                  <a:srgbClr val="5A534A"/>
+                </a:solidFill>
+                <a:latin typeface="Yu Gothic" pitchFamily="34" charset="0"/>
+                <a:ea typeface="Yu Gothic" pitchFamily="34" charset="-122"/>
+                <a:cs typeface="Yu Gothic" pitchFamily="34" charset="-120"/>
+              </a:rPr>
+              <a:t>今日の主役は講師ではありません。説明するのは社長です。講師は、みなさんからのご質問にお答えする役に回ります。</a:t>
+            </a:r>
+            <a:endParaRPr lang="en-US" sz="1450" dirty="0"/>
+          </a:p>
+        </p:txBody>
+      </p:sp>
+      <p:sp>
+        <p:nvSpPr>
+          <p:cNvPr id="6" name="Shape 4"/>
           <p:cNvSpPr/>
           <p:nvPr/>
         </p:nvSpPr>
         <p:spPr>
           <a:xfrm>
-            <a:off x="1033272" y="2010537"/>
-            <a:ext cx="384048" cy="384048"/>
-          </a:xfrm>
-          <a:prstGeom prst="ellipse">
+            <a:off x="777240" y="4754880"/>
+            <a:ext cx="10607040" cy="822960"/>
+          </a:xfrm>
+          <a:prstGeom prst="rect">
             <a:avLst/>
           </a:prstGeom>
           <a:solidFill>
-            <a:srgbClr val="B04A2F"/>
+            <a:srgbClr val="EDE7DB"/>
           </a:solidFill>
           <a:ln w="12700">
             <a:solidFill>
-              <a:srgbClr val="B04A2F"/>
+              <a:srgbClr val="333333"/>
             </a:solidFill>
             <a:prstDash val="solid"/>
           </a:ln>
@@ -2507,69 +4165,69 @@
       </p:sp>
       <p:sp>
         <p:nvSpPr>
-          <p:cNvPr id="6" name="Text 4"/>
-          <p:cNvSpPr txBox="1"/>
-          <p:nvPr/>
-        </p:nvSpPr>
-        <p:spPr>
-          <a:xfrm>
-            <a:off x="1033272" y="2010537"/>
-            <a:ext cx="384048" cy="384048"/>
-          </a:xfrm>
-          <a:prstGeom prst="rect">
-            <a:avLst/>
-          </a:prstGeom>
-          <a:noFill/>
-          <a:ln/>
-        </p:spPr>
-        <p:txBody>
-          <a:bodyPr wrap="square" lIns="0" tIns="0" rIns="0" bIns="0" rtlCol="0" anchor="ctr"/>
-          <a:lstStyle/>
-          <a:p>
-            <a:pPr algn="ctr" indent="0" marL="0">
-              <a:buNone/>
-            </a:pPr>
-            <a:r>
-              <a:rPr lang="en-US" sz="1400" b="1" dirty="0">
-                <a:solidFill>
-                  <a:srgbClr val="FFFFFF"/>
-                </a:solidFill>
-                <a:latin typeface="Yu Gothic" pitchFamily="34" charset="0"/>
-                <a:ea typeface="Yu Gothic" pitchFamily="34" charset="-122"/>
-                <a:cs typeface="Yu Gothic" pitchFamily="34" charset="-120"/>
-              </a:rPr>
-              <a:t>1</a:t>
-            </a:r>
-            <a:endParaRPr lang="en-US" sz="1400" dirty="0"/>
-          </a:p>
-        </p:txBody>
-      </p:sp>
-      <p:sp>
-        <p:nvSpPr>
           <p:cNvPr id="7" name="Text 5"/>
           <p:cNvSpPr txBox="1"/>
           <p:nvPr/>
         </p:nvSpPr>
         <p:spPr>
           <a:xfrm>
-            <a:off x="1645920" y="1874520"/>
-            <a:ext cx="3394253" cy="656082"/>
-          </a:xfrm>
-          <a:prstGeom prst="rect">
-            <a:avLst/>
-          </a:prstGeom>
-          <a:noFill/>
-          <a:ln/>
-        </p:spPr>
-        <p:txBody>
-          <a:bodyPr wrap="square" lIns="0" tIns="0" rIns="0" bIns="0" rtlCol="0" anchor="ctr"/>
-          <a:lstStyle/>
-          <a:p>
-            <a:pPr indent="0" marL="0">
-              <a:buNone/>
-            </a:pPr>
-            <a:r>
-              <a:rPr lang="en-US" sz="1500" b="1" dirty="0">
+            <a:off x="960120" y="4873752"/>
+            <a:ext cx="1956816" cy="237744"/>
+          </a:xfrm>
+          <a:prstGeom prst="rect">
+            <a:avLst/>
+          </a:prstGeom>
+          <a:noFill/>
+          <a:ln/>
+        </p:spPr>
+        <p:txBody>
+          <a:bodyPr wrap="square" lIns="0" tIns="0" rIns="0" bIns="0" rtlCol="0" anchor="ctr"/>
+          <a:lstStyle/>
+          <a:p>
+            <a:pPr indent="0" marL="0">
+              <a:buNone/>
+            </a:pPr>
+            <a:r>
+              <a:rPr lang="en-US" sz="900" b="1" dirty="0">
+                <a:solidFill>
+                  <a:srgbClr val="B04A2F"/>
+                </a:solidFill>
+                <a:latin typeface="Yu Gothic" pitchFamily="34" charset="0"/>
+                <a:ea typeface="Yu Gothic" pitchFamily="34" charset="-122"/>
+                <a:cs typeface="Yu Gothic" pitchFamily="34" charset="-120"/>
+              </a:rPr>
+              <a:t>0-15分</a:t>
+            </a:r>
+            <a:endParaRPr lang="en-US" sz="900" dirty="0"/>
+          </a:p>
+        </p:txBody>
+      </p:sp>
+      <p:sp>
+        <p:nvSpPr>
+          <p:cNvPr id="8" name="Text 6"/>
+          <p:cNvSpPr txBox="1"/>
+          <p:nvPr/>
+        </p:nvSpPr>
+        <p:spPr>
+          <a:xfrm>
+            <a:off x="960120" y="5111496"/>
+            <a:ext cx="1956816" cy="384048"/>
+          </a:xfrm>
+          <a:prstGeom prst="rect">
+            <a:avLst/>
+          </a:prstGeom>
+          <a:noFill/>
+          <a:ln/>
+        </p:spPr>
+        <p:txBody>
+          <a:bodyPr wrap="square" lIns="0" tIns="0" rIns="0" bIns="0" rtlCol="0" anchor="ctr"/>
+          <a:lstStyle/>
+          <a:p>
+            <a:pPr indent="0" marL="0">
+              <a:buNone/>
+            </a:pPr>
+            <a:r>
+              <a:rPr lang="en-US" sz="1100" dirty="0">
                 <a:solidFill>
                   <a:srgbClr val="23201D"/>
                 </a:solidFill>
@@ -2577,103 +4235,89 @@
                 <a:ea typeface="Yu Gothic" pitchFamily="34" charset="-122"/>
                 <a:cs typeface="Yu Gothic" pitchFamily="34" charset="-120"/>
               </a:rPr>
-              <a:t>自社の指示文 15本</a:t>
-            </a:r>
-            <a:endParaRPr lang="en-US" sz="1500" dirty="0"/>
-          </a:p>
-        </p:txBody>
-      </p:sp>
-      <p:sp>
-        <p:nvSpPr>
-          <p:cNvPr id="8" name="Text 6"/>
-          <p:cNvSpPr txBox="1"/>
-          <p:nvPr/>
-        </p:nvSpPr>
-        <p:spPr>
-          <a:xfrm>
-            <a:off x="5146243" y="1874520"/>
-            <a:ext cx="5963717" cy="656082"/>
-          </a:xfrm>
-          <a:prstGeom prst="rect">
-            <a:avLst/>
-          </a:prstGeom>
-          <a:noFill/>
-          <a:ln/>
-        </p:spPr>
-        <p:txBody>
-          <a:bodyPr wrap="square" lIns="0" tIns="0" rIns="0" bIns="0" rtlCol="0" anchor="ctr"/>
-          <a:lstStyle/>
-          <a:p>
-            <a:pPr indent="0" marL="0">
-              <a:lnSpc>
-                <a:spcPct val="130000"/>
-              </a:lnSpc>
-              <a:buNone/>
-            </a:pPr>
-            <a:r>
-              <a:rPr lang="en-US" sz="1250" dirty="0">
-                <a:solidFill>
-                  <a:srgbClr val="5A534A"/>
-                </a:solidFill>
-                <a:latin typeface="Yu Gothic" pitchFamily="34" charset="0"/>
-                <a:ea typeface="Yu Gothic" pitchFamily="34" charset="-122"/>
-                <a:cs typeface="Yu Gothic" pitchFamily="34" charset="-120"/>
-              </a:rPr>
-              <a:t>毎回ゼロから打つのをやめ、蓄積する形にしました</a:t>
-            </a:r>
-            <a:endParaRPr lang="en-US" sz="1250" dirty="0"/>
-          </a:p>
-        </p:txBody>
-      </p:sp>
-      <p:sp>
-        <p:nvSpPr>
-          <p:cNvPr id="9" name="Shape 7"/>
-          <p:cNvSpPr/>
-          <p:nvPr/>
-        </p:nvSpPr>
-        <p:spPr>
-          <a:xfrm>
-            <a:off x="777240" y="2768346"/>
-            <a:ext cx="10607040" cy="838962"/>
-          </a:xfrm>
-          <a:prstGeom prst="rect">
-            <a:avLst/>
-          </a:prstGeom>
-          <a:solidFill>
-            <a:srgbClr val="FFFFFF"/>
-          </a:solidFill>
-          <a:ln w="12700">
-            <a:solidFill>
-              <a:srgbClr val="EDE7DB"/>
-            </a:solidFill>
-            <a:prstDash val="solid"/>
-          </a:ln>
-        </p:spPr>
-      </p:sp>
-      <p:sp>
-        <p:nvSpPr>
-          <p:cNvPr id="10" name="Shape 8"/>
-          <p:cNvSpPr/>
-          <p:nvPr/>
-        </p:nvSpPr>
-        <p:spPr>
-          <a:xfrm>
-            <a:off x="1033272" y="2995803"/>
-            <a:ext cx="384048" cy="384048"/>
-          </a:xfrm>
-          <a:prstGeom prst="ellipse">
-            <a:avLst/>
-          </a:prstGeom>
-          <a:solidFill>
-            <a:srgbClr val="B04A2F"/>
-          </a:solidFill>
-          <a:ln w="12700">
-            <a:solidFill>
-              <a:srgbClr val="B04A2F"/>
-            </a:solidFill>
-            <a:prstDash val="solid"/>
-          </a:ln>
-        </p:spPr>
+              <a:t>前回の宿題を実物で</a:t>
+            </a:r>
+            <a:endParaRPr lang="en-US" sz="1100" dirty="0"/>
+          </a:p>
+        </p:txBody>
+      </p:sp>
+      <p:sp>
+        <p:nvSpPr>
+          <p:cNvPr id="9" name="Text 7"/>
+          <p:cNvSpPr txBox="1"/>
+          <p:nvPr/>
+        </p:nvSpPr>
+        <p:spPr>
+          <a:xfrm>
+            <a:off x="3008376" y="4873752"/>
+            <a:ext cx="1956816" cy="237744"/>
+          </a:xfrm>
+          <a:prstGeom prst="rect">
+            <a:avLst/>
+          </a:prstGeom>
+          <a:noFill/>
+          <a:ln/>
+        </p:spPr>
+        <p:txBody>
+          <a:bodyPr wrap="square" lIns="0" tIns="0" rIns="0" bIns="0" rtlCol="0" anchor="ctr"/>
+          <a:lstStyle/>
+          <a:p>
+            <a:pPr indent="0" marL="0">
+              <a:buNone/>
+            </a:pPr>
+            <a:r>
+              <a:rPr lang="en-US" sz="900" b="1" dirty="0">
+                <a:solidFill>
+                  <a:srgbClr val="B04A2F"/>
+                </a:solidFill>
+                <a:latin typeface="Yu Gothic" pitchFamily="34" charset="0"/>
+                <a:ea typeface="Yu Gothic" pitchFamily="34" charset="-122"/>
+                <a:cs typeface="Yu Gothic" pitchFamily="34" charset="-120"/>
+              </a:rPr>
+              <a:t>15-35分</a:t>
+            </a:r>
+            <a:endParaRPr lang="en-US" sz="900" dirty="0"/>
+          </a:p>
+        </p:txBody>
+      </p:sp>
+      <p:sp>
+        <p:nvSpPr>
+          <p:cNvPr id="10" name="Text 8"/>
+          <p:cNvSpPr txBox="1"/>
+          <p:nvPr/>
+        </p:nvSpPr>
+        <p:spPr>
+          <a:xfrm>
+            <a:off x="3008376" y="5111496"/>
+            <a:ext cx="1956816" cy="384048"/>
+          </a:xfrm>
+          <a:prstGeom prst="rect">
+            <a:avLst/>
+          </a:prstGeom>
+          <a:noFill/>
+          <a:ln/>
+        </p:spPr>
+        <p:txBody>
+          <a:bodyPr wrap="square" lIns="0" tIns="0" rIns="0" bIns="0" rtlCol="0" anchor="ctr"/>
+          <a:lstStyle/>
+          <a:p>
+            <a:pPr indent="0" marL="0">
+              <a:buNone/>
+            </a:pPr>
+            <a:r>
+              <a:rPr lang="en-US" sz="1100" dirty="0">
+                <a:solidFill>
+                  <a:srgbClr val="23201D"/>
+                </a:solidFill>
+                <a:latin typeface="Yu Gothic" pitchFamily="34" charset="0"/>
+                <a:ea typeface="Yu Gothic" pitchFamily="34" charset="-122"/>
+                <a:cs typeface="Yu Gothic" pitchFamily="34" charset="-120"/>
+              </a:rPr>
+              <a:t>テーマとデモ</a:t>
+            </a:r>
+            <a:endParaRPr lang="en-US" sz="1100" dirty="0"/>
+          </a:p>
+        </p:txBody>
       </p:sp>
       <p:sp>
         <p:nvSpPr>
@@ -2683,34 +4327,34 @@
         </p:nvSpPr>
         <p:spPr>
           <a:xfrm>
-            <a:off x="1033272" y="2995803"/>
-            <a:ext cx="384048" cy="384048"/>
-          </a:xfrm>
-          <a:prstGeom prst="rect">
-            <a:avLst/>
-          </a:prstGeom>
-          <a:noFill/>
-          <a:ln/>
-        </p:spPr>
-        <p:txBody>
-          <a:bodyPr wrap="square" lIns="0" tIns="0" rIns="0" bIns="0" rtlCol="0" anchor="ctr"/>
-          <a:lstStyle/>
-          <a:p>
-            <a:pPr algn="ctr" indent="0" marL="0">
-              <a:buNone/>
-            </a:pPr>
-            <a:r>
-              <a:rPr lang="en-US" sz="1400" b="1" dirty="0">
-                <a:solidFill>
-                  <a:srgbClr val="FFFFFF"/>
-                </a:solidFill>
-                <a:latin typeface="Yu Gothic" pitchFamily="34" charset="0"/>
-                <a:ea typeface="Yu Gothic" pitchFamily="34" charset="-122"/>
-                <a:cs typeface="Yu Gothic" pitchFamily="34" charset="-120"/>
-              </a:rPr>
-              <a:t>2</a:t>
-            </a:r>
-            <a:endParaRPr lang="en-US" sz="1400" dirty="0"/>
+            <a:off x="5056632" y="4873752"/>
+            <a:ext cx="1956816" cy="237744"/>
+          </a:xfrm>
+          <a:prstGeom prst="rect">
+            <a:avLst/>
+          </a:prstGeom>
+          <a:noFill/>
+          <a:ln/>
+        </p:spPr>
+        <p:txBody>
+          <a:bodyPr wrap="square" lIns="0" tIns="0" rIns="0" bIns="0" rtlCol="0" anchor="ctr"/>
+          <a:lstStyle/>
+          <a:p>
+            <a:pPr indent="0" marL="0">
+              <a:buNone/>
+            </a:pPr>
+            <a:r>
+              <a:rPr lang="en-US" sz="900" b="1" dirty="0">
+                <a:solidFill>
+                  <a:srgbClr val="B04A2F"/>
+                </a:solidFill>
+                <a:latin typeface="Yu Gothic" pitchFamily="34" charset="0"/>
+                <a:ea typeface="Yu Gothic" pitchFamily="34" charset="-122"/>
+                <a:cs typeface="Yu Gothic" pitchFamily="34" charset="-120"/>
+              </a:rPr>
+              <a:t>35-90分</a:t>
+            </a:r>
+            <a:endParaRPr lang="en-US" sz="900" dirty="0"/>
           </a:p>
         </p:txBody>
       </p:sp>
@@ -2722,24 +4366,24 @@
         </p:nvSpPr>
         <p:spPr>
           <a:xfrm>
-            <a:off x="1645920" y="2859786"/>
-            <a:ext cx="3394253" cy="656082"/>
-          </a:xfrm>
-          <a:prstGeom prst="rect">
-            <a:avLst/>
-          </a:prstGeom>
-          <a:noFill/>
-          <a:ln/>
-        </p:spPr>
-        <p:txBody>
-          <a:bodyPr wrap="square" lIns="0" tIns="0" rIns="0" bIns="0" rtlCol="0" anchor="ctr"/>
-          <a:lstStyle/>
-          <a:p>
-            <a:pPr indent="0" marL="0">
-              <a:buNone/>
-            </a:pPr>
-            <a:r>
-              <a:rPr lang="en-US" sz="1500" b="1" dirty="0">
+            <a:off x="5056632" y="5111496"/>
+            <a:ext cx="1956816" cy="384048"/>
+          </a:xfrm>
+          <a:prstGeom prst="rect">
+            <a:avLst/>
+          </a:prstGeom>
+          <a:noFill/>
+          <a:ln/>
+        </p:spPr>
+        <p:txBody>
+          <a:bodyPr wrap="square" lIns="0" tIns="0" rIns="0" bIns="0" rtlCol="0" anchor="ctr"/>
+          <a:lstStyle/>
+          <a:p>
+            <a:pPr indent="0" marL="0">
+              <a:buNone/>
+            </a:pPr>
+            <a:r>
+              <a:rPr lang="en-US" sz="1100" dirty="0">
                 <a:solidFill>
                   <a:srgbClr val="23201D"/>
                 </a:solidFill>
@@ -2747,9 +4391,9 @@
                 <a:ea typeface="Yu Gothic" pitchFamily="34" charset="-122"/>
                 <a:cs typeface="Yu Gothic" pitchFamily="34" charset="-120"/>
               </a:rPr>
-              <a:t>社員が使える文書テンプレート 3種</a:t>
-            </a:r>
-            <a:endParaRPr lang="en-US" sz="1500" dirty="0"/>
+              <a:t>一緒に手を動かす</a:t>
+            </a:r>
+            <a:endParaRPr lang="en-US" sz="1100" dirty="0"/>
           </a:p>
         </p:txBody>
       </p:sp>
@@ -2761,89 +4405,114 @@
         </p:nvSpPr>
         <p:spPr>
           <a:xfrm>
-            <a:off x="5146243" y="2859786"/>
-            <a:ext cx="5963717" cy="656082"/>
-          </a:xfrm>
-          <a:prstGeom prst="rect">
-            <a:avLst/>
-          </a:prstGeom>
-          <a:noFill/>
-          <a:ln/>
-        </p:spPr>
-        <p:txBody>
-          <a:bodyPr wrap="square" lIns="0" tIns="0" rIns="0" bIns="0" rtlCol="0" anchor="ctr"/>
-          <a:lstStyle/>
-          <a:p>
-            <a:pPr indent="0" marL="0">
-              <a:lnSpc>
-                <a:spcPct val="130000"/>
-              </a:lnSpc>
-              <a:buNone/>
-            </a:pPr>
-            <a:r>
-              <a:rPr lang="en-US" sz="1250" dirty="0">
-                <a:solidFill>
-                  <a:srgbClr val="5A534A"/>
-                </a:solidFill>
-                <a:latin typeface="Yu Gothic" pitchFamily="34" charset="0"/>
-                <a:ea typeface="Yu Gothic" pitchFamily="34" charset="-122"/>
-                <a:cs typeface="Yu Gothic" pitchFamily="34" charset="-120"/>
-              </a:rPr>
-              <a:t>すでに1名に使っていただいています</a:t>
-            </a:r>
-            <a:endParaRPr lang="en-US" sz="1250" dirty="0"/>
-          </a:p>
-        </p:txBody>
-      </p:sp>
-      <p:sp>
-        <p:nvSpPr>
-          <p:cNvPr id="14" name="Shape 12"/>
-          <p:cNvSpPr/>
-          <p:nvPr/>
-        </p:nvSpPr>
-        <p:spPr>
-          <a:xfrm>
-            <a:off x="777240" y="3753612"/>
-            <a:ext cx="10607040" cy="838962"/>
-          </a:xfrm>
-          <a:prstGeom prst="rect">
-            <a:avLst/>
-          </a:prstGeom>
-          <a:solidFill>
-            <a:srgbClr val="FFFFFF"/>
-          </a:solidFill>
-          <a:ln w="12700">
-            <a:solidFill>
-              <a:srgbClr val="EDE7DB"/>
-            </a:solidFill>
-            <a:prstDash val="solid"/>
-          </a:ln>
-        </p:spPr>
-      </p:sp>
-      <p:sp>
-        <p:nvSpPr>
-          <p:cNvPr id="15" name="Shape 13"/>
-          <p:cNvSpPr/>
-          <p:nvPr/>
-        </p:nvSpPr>
-        <p:spPr>
-          <a:xfrm>
-            <a:off x="1033272" y="3981069"/>
-            <a:ext cx="384048" cy="384048"/>
-          </a:xfrm>
-          <a:prstGeom prst="ellipse">
-            <a:avLst/>
-          </a:prstGeom>
-          <a:solidFill>
-            <a:srgbClr val="B04A2F"/>
-          </a:solidFill>
-          <a:ln w="12700">
-            <a:solidFill>
-              <a:srgbClr val="B04A2F"/>
-            </a:solidFill>
-            <a:prstDash val="solid"/>
-          </a:ln>
-        </p:spPr>
+            <a:off x="7104888" y="4873752"/>
+            <a:ext cx="1956816" cy="237744"/>
+          </a:xfrm>
+          <a:prstGeom prst="rect">
+            <a:avLst/>
+          </a:prstGeom>
+          <a:noFill/>
+          <a:ln/>
+        </p:spPr>
+        <p:txBody>
+          <a:bodyPr wrap="square" lIns="0" tIns="0" rIns="0" bIns="0" rtlCol="0" anchor="ctr"/>
+          <a:lstStyle/>
+          <a:p>
+            <a:pPr indent="0" marL="0">
+              <a:buNone/>
+            </a:pPr>
+            <a:r>
+              <a:rPr lang="en-US" sz="900" b="1" dirty="0">
+                <a:solidFill>
+                  <a:srgbClr val="B04A2F"/>
+                </a:solidFill>
+                <a:latin typeface="Yu Gothic" pitchFamily="34" charset="0"/>
+                <a:ea typeface="Yu Gothic" pitchFamily="34" charset="-122"/>
+                <a:cs typeface="Yu Gothic" pitchFamily="34" charset="-120"/>
+              </a:rPr>
+              <a:t>90-105分</a:t>
+            </a:r>
+            <a:endParaRPr lang="en-US" sz="900" dirty="0"/>
+          </a:p>
+        </p:txBody>
+      </p:sp>
+      <p:sp>
+        <p:nvSpPr>
+          <p:cNvPr id="14" name="Text 12"/>
+          <p:cNvSpPr txBox="1"/>
+          <p:nvPr/>
+        </p:nvSpPr>
+        <p:spPr>
+          <a:xfrm>
+            <a:off x="7104888" y="5111496"/>
+            <a:ext cx="1956816" cy="384048"/>
+          </a:xfrm>
+          <a:prstGeom prst="rect">
+            <a:avLst/>
+          </a:prstGeom>
+          <a:noFill/>
+          <a:ln/>
+        </p:spPr>
+        <p:txBody>
+          <a:bodyPr wrap="square" lIns="0" tIns="0" rIns="0" bIns="0" rtlCol="0" anchor="ctr"/>
+          <a:lstStyle/>
+          <a:p>
+            <a:pPr indent="0" marL="0">
+              <a:buNone/>
+            </a:pPr>
+            <a:r>
+              <a:rPr lang="en-US" sz="1100" dirty="0">
+                <a:solidFill>
+                  <a:srgbClr val="23201D"/>
+                </a:solidFill>
+                <a:latin typeface="Yu Gothic" pitchFamily="34" charset="0"/>
+                <a:ea typeface="Yu Gothic" pitchFamily="34" charset="-122"/>
+                <a:cs typeface="Yu Gothic" pitchFamily="34" charset="-120"/>
+              </a:rPr>
+              <a:t>業務への組み込み</a:t>
+            </a:r>
+            <a:endParaRPr lang="en-US" sz="1100" dirty="0"/>
+          </a:p>
+        </p:txBody>
+      </p:sp>
+      <p:sp>
+        <p:nvSpPr>
+          <p:cNvPr id="15" name="Text 13"/>
+          <p:cNvSpPr txBox="1"/>
+          <p:nvPr/>
+        </p:nvSpPr>
+        <p:spPr>
+          <a:xfrm>
+            <a:off x="9153144" y="4873752"/>
+            <a:ext cx="1956816" cy="237744"/>
+          </a:xfrm>
+          <a:prstGeom prst="rect">
+            <a:avLst/>
+          </a:prstGeom>
+          <a:noFill/>
+          <a:ln/>
+        </p:spPr>
+        <p:txBody>
+          <a:bodyPr wrap="square" lIns="0" tIns="0" rIns="0" bIns="0" rtlCol="0" anchor="ctr"/>
+          <a:lstStyle/>
+          <a:p>
+            <a:pPr indent="0" marL="0">
+              <a:buNone/>
+            </a:pPr>
+            <a:r>
+              <a:rPr lang="en-US" sz="900" b="1" dirty="0">
+                <a:solidFill>
+                  <a:srgbClr val="B04A2F"/>
+                </a:solidFill>
+                <a:latin typeface="Yu Gothic" pitchFamily="34" charset="0"/>
+                <a:ea typeface="Yu Gothic" pitchFamily="34" charset="-122"/>
+                <a:cs typeface="Yu Gothic" pitchFamily="34" charset="-120"/>
+              </a:rPr>
+              <a:t>105-120分</a:t>
+            </a:r>
+            <a:endParaRPr lang="en-US" sz="900" dirty="0"/>
+          </a:p>
+        </p:txBody>
       </p:sp>
       <p:sp>
         <p:nvSpPr>
@@ -2853,34 +4522,34 @@
         </p:nvSpPr>
         <p:spPr>
           <a:xfrm>
-            <a:off x="1033272" y="3981069"/>
-            <a:ext cx="384048" cy="384048"/>
-          </a:xfrm>
-          <a:prstGeom prst="rect">
-            <a:avLst/>
-          </a:prstGeom>
-          <a:noFill/>
-          <a:ln/>
-        </p:spPr>
-        <p:txBody>
-          <a:bodyPr wrap="square" lIns="0" tIns="0" rIns="0" bIns="0" rtlCol="0" anchor="ctr"/>
-          <a:lstStyle/>
-          <a:p>
-            <a:pPr algn="ctr" indent="0" marL="0">
-              <a:buNone/>
-            </a:pPr>
-            <a:r>
-              <a:rPr lang="en-US" sz="1400" b="1" dirty="0">
-                <a:solidFill>
-                  <a:srgbClr val="FFFFFF"/>
-                </a:solidFill>
-                <a:latin typeface="Yu Gothic" pitchFamily="34" charset="0"/>
-                <a:ea typeface="Yu Gothic" pitchFamily="34" charset="-122"/>
-                <a:cs typeface="Yu Gothic" pitchFamily="34" charset="-120"/>
-              </a:rPr>
-              <a:t>3</a:t>
-            </a:r>
-            <a:endParaRPr lang="en-US" sz="1400" dirty="0"/>
+            <a:off x="9153144" y="5111496"/>
+            <a:ext cx="1956816" cy="384048"/>
+          </a:xfrm>
+          <a:prstGeom prst="rect">
+            <a:avLst/>
+          </a:prstGeom>
+          <a:noFill/>
+          <a:ln/>
+        </p:spPr>
+        <p:txBody>
+          <a:bodyPr wrap="square" lIns="0" tIns="0" rIns="0" bIns="0" rtlCol="0" anchor="ctr"/>
+          <a:lstStyle/>
+          <a:p>
+            <a:pPr indent="0" marL="0">
+              <a:buNone/>
+            </a:pPr>
+            <a:r>
+              <a:rPr lang="en-US" sz="1100" dirty="0">
+                <a:solidFill>
+                  <a:srgbClr val="23201D"/>
+                </a:solidFill>
+                <a:latin typeface="Yu Gothic" pitchFamily="34" charset="0"/>
+                <a:ea typeface="Yu Gothic" pitchFamily="34" charset="-122"/>
+                <a:cs typeface="Yu Gothic" pitchFamily="34" charset="-120"/>
+              </a:rPr>
+              <a:t>宿題・記録</a:t>
+            </a:r>
+            <a:endParaRPr lang="en-US" sz="1100" dirty="0"/>
           </a:p>
         </p:txBody>
       </p:sp>
@@ -2892,34 +4561,34 @@
         </p:nvSpPr>
         <p:spPr>
           <a:xfrm>
-            <a:off x="1645920" y="3845052"/>
-            <a:ext cx="3394253" cy="656082"/>
-          </a:xfrm>
-          <a:prstGeom prst="rect">
-            <a:avLst/>
-          </a:prstGeom>
-          <a:noFill/>
-          <a:ln/>
-        </p:spPr>
-        <p:txBody>
-          <a:bodyPr wrap="square" lIns="0" tIns="0" rIns="0" bIns="0" rtlCol="0" anchor="ctr"/>
-          <a:lstStyle/>
-          <a:p>
-            <a:pPr indent="0" marL="0">
-              <a:buNone/>
-            </a:pPr>
-            <a:r>
-              <a:rPr lang="en-US" sz="1500" b="1" dirty="0">
-                <a:solidFill>
-                  <a:srgbClr val="23201D"/>
-                </a:solidFill>
-                <a:latin typeface="Yu Gothic" pitchFamily="34" charset="0"/>
-                <a:ea typeface="Yu Gothic" pitchFamily="34" charset="-122"/>
-                <a:cs typeface="Yu Gothic" pitchFamily="34" charset="-120"/>
-              </a:rPr>
-              <a:t>月次レポートの雛形</a:t>
-            </a:r>
-            <a:endParaRPr lang="en-US" sz="1500" dirty="0"/>
+            <a:off x="777240" y="6382512"/>
+            <a:ext cx="7424928" cy="256032"/>
+          </a:xfrm>
+          <a:prstGeom prst="rect">
+            <a:avLst/>
+          </a:prstGeom>
+          <a:noFill/>
+          <a:ln/>
+        </p:spPr>
+        <p:txBody>
+          <a:bodyPr wrap="square" lIns="0" tIns="0" rIns="0" bIns="0" rtlCol="0" anchor="ctr"/>
+          <a:lstStyle/>
+          <a:p>
+            <a:pPr indent="0" marL="0">
+              <a:buNone/>
+            </a:pPr>
+            <a:r>
+              <a:rPr lang="en-US" sz="900" dirty="0">
+                <a:solidFill>
+                  <a:srgbClr val="8A8177"/>
+                </a:solidFill>
+                <a:latin typeface="Yu Gothic" pitchFamily="34" charset="0"/>
+                <a:ea typeface="Yu Gothic" pitchFamily="34" charset="-122"/>
+                <a:cs typeface="Yu Gothic" pitchFamily="34" charset="-120"/>
+              </a:rPr>
+              <a:t>第6回　社内へのお披露目と12か月計画</a:t>
+            </a:r>
+            <a:endParaRPr lang="en-US" sz="900" dirty="0"/>
           </a:p>
         </p:txBody>
       </p:sp>
@@ -2931,271 +4600,20 @@
         </p:nvSpPr>
         <p:spPr>
           <a:xfrm>
-            <a:off x="5146243" y="3845052"/>
-            <a:ext cx="5963717" cy="656082"/>
-          </a:xfrm>
-          <a:prstGeom prst="rect">
-            <a:avLst/>
-          </a:prstGeom>
-          <a:noFill/>
-          <a:ln/>
-        </p:spPr>
-        <p:txBody>
-          <a:bodyPr wrap="square" lIns="0" tIns="0" rIns="0" bIns="0" rtlCol="0" anchor="ctr"/>
-          <a:lstStyle/>
-          <a:p>
-            <a:pPr indent="0" marL="0">
-              <a:lnSpc>
-                <a:spcPct val="130000"/>
-              </a:lnSpc>
-              <a:buNone/>
-            </a:pPr>
-            <a:r>
-              <a:rPr lang="en-US" sz="1250" dirty="0">
-                <a:solidFill>
-                  <a:srgbClr val="5A534A"/>
-                </a:solidFill>
-                <a:latin typeface="Yu Gothic" pitchFamily="34" charset="0"/>
-                <a:ea typeface="Yu Gothic" pitchFamily="34" charset="-122"/>
-                <a:cs typeface="Yu Gothic" pitchFamily="34" charset="-120"/>
-              </a:rPr>
-              <a:t>数字の意味をAIに語らせ、計算は表計算に任せます</a:t>
-            </a:r>
-            <a:endParaRPr lang="en-US" sz="1250" dirty="0"/>
-          </a:p>
-        </p:txBody>
-      </p:sp>
-      <p:sp>
-        <p:nvSpPr>
-          <p:cNvPr id="19" name="Shape 17"/>
-          <p:cNvSpPr/>
-          <p:nvPr/>
-        </p:nvSpPr>
-        <p:spPr>
-          <a:xfrm>
-            <a:off x="777240" y="4738878"/>
-            <a:ext cx="10607040" cy="838962"/>
-          </a:xfrm>
-          <a:prstGeom prst="rect">
-            <a:avLst/>
-          </a:prstGeom>
-          <a:solidFill>
-            <a:srgbClr val="FFFFFF"/>
-          </a:solidFill>
-          <a:ln w="12700">
-            <a:solidFill>
-              <a:srgbClr val="EDE7DB"/>
-            </a:solidFill>
-            <a:prstDash val="solid"/>
-          </a:ln>
-        </p:spPr>
-      </p:sp>
-      <p:sp>
-        <p:nvSpPr>
-          <p:cNvPr id="20" name="Shape 18"/>
-          <p:cNvSpPr/>
-          <p:nvPr/>
-        </p:nvSpPr>
-        <p:spPr>
-          <a:xfrm>
-            <a:off x="1033272" y="4966335"/>
-            <a:ext cx="384048" cy="384048"/>
-          </a:xfrm>
-          <a:prstGeom prst="ellipse">
-            <a:avLst/>
-          </a:prstGeom>
-          <a:solidFill>
-            <a:srgbClr val="B04A2F"/>
-          </a:solidFill>
-          <a:ln w="12700">
-            <a:solidFill>
-              <a:srgbClr val="B04A2F"/>
-            </a:solidFill>
-            <a:prstDash val="solid"/>
-          </a:ln>
-        </p:spPr>
-      </p:sp>
-      <p:sp>
-        <p:nvSpPr>
-          <p:cNvPr id="21" name="Text 19"/>
-          <p:cNvSpPr txBox="1"/>
-          <p:nvPr/>
-        </p:nvSpPr>
-        <p:spPr>
-          <a:xfrm>
-            <a:off x="1033272" y="4966335"/>
-            <a:ext cx="384048" cy="384048"/>
-          </a:xfrm>
-          <a:prstGeom prst="rect">
-            <a:avLst/>
-          </a:prstGeom>
-          <a:noFill/>
-          <a:ln/>
-        </p:spPr>
-        <p:txBody>
-          <a:bodyPr wrap="square" lIns="0" tIns="0" rIns="0" bIns="0" rtlCol="0" anchor="ctr"/>
-          <a:lstStyle/>
-          <a:p>
-            <a:pPr algn="ctr" indent="0" marL="0">
-              <a:buNone/>
-            </a:pPr>
-            <a:r>
-              <a:rPr lang="en-US" sz="1400" b="1" dirty="0">
-                <a:solidFill>
-                  <a:srgbClr val="FFFFFF"/>
-                </a:solidFill>
-                <a:latin typeface="Yu Gothic" pitchFamily="34" charset="0"/>
-                <a:ea typeface="Yu Gothic" pitchFamily="34" charset="-122"/>
-                <a:cs typeface="Yu Gothic" pitchFamily="34" charset="-120"/>
-              </a:rPr>
-              <a:t>4</a:t>
-            </a:r>
-            <a:endParaRPr lang="en-US" sz="1400" dirty="0"/>
-          </a:p>
-        </p:txBody>
-      </p:sp>
-      <p:sp>
-        <p:nvSpPr>
-          <p:cNvPr id="22" name="Text 20"/>
-          <p:cNvSpPr txBox="1"/>
-          <p:nvPr/>
-        </p:nvSpPr>
-        <p:spPr>
-          <a:xfrm>
-            <a:off x="1645920" y="4830318"/>
-            <a:ext cx="3394253" cy="656082"/>
-          </a:xfrm>
-          <a:prstGeom prst="rect">
-            <a:avLst/>
-          </a:prstGeom>
-          <a:noFill/>
-          <a:ln/>
-        </p:spPr>
-        <p:txBody>
-          <a:bodyPr wrap="square" lIns="0" tIns="0" rIns="0" bIns="0" rtlCol="0" anchor="ctr"/>
-          <a:lstStyle/>
-          <a:p>
-            <a:pPr indent="0" marL="0">
-              <a:buNone/>
-            </a:pPr>
-            <a:r>
-              <a:rPr lang="en-US" sz="1500" b="1" dirty="0">
-                <a:solidFill>
-                  <a:srgbClr val="23201D"/>
-                </a:solidFill>
-                <a:latin typeface="Yu Gothic" pitchFamily="34" charset="0"/>
-                <a:ea typeface="Yu Gothic" pitchFamily="34" charset="-122"/>
-                <a:cs typeface="Yu Gothic" pitchFamily="34" charset="-120"/>
-              </a:rPr>
-              <a:t>自社資料を読んで答えるAI 1つ</a:t>
-            </a:r>
-            <a:endParaRPr lang="en-US" sz="1500" dirty="0"/>
-          </a:p>
-        </p:txBody>
-      </p:sp>
-      <p:sp>
-        <p:nvSpPr>
-          <p:cNvPr id="23" name="Text 21"/>
-          <p:cNvSpPr txBox="1"/>
-          <p:nvPr/>
-        </p:nvSpPr>
-        <p:spPr>
-          <a:xfrm>
-            <a:off x="5146243" y="4830318"/>
-            <a:ext cx="5963717" cy="656082"/>
-          </a:xfrm>
-          <a:prstGeom prst="rect">
-            <a:avLst/>
-          </a:prstGeom>
-          <a:noFill/>
-          <a:ln/>
-        </p:spPr>
-        <p:txBody>
-          <a:bodyPr wrap="square" lIns="0" tIns="0" rIns="0" bIns="0" rtlCol="0" anchor="ctr"/>
-          <a:lstStyle/>
-          <a:p>
-            <a:pPr indent="0" marL="0">
-              <a:lnSpc>
-                <a:spcPct val="130000"/>
-              </a:lnSpc>
-              <a:buNone/>
-            </a:pPr>
-            <a:r>
-              <a:rPr lang="en-US" sz="1250" dirty="0">
-                <a:solidFill>
-                  <a:srgbClr val="5A534A"/>
-                </a:solidFill>
-                <a:latin typeface="Yu Gothic" pitchFamily="34" charset="0"/>
-                <a:ea typeface="Yu Gothic" pitchFamily="34" charset="-122"/>
-                <a:cs typeface="Yu Gothic" pitchFamily="34" charset="-120"/>
-              </a:rPr>
-              <a:t>資料にないことは答えない設定にしてあります</a:t>
-            </a:r>
-            <a:endParaRPr lang="en-US" sz="1250" dirty="0"/>
-          </a:p>
-        </p:txBody>
-      </p:sp>
-      <p:sp>
-        <p:nvSpPr>
-          <p:cNvPr id="24" name="Text 22"/>
-          <p:cNvSpPr txBox="1"/>
-          <p:nvPr/>
-        </p:nvSpPr>
-        <p:spPr>
-          <a:xfrm>
-            <a:off x="777240" y="5715000"/>
-            <a:ext cx="10607040" cy="457200"/>
-          </a:xfrm>
-          <a:prstGeom prst="rect">
-            <a:avLst/>
-          </a:prstGeom>
-          <a:noFill/>
-          <a:ln/>
-        </p:spPr>
-        <p:txBody>
-          <a:bodyPr wrap="square" lIns="0" tIns="0" rIns="0" bIns="0" rtlCol="0" anchor="ctr"/>
-          <a:lstStyle/>
-          <a:p>
-            <a:pPr indent="0" marL="0">
-              <a:buNone/>
-            </a:pPr>
-            <a:r>
-              <a:rPr lang="en-US" sz="1200" b="1" dirty="0">
-                <a:solidFill>
-                  <a:srgbClr val="B04A2F"/>
-                </a:solidFill>
-                <a:latin typeface="Yu Gothic" pitchFamily="34" charset="0"/>
-                <a:ea typeface="Yu Gothic" pitchFamily="34" charset="-122"/>
-                <a:cs typeface="Yu Gothic" pitchFamily="34" charset="-120"/>
-              </a:rPr>
-              <a:t>どれも、御社の実際の業務から作ったものです。</a:t>
-            </a:r>
-            <a:endParaRPr lang="en-US" sz="1200" dirty="0"/>
-          </a:p>
-        </p:txBody>
-      </p:sp>
-      <p:sp>
-        <p:nvSpPr>
-          <p:cNvPr id="25" name="Text 23"/>
-          <p:cNvSpPr txBox="1"/>
-          <p:nvPr/>
-        </p:nvSpPr>
-        <p:spPr>
-          <a:xfrm>
-            <a:off x="777240" y="6355080"/>
-            <a:ext cx="7424928" cy="274320"/>
-          </a:xfrm>
-          <a:prstGeom prst="rect">
-            <a:avLst/>
-          </a:prstGeom>
-          <a:noFill/>
-          <a:ln/>
-        </p:spPr>
-        <p:txBody>
-          <a:bodyPr wrap="square" lIns="0" tIns="0" rIns="0" bIns="0" rtlCol="0" anchor="ctr"/>
-          <a:lstStyle/>
-          <a:p>
-            <a:pPr indent="0" marL="0">
+            <a:off x="8202168" y="6382512"/>
+            <a:ext cx="3182112" cy="256032"/>
+          </a:xfrm>
+          <a:prstGeom prst="rect">
+            <a:avLst/>
+          </a:prstGeom>
+          <a:noFill/>
+          <a:ln/>
+        </p:spPr>
+        <p:txBody>
+          <a:bodyPr wrap="square" lIns="0" tIns="0" rIns="0" bIns="0" rtlCol="0" anchor="ctr"/>
+          <a:lstStyle/>
+          <a:p>
+            <a:pPr algn="r" indent="0" marL="0">
               <a:buNone/>
             </a:pPr>
             <a:r>
@@ -3207,46 +4625,7 @@
                 <a:ea typeface="Yu Gothic" pitchFamily="34" charset="-122"/>
                 <a:cs typeface="Yu Gothic" pitchFamily="34" charset="-120"/>
               </a:rPr>
-              <a:t>第6回　社内へのお披露目と12か月計画</a:t>
-            </a:r>
-            <a:endParaRPr lang="en-US" sz="900" dirty="0"/>
-          </a:p>
-        </p:txBody>
-      </p:sp>
-      <p:sp>
-        <p:nvSpPr>
-          <p:cNvPr id="26" name="Text 24"/>
-          <p:cNvSpPr txBox="1"/>
-          <p:nvPr/>
-        </p:nvSpPr>
-        <p:spPr>
-          <a:xfrm>
-            <a:off x="8202168" y="6355080"/>
-            <a:ext cx="3182112" cy="274320"/>
-          </a:xfrm>
-          <a:prstGeom prst="rect">
-            <a:avLst/>
-          </a:prstGeom>
-          <a:noFill/>
-          <a:ln/>
-        </p:spPr>
-        <p:txBody>
-          <a:bodyPr wrap="square" lIns="0" tIns="0" rIns="0" bIns="0" rtlCol="0" anchor="ctr"/>
-          <a:lstStyle/>
-          <a:p>
-            <a:pPr algn="r" indent="0" marL="0">
-              <a:buNone/>
-            </a:pPr>
-            <a:r>
-              <a:rPr lang="en-US" sz="900" dirty="0">
-                <a:solidFill>
-                  <a:srgbClr val="8A8177"/>
-                </a:solidFill>
-                <a:latin typeface="Yu Gothic" pitchFamily="34" charset="0"/>
-                <a:ea typeface="Yu Gothic" pitchFamily="34" charset="-122"/>
-                <a:cs typeface="Yu Gothic" pitchFamily="34" charset="-120"/>
-              </a:rPr>
-              <a:t>考え方</a:t>
+              <a:t>ゴール</a:t>
             </a:r>
             <a:endParaRPr lang="en-US" sz="900" dirty="0"/>
           </a:p>
@@ -3292,7 +4671,7 @@
         </p:nvSpPr>
         <p:spPr>
           <a:xfrm>
-            <a:off x="777240" y="640080"/>
+            <a:off x="777240" y="566928"/>
             <a:ext cx="10607040" cy="274320"/>
           </a:xfrm>
           <a:prstGeom prst="rect">
@@ -3317,7 +4696,7 @@
                 <a:ea typeface="Yu Gothic" pitchFamily="34" charset="-122"/>
                 <a:cs typeface="Yu Gothic" pitchFamily="34" charset="-120"/>
               </a:rPr>
-              <a:t>実演</a:t>
+              <a:t>考え方</a:t>
             </a:r>
             <a:endParaRPr lang="en-US" sz="1100" dirty="0"/>
           </a:p>
@@ -3331,7 +4710,7 @@
         </p:nvSpPr>
         <p:spPr>
           <a:xfrm>
-            <a:off x="777240" y="960120"/>
+            <a:off x="777240" y="896112"/>
             <a:ext cx="10607040" cy="640080"/>
           </a:xfrm>
           <a:prstGeom prst="rect">
@@ -3348,7 +4727,7 @@
               <a:buNone/>
             </a:pPr>
             <a:r>
-              <a:rPr lang="en-US" sz="2700" b="1" dirty="0">
+              <a:rPr lang="en-US" sz="2600" b="1" dirty="0">
                 <a:solidFill>
                   <a:srgbClr val="23201D"/>
                 </a:solidFill>
@@ -3356,9 +4735,9 @@
                 <a:ea typeface="Yu Gothic" pitchFamily="34" charset="-122"/>
                 <a:cs typeface="Yu Gothic" pitchFamily="34" charset="-120"/>
               </a:rPr>
-              <a:t>みなさんが気になること</a:t>
-            </a:r>
-            <a:endParaRPr lang="en-US" sz="2700" dirty="0"/>
+              <a:t>この5回で作ったもの</a:t>
+            </a:r>
+            <a:endParaRPr lang="en-US" sz="2600" dirty="0"/>
           </a:p>
         </p:txBody>
       </p:sp>
@@ -3370,18 +4749,18 @@
         </p:nvSpPr>
         <p:spPr>
           <a:xfrm>
-            <a:off x="777240" y="1828800"/>
-            <a:ext cx="4983480" cy="3566160"/>
+            <a:off x="777240" y="1691640"/>
+            <a:ext cx="10607040" cy="864108"/>
           </a:xfrm>
           <a:prstGeom prst="rect">
             <a:avLst/>
           </a:prstGeom>
           <a:solidFill>
-            <a:srgbClr val="EDE7DB"/>
+            <a:srgbClr val="FFFFFF"/>
           </a:solidFill>
-          <a:ln w="15875">
+          <a:ln w="12700">
             <a:solidFill>
-              <a:srgbClr val="8A8177"/>
+              <a:srgbClr val="EDE7DB"/>
             </a:solidFill>
             <a:prstDash val="solid"/>
           </a:ln>
@@ -3395,497 +4774,8 @@
         </p:nvSpPr>
         <p:spPr>
           <a:xfrm>
-            <a:off x="777240" y="1828800"/>
-            <a:ext cx="4983480" cy="566928"/>
-          </a:xfrm>
-          <a:prstGeom prst="rect">
-            <a:avLst/>
-          </a:prstGeom>
-          <a:solidFill>
-            <a:srgbClr val="8A8177"/>
-          </a:solidFill>
-          <a:ln w="12700">
-            <a:solidFill>
-              <a:srgbClr val="333333"/>
-            </a:solidFill>
-            <a:prstDash val="solid"/>
-          </a:ln>
-        </p:spPr>
-      </p:sp>
-      <p:sp>
-        <p:nvSpPr>
-          <p:cNvPr id="6" name="Text 4"/>
-          <p:cNvSpPr txBox="1"/>
-          <p:nvPr/>
-        </p:nvSpPr>
-        <p:spPr>
-          <a:xfrm>
-            <a:off x="1005840" y="1883664"/>
-            <a:ext cx="4526280" cy="457200"/>
-          </a:xfrm>
-          <a:prstGeom prst="rect">
-            <a:avLst/>
-          </a:prstGeom>
-          <a:noFill/>
-          <a:ln/>
-        </p:spPr>
-        <p:txBody>
-          <a:bodyPr wrap="square" lIns="0" tIns="0" rIns="0" bIns="0" rtlCol="0" anchor="ctr"/>
-          <a:lstStyle/>
-          <a:p>
-            <a:pPr indent="0" marL="0">
-              <a:buNone/>
-            </a:pPr>
-            <a:r>
-              <a:rPr lang="en-US" sz="1400" b="1" dirty="0">
-                <a:solidFill>
-                  <a:srgbClr val="FFFFFF"/>
-                </a:solidFill>
-                <a:latin typeface="Yu Gothic" pitchFamily="34" charset="0"/>
-                <a:ea typeface="Yu Gothic" pitchFamily="34" charset="-122"/>
-                <a:cs typeface="Yu Gothic" pitchFamily="34" charset="-120"/>
-              </a:rPr>
-              <a:t>よく聞かれること</a:t>
-            </a:r>
-            <a:endParaRPr lang="en-US" sz="1400" dirty="0"/>
-          </a:p>
-        </p:txBody>
-      </p:sp>
-      <p:sp>
-        <p:nvSpPr>
-          <p:cNvPr id="7" name="Text 5"/>
-          <p:cNvSpPr txBox="1"/>
-          <p:nvPr/>
-        </p:nvSpPr>
-        <p:spPr>
-          <a:xfrm>
-            <a:off x="1097280" y="2606040"/>
-            <a:ext cx="4343400" cy="548640"/>
-          </a:xfrm>
-          <a:prstGeom prst="rect">
-            <a:avLst/>
-          </a:prstGeom>
-          <a:noFill/>
-          <a:ln/>
-        </p:spPr>
-        <p:txBody>
-          <a:bodyPr wrap="square" lIns="0" tIns="0" rIns="0" bIns="0" rtlCol="0" anchor="ctr"/>
-          <a:lstStyle/>
-          <a:p>
-            <a:pPr indent="0" marL="0">
-              <a:lnSpc>
-                <a:spcPct val="125000"/>
-              </a:lnSpc>
-              <a:buNone/>
-            </a:pPr>
-            <a:r>
-              <a:rPr lang="en-US" sz="1300" dirty="0">
-                <a:solidFill>
-                  <a:srgbClr val="23201D"/>
-                </a:solidFill>
-                <a:latin typeface="Yu Gothic" pitchFamily="34" charset="0"/>
-                <a:ea typeface="Yu Gothic" pitchFamily="34" charset="-122"/>
-                <a:cs typeface="Yu Gothic" pitchFamily="34" charset="-120"/>
-              </a:rPr>
-              <a:t>これで人が減らされるのか</a:t>
-            </a:r>
-            <a:endParaRPr lang="en-US" sz="1300" dirty="0"/>
-          </a:p>
-        </p:txBody>
-      </p:sp>
-      <p:sp>
-        <p:nvSpPr>
-          <p:cNvPr id="8" name="Text 6"/>
-          <p:cNvSpPr txBox="1"/>
-          <p:nvPr/>
-        </p:nvSpPr>
-        <p:spPr>
-          <a:xfrm>
-            <a:off x="1097280" y="3172968"/>
-            <a:ext cx="4343400" cy="548640"/>
-          </a:xfrm>
-          <a:prstGeom prst="rect">
-            <a:avLst/>
-          </a:prstGeom>
-          <a:noFill/>
-          <a:ln/>
-        </p:spPr>
-        <p:txBody>
-          <a:bodyPr wrap="square" lIns="0" tIns="0" rIns="0" bIns="0" rtlCol="0" anchor="ctr"/>
-          <a:lstStyle/>
-          <a:p>
-            <a:pPr indent="0" marL="0">
-              <a:lnSpc>
-                <a:spcPct val="125000"/>
-              </a:lnSpc>
-              <a:buNone/>
-            </a:pPr>
-            <a:r>
-              <a:rPr lang="en-US" sz="1300" dirty="0">
-                <a:solidFill>
-                  <a:srgbClr val="23201D"/>
-                </a:solidFill>
-                <a:latin typeface="Yu Gothic" pitchFamily="34" charset="0"/>
-                <a:ea typeface="Yu Gothic" pitchFamily="34" charset="-122"/>
-                <a:cs typeface="Yu Gothic" pitchFamily="34" charset="-120"/>
-              </a:rPr>
-              <a:t>入力した情報は外に漏れないのか</a:t>
-            </a:r>
-            <a:endParaRPr lang="en-US" sz="1300" dirty="0"/>
-          </a:p>
-        </p:txBody>
-      </p:sp>
-      <p:sp>
-        <p:nvSpPr>
-          <p:cNvPr id="9" name="Text 7"/>
-          <p:cNvSpPr txBox="1"/>
-          <p:nvPr/>
-        </p:nvSpPr>
-        <p:spPr>
-          <a:xfrm>
-            <a:off x="1097280" y="3739896"/>
-            <a:ext cx="4343400" cy="548640"/>
-          </a:xfrm>
-          <a:prstGeom prst="rect">
-            <a:avLst/>
-          </a:prstGeom>
-          <a:noFill/>
-          <a:ln/>
-        </p:spPr>
-        <p:txBody>
-          <a:bodyPr wrap="square" lIns="0" tIns="0" rIns="0" bIns="0" rtlCol="0" anchor="ctr"/>
-          <a:lstStyle/>
-          <a:p>
-            <a:pPr indent="0" marL="0">
-              <a:lnSpc>
-                <a:spcPct val="125000"/>
-              </a:lnSpc>
-              <a:buNone/>
-            </a:pPr>
-            <a:r>
-              <a:rPr lang="en-US" sz="1300" dirty="0">
-                <a:solidFill>
-                  <a:srgbClr val="23201D"/>
-                </a:solidFill>
-                <a:latin typeface="Yu Gothic" pitchFamily="34" charset="0"/>
-                <a:ea typeface="Yu Gothic" pitchFamily="34" charset="-122"/>
-                <a:cs typeface="Yu Gothic" pitchFamily="34" charset="-120"/>
-              </a:rPr>
-              <a:t>間違えたら誰の責任か</a:t>
-            </a:r>
-            <a:endParaRPr lang="en-US" sz="1300" dirty="0"/>
-          </a:p>
-        </p:txBody>
-      </p:sp>
-      <p:sp>
-        <p:nvSpPr>
-          <p:cNvPr id="10" name="Text 8"/>
-          <p:cNvSpPr txBox="1"/>
-          <p:nvPr/>
-        </p:nvSpPr>
-        <p:spPr>
-          <a:xfrm>
-            <a:off x="1097280" y="4306824"/>
-            <a:ext cx="4343400" cy="548640"/>
-          </a:xfrm>
-          <a:prstGeom prst="rect">
-            <a:avLst/>
-          </a:prstGeom>
-          <a:noFill/>
-          <a:ln/>
-        </p:spPr>
-        <p:txBody>
-          <a:bodyPr wrap="square" lIns="0" tIns="0" rIns="0" bIns="0" rtlCol="0" anchor="ctr"/>
-          <a:lstStyle/>
-          <a:p>
-            <a:pPr indent="0" marL="0">
-              <a:lnSpc>
-                <a:spcPct val="125000"/>
-              </a:lnSpc>
-              <a:buNone/>
-            </a:pPr>
-            <a:r>
-              <a:rPr lang="en-US" sz="1300" dirty="0">
-                <a:solidFill>
-                  <a:srgbClr val="23201D"/>
-                </a:solidFill>
-                <a:latin typeface="Yu Gothic" pitchFamily="34" charset="0"/>
-                <a:ea typeface="Yu Gothic" pitchFamily="34" charset="-122"/>
-                <a:cs typeface="Yu Gothic" pitchFamily="34" charset="-120"/>
-              </a:rPr>
-              <a:t>使わなくてもいいのか</a:t>
-            </a:r>
-            <a:endParaRPr lang="en-US" sz="1300" dirty="0"/>
-          </a:p>
-        </p:txBody>
-      </p:sp>
-      <p:sp>
-        <p:nvSpPr>
-          <p:cNvPr id="11" name="Shape 9"/>
-          <p:cNvSpPr/>
-          <p:nvPr/>
-        </p:nvSpPr>
-        <p:spPr>
-          <a:xfrm>
-            <a:off x="6400800" y="1828800"/>
-            <a:ext cx="4983480" cy="3566160"/>
-          </a:xfrm>
-          <a:prstGeom prst="rect">
-            <a:avLst/>
-          </a:prstGeom>
-          <a:solidFill>
-            <a:srgbClr val="FFFFFF"/>
-          </a:solidFill>
-          <a:ln w="15875">
-            <a:solidFill>
-              <a:srgbClr val="3B6B4A"/>
-            </a:solidFill>
-            <a:prstDash val="solid"/>
-          </a:ln>
-        </p:spPr>
-      </p:sp>
-      <p:sp>
-        <p:nvSpPr>
-          <p:cNvPr id="12" name="Shape 10"/>
-          <p:cNvSpPr/>
-          <p:nvPr/>
-        </p:nvSpPr>
-        <p:spPr>
-          <a:xfrm>
-            <a:off x="6400800" y="1828800"/>
-            <a:ext cx="4983480" cy="566928"/>
-          </a:xfrm>
-          <a:prstGeom prst="rect">
-            <a:avLst/>
-          </a:prstGeom>
-          <a:solidFill>
-            <a:srgbClr val="3B6B4A"/>
-          </a:solidFill>
-          <a:ln w="12700">
-            <a:solidFill>
-              <a:srgbClr val="333333"/>
-            </a:solidFill>
-            <a:prstDash val="solid"/>
-          </a:ln>
-        </p:spPr>
-      </p:sp>
-      <p:sp>
-        <p:nvSpPr>
-          <p:cNvPr id="13" name="Text 11"/>
-          <p:cNvSpPr txBox="1"/>
-          <p:nvPr/>
-        </p:nvSpPr>
-        <p:spPr>
-          <a:xfrm>
-            <a:off x="6629400" y="1883664"/>
-            <a:ext cx="4526280" cy="457200"/>
-          </a:xfrm>
-          <a:prstGeom prst="rect">
-            <a:avLst/>
-          </a:prstGeom>
-          <a:noFill/>
-          <a:ln/>
-        </p:spPr>
-        <p:txBody>
-          <a:bodyPr wrap="square" lIns="0" tIns="0" rIns="0" bIns="0" rtlCol="0" anchor="ctr"/>
-          <a:lstStyle/>
-          <a:p>
-            <a:pPr indent="0" marL="0">
-              <a:buNone/>
-            </a:pPr>
-            <a:r>
-              <a:rPr lang="en-US" sz="1400" b="1" dirty="0">
-                <a:solidFill>
-                  <a:srgbClr val="FFFFFF"/>
-                </a:solidFill>
-                <a:latin typeface="Yu Gothic" pitchFamily="34" charset="0"/>
-                <a:ea typeface="Yu Gothic" pitchFamily="34" charset="-122"/>
-                <a:cs typeface="Yu Gothic" pitchFamily="34" charset="-120"/>
-              </a:rPr>
-              <a:t>この場でお答えします</a:t>
-            </a:r>
-            <a:endParaRPr lang="en-US" sz="1400" dirty="0"/>
-          </a:p>
-        </p:txBody>
-      </p:sp>
-      <p:sp>
-        <p:nvSpPr>
-          <p:cNvPr id="14" name="Text 12"/>
-          <p:cNvSpPr txBox="1"/>
-          <p:nvPr/>
-        </p:nvSpPr>
-        <p:spPr>
-          <a:xfrm>
-            <a:off x="6720840" y="2606040"/>
-            <a:ext cx="4343400" cy="548640"/>
-          </a:xfrm>
-          <a:prstGeom prst="rect">
-            <a:avLst/>
-          </a:prstGeom>
-          <a:noFill/>
-          <a:ln/>
-        </p:spPr>
-        <p:txBody>
-          <a:bodyPr wrap="square" lIns="0" tIns="0" rIns="0" bIns="0" rtlCol="0" anchor="ctr"/>
-          <a:lstStyle/>
-          <a:p>
-            <a:pPr indent="0" marL="0">
-              <a:lnSpc>
-                <a:spcPct val="125000"/>
-              </a:lnSpc>
-              <a:buNone/>
-            </a:pPr>
-            <a:r>
-              <a:rPr lang="en-US" sz="1300" dirty="0">
-                <a:solidFill>
-                  <a:srgbClr val="23201D"/>
-                </a:solidFill>
-                <a:latin typeface="Yu Gothic" pitchFamily="34" charset="0"/>
-                <a:ea typeface="Yu Gothic" pitchFamily="34" charset="-122"/>
-                <a:cs typeface="Yu Gothic" pitchFamily="34" charset="-120"/>
-              </a:rPr>
-              <a:t>減らす話ではなく、時間を何に移すかの話です</a:t>
-            </a:r>
-            <a:endParaRPr lang="en-US" sz="1300" dirty="0"/>
-          </a:p>
-        </p:txBody>
-      </p:sp>
-      <p:sp>
-        <p:nvSpPr>
-          <p:cNvPr id="15" name="Text 13"/>
-          <p:cNvSpPr txBox="1"/>
-          <p:nvPr/>
-        </p:nvSpPr>
-        <p:spPr>
-          <a:xfrm>
-            <a:off x="6720840" y="3172968"/>
-            <a:ext cx="4343400" cy="548640"/>
-          </a:xfrm>
-          <a:prstGeom prst="rect">
-            <a:avLst/>
-          </a:prstGeom>
-          <a:noFill/>
-          <a:ln/>
-        </p:spPr>
-        <p:txBody>
-          <a:bodyPr wrap="square" lIns="0" tIns="0" rIns="0" bIns="0" rtlCol="0" anchor="ctr"/>
-          <a:lstStyle/>
-          <a:p>
-            <a:pPr indent="0" marL="0">
-              <a:lnSpc>
-                <a:spcPct val="125000"/>
-              </a:lnSpc>
-              <a:buNone/>
-            </a:pPr>
-            <a:r>
-              <a:rPr lang="en-US" sz="1300" dirty="0">
-                <a:solidFill>
-                  <a:srgbClr val="23201D"/>
-                </a:solidFill>
-                <a:latin typeface="Yu Gothic" pitchFamily="34" charset="0"/>
-                <a:ea typeface="Yu Gothic" pitchFamily="34" charset="-122"/>
-                <a:cs typeface="Yu Gothic" pitchFamily="34" charset="-120"/>
-              </a:rPr>
-              <a:t>契約と設定の事実をお見せします</a:t>
-            </a:r>
-            <a:endParaRPr lang="en-US" sz="1300" dirty="0"/>
-          </a:p>
-        </p:txBody>
-      </p:sp>
-      <p:sp>
-        <p:nvSpPr>
-          <p:cNvPr id="16" name="Text 14"/>
-          <p:cNvSpPr txBox="1"/>
-          <p:nvPr/>
-        </p:nvSpPr>
-        <p:spPr>
-          <a:xfrm>
-            <a:off x="6720840" y="3739896"/>
-            <a:ext cx="4343400" cy="548640"/>
-          </a:xfrm>
-          <a:prstGeom prst="rect">
-            <a:avLst/>
-          </a:prstGeom>
-          <a:noFill/>
-          <a:ln/>
-        </p:spPr>
-        <p:txBody>
-          <a:bodyPr wrap="square" lIns="0" tIns="0" rIns="0" bIns="0" rtlCol="0" anchor="ctr"/>
-          <a:lstStyle/>
-          <a:p>
-            <a:pPr indent="0" marL="0">
-              <a:lnSpc>
-                <a:spcPct val="125000"/>
-              </a:lnSpc>
-              <a:buNone/>
-            </a:pPr>
-            <a:r>
-              <a:rPr lang="en-US" sz="1300" dirty="0">
-                <a:solidFill>
-                  <a:srgbClr val="23201D"/>
-                </a:solidFill>
-                <a:latin typeface="Yu Gothic" pitchFamily="34" charset="0"/>
-                <a:ea typeface="Yu Gothic" pitchFamily="34" charset="-122"/>
-                <a:cs typeface="Yu Gothic" pitchFamily="34" charset="-120"/>
-              </a:rPr>
-              <a:t>確認する場所を決めてあります</a:t>
-            </a:r>
-            <a:endParaRPr lang="en-US" sz="1300" dirty="0"/>
-          </a:p>
-        </p:txBody>
-      </p:sp>
-      <p:sp>
-        <p:nvSpPr>
-          <p:cNvPr id="17" name="Text 15"/>
-          <p:cNvSpPr txBox="1"/>
-          <p:nvPr/>
-        </p:nvSpPr>
-        <p:spPr>
-          <a:xfrm>
-            <a:off x="6720840" y="4306824"/>
-            <a:ext cx="4343400" cy="548640"/>
-          </a:xfrm>
-          <a:prstGeom prst="rect">
-            <a:avLst/>
-          </a:prstGeom>
-          <a:noFill/>
-          <a:ln/>
-        </p:spPr>
-        <p:txBody>
-          <a:bodyPr wrap="square" lIns="0" tIns="0" rIns="0" bIns="0" rtlCol="0" anchor="ctr"/>
-          <a:lstStyle/>
-          <a:p>
-            <a:pPr indent="0" marL="0">
-              <a:lnSpc>
-                <a:spcPct val="125000"/>
-              </a:lnSpc>
-              <a:buNone/>
-            </a:pPr>
-            <a:r>
-              <a:rPr lang="en-US" sz="1300" dirty="0">
-                <a:solidFill>
-                  <a:srgbClr val="23201D"/>
-                </a:solidFill>
-                <a:latin typeface="Yu Gothic" pitchFamily="34" charset="0"/>
-                <a:ea typeface="Yu Gothic" pitchFamily="34" charset="-122"/>
-                <a:cs typeface="Yu Gothic" pitchFamily="34" charset="-120"/>
-              </a:rPr>
-              <a:t>会社としての方針をお伝えします</a:t>
-            </a:r>
-            <a:endParaRPr lang="en-US" sz="1300" dirty="0"/>
-          </a:p>
-        </p:txBody>
-      </p:sp>
-      <p:sp>
-        <p:nvSpPr>
-          <p:cNvPr id="18" name="Shape 16"/>
-          <p:cNvSpPr/>
-          <p:nvPr/>
-        </p:nvSpPr>
-        <p:spPr>
-          <a:xfrm>
-            <a:off x="5815584" y="3337560"/>
-            <a:ext cx="512064" cy="512064"/>
+            <a:off x="1014984" y="1940814"/>
+            <a:ext cx="365760" cy="365760"/>
           </a:xfrm>
           <a:prstGeom prst="ellipse">
             <a:avLst/>
@@ -3903,14 +4793,14 @@
       </p:sp>
       <p:sp>
         <p:nvSpPr>
-          <p:cNvPr id="19" name="Text 17"/>
-          <p:cNvSpPr txBox="1"/>
-          <p:nvPr/>
-        </p:nvSpPr>
-        <p:spPr>
-          <a:xfrm>
-            <a:off x="5815584" y="3337560"/>
-            <a:ext cx="512064" cy="512064"/>
+          <p:cNvPr id="6" name="Text 4"/>
+          <p:cNvSpPr txBox="1"/>
+          <p:nvPr/>
+        </p:nvSpPr>
+        <p:spPr>
+          <a:xfrm>
+            <a:off x="1014984" y="1940814"/>
+            <a:ext cx="365760" cy="365760"/>
           </a:xfrm>
           <a:prstGeom prst="rect">
             <a:avLst/>
@@ -3926,7 +4816,7 @@
               <a:buNone/>
             </a:pPr>
             <a:r>
-              <a:rPr lang="en-US" sz="1800" b="1" dirty="0">
+              <a:rPr lang="en-US" sz="1300" b="1" dirty="0">
                 <a:solidFill>
                   <a:srgbClr val="FFFFFF"/>
                 </a:solidFill>
@@ -3934,22 +4824,652 @@
                 <a:ea typeface="Yu Gothic" pitchFamily="34" charset="-122"/>
                 <a:cs typeface="Yu Gothic" pitchFamily="34" charset="-120"/>
               </a:rPr>
-              <a:t>→</a:t>
-            </a:r>
-            <a:endParaRPr lang="en-US" sz="1800" dirty="0"/>
-          </a:p>
-        </p:txBody>
-      </p:sp>
-      <p:sp>
-        <p:nvSpPr>
-          <p:cNvPr id="20" name="Text 18"/>
-          <p:cNvSpPr txBox="1"/>
-          <p:nvPr/>
-        </p:nvSpPr>
-        <p:spPr>
-          <a:xfrm>
-            <a:off x="777240" y="6355080"/>
-            <a:ext cx="7424928" cy="274320"/>
+              <a:t>1</a:t>
+            </a:r>
+            <a:endParaRPr lang="en-US" sz="1300" dirty="0"/>
+          </a:p>
+        </p:txBody>
+      </p:sp>
+      <p:sp>
+        <p:nvSpPr>
+          <p:cNvPr id="7" name="Text 5"/>
+          <p:cNvSpPr txBox="1"/>
+          <p:nvPr/>
+        </p:nvSpPr>
+        <p:spPr>
+          <a:xfrm>
+            <a:off x="1600200" y="1764792"/>
+            <a:ext cx="3182112" cy="717804"/>
+          </a:xfrm>
+          <a:prstGeom prst="rect">
+            <a:avLst/>
+          </a:prstGeom>
+          <a:noFill/>
+          <a:ln/>
+        </p:spPr>
+        <p:txBody>
+          <a:bodyPr wrap="square" lIns="0" tIns="0" rIns="0" bIns="0" rtlCol="0" anchor="ctr"/>
+          <a:lstStyle/>
+          <a:p>
+            <a:pPr indent="0" marL="0">
+              <a:buNone/>
+            </a:pPr>
+            <a:r>
+              <a:rPr lang="en-US" sz="1450" b="1" dirty="0">
+                <a:solidFill>
+                  <a:srgbClr val="23201D"/>
+                </a:solidFill>
+                <a:latin typeface="Yu Gothic" pitchFamily="34" charset="0"/>
+                <a:ea typeface="Yu Gothic" pitchFamily="34" charset="-122"/>
+                <a:cs typeface="Yu Gothic" pitchFamily="34" charset="-120"/>
+              </a:rPr>
+              <a:t>自社の指示文 15本</a:t>
+            </a:r>
+            <a:endParaRPr lang="en-US" sz="1450" dirty="0"/>
+          </a:p>
+        </p:txBody>
+      </p:sp>
+      <p:sp>
+        <p:nvSpPr>
+          <p:cNvPr id="8" name="Text 6"/>
+          <p:cNvSpPr txBox="1"/>
+          <p:nvPr/>
+        </p:nvSpPr>
+        <p:spPr>
+          <a:xfrm>
+            <a:off x="4888382" y="1764792"/>
+            <a:ext cx="6267298" cy="717804"/>
+          </a:xfrm>
+          <a:prstGeom prst="rect">
+            <a:avLst/>
+          </a:prstGeom>
+          <a:noFill/>
+          <a:ln/>
+        </p:spPr>
+        <p:txBody>
+          <a:bodyPr wrap="square" lIns="0" tIns="0" rIns="0" bIns="0" rtlCol="0" anchor="ctr"/>
+          <a:lstStyle/>
+          <a:p>
+            <a:pPr indent="0" marL="0">
+              <a:lnSpc>
+                <a:spcPct val="130000"/>
+              </a:lnSpc>
+              <a:buNone/>
+            </a:pPr>
+            <a:r>
+              <a:rPr lang="en-US" sz="1200" dirty="0">
+                <a:solidFill>
+                  <a:srgbClr val="5A534A"/>
+                </a:solidFill>
+                <a:latin typeface="Yu Gothic" pitchFamily="34" charset="0"/>
+                <a:ea typeface="Yu Gothic" pitchFamily="34" charset="-122"/>
+                <a:cs typeface="Yu Gothic" pitchFamily="34" charset="-120"/>
+              </a:rPr>
+              <a:t>毎回ゼロから打つのをやめ、蓄積する形にしました</a:t>
+            </a:r>
+            <a:endParaRPr lang="en-US" sz="1200" dirty="0"/>
+          </a:p>
+        </p:txBody>
+      </p:sp>
+      <p:sp>
+        <p:nvSpPr>
+          <p:cNvPr id="9" name="Shape 7"/>
+          <p:cNvSpPr/>
+          <p:nvPr/>
+        </p:nvSpPr>
+        <p:spPr>
+          <a:xfrm>
+            <a:off x="777240" y="2683764"/>
+            <a:ext cx="10607040" cy="864108"/>
+          </a:xfrm>
+          <a:prstGeom prst="rect">
+            <a:avLst/>
+          </a:prstGeom>
+          <a:solidFill>
+            <a:srgbClr val="FFFFFF"/>
+          </a:solidFill>
+          <a:ln w="12700">
+            <a:solidFill>
+              <a:srgbClr val="EDE7DB"/>
+            </a:solidFill>
+            <a:prstDash val="solid"/>
+          </a:ln>
+        </p:spPr>
+      </p:sp>
+      <p:sp>
+        <p:nvSpPr>
+          <p:cNvPr id="10" name="Shape 8"/>
+          <p:cNvSpPr/>
+          <p:nvPr/>
+        </p:nvSpPr>
+        <p:spPr>
+          <a:xfrm>
+            <a:off x="1014984" y="2932938"/>
+            <a:ext cx="365760" cy="365760"/>
+          </a:xfrm>
+          <a:prstGeom prst="ellipse">
+            <a:avLst/>
+          </a:prstGeom>
+          <a:solidFill>
+            <a:srgbClr val="B04A2F"/>
+          </a:solidFill>
+          <a:ln w="12700">
+            <a:solidFill>
+              <a:srgbClr val="333333"/>
+            </a:solidFill>
+            <a:prstDash val="solid"/>
+          </a:ln>
+        </p:spPr>
+      </p:sp>
+      <p:sp>
+        <p:nvSpPr>
+          <p:cNvPr id="11" name="Text 9"/>
+          <p:cNvSpPr txBox="1"/>
+          <p:nvPr/>
+        </p:nvSpPr>
+        <p:spPr>
+          <a:xfrm>
+            <a:off x="1014984" y="2932938"/>
+            <a:ext cx="365760" cy="365760"/>
+          </a:xfrm>
+          <a:prstGeom prst="rect">
+            <a:avLst/>
+          </a:prstGeom>
+          <a:noFill/>
+          <a:ln/>
+        </p:spPr>
+        <p:txBody>
+          <a:bodyPr wrap="square" lIns="0" tIns="0" rIns="0" bIns="0" rtlCol="0" anchor="ctr"/>
+          <a:lstStyle/>
+          <a:p>
+            <a:pPr algn="ctr" indent="0" marL="0">
+              <a:buNone/>
+            </a:pPr>
+            <a:r>
+              <a:rPr lang="en-US" sz="1300" b="1" dirty="0">
+                <a:solidFill>
+                  <a:srgbClr val="FFFFFF"/>
+                </a:solidFill>
+                <a:latin typeface="Yu Gothic" pitchFamily="34" charset="0"/>
+                <a:ea typeface="Yu Gothic" pitchFamily="34" charset="-122"/>
+                <a:cs typeface="Yu Gothic" pitchFamily="34" charset="-120"/>
+              </a:rPr>
+              <a:t>2</a:t>
+            </a:r>
+            <a:endParaRPr lang="en-US" sz="1300" dirty="0"/>
+          </a:p>
+        </p:txBody>
+      </p:sp>
+      <p:sp>
+        <p:nvSpPr>
+          <p:cNvPr id="12" name="Text 10"/>
+          <p:cNvSpPr txBox="1"/>
+          <p:nvPr/>
+        </p:nvSpPr>
+        <p:spPr>
+          <a:xfrm>
+            <a:off x="1600200" y="2756916"/>
+            <a:ext cx="3182112" cy="717804"/>
+          </a:xfrm>
+          <a:prstGeom prst="rect">
+            <a:avLst/>
+          </a:prstGeom>
+          <a:noFill/>
+          <a:ln/>
+        </p:spPr>
+        <p:txBody>
+          <a:bodyPr wrap="square" lIns="0" tIns="0" rIns="0" bIns="0" rtlCol="0" anchor="ctr"/>
+          <a:lstStyle/>
+          <a:p>
+            <a:pPr indent="0" marL="0">
+              <a:buNone/>
+            </a:pPr>
+            <a:r>
+              <a:rPr lang="en-US" sz="1450" b="1" dirty="0">
+                <a:solidFill>
+                  <a:srgbClr val="23201D"/>
+                </a:solidFill>
+                <a:latin typeface="Yu Gothic" pitchFamily="34" charset="0"/>
+                <a:ea typeface="Yu Gothic" pitchFamily="34" charset="-122"/>
+                <a:cs typeface="Yu Gothic" pitchFamily="34" charset="-120"/>
+              </a:rPr>
+              <a:t>社員が使える文書テンプレート 3種</a:t>
+            </a:r>
+            <a:endParaRPr lang="en-US" sz="1450" dirty="0"/>
+          </a:p>
+        </p:txBody>
+      </p:sp>
+      <p:sp>
+        <p:nvSpPr>
+          <p:cNvPr id="13" name="Text 11"/>
+          <p:cNvSpPr txBox="1"/>
+          <p:nvPr/>
+        </p:nvSpPr>
+        <p:spPr>
+          <a:xfrm>
+            <a:off x="4888382" y="2756916"/>
+            <a:ext cx="6267298" cy="717804"/>
+          </a:xfrm>
+          <a:prstGeom prst="rect">
+            <a:avLst/>
+          </a:prstGeom>
+          <a:noFill/>
+          <a:ln/>
+        </p:spPr>
+        <p:txBody>
+          <a:bodyPr wrap="square" lIns="0" tIns="0" rIns="0" bIns="0" rtlCol="0" anchor="ctr"/>
+          <a:lstStyle/>
+          <a:p>
+            <a:pPr indent="0" marL="0">
+              <a:lnSpc>
+                <a:spcPct val="130000"/>
+              </a:lnSpc>
+              <a:buNone/>
+            </a:pPr>
+            <a:r>
+              <a:rPr lang="en-US" sz="1200" dirty="0">
+                <a:solidFill>
+                  <a:srgbClr val="5A534A"/>
+                </a:solidFill>
+                <a:latin typeface="Yu Gothic" pitchFamily="34" charset="0"/>
+                <a:ea typeface="Yu Gothic" pitchFamily="34" charset="-122"/>
+                <a:cs typeface="Yu Gothic" pitchFamily="34" charset="-120"/>
+              </a:rPr>
+              <a:t>すでに1名に使っていただいています</a:t>
+            </a:r>
+            <a:endParaRPr lang="en-US" sz="1200" dirty="0"/>
+          </a:p>
+        </p:txBody>
+      </p:sp>
+      <p:sp>
+        <p:nvSpPr>
+          <p:cNvPr id="14" name="Shape 12"/>
+          <p:cNvSpPr/>
+          <p:nvPr/>
+        </p:nvSpPr>
+        <p:spPr>
+          <a:xfrm>
+            <a:off x="777240" y="3675888"/>
+            <a:ext cx="10607040" cy="864108"/>
+          </a:xfrm>
+          <a:prstGeom prst="rect">
+            <a:avLst/>
+          </a:prstGeom>
+          <a:solidFill>
+            <a:srgbClr val="FFFFFF"/>
+          </a:solidFill>
+          <a:ln w="12700">
+            <a:solidFill>
+              <a:srgbClr val="EDE7DB"/>
+            </a:solidFill>
+            <a:prstDash val="solid"/>
+          </a:ln>
+        </p:spPr>
+      </p:sp>
+      <p:sp>
+        <p:nvSpPr>
+          <p:cNvPr id="15" name="Shape 13"/>
+          <p:cNvSpPr/>
+          <p:nvPr/>
+        </p:nvSpPr>
+        <p:spPr>
+          <a:xfrm>
+            <a:off x="1014984" y="3925062"/>
+            <a:ext cx="365760" cy="365760"/>
+          </a:xfrm>
+          <a:prstGeom prst="ellipse">
+            <a:avLst/>
+          </a:prstGeom>
+          <a:solidFill>
+            <a:srgbClr val="B04A2F"/>
+          </a:solidFill>
+          <a:ln w="12700">
+            <a:solidFill>
+              <a:srgbClr val="333333"/>
+            </a:solidFill>
+            <a:prstDash val="solid"/>
+          </a:ln>
+        </p:spPr>
+      </p:sp>
+      <p:sp>
+        <p:nvSpPr>
+          <p:cNvPr id="16" name="Text 14"/>
+          <p:cNvSpPr txBox="1"/>
+          <p:nvPr/>
+        </p:nvSpPr>
+        <p:spPr>
+          <a:xfrm>
+            <a:off x="1014984" y="3925062"/>
+            <a:ext cx="365760" cy="365760"/>
+          </a:xfrm>
+          <a:prstGeom prst="rect">
+            <a:avLst/>
+          </a:prstGeom>
+          <a:noFill/>
+          <a:ln/>
+        </p:spPr>
+        <p:txBody>
+          <a:bodyPr wrap="square" lIns="0" tIns="0" rIns="0" bIns="0" rtlCol="0" anchor="ctr"/>
+          <a:lstStyle/>
+          <a:p>
+            <a:pPr algn="ctr" indent="0" marL="0">
+              <a:buNone/>
+            </a:pPr>
+            <a:r>
+              <a:rPr lang="en-US" sz="1300" b="1" dirty="0">
+                <a:solidFill>
+                  <a:srgbClr val="FFFFFF"/>
+                </a:solidFill>
+                <a:latin typeface="Yu Gothic" pitchFamily="34" charset="0"/>
+                <a:ea typeface="Yu Gothic" pitchFamily="34" charset="-122"/>
+                <a:cs typeface="Yu Gothic" pitchFamily="34" charset="-120"/>
+              </a:rPr>
+              <a:t>3</a:t>
+            </a:r>
+            <a:endParaRPr lang="en-US" sz="1300" dirty="0"/>
+          </a:p>
+        </p:txBody>
+      </p:sp>
+      <p:sp>
+        <p:nvSpPr>
+          <p:cNvPr id="17" name="Text 15"/>
+          <p:cNvSpPr txBox="1"/>
+          <p:nvPr/>
+        </p:nvSpPr>
+        <p:spPr>
+          <a:xfrm>
+            <a:off x="1600200" y="3749040"/>
+            <a:ext cx="3182112" cy="717804"/>
+          </a:xfrm>
+          <a:prstGeom prst="rect">
+            <a:avLst/>
+          </a:prstGeom>
+          <a:noFill/>
+          <a:ln/>
+        </p:spPr>
+        <p:txBody>
+          <a:bodyPr wrap="square" lIns="0" tIns="0" rIns="0" bIns="0" rtlCol="0" anchor="ctr"/>
+          <a:lstStyle/>
+          <a:p>
+            <a:pPr indent="0" marL="0">
+              <a:buNone/>
+            </a:pPr>
+            <a:r>
+              <a:rPr lang="en-US" sz="1450" b="1" dirty="0">
+                <a:solidFill>
+                  <a:srgbClr val="23201D"/>
+                </a:solidFill>
+                <a:latin typeface="Yu Gothic" pitchFamily="34" charset="0"/>
+                <a:ea typeface="Yu Gothic" pitchFamily="34" charset="-122"/>
+                <a:cs typeface="Yu Gothic" pitchFamily="34" charset="-120"/>
+              </a:rPr>
+              <a:t>月次レポートの雛形</a:t>
+            </a:r>
+            <a:endParaRPr lang="en-US" sz="1450" dirty="0"/>
+          </a:p>
+        </p:txBody>
+      </p:sp>
+      <p:sp>
+        <p:nvSpPr>
+          <p:cNvPr id="18" name="Text 16"/>
+          <p:cNvSpPr txBox="1"/>
+          <p:nvPr/>
+        </p:nvSpPr>
+        <p:spPr>
+          <a:xfrm>
+            <a:off x="4888382" y="3749040"/>
+            <a:ext cx="6267298" cy="717804"/>
+          </a:xfrm>
+          <a:prstGeom prst="rect">
+            <a:avLst/>
+          </a:prstGeom>
+          <a:noFill/>
+          <a:ln/>
+        </p:spPr>
+        <p:txBody>
+          <a:bodyPr wrap="square" lIns="0" tIns="0" rIns="0" bIns="0" rtlCol="0" anchor="ctr"/>
+          <a:lstStyle/>
+          <a:p>
+            <a:pPr indent="0" marL="0">
+              <a:lnSpc>
+                <a:spcPct val="130000"/>
+              </a:lnSpc>
+              <a:buNone/>
+            </a:pPr>
+            <a:r>
+              <a:rPr lang="en-US" sz="1200" dirty="0">
+                <a:solidFill>
+                  <a:srgbClr val="5A534A"/>
+                </a:solidFill>
+                <a:latin typeface="Yu Gothic" pitchFamily="34" charset="0"/>
+                <a:ea typeface="Yu Gothic" pitchFamily="34" charset="-122"/>
+                <a:cs typeface="Yu Gothic" pitchFamily="34" charset="-120"/>
+              </a:rPr>
+              <a:t>計算は表計算、意味はAI、と役割を分けてあります</a:t>
+            </a:r>
+            <a:endParaRPr lang="en-US" sz="1200" dirty="0"/>
+          </a:p>
+        </p:txBody>
+      </p:sp>
+      <p:sp>
+        <p:nvSpPr>
+          <p:cNvPr id="19" name="Shape 17"/>
+          <p:cNvSpPr/>
+          <p:nvPr/>
+        </p:nvSpPr>
+        <p:spPr>
+          <a:xfrm>
+            <a:off x="777240" y="4668012"/>
+            <a:ext cx="10607040" cy="864108"/>
+          </a:xfrm>
+          <a:prstGeom prst="rect">
+            <a:avLst/>
+          </a:prstGeom>
+          <a:solidFill>
+            <a:srgbClr val="FFFFFF"/>
+          </a:solidFill>
+          <a:ln w="12700">
+            <a:solidFill>
+              <a:srgbClr val="EDE7DB"/>
+            </a:solidFill>
+            <a:prstDash val="solid"/>
+          </a:ln>
+        </p:spPr>
+      </p:sp>
+      <p:sp>
+        <p:nvSpPr>
+          <p:cNvPr id="20" name="Shape 18"/>
+          <p:cNvSpPr/>
+          <p:nvPr/>
+        </p:nvSpPr>
+        <p:spPr>
+          <a:xfrm>
+            <a:off x="1014984" y="4917186"/>
+            <a:ext cx="365760" cy="365760"/>
+          </a:xfrm>
+          <a:prstGeom prst="ellipse">
+            <a:avLst/>
+          </a:prstGeom>
+          <a:solidFill>
+            <a:srgbClr val="B04A2F"/>
+          </a:solidFill>
+          <a:ln w="12700">
+            <a:solidFill>
+              <a:srgbClr val="333333"/>
+            </a:solidFill>
+            <a:prstDash val="solid"/>
+          </a:ln>
+        </p:spPr>
+      </p:sp>
+      <p:sp>
+        <p:nvSpPr>
+          <p:cNvPr id="21" name="Text 19"/>
+          <p:cNvSpPr txBox="1"/>
+          <p:nvPr/>
+        </p:nvSpPr>
+        <p:spPr>
+          <a:xfrm>
+            <a:off x="1014984" y="4917186"/>
+            <a:ext cx="365760" cy="365760"/>
+          </a:xfrm>
+          <a:prstGeom prst="rect">
+            <a:avLst/>
+          </a:prstGeom>
+          <a:noFill/>
+          <a:ln/>
+        </p:spPr>
+        <p:txBody>
+          <a:bodyPr wrap="square" lIns="0" tIns="0" rIns="0" bIns="0" rtlCol="0" anchor="ctr"/>
+          <a:lstStyle/>
+          <a:p>
+            <a:pPr algn="ctr" indent="0" marL="0">
+              <a:buNone/>
+            </a:pPr>
+            <a:r>
+              <a:rPr lang="en-US" sz="1300" b="1" dirty="0">
+                <a:solidFill>
+                  <a:srgbClr val="FFFFFF"/>
+                </a:solidFill>
+                <a:latin typeface="Yu Gothic" pitchFamily="34" charset="0"/>
+                <a:ea typeface="Yu Gothic" pitchFamily="34" charset="-122"/>
+                <a:cs typeface="Yu Gothic" pitchFamily="34" charset="-120"/>
+              </a:rPr>
+              <a:t>4</a:t>
+            </a:r>
+            <a:endParaRPr lang="en-US" sz="1300" dirty="0"/>
+          </a:p>
+        </p:txBody>
+      </p:sp>
+      <p:sp>
+        <p:nvSpPr>
+          <p:cNvPr id="22" name="Text 20"/>
+          <p:cNvSpPr txBox="1"/>
+          <p:nvPr/>
+        </p:nvSpPr>
+        <p:spPr>
+          <a:xfrm>
+            <a:off x="1600200" y="4741164"/>
+            <a:ext cx="3182112" cy="717804"/>
+          </a:xfrm>
+          <a:prstGeom prst="rect">
+            <a:avLst/>
+          </a:prstGeom>
+          <a:noFill/>
+          <a:ln/>
+        </p:spPr>
+        <p:txBody>
+          <a:bodyPr wrap="square" lIns="0" tIns="0" rIns="0" bIns="0" rtlCol="0" anchor="ctr"/>
+          <a:lstStyle/>
+          <a:p>
+            <a:pPr indent="0" marL="0">
+              <a:buNone/>
+            </a:pPr>
+            <a:r>
+              <a:rPr lang="en-US" sz="1450" b="1" dirty="0">
+                <a:solidFill>
+                  <a:srgbClr val="23201D"/>
+                </a:solidFill>
+                <a:latin typeface="Yu Gothic" pitchFamily="34" charset="0"/>
+                <a:ea typeface="Yu Gothic" pitchFamily="34" charset="-122"/>
+                <a:cs typeface="Yu Gothic" pitchFamily="34" charset="-120"/>
+              </a:rPr>
+              <a:t>自社資料を読んで答えるAI 1つ</a:t>
+            </a:r>
+            <a:endParaRPr lang="en-US" sz="1450" dirty="0"/>
+          </a:p>
+        </p:txBody>
+      </p:sp>
+      <p:sp>
+        <p:nvSpPr>
+          <p:cNvPr id="23" name="Text 21"/>
+          <p:cNvSpPr txBox="1"/>
+          <p:nvPr/>
+        </p:nvSpPr>
+        <p:spPr>
+          <a:xfrm>
+            <a:off x="4888382" y="4741164"/>
+            <a:ext cx="6267298" cy="717804"/>
+          </a:xfrm>
+          <a:prstGeom prst="rect">
+            <a:avLst/>
+          </a:prstGeom>
+          <a:noFill/>
+          <a:ln/>
+        </p:spPr>
+        <p:txBody>
+          <a:bodyPr wrap="square" lIns="0" tIns="0" rIns="0" bIns="0" rtlCol="0" anchor="ctr"/>
+          <a:lstStyle/>
+          <a:p>
+            <a:pPr indent="0" marL="0">
+              <a:lnSpc>
+                <a:spcPct val="130000"/>
+              </a:lnSpc>
+              <a:buNone/>
+            </a:pPr>
+            <a:r>
+              <a:rPr lang="en-US" sz="1200" dirty="0">
+                <a:solidFill>
+                  <a:srgbClr val="5A534A"/>
+                </a:solidFill>
+                <a:latin typeface="Yu Gothic" pitchFamily="34" charset="0"/>
+                <a:ea typeface="Yu Gothic" pitchFamily="34" charset="-122"/>
+                <a:cs typeface="Yu Gothic" pitchFamily="34" charset="-120"/>
+              </a:rPr>
+              <a:t>資料にないことは答えない設定にしてあります</a:t>
+            </a:r>
+            <a:endParaRPr lang="en-US" sz="1200" dirty="0"/>
+          </a:p>
+        </p:txBody>
+      </p:sp>
+      <p:sp>
+        <p:nvSpPr>
+          <p:cNvPr id="24" name="Text 22"/>
+          <p:cNvSpPr txBox="1"/>
+          <p:nvPr/>
+        </p:nvSpPr>
+        <p:spPr>
+          <a:xfrm>
+            <a:off x="777240" y="5669280"/>
+            <a:ext cx="10607040" cy="411480"/>
+          </a:xfrm>
+          <a:prstGeom prst="rect">
+            <a:avLst/>
+          </a:prstGeom>
+          <a:noFill/>
+          <a:ln/>
+        </p:spPr>
+        <p:txBody>
+          <a:bodyPr wrap="square" lIns="0" tIns="0" rIns="0" bIns="0" rtlCol="0" anchor="ctr"/>
+          <a:lstStyle/>
+          <a:p>
+            <a:pPr indent="0" marL="0">
+              <a:buNone/>
+            </a:pPr>
+            <a:r>
+              <a:rPr lang="en-US" sz="1200" b="1" dirty="0">
+                <a:solidFill>
+                  <a:srgbClr val="B04A2F"/>
+                </a:solidFill>
+                <a:latin typeface="Yu Gothic" pitchFamily="34" charset="0"/>
+                <a:ea typeface="Yu Gothic" pitchFamily="34" charset="-122"/>
+                <a:cs typeface="Yu Gothic" pitchFamily="34" charset="-120"/>
+              </a:rPr>
+              <a:t>どれも、御社の実際の業務から作ったものです。よそから買ってきたものは1つもありません。</a:t>
+            </a:r>
+            <a:endParaRPr lang="en-US" sz="1200" dirty="0"/>
+          </a:p>
+        </p:txBody>
+      </p:sp>
+      <p:sp>
+        <p:nvSpPr>
+          <p:cNvPr id="25" name="Text 23"/>
+          <p:cNvSpPr txBox="1"/>
+          <p:nvPr/>
+        </p:nvSpPr>
+        <p:spPr>
+          <a:xfrm>
+            <a:off x="777240" y="6382512"/>
+            <a:ext cx="7424928" cy="256032"/>
           </a:xfrm>
           <a:prstGeom prst="rect">
             <a:avLst/>
@@ -3981,14 +5501,14 @@
       </p:sp>
       <p:sp>
         <p:nvSpPr>
-          <p:cNvPr id="21" name="Text 19"/>
-          <p:cNvSpPr txBox="1"/>
-          <p:nvPr/>
-        </p:nvSpPr>
-        <p:spPr>
-          <a:xfrm>
-            <a:off x="8202168" y="6355080"/>
-            <a:ext cx="3182112" cy="274320"/>
+          <p:cNvPr id="26" name="Text 24"/>
+          <p:cNvSpPr txBox="1"/>
+          <p:nvPr/>
+        </p:nvSpPr>
+        <p:spPr>
+          <a:xfrm>
+            <a:off x="8202168" y="6382512"/>
+            <a:ext cx="3182112" cy="256032"/>
           </a:xfrm>
           <a:prstGeom prst="rect">
             <a:avLst/>
@@ -4012,7 +5532,7 @@
                 <a:ea typeface="Yu Gothic" pitchFamily="34" charset="-122"/>
                 <a:cs typeface="Yu Gothic" pitchFamily="34" charset="-120"/>
               </a:rPr>
-              <a:t>実演</a:t>
+              <a:t>考え方</a:t>
             </a:r>
             <a:endParaRPr lang="en-US" sz="900" dirty="0"/>
           </a:p>
@@ -4058,7 +5578,7 @@
         </p:nvSpPr>
         <p:spPr>
           <a:xfrm>
-            <a:off x="777240" y="640080"/>
+            <a:off x="777240" y="566928"/>
             <a:ext cx="10607040" cy="274320"/>
           </a:xfrm>
           <a:prstGeom prst="rect">
@@ -4083,7 +5603,7 @@
                 <a:ea typeface="Yu Gothic" pitchFamily="34" charset="-122"/>
                 <a:cs typeface="Yu Gothic" pitchFamily="34" charset="-120"/>
               </a:rPr>
-              <a:t>演習</a:t>
+              <a:t>あてはめ</a:t>
             </a:r>
             <a:endParaRPr lang="en-US" sz="1100" dirty="0"/>
           </a:p>
@@ -4097,7 +5617,7 @@
         </p:nvSpPr>
         <p:spPr>
           <a:xfrm>
-            <a:off x="777240" y="960120"/>
+            <a:off x="777240" y="896112"/>
             <a:ext cx="10607040" cy="640080"/>
           </a:xfrm>
           <a:prstGeom prst="rect">
@@ -4114,7 +5634,7 @@
               <a:buNone/>
             </a:pPr>
             <a:r>
-              <a:rPr lang="en-US" sz="2700" b="1" dirty="0">
+              <a:rPr lang="en-US" sz="2600" b="1" dirty="0">
                 <a:solidFill>
                   <a:srgbClr val="23201D"/>
                 </a:solidFill>
@@ -4122,61 +5642,22 @@
                 <a:ea typeface="Yu Gothic" pitchFamily="34" charset="-122"/>
                 <a:cs typeface="Yu Gothic" pitchFamily="34" charset="-120"/>
               </a:rPr>
-              <a:t>今日の流れ</a:t>
-            </a:r>
-            <a:endParaRPr lang="en-US" sz="2700" dirty="0"/>
-          </a:p>
-        </p:txBody>
-      </p:sp>
-      <p:sp>
-        <p:nvSpPr>
-          <p:cNvPr id="4" name="Text 2"/>
-          <p:cNvSpPr txBox="1"/>
-          <p:nvPr/>
-        </p:nvSpPr>
-        <p:spPr>
-          <a:xfrm>
-            <a:off x="777240" y="1627632"/>
-            <a:ext cx="10607040" cy="320040"/>
-          </a:xfrm>
-          <a:prstGeom prst="rect">
-            <a:avLst/>
-          </a:prstGeom>
-          <a:noFill/>
-          <a:ln/>
-        </p:spPr>
-        <p:txBody>
-          <a:bodyPr wrap="square" lIns="0" tIns="0" rIns="0" bIns="0" rtlCol="0" anchor="ctr"/>
-          <a:lstStyle/>
-          <a:p>
-            <a:pPr indent="0" marL="0">
-              <a:buNone/>
-            </a:pPr>
-            <a:r>
-              <a:rPr lang="en-US" sz="1250" b="1" dirty="0">
-                <a:solidFill>
-                  <a:srgbClr val="2F4F6B"/>
-                </a:solidFill>
-                <a:latin typeface="Yu Gothic" pitchFamily="34" charset="0"/>
-                <a:ea typeface="Yu Gothic" pitchFamily="34" charset="-122"/>
-                <a:cs typeface="Yu Gothic" pitchFamily="34" charset="-120"/>
-              </a:rPr>
-              <a:t>55分。操作するのはご自身です。</a:t>
-            </a:r>
-            <a:endParaRPr lang="en-US" sz="1250" dirty="0"/>
-          </a:p>
-        </p:txBody>
-      </p:sp>
-      <p:sp>
-        <p:nvSpPr>
-          <p:cNvPr id="5" name="Shape 3"/>
+              <a:t>12か月の進め方</a:t>
+            </a:r>
+            <a:endParaRPr lang="en-US" sz="2600" dirty="0"/>
+          </a:p>
+        </p:txBody>
+      </p:sp>
+      <p:sp>
+        <p:nvSpPr>
+          <p:cNvPr id="4" name="Shape 2"/>
           <p:cNvSpPr/>
           <p:nvPr/>
         </p:nvSpPr>
         <p:spPr>
           <a:xfrm>
-            <a:off x="777240" y="2240280"/>
-            <a:ext cx="3383280" cy="2697480"/>
+            <a:off x="777240" y="1691640"/>
+            <a:ext cx="10607040" cy="3401568"/>
           </a:xfrm>
           <a:prstGeom prst="rect">
             <a:avLst/>
@@ -4184,9 +5665,9 @@
           <a:solidFill>
             <a:srgbClr val="FFFFFF"/>
           </a:solidFill>
-          <a:ln w="12700">
+          <a:ln w="15875">
             <a:solidFill>
-              <a:srgbClr val="EDE7DB"/>
+              <a:srgbClr val="2F4F6B"/>
             </a:solidFill>
             <a:prstDash val="solid"/>
           </a:ln>
@@ -4194,16 +5675,16 @@
       </p:sp>
       <p:sp>
         <p:nvSpPr>
-          <p:cNvPr id="6" name="Shape 4"/>
+          <p:cNvPr id="5" name="Shape 3"/>
           <p:cNvSpPr/>
           <p:nvPr/>
         </p:nvSpPr>
         <p:spPr>
           <a:xfrm>
-            <a:off x="1051560" y="2487168"/>
-            <a:ext cx="438912" cy="438912"/>
-          </a:xfrm>
-          <a:prstGeom prst="ellipse">
+            <a:off x="777240" y="1691640"/>
+            <a:ext cx="10607040" cy="457200"/>
+          </a:xfrm>
+          <a:prstGeom prst="rect">
             <a:avLst/>
           </a:prstGeom>
           <a:solidFill>
@@ -4211,7 +5692,7 @@
           </a:solidFill>
           <a:ln w="12700">
             <a:solidFill>
-              <a:srgbClr val="2F4F6B"/>
+              <a:srgbClr val="333333"/>
             </a:solidFill>
             <a:prstDash val="solid"/>
           </a:ln>
@@ -4219,40 +5700,82 @@
       </p:sp>
       <p:sp>
         <p:nvSpPr>
+          <p:cNvPr id="6" name="Text 4"/>
+          <p:cNvSpPr txBox="1"/>
+          <p:nvPr/>
+        </p:nvSpPr>
+        <p:spPr>
+          <a:xfrm>
+            <a:off x="1051560" y="1709928"/>
+            <a:ext cx="10058400" cy="420624"/>
+          </a:xfrm>
+          <a:prstGeom prst="rect">
+            <a:avLst/>
+          </a:prstGeom>
+          <a:noFill/>
+          <a:ln/>
+        </p:spPr>
+        <p:txBody>
+          <a:bodyPr wrap="square" lIns="0" tIns="0" rIns="0" bIns="0" rtlCol="0" anchor="ctr"/>
+          <a:lstStyle/>
+          <a:p>
+            <a:pPr indent="0" marL="0">
+              <a:buNone/>
+            </a:pPr>
+            <a:r>
+              <a:rPr lang="en-US" sz="1200" b="1" dirty="0">
+                <a:solidFill>
+                  <a:srgbClr val="FFFFFF"/>
+                </a:solidFill>
+                <a:latin typeface="Yu Gothic" pitchFamily="34" charset="0"/>
+                <a:ea typeface="Yu Gothic" pitchFamily="34" charset="-122"/>
+                <a:cs typeface="Yu Gothic" pitchFamily="34" charset="-120"/>
+              </a:rPr>
+              <a:t>AI化ロードマップ（各期に担当者と「やめる基準」を必ず書く）</a:t>
+            </a:r>
+            <a:endParaRPr lang="en-US" sz="1200" dirty="0"/>
+          </a:p>
+        </p:txBody>
+      </p:sp>
+      <p:sp>
+        <p:nvSpPr>
           <p:cNvPr id="7" name="Text 5"/>
           <p:cNvSpPr txBox="1"/>
           <p:nvPr/>
         </p:nvSpPr>
         <p:spPr>
           <a:xfrm>
-            <a:off x="1051560" y="2487168"/>
-            <a:ext cx="438912" cy="438912"/>
-          </a:xfrm>
-          <a:prstGeom prst="rect">
-            <a:avLst/>
-          </a:prstGeom>
-          <a:noFill/>
-          <a:ln/>
-        </p:spPr>
-        <p:txBody>
-          <a:bodyPr wrap="square" lIns="0" tIns="0" rIns="0" bIns="0" rtlCol="0" anchor="ctr"/>
-          <a:lstStyle/>
-          <a:p>
-            <a:pPr algn="ctr" indent="0" marL="0">
-              <a:buNone/>
-            </a:pPr>
-            <a:r>
-              <a:rPr lang="en-US" sz="1400" b="1" dirty="0">
-                <a:solidFill>
-                  <a:srgbClr val="FFFFFF"/>
-                </a:solidFill>
-                <a:latin typeface="Yu Gothic" pitchFamily="34" charset="0"/>
-                <a:ea typeface="Yu Gothic" pitchFamily="34" charset="-122"/>
-                <a:cs typeface="Yu Gothic" pitchFamily="34" charset="-120"/>
-              </a:rPr>
-              <a:t>1</a:t>
-            </a:r>
-            <a:endParaRPr lang="en-US" sz="1400" dirty="0"/>
+            <a:off x="1097280" y="2331720"/>
+            <a:ext cx="2057400" cy="530352"/>
+          </a:xfrm>
+          <a:prstGeom prst="rect">
+            <a:avLst/>
+          </a:prstGeom>
+          <a:noFill/>
+          <a:ln/>
+        </p:spPr>
+        <p:txBody>
+          <a:bodyPr wrap="square" lIns="0" tIns="0" rIns="0" bIns="0" rtlCol="0" anchor="ctr"/>
+          <a:lstStyle/>
+          <a:p>
+            <a:pPr indent="0" marL="0">
+              <a:lnSpc>
+                <a:spcPct val="110000"/>
+              </a:lnSpc>
+              <a:buNone/>
+            </a:pPr>
+            <a:r>
+              <a:rPr lang="en-US" sz="1100" b="1" dirty="0">
+                <a:solidFill>
+                  <a:srgbClr val="2F4F6B"/>
+                </a:solidFill>
+                <a:latin typeface="Yu Gothic" pitchFamily="34" charset="0"/>
+                <a:ea typeface="Yu Gothic" pitchFamily="34" charset="-122"/>
+                <a:cs typeface="Yu Gothic" pitchFamily="34" charset="-120"/>
+              </a:rPr>
+              <a:t>0〜3か月</a:t>
+            </a:r>
+            <a:endParaRPr lang="en-US" sz="1100" dirty="0"/>
           </a:p>
         </p:txBody>
       </p:sp>
@@ -4264,8 +5787,8 @@
         </p:nvSpPr>
         <p:spPr>
           <a:xfrm>
-            <a:off x="1051560" y="3035808"/>
-            <a:ext cx="2834640" cy="777240"/>
+            <a:off x="3291840" y="2331720"/>
+            <a:ext cx="7772400" cy="530352"/>
           </a:xfrm>
           <a:prstGeom prst="rect">
             <a:avLst/>
@@ -4279,22 +5802,22 @@
           <a:p>
             <a:pPr indent="0" marL="0">
               <a:lnSpc>
-                <a:spcPct val="125000"/>
+                <a:spcPct val="115000"/>
               </a:lnSpc>
               <a:buNone/>
             </a:pPr>
             <a:r>
-              <a:rPr lang="en-US" sz="1500" b="1" dirty="0">
+              <a:rPr lang="en-US" sz="1150" dirty="0">
                 <a:solidFill>
                   <a:srgbClr val="23201D"/>
                 </a:solidFill>
-                <a:latin typeface="Yu Gothic" pitchFamily="34" charset="0"/>
-                <a:ea typeface="Yu Gothic" pitchFamily="34" charset="-122"/>
-                <a:cs typeface="Yu Gothic" pitchFamily="34" charset="-120"/>
-              </a:rPr>
-              <a:t>作ったものをお見せする</a:t>
-            </a:r>
-            <a:endParaRPr lang="en-US" sz="1500" dirty="0"/>
+                <a:latin typeface="Consolas" pitchFamily="34" charset="0"/>
+                <a:ea typeface="Consolas" pitchFamily="34" charset="-122"/>
+                <a:cs typeface="Consolas" pitchFamily="34" charset="-120"/>
+              </a:rPr>
+              <a:t>定着させる。いま動いているものを、毎日使う状態にする。増やさない</a:t>
+            </a:r>
+            <a:endParaRPr lang="en-US" sz="1150" dirty="0"/>
           </a:p>
         </p:txBody>
       </p:sp>
@@ -4306,8 +5829,8 @@
         </p:nvSpPr>
         <p:spPr>
           <a:xfrm>
-            <a:off x="1051560" y="3822192"/>
-            <a:ext cx="2834640" cy="960120"/>
+            <a:off x="1097280" y="2862072"/>
+            <a:ext cx="2057400" cy="530352"/>
           </a:xfrm>
           <a:prstGeom prst="rect">
             <a:avLst/>
@@ -4321,12 +5844,348 @@
           <a:p>
             <a:pPr indent="0" marL="0">
               <a:lnSpc>
-                <a:spcPct val="130000"/>
+                <a:spcPct val="110000"/>
               </a:lnSpc>
               <a:buNone/>
             </a:pPr>
             <a:r>
-              <a:rPr lang="en-US" sz="1200" dirty="0">
+              <a:rPr lang="en-US" sz="1100" b="1" dirty="0">
+                <a:solidFill>
+                  <a:srgbClr val="2F4F6B"/>
+                </a:solidFill>
+                <a:latin typeface="Yu Gothic" pitchFamily="34" charset="0"/>
+                <a:ea typeface="Yu Gothic" pitchFamily="34" charset="-122"/>
+                <a:cs typeface="Yu Gothic" pitchFamily="34" charset="-120"/>
+              </a:rPr>
+              <a:t>4〜6か月</a:t>
+            </a:r>
+            <a:endParaRPr lang="en-US" sz="1100" dirty="0"/>
+          </a:p>
+        </p:txBody>
+      </p:sp>
+      <p:sp>
+        <p:nvSpPr>
+          <p:cNvPr id="10" name="Text 8"/>
+          <p:cNvSpPr txBox="1"/>
+          <p:nvPr/>
+        </p:nvSpPr>
+        <p:spPr>
+          <a:xfrm>
+            <a:off x="3291840" y="2862072"/>
+            <a:ext cx="7772400" cy="530352"/>
+          </a:xfrm>
+          <a:prstGeom prst="rect">
+            <a:avLst/>
+          </a:prstGeom>
+          <a:noFill/>
+          <a:ln/>
+        </p:spPr>
+        <p:txBody>
+          <a:bodyPr wrap="square" lIns="0" tIns="0" rIns="0" bIns="0" rtlCol="0" anchor="ctr"/>
+          <a:lstStyle/>
+          <a:p>
+            <a:pPr indent="0" marL="0">
+              <a:lnSpc>
+                <a:spcPct val="115000"/>
+              </a:lnSpc>
+              <a:buNone/>
+            </a:pPr>
+            <a:r>
+              <a:rPr lang="en-US" sz="1150" dirty="0">
+                <a:solidFill>
+                  <a:srgbClr val="23201D"/>
+                </a:solidFill>
+                <a:latin typeface="Consolas" pitchFamily="34" charset="0"/>
+                <a:ea typeface="Consolas" pitchFamily="34" charset="-122"/>
+                <a:cs typeface="Consolas" pitchFamily="34" charset="-120"/>
+              </a:rPr>
+              <a:t>広げる。使う人と業務を増やす。渡す相手を1名ずつ</a:t>
+            </a:r>
+            <a:endParaRPr lang="en-US" sz="1150" dirty="0"/>
+          </a:p>
+        </p:txBody>
+      </p:sp>
+      <p:sp>
+        <p:nvSpPr>
+          <p:cNvPr id="11" name="Text 9"/>
+          <p:cNvSpPr txBox="1"/>
+          <p:nvPr/>
+        </p:nvSpPr>
+        <p:spPr>
+          <a:xfrm>
+            <a:off x="1097280" y="3392424"/>
+            <a:ext cx="2057400" cy="530352"/>
+          </a:xfrm>
+          <a:prstGeom prst="rect">
+            <a:avLst/>
+          </a:prstGeom>
+          <a:noFill/>
+          <a:ln/>
+        </p:spPr>
+        <p:txBody>
+          <a:bodyPr wrap="square" lIns="0" tIns="0" rIns="0" bIns="0" rtlCol="0" anchor="ctr"/>
+          <a:lstStyle/>
+          <a:p>
+            <a:pPr indent="0" marL="0">
+              <a:lnSpc>
+                <a:spcPct val="110000"/>
+              </a:lnSpc>
+              <a:buNone/>
+            </a:pPr>
+            <a:r>
+              <a:rPr lang="en-US" sz="1100" b="1" dirty="0">
+                <a:solidFill>
+                  <a:srgbClr val="2F4F6B"/>
+                </a:solidFill>
+                <a:latin typeface="Yu Gothic" pitchFamily="34" charset="0"/>
+                <a:ea typeface="Yu Gothic" pitchFamily="34" charset="-122"/>
+                <a:cs typeface="Yu Gothic" pitchFamily="34" charset="-120"/>
+              </a:rPr>
+              <a:t>7〜9か月</a:t>
+            </a:r>
+            <a:endParaRPr lang="en-US" sz="1100" dirty="0"/>
+          </a:p>
+        </p:txBody>
+      </p:sp>
+      <p:sp>
+        <p:nvSpPr>
+          <p:cNvPr id="12" name="Text 10"/>
+          <p:cNvSpPr txBox="1"/>
+          <p:nvPr/>
+        </p:nvSpPr>
+        <p:spPr>
+          <a:xfrm>
+            <a:off x="3291840" y="3392424"/>
+            <a:ext cx="7772400" cy="530352"/>
+          </a:xfrm>
+          <a:prstGeom prst="rect">
+            <a:avLst/>
+          </a:prstGeom>
+          <a:noFill/>
+          <a:ln/>
+        </p:spPr>
+        <p:txBody>
+          <a:bodyPr wrap="square" lIns="0" tIns="0" rIns="0" bIns="0" rtlCol="0" anchor="ctr"/>
+          <a:lstStyle/>
+          <a:p>
+            <a:pPr indent="0" marL="0">
+              <a:lnSpc>
+                <a:spcPct val="115000"/>
+              </a:lnSpc>
+              <a:buNone/>
+            </a:pPr>
+            <a:r>
+              <a:rPr lang="en-US" sz="1150" dirty="0">
+                <a:solidFill>
+                  <a:srgbClr val="23201D"/>
+                </a:solidFill>
+                <a:latin typeface="Consolas" pitchFamily="34" charset="0"/>
+                <a:ea typeface="Consolas" pitchFamily="34" charset="-122"/>
+                <a:cs typeface="Consolas" pitchFamily="34" charset="-120"/>
+              </a:rPr>
+              <a:t>つなげる。手作業の転記をなくす。止まったら気づく仕組みも</a:t>
+            </a:r>
+            <a:endParaRPr lang="en-US" sz="1150" dirty="0"/>
+          </a:p>
+        </p:txBody>
+      </p:sp>
+      <p:sp>
+        <p:nvSpPr>
+          <p:cNvPr id="13" name="Text 11"/>
+          <p:cNvSpPr txBox="1"/>
+          <p:nvPr/>
+        </p:nvSpPr>
+        <p:spPr>
+          <a:xfrm>
+            <a:off x="1097280" y="3922776"/>
+            <a:ext cx="2057400" cy="530352"/>
+          </a:xfrm>
+          <a:prstGeom prst="rect">
+            <a:avLst/>
+          </a:prstGeom>
+          <a:noFill/>
+          <a:ln/>
+        </p:spPr>
+        <p:txBody>
+          <a:bodyPr wrap="square" lIns="0" tIns="0" rIns="0" bIns="0" rtlCol="0" anchor="ctr"/>
+          <a:lstStyle/>
+          <a:p>
+            <a:pPr indent="0" marL="0">
+              <a:lnSpc>
+                <a:spcPct val="110000"/>
+              </a:lnSpc>
+              <a:buNone/>
+            </a:pPr>
+            <a:r>
+              <a:rPr lang="en-US" sz="1100" b="1" dirty="0">
+                <a:solidFill>
+                  <a:srgbClr val="2F4F6B"/>
+                </a:solidFill>
+                <a:latin typeface="Yu Gothic" pitchFamily="34" charset="0"/>
+                <a:ea typeface="Yu Gothic" pitchFamily="34" charset="-122"/>
+                <a:cs typeface="Yu Gothic" pitchFamily="34" charset="-120"/>
+              </a:rPr>
+              <a:t>10〜12か月</a:t>
+            </a:r>
+            <a:endParaRPr lang="en-US" sz="1100" dirty="0"/>
+          </a:p>
+        </p:txBody>
+      </p:sp>
+      <p:sp>
+        <p:nvSpPr>
+          <p:cNvPr id="14" name="Text 12"/>
+          <p:cNvSpPr txBox="1"/>
+          <p:nvPr/>
+        </p:nvSpPr>
+        <p:spPr>
+          <a:xfrm>
+            <a:off x="3291840" y="3922776"/>
+            <a:ext cx="7772400" cy="530352"/>
+          </a:xfrm>
+          <a:prstGeom prst="rect">
+            <a:avLst/>
+          </a:prstGeom>
+          <a:noFill/>
+          <a:ln/>
+        </p:spPr>
+        <p:txBody>
+          <a:bodyPr wrap="square" lIns="0" tIns="0" rIns="0" bIns="0" rtlCol="0" anchor="ctr"/>
+          <a:lstStyle/>
+          <a:p>
+            <a:pPr indent="0" marL="0">
+              <a:lnSpc>
+                <a:spcPct val="115000"/>
+              </a:lnSpc>
+              <a:buNone/>
+            </a:pPr>
+            <a:r>
+              <a:rPr lang="en-US" sz="1150" dirty="0">
+                <a:solidFill>
+                  <a:srgbClr val="23201D"/>
+                </a:solidFill>
+                <a:latin typeface="Consolas" pitchFamily="34" charset="0"/>
+                <a:ea typeface="Consolas" pitchFamily="34" charset="-122"/>
+                <a:cs typeface="Consolas" pitchFamily="34" charset="-120"/>
+              </a:rPr>
+              <a:t>測る。品質と効果を数字にして、次の1年を決める</a:t>
+            </a:r>
+            <a:endParaRPr lang="en-US" sz="1150" dirty="0"/>
+          </a:p>
+        </p:txBody>
+      </p:sp>
+      <p:sp>
+        <p:nvSpPr>
+          <p:cNvPr id="15" name="Text 13"/>
+          <p:cNvSpPr txBox="1"/>
+          <p:nvPr/>
+        </p:nvSpPr>
+        <p:spPr>
+          <a:xfrm>
+            <a:off x="1097280" y="4453128"/>
+            <a:ext cx="2057400" cy="530352"/>
+          </a:xfrm>
+          <a:prstGeom prst="rect">
+            <a:avLst/>
+          </a:prstGeom>
+          <a:noFill/>
+          <a:ln/>
+        </p:spPr>
+        <p:txBody>
+          <a:bodyPr wrap="square" lIns="0" tIns="0" rIns="0" bIns="0" rtlCol="0" anchor="ctr"/>
+          <a:lstStyle/>
+          <a:p>
+            <a:pPr indent="0" marL="0">
+              <a:lnSpc>
+                <a:spcPct val="110000"/>
+              </a:lnSpc>
+              <a:buNone/>
+            </a:pPr>
+            <a:r>
+              <a:rPr lang="en-US" sz="1100" b="1" dirty="0">
+                <a:solidFill>
+                  <a:srgbClr val="2F4F6B"/>
+                </a:solidFill>
+                <a:latin typeface="Yu Gothic" pitchFamily="34" charset="0"/>
+                <a:ea typeface="Yu Gothic" pitchFamily="34" charset="-122"/>
+                <a:cs typeface="Yu Gothic" pitchFamily="34" charset="-120"/>
+              </a:rPr>
+              <a:t>各期に書くこと</a:t>
+            </a:r>
+            <a:endParaRPr lang="en-US" sz="1100" dirty="0"/>
+          </a:p>
+        </p:txBody>
+      </p:sp>
+      <p:sp>
+        <p:nvSpPr>
+          <p:cNvPr id="16" name="Text 14"/>
+          <p:cNvSpPr txBox="1"/>
+          <p:nvPr/>
+        </p:nvSpPr>
+        <p:spPr>
+          <a:xfrm>
+            <a:off x="3291840" y="4453128"/>
+            <a:ext cx="7772400" cy="530352"/>
+          </a:xfrm>
+          <a:prstGeom prst="rect">
+            <a:avLst/>
+          </a:prstGeom>
+          <a:noFill/>
+          <a:ln/>
+        </p:spPr>
+        <p:txBody>
+          <a:bodyPr wrap="square" lIns="0" tIns="0" rIns="0" bIns="0" rtlCol="0" anchor="ctr"/>
+          <a:lstStyle/>
+          <a:p>
+            <a:pPr indent="0" marL="0">
+              <a:lnSpc>
+                <a:spcPct val="115000"/>
+              </a:lnSpc>
+              <a:buNone/>
+            </a:pPr>
+            <a:r>
+              <a:rPr lang="en-US" sz="1150" dirty="0">
+                <a:solidFill>
+                  <a:srgbClr val="23201D"/>
+                </a:solidFill>
+                <a:latin typeface="Consolas" pitchFamily="34" charset="0"/>
+                <a:ea typeface="Consolas" pitchFamily="34" charset="-122"/>
+                <a:cs typeface="Consolas" pitchFamily="34" charset="-120"/>
+              </a:rPr>
+              <a:t>担当者の実名／必要な費用／やめる判断の基準</a:t>
+            </a:r>
+            <a:endParaRPr lang="en-US" sz="1150" dirty="0"/>
+          </a:p>
+        </p:txBody>
+      </p:sp>
+      <p:sp>
+        <p:nvSpPr>
+          <p:cNvPr id="17" name="Text 15"/>
+          <p:cNvSpPr txBox="1"/>
+          <p:nvPr/>
+        </p:nvSpPr>
+        <p:spPr>
+          <a:xfrm>
+            <a:off x="777240" y="5239512"/>
+            <a:ext cx="10607040" cy="548640"/>
+          </a:xfrm>
+          <a:prstGeom prst="rect">
+            <a:avLst/>
+          </a:prstGeom>
+          <a:noFill/>
+          <a:ln/>
+        </p:spPr>
+        <p:txBody>
+          <a:bodyPr wrap="square" lIns="0" tIns="0" rIns="0" bIns="0" rtlCol="0" anchor="ctr"/>
+          <a:lstStyle/>
+          <a:p>
+            <a:pPr indent="0" marL="0">
+              <a:lnSpc>
+                <a:spcPct val="135000"/>
+              </a:lnSpc>
+              <a:buNone/>
+            </a:pPr>
+            <a:r>
+              <a:rPr lang="en-US" sz="1250" dirty="0">
                 <a:solidFill>
                   <a:srgbClr val="5A534A"/>
                 </a:solidFill>
@@ -4334,271 +6193,9 @@
                 <a:ea typeface="Yu Gothic" pitchFamily="34" charset="-122"/>
                 <a:cs typeface="Yu Gothic" pitchFamily="34" charset="-120"/>
               </a:rPr>
-              <a:t>実際に動かします</a:t>
-            </a:r>
-            <a:endParaRPr lang="en-US" sz="1200" dirty="0"/>
-          </a:p>
-        </p:txBody>
-      </p:sp>
-      <p:sp>
-        <p:nvSpPr>
-          <p:cNvPr id="10" name="Shape 8"/>
-          <p:cNvSpPr/>
-          <p:nvPr/>
-        </p:nvSpPr>
-        <p:spPr>
-          <a:xfrm>
-            <a:off x="4389120" y="2240280"/>
-            <a:ext cx="3383280" cy="2697480"/>
-          </a:xfrm>
-          <a:prstGeom prst="rect">
-            <a:avLst/>
-          </a:prstGeom>
-          <a:solidFill>
-            <a:srgbClr val="FFFFFF"/>
-          </a:solidFill>
-          <a:ln w="12700">
-            <a:solidFill>
-              <a:srgbClr val="EDE7DB"/>
-            </a:solidFill>
-            <a:prstDash val="solid"/>
-          </a:ln>
-        </p:spPr>
-      </p:sp>
-      <p:sp>
-        <p:nvSpPr>
-          <p:cNvPr id="11" name="Shape 9"/>
-          <p:cNvSpPr/>
-          <p:nvPr/>
-        </p:nvSpPr>
-        <p:spPr>
-          <a:xfrm>
-            <a:off x="4663440" y="2487168"/>
-            <a:ext cx="438912" cy="438912"/>
-          </a:xfrm>
-          <a:prstGeom prst="ellipse">
-            <a:avLst/>
-          </a:prstGeom>
-          <a:solidFill>
-            <a:srgbClr val="2F4F6B"/>
-          </a:solidFill>
-          <a:ln w="12700">
-            <a:solidFill>
-              <a:srgbClr val="2F4F6B"/>
-            </a:solidFill>
-            <a:prstDash val="solid"/>
-          </a:ln>
-        </p:spPr>
-      </p:sp>
-      <p:sp>
-        <p:nvSpPr>
-          <p:cNvPr id="12" name="Text 10"/>
-          <p:cNvSpPr txBox="1"/>
-          <p:nvPr/>
-        </p:nvSpPr>
-        <p:spPr>
-          <a:xfrm>
-            <a:off x="4663440" y="2487168"/>
-            <a:ext cx="438912" cy="438912"/>
-          </a:xfrm>
-          <a:prstGeom prst="rect">
-            <a:avLst/>
-          </a:prstGeom>
-          <a:noFill/>
-          <a:ln/>
-        </p:spPr>
-        <p:txBody>
-          <a:bodyPr wrap="square" lIns="0" tIns="0" rIns="0" bIns="0" rtlCol="0" anchor="ctr"/>
-          <a:lstStyle/>
-          <a:p>
-            <a:pPr algn="ctr" indent="0" marL="0">
-              <a:buNone/>
-            </a:pPr>
-            <a:r>
-              <a:rPr lang="en-US" sz="1400" b="1" dirty="0">
-                <a:solidFill>
-                  <a:srgbClr val="FFFFFF"/>
-                </a:solidFill>
-                <a:latin typeface="Yu Gothic" pitchFamily="34" charset="0"/>
-                <a:ea typeface="Yu Gothic" pitchFamily="34" charset="-122"/>
-                <a:cs typeface="Yu Gothic" pitchFamily="34" charset="-120"/>
-              </a:rPr>
-              <a:t>2</a:t>
-            </a:r>
-            <a:endParaRPr lang="en-US" sz="1400" dirty="0"/>
-          </a:p>
-        </p:txBody>
-      </p:sp>
-      <p:sp>
-        <p:nvSpPr>
-          <p:cNvPr id="13" name="Text 11"/>
-          <p:cNvSpPr txBox="1"/>
-          <p:nvPr/>
-        </p:nvSpPr>
-        <p:spPr>
-          <a:xfrm>
-            <a:off x="4663440" y="3035808"/>
-            <a:ext cx="2834640" cy="777240"/>
-          </a:xfrm>
-          <a:prstGeom prst="rect">
-            <a:avLst/>
-          </a:prstGeom>
-          <a:noFill/>
-          <a:ln/>
-        </p:spPr>
-        <p:txBody>
-          <a:bodyPr wrap="square" lIns="0" tIns="0" rIns="0" bIns="0" rtlCol="0" anchor="ctr"/>
-          <a:lstStyle/>
-          <a:p>
-            <a:pPr indent="0" marL="0">
-              <a:lnSpc>
-                <a:spcPct val="125000"/>
-              </a:lnSpc>
-              <a:buNone/>
-            </a:pPr>
-            <a:r>
-              <a:rPr lang="en-US" sz="1500" b="1" dirty="0">
-                <a:solidFill>
-                  <a:srgbClr val="23201D"/>
-                </a:solidFill>
-                <a:latin typeface="Yu Gothic" pitchFamily="34" charset="0"/>
-                <a:ea typeface="Yu Gothic" pitchFamily="34" charset="-122"/>
-                <a:cs typeface="Yu Gothic" pitchFamily="34" charset="-120"/>
-              </a:rPr>
-              <a:t>ご質問・ご意見をうかがう</a:t>
-            </a:r>
-            <a:endParaRPr lang="en-US" sz="1500" dirty="0"/>
-          </a:p>
-        </p:txBody>
-      </p:sp>
-      <p:sp>
-        <p:nvSpPr>
-          <p:cNvPr id="14" name="Text 12"/>
-          <p:cNvSpPr txBox="1"/>
-          <p:nvPr/>
-        </p:nvSpPr>
-        <p:spPr>
-          <a:xfrm>
-            <a:off x="4663440" y="3822192"/>
-            <a:ext cx="2834640" cy="960120"/>
-          </a:xfrm>
-          <a:prstGeom prst="rect">
-            <a:avLst/>
-          </a:prstGeom>
-          <a:noFill/>
-          <a:ln/>
-        </p:spPr>
-        <p:txBody>
-          <a:bodyPr wrap="square" lIns="0" tIns="0" rIns="0" bIns="0" rtlCol="0" anchor="ctr"/>
-          <a:lstStyle/>
-          <a:p>
-            <a:pPr indent="0" marL="0">
-              <a:lnSpc>
-                <a:spcPct val="130000"/>
-              </a:lnSpc>
-              <a:buNone/>
-            </a:pPr>
-            <a:r>
-              <a:rPr lang="en-US" sz="1200" dirty="0">
-                <a:solidFill>
-                  <a:srgbClr val="5A534A"/>
-                </a:solidFill>
-                <a:latin typeface="Yu Gothic" pitchFamily="34" charset="0"/>
-                <a:ea typeface="Yu Gothic" pitchFamily="34" charset="-122"/>
-                <a:cs typeface="Yu Gothic" pitchFamily="34" charset="-120"/>
-              </a:rPr>
-              <a:t>反対意見こそ、この先の設計に必要です</a:t>
-            </a:r>
-            <a:endParaRPr lang="en-US" sz="1200" dirty="0"/>
-          </a:p>
-        </p:txBody>
-      </p:sp>
-      <p:sp>
-        <p:nvSpPr>
-          <p:cNvPr id="15" name="Shape 13"/>
-          <p:cNvSpPr/>
-          <p:nvPr/>
-        </p:nvSpPr>
-        <p:spPr>
-          <a:xfrm>
-            <a:off x="8001000" y="2240280"/>
-            <a:ext cx="3383280" cy="2697480"/>
-          </a:xfrm>
-          <a:prstGeom prst="rect">
-            <a:avLst/>
-          </a:prstGeom>
-          <a:solidFill>
-            <a:srgbClr val="FFFFFF"/>
-          </a:solidFill>
-          <a:ln w="12700">
-            <a:solidFill>
-              <a:srgbClr val="EDE7DB"/>
-            </a:solidFill>
-            <a:prstDash val="solid"/>
-          </a:ln>
-        </p:spPr>
-      </p:sp>
-      <p:sp>
-        <p:nvSpPr>
-          <p:cNvPr id="16" name="Shape 14"/>
-          <p:cNvSpPr/>
-          <p:nvPr/>
-        </p:nvSpPr>
-        <p:spPr>
-          <a:xfrm>
-            <a:off x="8275320" y="2487168"/>
-            <a:ext cx="438912" cy="438912"/>
-          </a:xfrm>
-          <a:prstGeom prst="ellipse">
-            <a:avLst/>
-          </a:prstGeom>
-          <a:solidFill>
-            <a:srgbClr val="2F4F6B"/>
-          </a:solidFill>
-          <a:ln w="12700">
-            <a:solidFill>
-              <a:srgbClr val="2F4F6B"/>
-            </a:solidFill>
-            <a:prstDash val="solid"/>
-          </a:ln>
-        </p:spPr>
-      </p:sp>
-      <p:sp>
-        <p:nvSpPr>
-          <p:cNvPr id="17" name="Text 15"/>
-          <p:cNvSpPr txBox="1"/>
-          <p:nvPr/>
-        </p:nvSpPr>
-        <p:spPr>
-          <a:xfrm>
-            <a:off x="8275320" y="2487168"/>
-            <a:ext cx="438912" cy="438912"/>
-          </a:xfrm>
-          <a:prstGeom prst="rect">
-            <a:avLst/>
-          </a:prstGeom>
-          <a:noFill/>
-          <a:ln/>
-        </p:spPr>
-        <p:txBody>
-          <a:bodyPr wrap="square" lIns="0" tIns="0" rIns="0" bIns="0" rtlCol="0" anchor="ctr"/>
-          <a:lstStyle/>
-          <a:p>
-            <a:pPr algn="ctr" indent="0" marL="0">
-              <a:buNone/>
-            </a:pPr>
-            <a:r>
-              <a:rPr lang="en-US" sz="1400" b="1" dirty="0">
-                <a:solidFill>
-                  <a:srgbClr val="FFFFFF"/>
-                </a:solidFill>
-                <a:latin typeface="Yu Gothic" pitchFamily="34" charset="0"/>
-                <a:ea typeface="Yu Gothic" pitchFamily="34" charset="-122"/>
-                <a:cs typeface="Yu Gothic" pitchFamily="34" charset="-120"/>
-              </a:rPr>
-              <a:t>3</a:t>
-            </a:r>
-            <a:endParaRPr lang="en-US" sz="1400" dirty="0"/>
+              <a:t>「やめる基準」を書くのが要です。始める基準しか書かれていない計画は、うまくいかなかったときに誰も止められません。</a:t>
+            </a:r>
+            <a:endParaRPr lang="en-US" sz="1250" dirty="0"/>
           </a:p>
         </p:txBody>
       </p:sp>
@@ -4610,37 +6207,34 @@
         </p:nvSpPr>
         <p:spPr>
           <a:xfrm>
-            <a:off x="8275320" y="3035808"/>
-            <a:ext cx="2834640" cy="777240"/>
-          </a:xfrm>
-          <a:prstGeom prst="rect">
-            <a:avLst/>
-          </a:prstGeom>
-          <a:noFill/>
-          <a:ln/>
-        </p:spPr>
-        <p:txBody>
-          <a:bodyPr wrap="square" lIns="0" tIns="0" rIns="0" bIns="0" rtlCol="0" anchor="ctr"/>
-          <a:lstStyle/>
-          <a:p>
-            <a:pPr indent="0" marL="0">
-              <a:lnSpc>
-                <a:spcPct val="125000"/>
-              </a:lnSpc>
-              <a:buNone/>
-            </a:pPr>
-            <a:r>
-              <a:rPr lang="en-US" sz="1500" b="1" dirty="0">
-                <a:solidFill>
-                  <a:srgbClr val="23201D"/>
-                </a:solidFill>
-                <a:latin typeface="Yu Gothic" pitchFamily="34" charset="0"/>
-                <a:ea typeface="Yu Gothic" pitchFamily="34" charset="-122"/>
-                <a:cs typeface="Yu Gothic" pitchFamily="34" charset="-120"/>
-              </a:rPr>
-              <a:t>12か月の方針を決める</a:t>
-            </a:r>
-            <a:endParaRPr lang="en-US" sz="1500" dirty="0"/>
+            <a:off x="777240" y="6382512"/>
+            <a:ext cx="7424928" cy="256032"/>
+          </a:xfrm>
+          <a:prstGeom prst="rect">
+            <a:avLst/>
+          </a:prstGeom>
+          <a:noFill/>
+          <a:ln/>
+        </p:spPr>
+        <p:txBody>
+          <a:bodyPr wrap="square" lIns="0" tIns="0" rIns="0" bIns="0" rtlCol="0" anchor="ctr"/>
+          <a:lstStyle/>
+          <a:p>
+            <a:pPr indent="0" marL="0">
+              <a:buNone/>
+            </a:pPr>
+            <a:r>
+              <a:rPr lang="en-US" sz="900" dirty="0">
+                <a:solidFill>
+                  <a:srgbClr val="8A8177"/>
+                </a:solidFill>
+                <a:latin typeface="Yu Gothic" pitchFamily="34" charset="0"/>
+                <a:ea typeface="Yu Gothic" pitchFamily="34" charset="-122"/>
+                <a:cs typeface="Yu Gothic" pitchFamily="34" charset="-120"/>
+              </a:rPr>
+              <a:t>第6回　社内へのお披露目と12か月計画</a:t>
+            </a:r>
+            <a:endParaRPr lang="en-US" sz="900" dirty="0"/>
           </a:p>
         </p:txBody>
       </p:sp>
@@ -4652,62 +6246,20 @@
         </p:nvSpPr>
         <p:spPr>
           <a:xfrm>
-            <a:off x="8275320" y="3822192"/>
-            <a:ext cx="2834640" cy="960120"/>
-          </a:xfrm>
-          <a:prstGeom prst="rect">
-            <a:avLst/>
-          </a:prstGeom>
-          <a:noFill/>
-          <a:ln/>
-        </p:spPr>
-        <p:txBody>
-          <a:bodyPr wrap="square" lIns="0" tIns="0" rIns="0" bIns="0" rtlCol="0" anchor="ctr"/>
-          <a:lstStyle/>
-          <a:p>
-            <a:pPr indent="0" marL="0">
-              <a:lnSpc>
-                <a:spcPct val="130000"/>
-              </a:lnSpc>
-              <a:buNone/>
-            </a:pPr>
-            <a:r>
-              <a:rPr lang="en-US" sz="1200" dirty="0">
-                <a:solidFill>
-                  <a:srgbClr val="5A534A"/>
-                </a:solidFill>
-                <a:latin typeface="Yu Gothic" pitchFamily="34" charset="0"/>
-                <a:ea typeface="Yu Gothic" pitchFamily="34" charset="-122"/>
-                <a:cs typeface="Yu Gothic" pitchFamily="34" charset="-120"/>
-              </a:rPr>
-              <a:t>定着 → 展開 → つなぐ → 測る。各期に担当と、やめる基準を書きます</a:t>
-            </a:r>
-            <a:endParaRPr lang="en-US" sz="1200" dirty="0"/>
-          </a:p>
-        </p:txBody>
-      </p:sp>
-      <p:sp>
-        <p:nvSpPr>
-          <p:cNvPr id="20" name="Text 18"/>
-          <p:cNvSpPr txBox="1"/>
-          <p:nvPr/>
-        </p:nvSpPr>
-        <p:spPr>
-          <a:xfrm>
-            <a:off x="777240" y="6355080"/>
-            <a:ext cx="7424928" cy="274320"/>
-          </a:xfrm>
-          <a:prstGeom prst="rect">
-            <a:avLst/>
-          </a:prstGeom>
-          <a:noFill/>
-          <a:ln/>
-        </p:spPr>
-        <p:txBody>
-          <a:bodyPr wrap="square" lIns="0" tIns="0" rIns="0" bIns="0" rtlCol="0" anchor="ctr"/>
-          <a:lstStyle/>
-          <a:p>
-            <a:pPr indent="0" marL="0">
+            <a:off x="8202168" y="6382512"/>
+            <a:ext cx="3182112" cy="256032"/>
+          </a:xfrm>
+          <a:prstGeom prst="rect">
+            <a:avLst/>
+          </a:prstGeom>
+          <a:noFill/>
+          <a:ln/>
+        </p:spPr>
+        <p:txBody>
+          <a:bodyPr wrap="square" lIns="0" tIns="0" rIns="0" bIns="0" rtlCol="0" anchor="ctr"/>
+          <a:lstStyle/>
+          <a:p>
+            <a:pPr algn="r" indent="0" marL="0">
               <a:buNone/>
             </a:pPr>
             <a:r>
@@ -4719,46 +6271,7 @@
                 <a:ea typeface="Yu Gothic" pitchFamily="34" charset="-122"/>
                 <a:cs typeface="Yu Gothic" pitchFamily="34" charset="-120"/>
               </a:rPr>
-              <a:t>第6回　社内へのお披露目と12か月計画</a:t>
-            </a:r>
-            <a:endParaRPr lang="en-US" sz="900" dirty="0"/>
-          </a:p>
-        </p:txBody>
-      </p:sp>
-      <p:sp>
-        <p:nvSpPr>
-          <p:cNvPr id="21" name="Text 19"/>
-          <p:cNvSpPr txBox="1"/>
-          <p:nvPr/>
-        </p:nvSpPr>
-        <p:spPr>
-          <a:xfrm>
-            <a:off x="8202168" y="6355080"/>
-            <a:ext cx="3182112" cy="274320"/>
-          </a:xfrm>
-          <a:prstGeom prst="rect">
-            <a:avLst/>
-          </a:prstGeom>
-          <a:noFill/>
-          <a:ln/>
-        </p:spPr>
-        <p:txBody>
-          <a:bodyPr wrap="square" lIns="0" tIns="0" rIns="0" bIns="0" rtlCol="0" anchor="ctr"/>
-          <a:lstStyle/>
-          <a:p>
-            <a:pPr algn="r" indent="0" marL="0">
-              <a:buNone/>
-            </a:pPr>
-            <a:r>
-              <a:rPr lang="en-US" sz="900" dirty="0">
-                <a:solidFill>
-                  <a:srgbClr val="8A8177"/>
-                </a:solidFill>
-                <a:latin typeface="Yu Gothic" pitchFamily="34" charset="0"/>
-                <a:ea typeface="Yu Gothic" pitchFamily="34" charset="-122"/>
-                <a:cs typeface="Yu Gothic" pitchFamily="34" charset="-120"/>
-              </a:rPr>
-              <a:t>演習</a:t>
+              <a:t>あてはめ</a:t>
             </a:r>
             <a:endParaRPr lang="en-US" sz="900" dirty="0"/>
           </a:p>
@@ -4804,7 +6317,7 @@
         </p:nvSpPr>
         <p:spPr>
           <a:xfrm>
-            <a:off x="777240" y="822960"/>
+            <a:off x="777240" y="566928"/>
             <a:ext cx="10607040" cy="274320"/>
           </a:xfrm>
           <a:prstGeom prst="rect">
@@ -4823,13 +6336,13 @@
             <a:r>
               <a:rPr lang="en-US" sz="1100" b="1" spc="250" kern="0" dirty="0">
                 <a:solidFill>
-                  <a:srgbClr val="B04A2F"/>
-                </a:solidFill>
-                <a:latin typeface="Yu Gothic" pitchFamily="34" charset="0"/>
-                <a:ea typeface="Yu Gothic" pitchFamily="34" charset="-122"/>
-                <a:cs typeface="Yu Gothic" pitchFamily="34" charset="-120"/>
-              </a:rPr>
-              <a:t>ここだけは</a:t>
+                  <a:srgbClr val="8A8177"/>
+                </a:solidFill>
+                <a:latin typeface="Yu Gothic" pitchFamily="34" charset="0"/>
+                <a:ea typeface="Yu Gothic" pitchFamily="34" charset="-122"/>
+                <a:cs typeface="Yu Gothic" pitchFamily="34" charset="-120"/>
+              </a:rPr>
+              <a:t>実演 ①</a:t>
             </a:r>
             <a:endParaRPr lang="en-US" sz="1100" dirty="0"/>
           </a:p>
@@ -4843,24 +6356,24 @@
         </p:nvSpPr>
         <p:spPr>
           <a:xfrm>
-            <a:off x="777240" y="1188720"/>
-            <a:ext cx="9546336" cy="822960"/>
-          </a:xfrm>
-          <a:prstGeom prst="rect">
-            <a:avLst/>
-          </a:prstGeom>
-          <a:noFill/>
-          <a:ln/>
-        </p:spPr>
-        <p:txBody>
-          <a:bodyPr wrap="square" lIns="0" tIns="0" rIns="0" bIns="0" rtlCol="0" anchor="ctr"/>
-          <a:lstStyle/>
-          <a:p>
-            <a:pPr indent="0" marL="0">
-              <a:buNone/>
-            </a:pPr>
-            <a:r>
-              <a:rPr lang="en-US" sz="3000" b="1" dirty="0">
+            <a:off x="777240" y="896112"/>
+            <a:ext cx="10607040" cy="640080"/>
+          </a:xfrm>
+          <a:prstGeom prst="rect">
+            <a:avLst/>
+          </a:prstGeom>
+          <a:noFill/>
+          <a:ln/>
+        </p:spPr>
+        <p:txBody>
+          <a:bodyPr wrap="square" lIns="0" tIns="0" rIns="0" bIns="0" rtlCol="0" anchor="ctr"/>
+          <a:lstStyle/>
+          <a:p>
+            <a:pPr indent="0" marL="0">
+              <a:buNone/>
+            </a:pPr>
+            <a:r>
+              <a:rPr lang="en-US" sz="2600" b="1" dirty="0">
                 <a:solidFill>
                   <a:srgbClr val="23201D"/>
                 </a:solidFill>
@@ -4868,9 +6381,9 @@
                 <a:ea typeface="Yu Gothic" pitchFamily="34" charset="-122"/>
                 <a:cs typeface="Yu Gothic" pitchFamily="34" charset="-120"/>
               </a:rPr>
-              <a:t>否定的な意見ほど、丁寧に記録します</a:t>
-            </a:r>
-            <a:endParaRPr lang="en-US" sz="3000" dirty="0"/>
+              <a:t>みなさんが気にされていること</a:t>
+            </a:r>
+            <a:endParaRPr lang="en-US" sz="2600" dirty="0"/>
           </a:p>
         </p:txBody>
       </p:sp>
@@ -4882,14 +6395,352 @@
         </p:nvSpPr>
         <p:spPr>
           <a:xfrm>
-            <a:off x="777240" y="2331720"/>
-            <a:ext cx="64008" cy="2011680"/>
+            <a:off x="777240" y="1691640"/>
+            <a:ext cx="4879238" cy="1371600"/>
           </a:xfrm>
           <a:prstGeom prst="rect">
             <a:avLst/>
           </a:prstGeom>
           <a:solidFill>
-            <a:srgbClr val="B04A2F"/>
+            <a:srgbClr val="EDE7DB"/>
+          </a:solidFill>
+          <a:ln w="15875">
+            <a:solidFill>
+              <a:srgbClr val="8A8177"/>
+            </a:solidFill>
+            <a:prstDash val="solid"/>
+          </a:ln>
+        </p:spPr>
+      </p:sp>
+      <p:sp>
+        <p:nvSpPr>
+          <p:cNvPr id="5" name="Text 3"/>
+          <p:cNvSpPr txBox="1"/>
+          <p:nvPr/>
+        </p:nvSpPr>
+        <p:spPr>
+          <a:xfrm>
+            <a:off x="1005840" y="1783080"/>
+            <a:ext cx="1828800" cy="274320"/>
+          </a:xfrm>
+          <a:prstGeom prst="rect">
+            <a:avLst/>
+          </a:prstGeom>
+          <a:noFill/>
+          <a:ln/>
+        </p:spPr>
+        <p:txBody>
+          <a:bodyPr wrap="square" lIns="0" tIns="0" rIns="0" bIns="0" rtlCol="0" anchor="ctr"/>
+          <a:lstStyle/>
+          <a:p>
+            <a:pPr indent="0" marL="0">
+              <a:buNone/>
+            </a:pPr>
+            <a:r>
+              <a:rPr lang="en-US" sz="1000" b="1" spc="200" kern="0" dirty="0">
+                <a:solidFill>
+                  <a:srgbClr val="8A8177"/>
+                </a:solidFill>
+                <a:latin typeface="Yu Gothic" pitchFamily="34" charset="0"/>
+                <a:ea typeface="Yu Gothic" pitchFamily="34" charset="-122"/>
+                <a:cs typeface="Yu Gothic" pitchFamily="34" charset="-120"/>
+              </a:rPr>
+              <a:t>入力</a:t>
+            </a:r>
+            <a:endParaRPr lang="en-US" sz="1000" dirty="0"/>
+          </a:p>
+        </p:txBody>
+      </p:sp>
+      <p:sp>
+        <p:nvSpPr>
+          <p:cNvPr id="6" name="Text 4"/>
+          <p:cNvSpPr txBox="1"/>
+          <p:nvPr/>
+        </p:nvSpPr>
+        <p:spPr>
+          <a:xfrm>
+            <a:off x="1005840" y="2084832"/>
+            <a:ext cx="4422038" cy="868680"/>
+          </a:xfrm>
+          <a:prstGeom prst="rect">
+            <a:avLst/>
+          </a:prstGeom>
+          <a:noFill/>
+          <a:ln/>
+        </p:spPr>
+        <p:txBody>
+          <a:bodyPr wrap="square" lIns="0" tIns="0" rIns="0" bIns="0" rtlCol="0" anchor="ctr"/>
+          <a:lstStyle/>
+          <a:p>
+            <a:pPr indent="0" marL="0">
+              <a:lnSpc>
+                <a:spcPct val="125000"/>
+              </a:lnSpc>
+              <a:buNone/>
+            </a:pPr>
+            <a:r>
+              <a:rPr lang="en-US" sz="1200" dirty="0">
+                <a:solidFill>
+                  <a:srgbClr val="23201D"/>
+                </a:solidFill>
+                <a:latin typeface="Consolas" pitchFamily="34" charset="0"/>
+                <a:ea typeface="Consolas" pitchFamily="34" charset="-122"/>
+                <a:cs typeface="Consolas" pitchFamily="34" charset="-120"/>
+              </a:rPr>
+              <a:t>社員のみなさんからよく出るご質問</a:t>
+            </a:r>
+            <a:endParaRPr lang="en-US" sz="1200" dirty="0"/>
+          </a:p>
+        </p:txBody>
+      </p:sp>
+      <p:sp>
+        <p:nvSpPr>
+          <p:cNvPr id="7" name="Shape 5"/>
+          <p:cNvSpPr/>
+          <p:nvPr/>
+        </p:nvSpPr>
+        <p:spPr>
+          <a:xfrm>
+            <a:off x="6080760" y="1691640"/>
+            <a:ext cx="5303520" cy="3017520"/>
+          </a:xfrm>
+          <a:prstGeom prst="rect">
+            <a:avLst/>
+          </a:prstGeom>
+          <a:solidFill>
+            <a:srgbClr val="FFFFFF"/>
+          </a:solidFill>
+          <a:ln w="12700">
+            <a:solidFill>
+              <a:srgbClr val="EDE7DB"/>
+            </a:solidFill>
+            <a:prstDash val="solid"/>
+          </a:ln>
+        </p:spPr>
+      </p:sp>
+      <p:sp>
+        <p:nvSpPr>
+          <p:cNvPr id="8" name="Text 6"/>
+          <p:cNvSpPr txBox="1"/>
+          <p:nvPr/>
+        </p:nvSpPr>
+        <p:spPr>
+          <a:xfrm>
+            <a:off x="6309360" y="1783080"/>
+            <a:ext cx="2743200" cy="274320"/>
+          </a:xfrm>
+          <a:prstGeom prst="rect">
+            <a:avLst/>
+          </a:prstGeom>
+          <a:noFill/>
+          <a:ln/>
+        </p:spPr>
+        <p:txBody>
+          <a:bodyPr wrap="square" lIns="0" tIns="0" rIns="0" bIns="0" rtlCol="0" anchor="ctr"/>
+          <a:lstStyle/>
+          <a:p>
+            <a:pPr indent="0" marL="0">
+              <a:buNone/>
+            </a:pPr>
+            <a:r>
+              <a:rPr lang="en-US" sz="1000" b="1" spc="200" kern="0" dirty="0">
+                <a:solidFill>
+                  <a:srgbClr val="8A8177"/>
+                </a:solidFill>
+                <a:latin typeface="Yu Gothic" pitchFamily="34" charset="0"/>
+                <a:ea typeface="Yu Gothic" pitchFamily="34" charset="-122"/>
+                <a:cs typeface="Yu Gothic" pitchFamily="34" charset="-120"/>
+              </a:rPr>
+              <a:t>出てくるもの</a:t>
+            </a:r>
+            <a:endParaRPr lang="en-US" sz="1000" dirty="0"/>
+          </a:p>
+        </p:txBody>
+      </p:sp>
+      <p:sp>
+        <p:nvSpPr>
+          <p:cNvPr id="9" name="Text 7"/>
+          <p:cNvSpPr txBox="1"/>
+          <p:nvPr/>
+        </p:nvSpPr>
+        <p:spPr>
+          <a:xfrm>
+            <a:off x="6309360" y="2148840"/>
+            <a:ext cx="4846320" cy="566928"/>
+          </a:xfrm>
+          <a:prstGeom prst="rect">
+            <a:avLst/>
+          </a:prstGeom>
+          <a:noFill/>
+          <a:ln/>
+        </p:spPr>
+        <p:txBody>
+          <a:bodyPr wrap="square" lIns="0" tIns="0" rIns="0" bIns="0" rtlCol="0" anchor="ctr"/>
+          <a:lstStyle/>
+          <a:p>
+            <a:pPr indent="0" marL="0">
+              <a:lnSpc>
+                <a:spcPct val="125000"/>
+              </a:lnSpc>
+              <a:buNone/>
+            </a:pPr>
+            <a:r>
+              <a:rPr lang="en-US" sz="1250" dirty="0">
+                <a:solidFill>
+                  <a:srgbClr val="23201D"/>
+                </a:solidFill>
+                <a:latin typeface="Yu Gothic" pitchFamily="34" charset="0"/>
+                <a:ea typeface="Yu Gothic" pitchFamily="34" charset="-122"/>
+                <a:cs typeface="Yu Gothic" pitchFamily="34" charset="-120"/>
+              </a:rPr>
+              <a:t>・これで人が減らされるのか</a:t>
+            </a:r>
+            <a:endParaRPr lang="en-US" sz="1250" dirty="0"/>
+          </a:p>
+        </p:txBody>
+      </p:sp>
+      <p:sp>
+        <p:nvSpPr>
+          <p:cNvPr id="10" name="Text 8"/>
+          <p:cNvSpPr txBox="1"/>
+          <p:nvPr/>
+        </p:nvSpPr>
+        <p:spPr>
+          <a:xfrm>
+            <a:off x="6309360" y="2752344"/>
+            <a:ext cx="4846320" cy="566928"/>
+          </a:xfrm>
+          <a:prstGeom prst="rect">
+            <a:avLst/>
+          </a:prstGeom>
+          <a:noFill/>
+          <a:ln/>
+        </p:spPr>
+        <p:txBody>
+          <a:bodyPr wrap="square" lIns="0" tIns="0" rIns="0" bIns="0" rtlCol="0" anchor="ctr"/>
+          <a:lstStyle/>
+          <a:p>
+            <a:pPr indent="0" marL="0">
+              <a:lnSpc>
+                <a:spcPct val="125000"/>
+              </a:lnSpc>
+              <a:buNone/>
+            </a:pPr>
+            <a:r>
+              <a:rPr lang="en-US" sz="1250" dirty="0">
+                <a:solidFill>
+                  <a:srgbClr val="23201D"/>
+                </a:solidFill>
+                <a:latin typeface="Yu Gothic" pitchFamily="34" charset="0"/>
+                <a:ea typeface="Yu Gothic" pitchFamily="34" charset="-122"/>
+                <a:cs typeface="Yu Gothic" pitchFamily="34" charset="-120"/>
+              </a:rPr>
+              <a:t>・入力した情報は外に漏れないのか</a:t>
+            </a:r>
+            <a:endParaRPr lang="en-US" sz="1250" dirty="0"/>
+          </a:p>
+        </p:txBody>
+      </p:sp>
+      <p:sp>
+        <p:nvSpPr>
+          <p:cNvPr id="11" name="Text 9"/>
+          <p:cNvSpPr txBox="1"/>
+          <p:nvPr/>
+        </p:nvSpPr>
+        <p:spPr>
+          <a:xfrm>
+            <a:off x="6309360" y="3355848"/>
+            <a:ext cx="4846320" cy="566928"/>
+          </a:xfrm>
+          <a:prstGeom prst="rect">
+            <a:avLst/>
+          </a:prstGeom>
+          <a:noFill/>
+          <a:ln/>
+        </p:spPr>
+        <p:txBody>
+          <a:bodyPr wrap="square" lIns="0" tIns="0" rIns="0" bIns="0" rtlCol="0" anchor="ctr"/>
+          <a:lstStyle/>
+          <a:p>
+            <a:pPr indent="0" marL="0">
+              <a:lnSpc>
+                <a:spcPct val="125000"/>
+              </a:lnSpc>
+              <a:buNone/>
+            </a:pPr>
+            <a:r>
+              <a:rPr lang="en-US" sz="1250" dirty="0">
+                <a:solidFill>
+                  <a:srgbClr val="23201D"/>
+                </a:solidFill>
+                <a:latin typeface="Yu Gothic" pitchFamily="34" charset="0"/>
+                <a:ea typeface="Yu Gothic" pitchFamily="34" charset="-122"/>
+                <a:cs typeface="Yu Gothic" pitchFamily="34" charset="-120"/>
+              </a:rPr>
+              <a:t>・間違えたら誰の責任になるのか</a:t>
+            </a:r>
+            <a:endParaRPr lang="en-US" sz="1250" dirty="0"/>
+          </a:p>
+        </p:txBody>
+      </p:sp>
+      <p:sp>
+        <p:nvSpPr>
+          <p:cNvPr id="12" name="Text 10"/>
+          <p:cNvSpPr txBox="1"/>
+          <p:nvPr/>
+        </p:nvSpPr>
+        <p:spPr>
+          <a:xfrm>
+            <a:off x="6309360" y="3959352"/>
+            <a:ext cx="4846320" cy="566928"/>
+          </a:xfrm>
+          <a:prstGeom prst="rect">
+            <a:avLst/>
+          </a:prstGeom>
+          <a:noFill/>
+          <a:ln/>
+        </p:spPr>
+        <p:txBody>
+          <a:bodyPr wrap="square" lIns="0" tIns="0" rIns="0" bIns="0" rtlCol="0" anchor="ctr"/>
+          <a:lstStyle/>
+          <a:p>
+            <a:pPr indent="0" marL="0">
+              <a:lnSpc>
+                <a:spcPct val="125000"/>
+              </a:lnSpc>
+              <a:buNone/>
+            </a:pPr>
+            <a:r>
+              <a:rPr lang="en-US" sz="1250" dirty="0">
+                <a:solidFill>
+                  <a:srgbClr val="23201D"/>
+                </a:solidFill>
+                <a:latin typeface="Yu Gothic" pitchFamily="34" charset="0"/>
+                <a:ea typeface="Yu Gothic" pitchFamily="34" charset="-122"/>
+                <a:cs typeface="Yu Gothic" pitchFamily="34" charset="-120"/>
+              </a:rPr>
+              <a:t>・使わなくてもいいのか</a:t>
+            </a:r>
+            <a:endParaRPr lang="en-US" sz="1250" dirty="0"/>
+          </a:p>
+        </p:txBody>
+      </p:sp>
+      <p:sp>
+        <p:nvSpPr>
+          <p:cNvPr id="13" name="Shape 11"/>
+          <p:cNvSpPr/>
+          <p:nvPr/>
+        </p:nvSpPr>
+        <p:spPr>
+          <a:xfrm>
+            <a:off x="777240" y="3291840"/>
+            <a:ext cx="4879238" cy="1417320"/>
+          </a:xfrm>
+          <a:prstGeom prst="rect">
+            <a:avLst/>
+          </a:prstGeom>
+          <a:solidFill>
+            <a:srgbClr val="E4DFD5"/>
           </a:solidFill>
           <a:ln w="12700">
             <a:solidFill>
@@ -4901,14 +6752,14 @@
       </p:sp>
       <p:sp>
         <p:nvSpPr>
-          <p:cNvPr id="5" name="Text 3"/>
-          <p:cNvSpPr txBox="1"/>
-          <p:nvPr/>
-        </p:nvSpPr>
-        <p:spPr>
-          <a:xfrm>
-            <a:off x="1188720" y="2331720"/>
-            <a:ext cx="9966960" cy="2011680"/>
+          <p:cNvPr id="14" name="Text 12"/>
+          <p:cNvSpPr txBox="1"/>
+          <p:nvPr/>
+        </p:nvSpPr>
+        <p:spPr>
+          <a:xfrm>
+            <a:off x="1005840" y="3383280"/>
+            <a:ext cx="4422038" cy="1234440"/>
           </a:xfrm>
           <a:prstGeom prst="rect">
             <a:avLst/>
@@ -4922,12 +6773,12 @@
           <a:p>
             <a:pPr indent="0" marL="0">
               <a:lnSpc>
-                <a:spcPct val="160000"/>
+                <a:spcPct val="135000"/>
               </a:lnSpc>
               <a:buNone/>
             </a:pPr>
             <a:r>
-              <a:rPr lang="en-US" sz="1700" dirty="0">
+              <a:rPr lang="en-US" sz="1250" dirty="0">
                 <a:solidFill>
                   <a:srgbClr val="3F3933"/>
                 </a:solidFill>
@@ -4935,22 +6786,86 @@
                 <a:ea typeface="Yu Gothic" pitchFamily="34" charset="-122"/>
                 <a:cs typeface="Yu Gothic" pitchFamily="34" charset="-120"/>
               </a:rPr>
-              <a:t>最も強く反対した方が、後に推進担当になった会社があります。反対の理由がいちばん具体的だったため、設計が現実的になりました。</a:t>
-            </a:r>
-            <a:endParaRPr lang="en-US" sz="1700" dirty="0"/>
-          </a:p>
-        </p:txBody>
-      </p:sp>
-      <p:sp>
-        <p:nvSpPr>
-          <p:cNvPr id="6" name="Text 4"/>
-          <p:cNvSpPr txBox="1"/>
-          <p:nvPr/>
-        </p:nvSpPr>
-        <p:spPr>
-          <a:xfrm>
-            <a:off x="777240" y="6355080"/>
-            <a:ext cx="7424928" cy="274320"/>
+              <a:t>どれも当然の疑問です。この場で曖昧にすると、現場では「よく分からないもの」として扱われ、結局使われません。</a:t>
+            </a:r>
+            <a:endParaRPr lang="en-US" sz="1250" dirty="0"/>
+          </a:p>
+        </p:txBody>
+      </p:sp>
+      <p:sp>
+        <p:nvSpPr>
+          <p:cNvPr id="15" name="Shape 13"/>
+          <p:cNvSpPr/>
+          <p:nvPr/>
+        </p:nvSpPr>
+        <p:spPr>
+          <a:xfrm>
+            <a:off x="777240" y="4983480"/>
+            <a:ext cx="10607040" cy="685800"/>
+          </a:xfrm>
+          <a:prstGeom prst="rect">
+            <a:avLst/>
+          </a:prstGeom>
+          <a:solidFill>
+            <a:srgbClr val="8A8177"/>
+          </a:solidFill>
+          <a:ln w="12700">
+            <a:solidFill>
+              <a:srgbClr val="333333"/>
+            </a:solidFill>
+            <a:prstDash val="solid"/>
+          </a:ln>
+        </p:spPr>
+      </p:sp>
+      <p:sp>
+        <p:nvSpPr>
+          <p:cNvPr id="16" name="Text 14"/>
+          <p:cNvSpPr txBox="1"/>
+          <p:nvPr/>
+        </p:nvSpPr>
+        <p:spPr>
+          <a:xfrm>
+            <a:off x="1097280" y="4983480"/>
+            <a:ext cx="9966960" cy="685800"/>
+          </a:xfrm>
+          <a:prstGeom prst="rect">
+            <a:avLst/>
+          </a:prstGeom>
+          <a:noFill/>
+          <a:ln/>
+        </p:spPr>
+        <p:txBody>
+          <a:bodyPr wrap="square" lIns="0" tIns="0" rIns="0" bIns="0" rtlCol="0" anchor="ctr"/>
+          <a:lstStyle/>
+          <a:p>
+            <a:pPr indent="0" marL="0">
+              <a:buNone/>
+            </a:pPr>
+            <a:r>
+              <a:rPr lang="en-US" sz="1450" b="1" dirty="0">
+                <a:solidFill>
+                  <a:srgbClr val="FFFFFF"/>
+                </a:solidFill>
+                <a:latin typeface="Yu Gothic" pitchFamily="34" charset="0"/>
+                <a:ea typeface="Yu Gothic" pitchFamily="34" charset="-122"/>
+                <a:cs typeface="Yu Gothic" pitchFamily="34" charset="-120"/>
+              </a:rPr>
+              <a:t>不安を言葉にしないまま進むと、必ず後で止まります</a:t>
+            </a:r>
+            <a:endParaRPr lang="en-US" sz="1450" dirty="0"/>
+          </a:p>
+        </p:txBody>
+      </p:sp>
+      <p:sp>
+        <p:nvSpPr>
+          <p:cNvPr id="17" name="Text 15"/>
+          <p:cNvSpPr txBox="1"/>
+          <p:nvPr/>
+        </p:nvSpPr>
+        <p:spPr>
+          <a:xfrm>
+            <a:off x="777240" y="6382512"/>
+            <a:ext cx="7424928" cy="256032"/>
           </a:xfrm>
           <a:prstGeom prst="rect">
             <a:avLst/>
@@ -4982,14 +6897,14 @@
       </p:sp>
       <p:sp>
         <p:nvSpPr>
-          <p:cNvPr id="7" name="Text 5"/>
-          <p:cNvSpPr txBox="1"/>
-          <p:nvPr/>
-        </p:nvSpPr>
-        <p:spPr>
-          <a:xfrm>
-            <a:off x="8202168" y="6355080"/>
-            <a:ext cx="3182112" cy="274320"/>
+          <p:cNvPr id="18" name="Text 16"/>
+          <p:cNvSpPr txBox="1"/>
+          <p:nvPr/>
+        </p:nvSpPr>
+        <p:spPr>
+          <a:xfrm>
+            <a:off x="8202168" y="6382512"/>
+            <a:ext cx="3182112" cy="256032"/>
           </a:xfrm>
           <a:prstGeom prst="rect">
             <a:avLst/>
@@ -5013,7 +6928,7 @@
                 <a:ea typeface="Yu Gothic" pitchFamily="34" charset="-122"/>
                 <a:cs typeface="Yu Gothic" pitchFamily="34" charset="-120"/>
               </a:rPr>
-              <a:t>ここだけは</a:t>
+              <a:t>実演 ①</a:t>
             </a:r>
             <a:endParaRPr lang="en-US" sz="900" dirty="0"/>
           </a:p>
@@ -5033,7 +6948,7 @@
     <p:bg>
       <p:bgPr>
         <a:solidFill>
-          <a:srgbClr val="23201D"/>
+          <a:srgbClr val="F6F2EA"/>
         </a:solidFill>
       </p:bgPr>
     </p:bg>
@@ -5059,34 +6974,34 @@
         </p:nvSpPr>
         <p:spPr>
           <a:xfrm>
-            <a:off x="777240" y="1371600"/>
-            <a:ext cx="10607040" cy="365760"/>
-          </a:xfrm>
-          <a:prstGeom prst="rect">
-            <a:avLst/>
-          </a:prstGeom>
-          <a:noFill/>
-          <a:ln/>
-        </p:spPr>
-        <p:txBody>
-          <a:bodyPr wrap="square" lIns="0" tIns="0" rIns="0" bIns="0" rtlCol="0" anchor="ctr"/>
-          <a:lstStyle/>
-          <a:p>
-            <a:pPr indent="0" marL="0">
-              <a:buNone/>
-            </a:pPr>
-            <a:r>
-              <a:rPr lang="en-US" sz="1200" b="1" spc="300" kern="0" dirty="0">
-                <a:solidFill>
-                  <a:srgbClr val="B04A2F"/>
-                </a:solidFill>
-                <a:latin typeface="Yu Gothic" pitchFamily="34" charset="0"/>
-                <a:ea typeface="Yu Gothic" pitchFamily="34" charset="-122"/>
-                <a:cs typeface="Yu Gothic" pitchFamily="34" charset="-120"/>
-              </a:rPr>
-              <a:t>今日の宿題</a:t>
-            </a:r>
-            <a:endParaRPr lang="en-US" sz="1200" dirty="0"/>
+            <a:off x="777240" y="566928"/>
+            <a:ext cx="10607040" cy="274320"/>
+          </a:xfrm>
+          <a:prstGeom prst="rect">
+            <a:avLst/>
+          </a:prstGeom>
+          <a:noFill/>
+          <a:ln/>
+        </p:spPr>
+        <p:txBody>
+          <a:bodyPr wrap="square" lIns="0" tIns="0" rIns="0" bIns="0" rtlCol="0" anchor="ctr"/>
+          <a:lstStyle/>
+          <a:p>
+            <a:pPr indent="0" marL="0">
+              <a:buNone/>
+            </a:pPr>
+            <a:r>
+              <a:rPr lang="en-US" sz="1100" b="1" spc="250" kern="0" dirty="0">
+                <a:solidFill>
+                  <a:srgbClr val="3B6B4A"/>
+                </a:solidFill>
+                <a:latin typeface="Yu Gothic" pitchFamily="34" charset="0"/>
+                <a:ea typeface="Yu Gothic" pitchFamily="34" charset="-122"/>
+                <a:cs typeface="Yu Gothic" pitchFamily="34" charset="-120"/>
+              </a:rPr>
+              <a:t>実演 ②</a:t>
+            </a:r>
+            <a:endParaRPr lang="en-US" sz="1100" dirty="0"/>
           </a:p>
         </p:txBody>
       </p:sp>
@@ -5098,7 +7013,7 @@
         </p:nvSpPr>
         <p:spPr>
           <a:xfrm>
-            <a:off x="777240" y="1783080"/>
+            <a:off x="777240" y="896112"/>
             <a:ext cx="10607040" cy="640080"/>
           </a:xfrm>
           <a:prstGeom prst="rect">
@@ -5115,17 +7030,17 @@
               <a:buNone/>
             </a:pPr>
             <a:r>
-              <a:rPr lang="en-US" sz="3200" b="1" dirty="0">
-                <a:solidFill>
-                  <a:srgbClr val="FFFFFF"/>
-                </a:solidFill>
-                <a:latin typeface="Yu Gothic" pitchFamily="34" charset="0"/>
-                <a:ea typeface="Yu Gothic" pitchFamily="34" charset="-122"/>
-                <a:cs typeface="Yu Gothic" pitchFamily="34" charset="-120"/>
-              </a:rPr>
-              <a:t>ひとつだけ</a:t>
-            </a:r>
-            <a:endParaRPr lang="en-US" sz="3200" dirty="0"/>
+              <a:rPr lang="en-US" sz="2600" b="1" dirty="0">
+                <a:solidFill>
+                  <a:srgbClr val="23201D"/>
+                </a:solidFill>
+                <a:latin typeface="Yu Gothic" pitchFamily="34" charset="0"/>
+                <a:ea typeface="Yu Gothic" pitchFamily="34" charset="-122"/>
+                <a:cs typeface="Yu Gothic" pitchFamily="34" charset="-120"/>
+              </a:rPr>
+              <a:t>この場でお答えします</a:t>
+            </a:r>
+            <a:endParaRPr lang="en-US" sz="2600" dirty="0"/>
           </a:p>
         </p:txBody>
       </p:sp>
@@ -5137,18 +7052,124 @@
         </p:nvSpPr>
         <p:spPr>
           <a:xfrm>
-            <a:off x="777240" y="2743200"/>
-            <a:ext cx="10607040" cy="1463040"/>
+            <a:off x="777240" y="1691640"/>
+            <a:ext cx="4879238" cy="1371600"/>
           </a:xfrm>
           <a:prstGeom prst="rect">
             <a:avLst/>
           </a:prstGeom>
           <a:solidFill>
-            <a:srgbClr val="2E2A26"/>
+            <a:srgbClr val="FFFFFF"/>
+          </a:solidFill>
+          <a:ln w="15875">
+            <a:solidFill>
+              <a:srgbClr val="3B6B4A"/>
+            </a:solidFill>
+            <a:prstDash val="solid"/>
+          </a:ln>
+        </p:spPr>
+      </p:sp>
+      <p:sp>
+        <p:nvSpPr>
+          <p:cNvPr id="5" name="Text 3"/>
+          <p:cNvSpPr txBox="1"/>
+          <p:nvPr/>
+        </p:nvSpPr>
+        <p:spPr>
+          <a:xfrm>
+            <a:off x="1005840" y="1783080"/>
+            <a:ext cx="1828800" cy="274320"/>
+          </a:xfrm>
+          <a:prstGeom prst="rect">
+            <a:avLst/>
+          </a:prstGeom>
+          <a:noFill/>
+          <a:ln/>
+        </p:spPr>
+        <p:txBody>
+          <a:bodyPr wrap="square" lIns="0" tIns="0" rIns="0" bIns="0" rtlCol="0" anchor="ctr"/>
+          <a:lstStyle/>
+          <a:p>
+            <a:pPr indent="0" marL="0">
+              <a:buNone/>
+            </a:pPr>
+            <a:r>
+              <a:rPr lang="en-US" sz="1000" b="1" spc="200" kern="0" dirty="0">
+                <a:solidFill>
+                  <a:srgbClr val="3B6B4A"/>
+                </a:solidFill>
+                <a:latin typeface="Yu Gothic" pitchFamily="34" charset="0"/>
+                <a:ea typeface="Yu Gothic" pitchFamily="34" charset="-122"/>
+                <a:cs typeface="Yu Gothic" pitchFamily="34" charset="-120"/>
+              </a:rPr>
+              <a:t>入力</a:t>
+            </a:r>
+            <a:endParaRPr lang="en-US" sz="1000" dirty="0"/>
+          </a:p>
+        </p:txBody>
+      </p:sp>
+      <p:sp>
+        <p:nvSpPr>
+          <p:cNvPr id="6" name="Text 4"/>
+          <p:cNvSpPr txBox="1"/>
+          <p:nvPr/>
+        </p:nvSpPr>
+        <p:spPr>
+          <a:xfrm>
+            <a:off x="1005840" y="2084832"/>
+            <a:ext cx="4422038" cy="868680"/>
+          </a:xfrm>
+          <a:prstGeom prst="rect">
+            <a:avLst/>
+          </a:prstGeom>
+          <a:noFill/>
+          <a:ln/>
+        </p:spPr>
+        <p:txBody>
+          <a:bodyPr wrap="square" lIns="0" tIns="0" rIns="0" bIns="0" rtlCol="0" anchor="ctr"/>
+          <a:lstStyle/>
+          <a:p>
+            <a:pPr indent="0" marL="0">
+              <a:lnSpc>
+                <a:spcPct val="125000"/>
+              </a:lnSpc>
+              <a:buNone/>
+            </a:pPr>
+            <a:r>
+              <a:rPr lang="en-US" sz="1200" dirty="0">
+                <a:solidFill>
+                  <a:srgbClr val="23201D"/>
+                </a:solidFill>
+                <a:latin typeface="Consolas" pitchFamily="34" charset="0"/>
+                <a:ea typeface="Consolas" pitchFamily="34" charset="-122"/>
+                <a:cs typeface="Consolas" pitchFamily="34" charset="-120"/>
+              </a:rPr>
+              <a:t>社長からの回答＋事実の提示</a:t>
+            </a:r>
+            <a:endParaRPr lang="en-US" sz="1200" dirty="0"/>
+          </a:p>
+        </p:txBody>
+      </p:sp>
+      <p:sp>
+        <p:nvSpPr>
+          <p:cNvPr id="7" name="Shape 5"/>
+          <p:cNvSpPr/>
+          <p:nvPr/>
+        </p:nvSpPr>
+        <p:spPr>
+          <a:xfrm>
+            <a:off x="6080760" y="1691640"/>
+            <a:ext cx="5303520" cy="3017520"/>
+          </a:xfrm>
+          <a:prstGeom prst="rect">
+            <a:avLst/>
+          </a:prstGeom>
+          <a:solidFill>
+            <a:srgbClr val="FFFFFF"/>
           </a:solidFill>
           <a:ln w="12700">
             <a:solidFill>
-              <a:srgbClr val="B04A2F"/>
+              <a:srgbClr val="EDE7DB"/>
             </a:solidFill>
             <a:prstDash val="solid"/>
           </a:ln>
@@ -5156,14 +7177,604 @@
       </p:sp>
       <p:sp>
         <p:nvSpPr>
+          <p:cNvPr id="8" name="Text 6"/>
+          <p:cNvSpPr txBox="1"/>
+          <p:nvPr/>
+        </p:nvSpPr>
+        <p:spPr>
+          <a:xfrm>
+            <a:off x="6309360" y="1783080"/>
+            <a:ext cx="2743200" cy="274320"/>
+          </a:xfrm>
+          <a:prstGeom prst="rect">
+            <a:avLst/>
+          </a:prstGeom>
+          <a:noFill/>
+          <a:ln/>
+        </p:spPr>
+        <p:txBody>
+          <a:bodyPr wrap="square" lIns="0" tIns="0" rIns="0" bIns="0" rtlCol="0" anchor="ctr"/>
+          <a:lstStyle/>
+          <a:p>
+            <a:pPr indent="0" marL="0">
+              <a:buNone/>
+            </a:pPr>
+            <a:r>
+              <a:rPr lang="en-US" sz="1000" b="1" spc="200" kern="0" dirty="0">
+                <a:solidFill>
+                  <a:srgbClr val="8A8177"/>
+                </a:solidFill>
+                <a:latin typeface="Yu Gothic" pitchFamily="34" charset="0"/>
+                <a:ea typeface="Yu Gothic" pitchFamily="34" charset="-122"/>
+                <a:cs typeface="Yu Gothic" pitchFamily="34" charset="-120"/>
+              </a:rPr>
+              <a:t>出てくるもの</a:t>
+            </a:r>
+            <a:endParaRPr lang="en-US" sz="1000" dirty="0"/>
+          </a:p>
+        </p:txBody>
+      </p:sp>
+      <p:sp>
+        <p:nvSpPr>
+          <p:cNvPr id="9" name="Text 7"/>
+          <p:cNvSpPr txBox="1"/>
+          <p:nvPr/>
+        </p:nvSpPr>
+        <p:spPr>
+          <a:xfrm>
+            <a:off x="6309360" y="2148840"/>
+            <a:ext cx="4846320" cy="566928"/>
+          </a:xfrm>
+          <a:prstGeom prst="rect">
+            <a:avLst/>
+          </a:prstGeom>
+          <a:noFill/>
+          <a:ln/>
+        </p:spPr>
+        <p:txBody>
+          <a:bodyPr wrap="square" lIns="0" tIns="0" rIns="0" bIns="0" rtlCol="0" anchor="ctr"/>
+          <a:lstStyle/>
+          <a:p>
+            <a:pPr indent="0" marL="0">
+              <a:lnSpc>
+                <a:spcPct val="125000"/>
+              </a:lnSpc>
+              <a:buNone/>
+            </a:pPr>
+            <a:r>
+              <a:rPr lang="en-US" sz="1250" dirty="0">
+                <a:solidFill>
+                  <a:srgbClr val="23201D"/>
+                </a:solidFill>
+                <a:latin typeface="Yu Gothic" pitchFamily="34" charset="0"/>
+                <a:ea typeface="Yu Gothic" pitchFamily="34" charset="-122"/>
+                <a:cs typeface="Yu Gothic" pitchFamily="34" charset="-120"/>
+              </a:rPr>
+              <a:t>・減らす話ではなく、空いた時間を何に移すかの話です</a:t>
+            </a:r>
+            <a:endParaRPr lang="en-US" sz="1250" dirty="0"/>
+          </a:p>
+        </p:txBody>
+      </p:sp>
+      <p:sp>
+        <p:nvSpPr>
+          <p:cNvPr id="10" name="Text 8"/>
+          <p:cNvSpPr txBox="1"/>
+          <p:nvPr/>
+        </p:nvSpPr>
+        <p:spPr>
+          <a:xfrm>
+            <a:off x="6309360" y="2752344"/>
+            <a:ext cx="4846320" cy="566928"/>
+          </a:xfrm>
+          <a:prstGeom prst="rect">
+            <a:avLst/>
+          </a:prstGeom>
+          <a:noFill/>
+          <a:ln/>
+        </p:spPr>
+        <p:txBody>
+          <a:bodyPr wrap="square" lIns="0" tIns="0" rIns="0" bIns="0" rtlCol="0" anchor="ctr"/>
+          <a:lstStyle/>
+          <a:p>
+            <a:pPr indent="0" marL="0">
+              <a:lnSpc>
+                <a:spcPct val="125000"/>
+              </a:lnSpc>
+              <a:buNone/>
+            </a:pPr>
+            <a:r>
+              <a:rPr lang="en-US" sz="1250" dirty="0">
+                <a:solidFill>
+                  <a:srgbClr val="23201D"/>
+                </a:solidFill>
+                <a:latin typeface="Yu Gothic" pitchFamily="34" charset="0"/>
+                <a:ea typeface="Yu Gothic" pitchFamily="34" charset="-122"/>
+                <a:cs typeface="Yu Gothic" pitchFamily="34" charset="-120"/>
+              </a:rPr>
+              <a:t>・契約と設定の事実を、いまこの場でお見せします</a:t>
+            </a:r>
+            <a:endParaRPr lang="en-US" sz="1250" dirty="0"/>
+          </a:p>
+        </p:txBody>
+      </p:sp>
+      <p:sp>
+        <p:nvSpPr>
+          <p:cNvPr id="11" name="Text 9"/>
+          <p:cNvSpPr txBox="1"/>
+          <p:nvPr/>
+        </p:nvSpPr>
+        <p:spPr>
+          <a:xfrm>
+            <a:off x="6309360" y="3355848"/>
+            <a:ext cx="4846320" cy="566928"/>
+          </a:xfrm>
+          <a:prstGeom prst="rect">
+            <a:avLst/>
+          </a:prstGeom>
+          <a:noFill/>
+          <a:ln/>
+        </p:spPr>
+        <p:txBody>
+          <a:bodyPr wrap="square" lIns="0" tIns="0" rIns="0" bIns="0" rtlCol="0" anchor="ctr"/>
+          <a:lstStyle/>
+          <a:p>
+            <a:pPr indent="0" marL="0">
+              <a:lnSpc>
+                <a:spcPct val="125000"/>
+              </a:lnSpc>
+              <a:buNone/>
+            </a:pPr>
+            <a:r>
+              <a:rPr lang="en-US" sz="1250" dirty="0">
+                <a:solidFill>
+                  <a:srgbClr val="23201D"/>
+                </a:solidFill>
+                <a:latin typeface="Yu Gothic" pitchFamily="34" charset="0"/>
+                <a:ea typeface="Yu Gothic" pitchFamily="34" charset="-122"/>
+                <a:cs typeface="Yu Gothic" pitchFamily="34" charset="-120"/>
+              </a:rPr>
+              <a:t>・確認する場所を決めてあります。ルールはA4一枚です</a:t>
+            </a:r>
+            <a:endParaRPr lang="en-US" sz="1250" dirty="0"/>
+          </a:p>
+        </p:txBody>
+      </p:sp>
+      <p:sp>
+        <p:nvSpPr>
+          <p:cNvPr id="12" name="Text 10"/>
+          <p:cNvSpPr txBox="1"/>
+          <p:nvPr/>
+        </p:nvSpPr>
+        <p:spPr>
+          <a:xfrm>
+            <a:off x="6309360" y="3959352"/>
+            <a:ext cx="4846320" cy="566928"/>
+          </a:xfrm>
+          <a:prstGeom prst="rect">
+            <a:avLst/>
+          </a:prstGeom>
+          <a:noFill/>
+          <a:ln/>
+        </p:spPr>
+        <p:txBody>
+          <a:bodyPr wrap="square" lIns="0" tIns="0" rIns="0" bIns="0" rtlCol="0" anchor="ctr"/>
+          <a:lstStyle/>
+          <a:p>
+            <a:pPr indent="0" marL="0">
+              <a:lnSpc>
+                <a:spcPct val="125000"/>
+              </a:lnSpc>
+              <a:buNone/>
+            </a:pPr>
+            <a:r>
+              <a:rPr lang="en-US" sz="1250" dirty="0">
+                <a:solidFill>
+                  <a:srgbClr val="23201D"/>
+                </a:solidFill>
+                <a:latin typeface="Yu Gothic" pitchFamily="34" charset="0"/>
+                <a:ea typeface="Yu Gothic" pitchFamily="34" charset="-122"/>
+                <a:cs typeface="Yu Gothic" pitchFamily="34" charset="-120"/>
+              </a:rPr>
+              <a:t>・会社としての方針を、いまお伝えします</a:t>
+            </a:r>
+            <a:endParaRPr lang="en-US" sz="1250" dirty="0"/>
+          </a:p>
+        </p:txBody>
+      </p:sp>
+      <p:sp>
+        <p:nvSpPr>
+          <p:cNvPr id="13" name="Shape 11"/>
+          <p:cNvSpPr/>
+          <p:nvPr/>
+        </p:nvSpPr>
+        <p:spPr>
+          <a:xfrm>
+            <a:off x="777240" y="3291840"/>
+            <a:ext cx="4879238" cy="1417320"/>
+          </a:xfrm>
+          <a:prstGeom prst="rect">
+            <a:avLst/>
+          </a:prstGeom>
+          <a:solidFill>
+            <a:srgbClr val="E7F0E9"/>
+          </a:solidFill>
+          <a:ln w="12700">
+            <a:solidFill>
+              <a:srgbClr val="333333"/>
+            </a:solidFill>
+            <a:prstDash val="solid"/>
+          </a:ln>
+        </p:spPr>
+      </p:sp>
+      <p:sp>
+        <p:nvSpPr>
+          <p:cNvPr id="14" name="Text 12"/>
+          <p:cNvSpPr txBox="1"/>
+          <p:nvPr/>
+        </p:nvSpPr>
+        <p:spPr>
+          <a:xfrm>
+            <a:off x="1005840" y="3383280"/>
+            <a:ext cx="4422038" cy="1234440"/>
+          </a:xfrm>
+          <a:prstGeom prst="rect">
+            <a:avLst/>
+          </a:prstGeom>
+          <a:noFill/>
+          <a:ln/>
+        </p:spPr>
+        <p:txBody>
+          <a:bodyPr wrap="square" lIns="0" tIns="0" rIns="0" bIns="0" rtlCol="0" anchor="ctr"/>
+          <a:lstStyle/>
+          <a:p>
+            <a:pPr indent="0" marL="0">
+              <a:lnSpc>
+                <a:spcPct val="135000"/>
+              </a:lnSpc>
+              <a:buNone/>
+            </a:pPr>
+            <a:r>
+              <a:rPr lang="en-US" sz="1250" dirty="0">
+                <a:solidFill>
+                  <a:srgbClr val="3F3933"/>
+                </a:solidFill>
+                <a:latin typeface="Yu Gothic" pitchFamily="34" charset="0"/>
+                <a:ea typeface="Yu Gothic" pitchFamily="34" charset="-122"/>
+                <a:cs typeface="Yu Gothic" pitchFamily="34" charset="-120"/>
+              </a:rPr>
+              <a:t>この4つに、はっきり答えられるかどうかで、来月から使われるかが決まります。</a:t>
+            </a:r>
+            <a:endParaRPr lang="en-US" sz="1250" dirty="0"/>
+          </a:p>
+        </p:txBody>
+      </p:sp>
+      <p:sp>
+        <p:nvSpPr>
+          <p:cNvPr id="15" name="Shape 13"/>
+          <p:cNvSpPr/>
+          <p:nvPr/>
+        </p:nvSpPr>
+        <p:spPr>
+          <a:xfrm>
+            <a:off x="777240" y="4983480"/>
+            <a:ext cx="10607040" cy="685800"/>
+          </a:xfrm>
+          <a:prstGeom prst="rect">
+            <a:avLst/>
+          </a:prstGeom>
+          <a:solidFill>
+            <a:srgbClr val="3B6B4A"/>
+          </a:solidFill>
+          <a:ln w="12700">
+            <a:solidFill>
+              <a:srgbClr val="333333"/>
+            </a:solidFill>
+            <a:prstDash val="solid"/>
+          </a:ln>
+        </p:spPr>
+      </p:sp>
+      <p:sp>
+        <p:nvSpPr>
+          <p:cNvPr id="16" name="Text 14"/>
+          <p:cNvSpPr txBox="1"/>
+          <p:nvPr/>
+        </p:nvSpPr>
+        <p:spPr>
+          <a:xfrm>
+            <a:off x="1097280" y="4983480"/>
+            <a:ext cx="9966960" cy="685800"/>
+          </a:xfrm>
+          <a:prstGeom prst="rect">
+            <a:avLst/>
+          </a:prstGeom>
+          <a:noFill/>
+          <a:ln/>
+        </p:spPr>
+        <p:txBody>
+          <a:bodyPr wrap="square" lIns="0" tIns="0" rIns="0" bIns="0" rtlCol="0" anchor="ctr"/>
+          <a:lstStyle/>
+          <a:p>
+            <a:pPr indent="0" marL="0">
+              <a:buNone/>
+            </a:pPr>
+            <a:r>
+              <a:rPr lang="en-US" sz="1450" b="1" dirty="0">
+                <a:solidFill>
+                  <a:srgbClr val="FFFFFF"/>
+                </a:solidFill>
+                <a:latin typeface="Yu Gothic" pitchFamily="34" charset="0"/>
+                <a:ea typeface="Yu Gothic" pitchFamily="34" charset="-122"/>
+                <a:cs typeface="Yu Gothic" pitchFamily="34" charset="-120"/>
+              </a:rPr>
+              <a:t>答えを持って臨めば、反対意見は設計の材料になります</a:t>
+            </a:r>
+            <a:endParaRPr lang="en-US" sz="1450" dirty="0"/>
+          </a:p>
+        </p:txBody>
+      </p:sp>
+      <p:sp>
+        <p:nvSpPr>
+          <p:cNvPr id="17" name="Text 15"/>
+          <p:cNvSpPr txBox="1"/>
+          <p:nvPr/>
+        </p:nvSpPr>
+        <p:spPr>
+          <a:xfrm>
+            <a:off x="777240" y="6382512"/>
+            <a:ext cx="7424928" cy="256032"/>
+          </a:xfrm>
+          <a:prstGeom prst="rect">
+            <a:avLst/>
+          </a:prstGeom>
+          <a:noFill/>
+          <a:ln/>
+        </p:spPr>
+        <p:txBody>
+          <a:bodyPr wrap="square" lIns="0" tIns="0" rIns="0" bIns="0" rtlCol="0" anchor="ctr"/>
+          <a:lstStyle/>
+          <a:p>
+            <a:pPr indent="0" marL="0">
+              <a:buNone/>
+            </a:pPr>
+            <a:r>
+              <a:rPr lang="en-US" sz="900" dirty="0">
+                <a:solidFill>
+                  <a:srgbClr val="8A8177"/>
+                </a:solidFill>
+                <a:latin typeface="Yu Gothic" pitchFamily="34" charset="0"/>
+                <a:ea typeface="Yu Gothic" pitchFamily="34" charset="-122"/>
+                <a:cs typeface="Yu Gothic" pitchFamily="34" charset="-120"/>
+              </a:rPr>
+              <a:t>第6回　社内へのお披露目と12か月計画</a:t>
+            </a:r>
+            <a:endParaRPr lang="en-US" sz="900" dirty="0"/>
+          </a:p>
+        </p:txBody>
+      </p:sp>
+      <p:sp>
+        <p:nvSpPr>
+          <p:cNvPr id="18" name="Text 16"/>
+          <p:cNvSpPr txBox="1"/>
+          <p:nvPr/>
+        </p:nvSpPr>
+        <p:spPr>
+          <a:xfrm>
+            <a:off x="8202168" y="6382512"/>
+            <a:ext cx="3182112" cy="256032"/>
+          </a:xfrm>
+          <a:prstGeom prst="rect">
+            <a:avLst/>
+          </a:prstGeom>
+          <a:noFill/>
+          <a:ln/>
+        </p:spPr>
+        <p:txBody>
+          <a:bodyPr wrap="square" lIns="0" tIns="0" rIns="0" bIns="0" rtlCol="0" anchor="ctr"/>
+          <a:lstStyle/>
+          <a:p>
+            <a:pPr algn="r" indent="0" marL="0">
+              <a:buNone/>
+            </a:pPr>
+            <a:r>
+              <a:rPr lang="en-US" sz="900" dirty="0">
+                <a:solidFill>
+                  <a:srgbClr val="8A8177"/>
+                </a:solidFill>
+                <a:latin typeface="Yu Gothic" pitchFamily="34" charset="0"/>
+                <a:ea typeface="Yu Gothic" pitchFamily="34" charset="-122"/>
+                <a:cs typeface="Yu Gothic" pitchFamily="34" charset="-120"/>
+              </a:rPr>
+              <a:t>実演 ②</a:t>
+            </a:r>
+            <a:endParaRPr lang="en-US" sz="900" dirty="0"/>
+          </a:p>
+        </p:txBody>
+      </p:sp>
+    </p:spTree>
+  </p:cSld>
+  <p:clrMapOvr>
+    <a:masterClrMapping/>
+  </p:clrMapOvr>
+</p:sld>
+</file>
+
+<file path=ppt/slides/slide8.xml><?xml version="1.0" encoding="utf-8"?>
+<p:sld xmlns:a="http://schemas.openxmlformats.org/drawingml/2006/main" xmlns:r="http://schemas.openxmlformats.org/officeDocument/2006/relationships" xmlns:p="http://schemas.openxmlformats.org/presentationml/2006/main">
+  <p:cSld name="Slide 8">
+    <p:bg>
+      <p:bgPr>
+        <a:solidFill>
+          <a:srgbClr val="F6F2EA"/>
+        </a:solidFill>
+      </p:bgPr>
+    </p:bg>
+    <p:spTree>
+      <p:nvGrpSpPr>
+        <p:cNvPr id="1" name=""/>
+        <p:cNvGrpSpPr/>
+        <p:nvPr/>
+      </p:nvGrpSpPr>
+      <p:grpSpPr>
+        <a:xfrm>
+          <a:off x="0" y="0"/>
+          <a:ext cx="0" cy="0"/>
+          <a:chOff x="0" y="0"/>
+          <a:chExt cx="0" cy="0"/>
+        </a:xfrm>
+      </p:grpSpPr>
+      <p:sp>
+        <p:nvSpPr>
+          <p:cNvPr id="2" name="Text 0"/>
+          <p:cNvSpPr txBox="1"/>
+          <p:nvPr/>
+        </p:nvSpPr>
+        <p:spPr>
+          <a:xfrm>
+            <a:off x="777240" y="566928"/>
+            <a:ext cx="10607040" cy="274320"/>
+          </a:xfrm>
+          <a:prstGeom prst="rect">
+            <a:avLst/>
+          </a:prstGeom>
+          <a:noFill/>
+          <a:ln/>
+        </p:spPr>
+        <p:txBody>
+          <a:bodyPr wrap="square" lIns="0" tIns="0" rIns="0" bIns="0" rtlCol="0" anchor="ctr"/>
+          <a:lstStyle/>
+          <a:p>
+            <a:pPr indent="0" marL="0">
+              <a:buNone/>
+            </a:pPr>
+            <a:r>
+              <a:rPr lang="en-US" sz="1100" b="1" spc="250" kern="0" dirty="0">
+                <a:solidFill>
+                  <a:srgbClr val="B04A2F"/>
+                </a:solidFill>
+                <a:latin typeface="Yu Gothic" pitchFamily="34" charset="0"/>
+                <a:ea typeface="Yu Gothic" pitchFamily="34" charset="-122"/>
+                <a:cs typeface="Yu Gothic" pitchFamily="34" charset="-120"/>
+              </a:rPr>
+              <a:t>つまずきやすいところ</a:t>
+            </a:r>
+            <a:endParaRPr lang="en-US" sz="1100" dirty="0"/>
+          </a:p>
+        </p:txBody>
+      </p:sp>
+      <p:sp>
+        <p:nvSpPr>
+          <p:cNvPr id="3" name="Text 1"/>
+          <p:cNvSpPr txBox="1"/>
+          <p:nvPr/>
+        </p:nvSpPr>
+        <p:spPr>
+          <a:xfrm>
+            <a:off x="777240" y="896112"/>
+            <a:ext cx="10607040" cy="640080"/>
+          </a:xfrm>
+          <a:prstGeom prst="rect">
+            <a:avLst/>
+          </a:prstGeom>
+          <a:noFill/>
+          <a:ln/>
+        </p:spPr>
+        <p:txBody>
+          <a:bodyPr wrap="square" lIns="0" tIns="0" rIns="0" bIns="0" rtlCol="0" anchor="ctr"/>
+          <a:lstStyle/>
+          <a:p>
+            <a:pPr indent="0" marL="0">
+              <a:buNone/>
+            </a:pPr>
+            <a:r>
+              <a:rPr lang="en-US" sz="2600" b="1" dirty="0">
+                <a:solidFill>
+                  <a:srgbClr val="23201D"/>
+                </a:solidFill>
+                <a:latin typeface="Yu Gothic" pitchFamily="34" charset="0"/>
+                <a:ea typeface="Yu Gothic" pitchFamily="34" charset="-122"/>
+                <a:cs typeface="Yu Gothic" pitchFamily="34" charset="-120"/>
+              </a:rPr>
+              <a:t>この回で、よく起きること</a:t>
+            </a:r>
+            <a:endParaRPr lang="en-US" sz="2600" dirty="0"/>
+          </a:p>
+        </p:txBody>
+      </p:sp>
+      <p:sp>
+        <p:nvSpPr>
+          <p:cNvPr id="4" name="Shape 2"/>
+          <p:cNvSpPr/>
+          <p:nvPr/>
+        </p:nvSpPr>
+        <p:spPr>
+          <a:xfrm>
+            <a:off x="777240" y="1737360"/>
+            <a:ext cx="10607040" cy="1078992"/>
+          </a:xfrm>
+          <a:prstGeom prst="rect">
+            <a:avLst/>
+          </a:prstGeom>
+          <a:solidFill>
+            <a:srgbClr val="FFFFFF"/>
+          </a:solidFill>
+          <a:ln w="12700">
+            <a:solidFill>
+              <a:srgbClr val="EDE7DB"/>
+            </a:solidFill>
+            <a:prstDash val="solid"/>
+          </a:ln>
+        </p:spPr>
+      </p:sp>
+      <p:sp>
+        <p:nvSpPr>
           <p:cNvPr id="5" name="Text 3"/>
           <p:cNvSpPr txBox="1"/>
           <p:nvPr/>
         </p:nvSpPr>
         <p:spPr>
           <a:xfrm>
-            <a:off x="1234440" y="2880360"/>
-            <a:ext cx="9692640" cy="1188720"/>
+            <a:off x="1051560" y="1856232"/>
+            <a:ext cx="1463040" cy="256032"/>
+          </a:xfrm>
+          <a:prstGeom prst="rect">
+            <a:avLst/>
+          </a:prstGeom>
+          <a:noFill/>
+          <a:ln/>
+        </p:spPr>
+        <p:txBody>
+          <a:bodyPr wrap="square" lIns="0" tIns="0" rIns="0" bIns="0" rtlCol="0" anchor="ctr"/>
+          <a:lstStyle/>
+          <a:p>
+            <a:pPr indent="0" marL="0">
+              <a:buNone/>
+            </a:pPr>
+            <a:r>
+              <a:rPr lang="en-US" sz="900" b="1" spc="150" kern="0" dirty="0">
+                <a:solidFill>
+                  <a:srgbClr val="8A8177"/>
+                </a:solidFill>
+                <a:latin typeface="Yu Gothic" pitchFamily="34" charset="0"/>
+                <a:ea typeface="Yu Gothic" pitchFamily="34" charset="-122"/>
+                <a:cs typeface="Yu Gothic" pitchFamily="34" charset="-120"/>
+              </a:rPr>
+              <a:t>こうなったら</a:t>
+            </a:r>
+            <a:endParaRPr lang="en-US" sz="900" dirty="0"/>
+          </a:p>
+        </p:txBody>
+      </p:sp>
+      <p:sp>
+        <p:nvSpPr>
+          <p:cNvPr id="6" name="Text 4"/>
+          <p:cNvSpPr txBox="1"/>
+          <p:nvPr/>
+        </p:nvSpPr>
+        <p:spPr>
+          <a:xfrm>
+            <a:off x="1051560" y="2121408"/>
+            <a:ext cx="4454957" cy="566928"/>
           </a:xfrm>
           <a:prstGeom prst="rect">
             <a:avLst/>
@@ -5177,12 +7788,858 @@
           <a:p>
             <a:pPr indent="0" marL="0">
               <a:lnSpc>
-                <a:spcPct val="140000"/>
+                <a:spcPct val="120000"/>
               </a:lnSpc>
               <a:buNone/>
             </a:pPr>
             <a:r>
-              <a:rPr lang="en-US" sz="1900" b="1" dirty="0">
+              <a:rPr lang="en-US" sz="1350" b="1" dirty="0">
+                <a:solidFill>
+                  <a:srgbClr val="23201D"/>
+                </a:solidFill>
+                <a:latin typeface="Yu Gothic" pitchFamily="34" charset="0"/>
+                <a:ea typeface="Yu Gothic" pitchFamily="34" charset="-122"/>
+                <a:cs typeface="Yu Gothic" pitchFamily="34" charset="-120"/>
+              </a:rPr>
+              <a:t>社員が集まらない／1名しか来ない</a:t>
+            </a:r>
+            <a:endParaRPr lang="en-US" sz="1350" dirty="0"/>
+          </a:p>
+        </p:txBody>
+      </p:sp>
+      <p:sp>
+        <p:nvSpPr>
+          <p:cNvPr id="7" name="Shape 5"/>
+          <p:cNvSpPr/>
+          <p:nvPr/>
+        </p:nvSpPr>
+        <p:spPr>
+          <a:xfrm>
+            <a:off x="5762549" y="1847088"/>
+            <a:ext cx="18288" cy="859536"/>
+          </a:xfrm>
+          <a:prstGeom prst="rect">
+            <a:avLst/>
+          </a:prstGeom>
+          <a:solidFill>
+            <a:srgbClr val="EDE7DB"/>
+          </a:solidFill>
+          <a:ln w="12700">
+            <a:solidFill>
+              <a:srgbClr val="333333"/>
+            </a:solidFill>
+            <a:prstDash val="solid"/>
+          </a:ln>
+        </p:spPr>
+      </p:sp>
+      <p:sp>
+        <p:nvSpPr>
+          <p:cNvPr id="8" name="Text 6"/>
+          <p:cNvSpPr txBox="1"/>
+          <p:nvPr/>
+        </p:nvSpPr>
+        <p:spPr>
+          <a:xfrm>
+            <a:off x="6080760" y="1856232"/>
+            <a:ext cx="1463040" cy="256032"/>
+          </a:xfrm>
+          <a:prstGeom prst="rect">
+            <a:avLst/>
+          </a:prstGeom>
+          <a:noFill/>
+          <a:ln/>
+        </p:spPr>
+        <p:txBody>
+          <a:bodyPr wrap="square" lIns="0" tIns="0" rIns="0" bIns="0" rtlCol="0" anchor="ctr"/>
+          <a:lstStyle/>
+          <a:p>
+            <a:pPr indent="0" marL="0">
+              <a:buNone/>
+            </a:pPr>
+            <a:r>
+              <a:rPr lang="en-US" sz="900" b="1" spc="150" kern="0" dirty="0">
+                <a:solidFill>
+                  <a:srgbClr val="B04A2F"/>
+                </a:solidFill>
+                <a:latin typeface="Yu Gothic" pitchFamily="34" charset="0"/>
+                <a:ea typeface="Yu Gothic" pitchFamily="34" charset="-122"/>
+                <a:cs typeface="Yu Gothic" pitchFamily="34" charset="-120"/>
+              </a:rPr>
+              <a:t>こうする</a:t>
+            </a:r>
+            <a:endParaRPr lang="en-US" sz="900" dirty="0"/>
+          </a:p>
+        </p:txBody>
+      </p:sp>
+      <p:sp>
+        <p:nvSpPr>
+          <p:cNvPr id="9" name="Text 7"/>
+          <p:cNvSpPr txBox="1"/>
+          <p:nvPr/>
+        </p:nvSpPr>
+        <p:spPr>
+          <a:xfrm>
+            <a:off x="6080760" y="2121408"/>
+            <a:ext cx="5091379" cy="566928"/>
+          </a:xfrm>
+          <a:prstGeom prst="rect">
+            <a:avLst/>
+          </a:prstGeom>
+          <a:noFill/>
+          <a:ln/>
+        </p:spPr>
+        <p:txBody>
+          <a:bodyPr wrap="square" lIns="0" tIns="0" rIns="0" bIns="0" rtlCol="0" anchor="ctr"/>
+          <a:lstStyle/>
+          <a:p>
+            <a:pPr indent="0" marL="0">
+              <a:lnSpc>
+                <a:spcPct val="125000"/>
+              </a:lnSpc>
+              <a:buNone/>
+            </a:pPr>
+            <a:r>
+              <a:rPr lang="en-US" sz="1250" dirty="0">
+                <a:solidFill>
+                  <a:srgbClr val="3F3933"/>
+                </a:solidFill>
+                <a:latin typeface="Yu Gothic" pitchFamily="34" charset="0"/>
+                <a:ea typeface="Yu Gothic" pitchFamily="34" charset="-122"/>
+                <a:cs typeface="Yu Gothic" pitchFamily="34" charset="-120"/>
+              </a:rPr>
+              <a:t>人数より、その1名が推進候補かどうかです。少なければ形式を座談会に変えます</a:t>
+            </a:r>
+            <a:endParaRPr lang="en-US" sz="1250" dirty="0"/>
+          </a:p>
+        </p:txBody>
+      </p:sp>
+      <p:sp>
+        <p:nvSpPr>
+          <p:cNvPr id="10" name="Shape 8"/>
+          <p:cNvSpPr/>
+          <p:nvPr/>
+        </p:nvSpPr>
+        <p:spPr>
+          <a:xfrm>
+            <a:off x="777240" y="2944368"/>
+            <a:ext cx="10607040" cy="1078992"/>
+          </a:xfrm>
+          <a:prstGeom prst="rect">
+            <a:avLst/>
+          </a:prstGeom>
+          <a:solidFill>
+            <a:srgbClr val="FFFFFF"/>
+          </a:solidFill>
+          <a:ln w="12700">
+            <a:solidFill>
+              <a:srgbClr val="EDE7DB"/>
+            </a:solidFill>
+            <a:prstDash val="solid"/>
+          </a:ln>
+        </p:spPr>
+      </p:sp>
+      <p:sp>
+        <p:nvSpPr>
+          <p:cNvPr id="11" name="Text 9"/>
+          <p:cNvSpPr txBox="1"/>
+          <p:nvPr/>
+        </p:nvSpPr>
+        <p:spPr>
+          <a:xfrm>
+            <a:off x="1051560" y="3063240"/>
+            <a:ext cx="1463040" cy="256032"/>
+          </a:xfrm>
+          <a:prstGeom prst="rect">
+            <a:avLst/>
+          </a:prstGeom>
+          <a:noFill/>
+          <a:ln/>
+        </p:spPr>
+        <p:txBody>
+          <a:bodyPr wrap="square" lIns="0" tIns="0" rIns="0" bIns="0" rtlCol="0" anchor="ctr"/>
+          <a:lstStyle/>
+          <a:p>
+            <a:pPr indent="0" marL="0">
+              <a:buNone/>
+            </a:pPr>
+            <a:r>
+              <a:rPr lang="en-US" sz="900" b="1" spc="150" kern="0" dirty="0">
+                <a:solidFill>
+                  <a:srgbClr val="8A8177"/>
+                </a:solidFill>
+                <a:latin typeface="Yu Gothic" pitchFamily="34" charset="0"/>
+                <a:ea typeface="Yu Gothic" pitchFamily="34" charset="-122"/>
+                <a:cs typeface="Yu Gothic" pitchFamily="34" charset="-120"/>
+              </a:rPr>
+              <a:t>こうなったら</a:t>
+            </a:r>
+            <a:endParaRPr lang="en-US" sz="900" dirty="0"/>
+          </a:p>
+        </p:txBody>
+      </p:sp>
+      <p:sp>
+        <p:nvSpPr>
+          <p:cNvPr id="12" name="Text 10"/>
+          <p:cNvSpPr txBox="1"/>
+          <p:nvPr/>
+        </p:nvSpPr>
+        <p:spPr>
+          <a:xfrm>
+            <a:off x="1051560" y="3328416"/>
+            <a:ext cx="4454957" cy="566928"/>
+          </a:xfrm>
+          <a:prstGeom prst="rect">
+            <a:avLst/>
+          </a:prstGeom>
+          <a:noFill/>
+          <a:ln/>
+        </p:spPr>
+        <p:txBody>
+          <a:bodyPr wrap="square" lIns="0" tIns="0" rIns="0" bIns="0" rtlCol="0" anchor="ctr"/>
+          <a:lstStyle/>
+          <a:p>
+            <a:pPr indent="0" marL="0">
+              <a:lnSpc>
+                <a:spcPct val="120000"/>
+              </a:lnSpc>
+              <a:buNone/>
+            </a:pPr>
+            <a:r>
+              <a:rPr lang="en-US" sz="1350" b="1" dirty="0">
+                <a:solidFill>
+                  <a:srgbClr val="23201D"/>
+                </a:solidFill>
+                <a:latin typeface="Yu Gothic" pitchFamily="34" charset="0"/>
+                <a:ea typeface="Yu Gothic" pitchFamily="34" charset="-122"/>
+                <a:cs typeface="Yu Gothic" pitchFamily="34" charset="-120"/>
+              </a:rPr>
+              <a:t>発表中に社長が固まる</a:t>
+            </a:r>
+            <a:endParaRPr lang="en-US" sz="1350" dirty="0"/>
+          </a:p>
+        </p:txBody>
+      </p:sp>
+      <p:sp>
+        <p:nvSpPr>
+          <p:cNvPr id="13" name="Shape 11"/>
+          <p:cNvSpPr/>
+          <p:nvPr/>
+        </p:nvSpPr>
+        <p:spPr>
+          <a:xfrm>
+            <a:off x="5762549" y="3054096"/>
+            <a:ext cx="18288" cy="859536"/>
+          </a:xfrm>
+          <a:prstGeom prst="rect">
+            <a:avLst/>
+          </a:prstGeom>
+          <a:solidFill>
+            <a:srgbClr val="EDE7DB"/>
+          </a:solidFill>
+          <a:ln w="12700">
+            <a:solidFill>
+              <a:srgbClr val="333333"/>
+            </a:solidFill>
+            <a:prstDash val="solid"/>
+          </a:ln>
+        </p:spPr>
+      </p:sp>
+      <p:sp>
+        <p:nvSpPr>
+          <p:cNvPr id="14" name="Text 12"/>
+          <p:cNvSpPr txBox="1"/>
+          <p:nvPr/>
+        </p:nvSpPr>
+        <p:spPr>
+          <a:xfrm>
+            <a:off x="6080760" y="3063240"/>
+            <a:ext cx="1463040" cy="256032"/>
+          </a:xfrm>
+          <a:prstGeom prst="rect">
+            <a:avLst/>
+          </a:prstGeom>
+          <a:noFill/>
+          <a:ln/>
+        </p:spPr>
+        <p:txBody>
+          <a:bodyPr wrap="square" lIns="0" tIns="0" rIns="0" bIns="0" rtlCol="0" anchor="ctr"/>
+          <a:lstStyle/>
+          <a:p>
+            <a:pPr indent="0" marL="0">
+              <a:buNone/>
+            </a:pPr>
+            <a:r>
+              <a:rPr lang="en-US" sz="900" b="1" spc="150" kern="0" dirty="0">
+                <a:solidFill>
+                  <a:srgbClr val="B04A2F"/>
+                </a:solidFill>
+                <a:latin typeface="Yu Gothic" pitchFamily="34" charset="0"/>
+                <a:ea typeface="Yu Gothic" pitchFamily="34" charset="-122"/>
+                <a:cs typeface="Yu Gothic" pitchFamily="34" charset="-120"/>
+              </a:rPr>
+              <a:t>こうする</a:t>
+            </a:r>
+            <a:endParaRPr lang="en-US" sz="900" dirty="0"/>
+          </a:p>
+        </p:txBody>
+      </p:sp>
+      <p:sp>
+        <p:nvSpPr>
+          <p:cNvPr id="15" name="Text 13"/>
+          <p:cNvSpPr txBox="1"/>
+          <p:nvPr/>
+        </p:nvSpPr>
+        <p:spPr>
+          <a:xfrm>
+            <a:off x="6080760" y="3328416"/>
+            <a:ext cx="5091379" cy="566928"/>
+          </a:xfrm>
+          <a:prstGeom prst="rect">
+            <a:avLst/>
+          </a:prstGeom>
+          <a:noFill/>
+          <a:ln/>
+        </p:spPr>
+        <p:txBody>
+          <a:bodyPr wrap="square" lIns="0" tIns="0" rIns="0" bIns="0" rtlCol="0" anchor="ctr"/>
+          <a:lstStyle/>
+          <a:p>
+            <a:pPr indent="0" marL="0">
+              <a:lnSpc>
+                <a:spcPct val="125000"/>
+              </a:lnSpc>
+              <a:buNone/>
+            </a:pPr>
+            <a:r>
+              <a:rPr lang="en-US" sz="1250" dirty="0">
+                <a:solidFill>
+                  <a:srgbClr val="3F3933"/>
+                </a:solidFill>
+                <a:latin typeface="Yu Gothic" pitchFamily="34" charset="0"/>
+                <a:ea typeface="Yu Gothic" pitchFamily="34" charset="-122"/>
+                <a:cs typeface="Yu Gothic" pitchFamily="34" charset="-120"/>
+              </a:rPr>
+              <a:t>講師が質問を挟んで話を引き出します。代わりに説明してはいけません。講師が主役になった瞬間、AIは「外の人のもの」になります</a:t>
+            </a:r>
+            <a:endParaRPr lang="en-US" sz="1250" dirty="0"/>
+          </a:p>
+        </p:txBody>
+      </p:sp>
+      <p:sp>
+        <p:nvSpPr>
+          <p:cNvPr id="16" name="Shape 14"/>
+          <p:cNvSpPr/>
+          <p:nvPr/>
+        </p:nvSpPr>
+        <p:spPr>
+          <a:xfrm>
+            <a:off x="777240" y="4151376"/>
+            <a:ext cx="10607040" cy="1078992"/>
+          </a:xfrm>
+          <a:prstGeom prst="rect">
+            <a:avLst/>
+          </a:prstGeom>
+          <a:solidFill>
+            <a:srgbClr val="FFFFFF"/>
+          </a:solidFill>
+          <a:ln w="12700">
+            <a:solidFill>
+              <a:srgbClr val="EDE7DB"/>
+            </a:solidFill>
+            <a:prstDash val="solid"/>
+          </a:ln>
+        </p:spPr>
+      </p:sp>
+      <p:sp>
+        <p:nvSpPr>
+          <p:cNvPr id="17" name="Text 15"/>
+          <p:cNvSpPr txBox="1"/>
+          <p:nvPr/>
+        </p:nvSpPr>
+        <p:spPr>
+          <a:xfrm>
+            <a:off x="1051560" y="4270248"/>
+            <a:ext cx="1463040" cy="256032"/>
+          </a:xfrm>
+          <a:prstGeom prst="rect">
+            <a:avLst/>
+          </a:prstGeom>
+          <a:noFill/>
+          <a:ln/>
+        </p:spPr>
+        <p:txBody>
+          <a:bodyPr wrap="square" lIns="0" tIns="0" rIns="0" bIns="0" rtlCol="0" anchor="ctr"/>
+          <a:lstStyle/>
+          <a:p>
+            <a:pPr indent="0" marL="0">
+              <a:buNone/>
+            </a:pPr>
+            <a:r>
+              <a:rPr lang="en-US" sz="900" b="1" spc="150" kern="0" dirty="0">
+                <a:solidFill>
+                  <a:srgbClr val="8A8177"/>
+                </a:solidFill>
+                <a:latin typeface="Yu Gothic" pitchFamily="34" charset="0"/>
+                <a:ea typeface="Yu Gothic" pitchFamily="34" charset="-122"/>
+                <a:cs typeface="Yu Gothic" pitchFamily="34" charset="-120"/>
+              </a:rPr>
+              <a:t>こうなったら</a:t>
+            </a:r>
+            <a:endParaRPr lang="en-US" sz="900" dirty="0"/>
+          </a:p>
+        </p:txBody>
+      </p:sp>
+      <p:sp>
+        <p:nvSpPr>
+          <p:cNvPr id="18" name="Text 16"/>
+          <p:cNvSpPr txBox="1"/>
+          <p:nvPr/>
+        </p:nvSpPr>
+        <p:spPr>
+          <a:xfrm>
+            <a:off x="1051560" y="4535424"/>
+            <a:ext cx="4454957" cy="566928"/>
+          </a:xfrm>
+          <a:prstGeom prst="rect">
+            <a:avLst/>
+          </a:prstGeom>
+          <a:noFill/>
+          <a:ln/>
+        </p:spPr>
+        <p:txBody>
+          <a:bodyPr wrap="square" lIns="0" tIns="0" rIns="0" bIns="0" rtlCol="0" anchor="ctr"/>
+          <a:lstStyle/>
+          <a:p>
+            <a:pPr indent="0" marL="0">
+              <a:lnSpc>
+                <a:spcPct val="120000"/>
+              </a:lnSpc>
+              <a:buNone/>
+            </a:pPr>
+            <a:r>
+              <a:rPr lang="en-US" sz="1350" b="1" dirty="0">
+                <a:solidFill>
+                  <a:srgbClr val="23201D"/>
+                </a:solidFill>
+                <a:latin typeface="Yu Gothic" pitchFamily="34" charset="0"/>
+                <a:ea typeface="Yu Gothic" pitchFamily="34" charset="-122"/>
+                <a:cs typeface="Yu Gothic" pitchFamily="34" charset="-120"/>
+              </a:rPr>
+              <a:t>強い反発が出る</a:t>
+            </a:r>
+            <a:endParaRPr lang="en-US" sz="1350" dirty="0"/>
+          </a:p>
+        </p:txBody>
+      </p:sp>
+      <p:sp>
+        <p:nvSpPr>
+          <p:cNvPr id="19" name="Shape 17"/>
+          <p:cNvSpPr/>
+          <p:nvPr/>
+        </p:nvSpPr>
+        <p:spPr>
+          <a:xfrm>
+            <a:off x="5762549" y="4261104"/>
+            <a:ext cx="18288" cy="859536"/>
+          </a:xfrm>
+          <a:prstGeom prst="rect">
+            <a:avLst/>
+          </a:prstGeom>
+          <a:solidFill>
+            <a:srgbClr val="EDE7DB"/>
+          </a:solidFill>
+          <a:ln w="12700">
+            <a:solidFill>
+              <a:srgbClr val="333333"/>
+            </a:solidFill>
+            <a:prstDash val="solid"/>
+          </a:ln>
+        </p:spPr>
+      </p:sp>
+      <p:sp>
+        <p:nvSpPr>
+          <p:cNvPr id="20" name="Text 18"/>
+          <p:cNvSpPr txBox="1"/>
+          <p:nvPr/>
+        </p:nvSpPr>
+        <p:spPr>
+          <a:xfrm>
+            <a:off x="6080760" y="4270248"/>
+            <a:ext cx="1463040" cy="256032"/>
+          </a:xfrm>
+          <a:prstGeom prst="rect">
+            <a:avLst/>
+          </a:prstGeom>
+          <a:noFill/>
+          <a:ln/>
+        </p:spPr>
+        <p:txBody>
+          <a:bodyPr wrap="square" lIns="0" tIns="0" rIns="0" bIns="0" rtlCol="0" anchor="ctr"/>
+          <a:lstStyle/>
+          <a:p>
+            <a:pPr indent="0" marL="0">
+              <a:buNone/>
+            </a:pPr>
+            <a:r>
+              <a:rPr lang="en-US" sz="900" b="1" spc="150" kern="0" dirty="0">
+                <a:solidFill>
+                  <a:srgbClr val="B04A2F"/>
+                </a:solidFill>
+                <a:latin typeface="Yu Gothic" pitchFamily="34" charset="0"/>
+                <a:ea typeface="Yu Gothic" pitchFamily="34" charset="-122"/>
+                <a:cs typeface="Yu Gothic" pitchFamily="34" charset="-120"/>
+              </a:rPr>
+              <a:t>こうする</a:t>
+            </a:r>
+            <a:endParaRPr lang="en-US" sz="900" dirty="0"/>
+          </a:p>
+        </p:txBody>
+      </p:sp>
+      <p:sp>
+        <p:nvSpPr>
+          <p:cNvPr id="21" name="Text 19"/>
+          <p:cNvSpPr txBox="1"/>
+          <p:nvPr/>
+        </p:nvSpPr>
+        <p:spPr>
+          <a:xfrm>
+            <a:off x="6080760" y="4535424"/>
+            <a:ext cx="5091379" cy="566928"/>
+          </a:xfrm>
+          <a:prstGeom prst="rect">
+            <a:avLst/>
+          </a:prstGeom>
+          <a:noFill/>
+          <a:ln/>
+        </p:spPr>
+        <p:txBody>
+          <a:bodyPr wrap="square" lIns="0" tIns="0" rIns="0" bIns="0" rtlCol="0" anchor="ctr"/>
+          <a:lstStyle/>
+          <a:p>
+            <a:pPr indent="0" marL="0">
+              <a:lnSpc>
+                <a:spcPct val="125000"/>
+              </a:lnSpc>
+              <a:buNone/>
+            </a:pPr>
+            <a:r>
+              <a:rPr lang="en-US" sz="1250" dirty="0">
+                <a:solidFill>
+                  <a:srgbClr val="3F3933"/>
+                </a:solidFill>
+                <a:latin typeface="Yu Gothic" pitchFamily="34" charset="0"/>
+                <a:ea typeface="Yu Gothic" pitchFamily="34" charset="-122"/>
+                <a:cs typeface="Yu Gothic" pitchFamily="34" charset="-120"/>
+              </a:rPr>
+              <a:t>遮りません。全部出させます。反発が出た回のほうが、後の定着はよくなります</a:t>
+            </a:r>
+            <a:endParaRPr lang="en-US" sz="1250" dirty="0"/>
+          </a:p>
+        </p:txBody>
+      </p:sp>
+      <p:sp>
+        <p:nvSpPr>
+          <p:cNvPr id="22" name="Text 20"/>
+          <p:cNvSpPr txBox="1"/>
+          <p:nvPr/>
+        </p:nvSpPr>
+        <p:spPr>
+          <a:xfrm>
+            <a:off x="777240" y="6382512"/>
+            <a:ext cx="7424928" cy="256032"/>
+          </a:xfrm>
+          <a:prstGeom prst="rect">
+            <a:avLst/>
+          </a:prstGeom>
+          <a:noFill/>
+          <a:ln/>
+        </p:spPr>
+        <p:txBody>
+          <a:bodyPr wrap="square" lIns="0" tIns="0" rIns="0" bIns="0" rtlCol="0" anchor="ctr"/>
+          <a:lstStyle/>
+          <a:p>
+            <a:pPr indent="0" marL="0">
+              <a:buNone/>
+            </a:pPr>
+            <a:r>
+              <a:rPr lang="en-US" sz="900" dirty="0">
+                <a:solidFill>
+                  <a:srgbClr val="8A8177"/>
+                </a:solidFill>
+                <a:latin typeface="Yu Gothic" pitchFamily="34" charset="0"/>
+                <a:ea typeface="Yu Gothic" pitchFamily="34" charset="-122"/>
+                <a:cs typeface="Yu Gothic" pitchFamily="34" charset="-120"/>
+              </a:rPr>
+              <a:t>第6回　社内へのお披露目と12か月計画</a:t>
+            </a:r>
+            <a:endParaRPr lang="en-US" sz="900" dirty="0"/>
+          </a:p>
+        </p:txBody>
+      </p:sp>
+      <p:sp>
+        <p:nvSpPr>
+          <p:cNvPr id="23" name="Text 21"/>
+          <p:cNvSpPr txBox="1"/>
+          <p:nvPr/>
+        </p:nvSpPr>
+        <p:spPr>
+          <a:xfrm>
+            <a:off x="8202168" y="6382512"/>
+            <a:ext cx="3182112" cy="256032"/>
+          </a:xfrm>
+          <a:prstGeom prst="rect">
+            <a:avLst/>
+          </a:prstGeom>
+          <a:noFill/>
+          <a:ln/>
+        </p:spPr>
+        <p:txBody>
+          <a:bodyPr wrap="square" lIns="0" tIns="0" rIns="0" bIns="0" rtlCol="0" anchor="ctr"/>
+          <a:lstStyle/>
+          <a:p>
+            <a:pPr algn="r" indent="0" marL="0">
+              <a:buNone/>
+            </a:pPr>
+            <a:r>
+              <a:rPr lang="en-US" sz="900" dirty="0">
+                <a:solidFill>
+                  <a:srgbClr val="8A8177"/>
+                </a:solidFill>
+                <a:latin typeface="Yu Gothic" pitchFamily="34" charset="0"/>
+                <a:ea typeface="Yu Gothic" pitchFamily="34" charset="-122"/>
+                <a:cs typeface="Yu Gothic" pitchFamily="34" charset="-120"/>
+              </a:rPr>
+              <a:t>つまずき</a:t>
+            </a:r>
+            <a:endParaRPr lang="en-US" sz="900" dirty="0"/>
+          </a:p>
+        </p:txBody>
+      </p:sp>
+    </p:spTree>
+  </p:cSld>
+  <p:clrMapOvr>
+    <a:masterClrMapping/>
+  </p:clrMapOvr>
+</p:sld>
+</file>
+
+<file path=ppt/slides/slide9.xml><?xml version="1.0" encoding="utf-8"?>
+<p:sld xmlns:a="http://schemas.openxmlformats.org/drawingml/2006/main" xmlns:r="http://schemas.openxmlformats.org/officeDocument/2006/relationships" xmlns:p="http://schemas.openxmlformats.org/presentationml/2006/main">
+  <p:cSld name="Slide 9">
+    <p:bg>
+      <p:bgPr>
+        <a:solidFill>
+          <a:srgbClr val="F6F2EA"/>
+        </a:solidFill>
+      </p:bgPr>
+    </p:bg>
+    <p:spTree>
+      <p:nvGrpSpPr>
+        <p:cNvPr id="1" name=""/>
+        <p:cNvGrpSpPr/>
+        <p:nvPr/>
+      </p:nvGrpSpPr>
+      <p:grpSpPr>
+        <a:xfrm>
+          <a:off x="0" y="0"/>
+          <a:ext cx="0" cy="0"/>
+          <a:chOff x="0" y="0"/>
+          <a:chExt cx="0" cy="0"/>
+        </a:xfrm>
+      </p:grpSpPr>
+      <p:sp>
+        <p:nvSpPr>
+          <p:cNvPr id="2" name="Text 0"/>
+          <p:cNvSpPr txBox="1"/>
+          <p:nvPr/>
+        </p:nvSpPr>
+        <p:spPr>
+          <a:xfrm>
+            <a:off x="777240" y="566928"/>
+            <a:ext cx="10607040" cy="274320"/>
+          </a:xfrm>
+          <a:prstGeom prst="rect">
+            <a:avLst/>
+          </a:prstGeom>
+          <a:noFill/>
+          <a:ln/>
+        </p:spPr>
+        <p:txBody>
+          <a:bodyPr wrap="square" lIns="0" tIns="0" rIns="0" bIns="0" rtlCol="0" anchor="ctr"/>
+          <a:lstStyle/>
+          <a:p>
+            <a:pPr indent="0" marL="0">
+              <a:buNone/>
+            </a:pPr>
+            <a:r>
+              <a:rPr lang="en-US" sz="1100" b="1" spc="250" kern="0" dirty="0">
+                <a:solidFill>
+                  <a:srgbClr val="2F4F6B"/>
+                </a:solidFill>
+                <a:latin typeface="Yu Gothic" pitchFamily="34" charset="0"/>
+                <a:ea typeface="Yu Gothic" pitchFamily="34" charset="-122"/>
+                <a:cs typeface="Yu Gothic" pitchFamily="34" charset="-120"/>
+              </a:rPr>
+              <a:t>演習</a:t>
+            </a:r>
+            <a:endParaRPr lang="en-US" sz="1100" dirty="0"/>
+          </a:p>
+        </p:txBody>
+      </p:sp>
+      <p:sp>
+        <p:nvSpPr>
+          <p:cNvPr id="3" name="Text 1"/>
+          <p:cNvSpPr txBox="1"/>
+          <p:nvPr/>
+        </p:nvSpPr>
+        <p:spPr>
+          <a:xfrm>
+            <a:off x="777240" y="896112"/>
+            <a:ext cx="10607040" cy="640080"/>
+          </a:xfrm>
+          <a:prstGeom prst="rect">
+            <a:avLst/>
+          </a:prstGeom>
+          <a:noFill/>
+          <a:ln/>
+        </p:spPr>
+        <p:txBody>
+          <a:bodyPr wrap="square" lIns="0" tIns="0" rIns="0" bIns="0" rtlCol="0" anchor="ctr"/>
+          <a:lstStyle/>
+          <a:p>
+            <a:pPr indent="0" marL="0">
+              <a:buNone/>
+            </a:pPr>
+            <a:r>
+              <a:rPr lang="en-US" sz="2600" b="1" dirty="0">
+                <a:solidFill>
+                  <a:srgbClr val="23201D"/>
+                </a:solidFill>
+                <a:latin typeface="Yu Gothic" pitchFamily="34" charset="0"/>
+                <a:ea typeface="Yu Gothic" pitchFamily="34" charset="-122"/>
+                <a:cs typeface="Yu Gothic" pitchFamily="34" charset="-120"/>
+              </a:rPr>
+              <a:t>今日の流れ</a:t>
+            </a:r>
+            <a:endParaRPr lang="en-US" sz="2600" dirty="0"/>
+          </a:p>
+        </p:txBody>
+      </p:sp>
+      <p:sp>
+        <p:nvSpPr>
+          <p:cNvPr id="4" name="Text 2"/>
+          <p:cNvSpPr txBox="1"/>
+          <p:nvPr/>
+        </p:nvSpPr>
+        <p:spPr>
+          <a:xfrm>
+            <a:off x="777240" y="1572768"/>
+            <a:ext cx="10607040" cy="320040"/>
+          </a:xfrm>
+          <a:prstGeom prst="rect">
+            <a:avLst/>
+          </a:prstGeom>
+          <a:noFill/>
+          <a:ln/>
+        </p:spPr>
+        <p:txBody>
+          <a:bodyPr wrap="square" lIns="0" tIns="0" rIns="0" bIns="0" rtlCol="0" anchor="ctr"/>
+          <a:lstStyle/>
+          <a:p>
+            <a:pPr indent="0" marL="0">
+              <a:buNone/>
+            </a:pPr>
+            <a:r>
+              <a:rPr lang="en-US" sz="1250" b="1" dirty="0">
+                <a:solidFill>
+                  <a:srgbClr val="2F4F6B"/>
+                </a:solidFill>
+                <a:latin typeface="Yu Gothic" pitchFamily="34" charset="0"/>
+                <a:ea typeface="Yu Gothic" pitchFamily="34" charset="-122"/>
+                <a:cs typeface="Yu Gothic" pitchFamily="34" charset="-120"/>
+              </a:rPr>
+              <a:t>55分。操作するのはご自身です。</a:t>
+            </a:r>
+            <a:endParaRPr lang="en-US" sz="1250" dirty="0"/>
+          </a:p>
+        </p:txBody>
+      </p:sp>
+      <p:sp>
+        <p:nvSpPr>
+          <p:cNvPr id="5" name="Shape 3"/>
+          <p:cNvSpPr/>
+          <p:nvPr/>
+        </p:nvSpPr>
+        <p:spPr>
+          <a:xfrm>
+            <a:off x="777240" y="2148840"/>
+            <a:ext cx="3383280" cy="2880360"/>
+          </a:xfrm>
+          <a:prstGeom prst="rect">
+            <a:avLst/>
+          </a:prstGeom>
+          <a:solidFill>
+            <a:srgbClr val="FFFFFF"/>
+          </a:solidFill>
+          <a:ln w="12700">
+            <a:solidFill>
+              <a:srgbClr val="EDE7DB"/>
+            </a:solidFill>
+            <a:prstDash val="solid"/>
+          </a:ln>
+        </p:spPr>
+      </p:sp>
+      <p:sp>
+        <p:nvSpPr>
+          <p:cNvPr id="6" name="Shape 4"/>
+          <p:cNvSpPr/>
+          <p:nvPr/>
+        </p:nvSpPr>
+        <p:spPr>
+          <a:xfrm>
+            <a:off x="1051560" y="2395728"/>
+            <a:ext cx="438912" cy="438912"/>
+          </a:xfrm>
+          <a:prstGeom prst="ellipse">
+            <a:avLst/>
+          </a:prstGeom>
+          <a:solidFill>
+            <a:srgbClr val="2F4F6B"/>
+          </a:solidFill>
+          <a:ln w="12700">
+            <a:solidFill>
+              <a:srgbClr val="333333"/>
+            </a:solidFill>
+            <a:prstDash val="solid"/>
+          </a:ln>
+        </p:spPr>
+      </p:sp>
+      <p:sp>
+        <p:nvSpPr>
+          <p:cNvPr id="7" name="Text 5"/>
+          <p:cNvSpPr txBox="1"/>
+          <p:nvPr/>
+        </p:nvSpPr>
+        <p:spPr>
+          <a:xfrm>
+            <a:off x="1051560" y="2395728"/>
+            <a:ext cx="438912" cy="438912"/>
+          </a:xfrm>
+          <a:prstGeom prst="rect">
+            <a:avLst/>
+          </a:prstGeom>
+          <a:noFill/>
+          <a:ln/>
+        </p:spPr>
+        <p:txBody>
+          <a:bodyPr wrap="square" lIns="0" tIns="0" rIns="0" bIns="0" rtlCol="0" anchor="ctr"/>
+          <a:lstStyle/>
+          <a:p>
+            <a:pPr algn="ctr" indent="0" marL="0">
+              <a:buNone/>
+            </a:pPr>
+            <a:r>
+              <a:rPr lang="en-US" sz="1300" b="1" dirty="0">
                 <a:solidFill>
                   <a:srgbClr val="FFFFFF"/>
                 </a:solidFill>
@@ -5190,22 +8647,22 @@
                 <a:ea typeface="Yu Gothic" pitchFamily="34" charset="-122"/>
                 <a:cs typeface="Yu Gothic" pitchFamily="34" charset="-120"/>
               </a:rPr>
-              <a:t>12か月ロードマップの0〜3か月に書いたことを、1つだけ着手する。</a:t>
-            </a:r>
-            <a:endParaRPr lang="en-US" sz="1900" dirty="0"/>
-          </a:p>
-        </p:txBody>
-      </p:sp>
-      <p:sp>
-        <p:nvSpPr>
-          <p:cNvPr id="6" name="Text 4"/>
-          <p:cNvSpPr txBox="1"/>
-          <p:nvPr/>
-        </p:nvSpPr>
-        <p:spPr>
-          <a:xfrm>
-            <a:off x="777240" y="4572000"/>
-            <a:ext cx="10607040" cy="822960"/>
+              <a:t>1</a:t>
+            </a:r>
+            <a:endParaRPr lang="en-US" sz="1300" dirty="0"/>
+          </a:p>
+        </p:txBody>
+      </p:sp>
+      <p:sp>
+        <p:nvSpPr>
+          <p:cNvPr id="8" name="Text 6"/>
+          <p:cNvSpPr txBox="1"/>
+          <p:nvPr/>
+        </p:nvSpPr>
+        <p:spPr>
+          <a:xfrm>
+            <a:off x="1051560" y="2944368"/>
+            <a:ext cx="2834640" cy="731520"/>
           </a:xfrm>
           <a:prstGeom prst="rect">
             <a:avLst/>
@@ -5219,40 +8676,324 @@
           <a:p>
             <a:pPr indent="0" marL="0">
               <a:lnSpc>
-                <a:spcPct val="145000"/>
+                <a:spcPct val="125000"/>
               </a:lnSpc>
               <a:buNone/>
             </a:pPr>
             <a:r>
-              <a:rPr lang="en-US" sz="1300" dirty="0">
-                <a:solidFill>
-                  <a:srgbClr val="B9B0A4"/>
-                </a:solidFill>
-                <a:latin typeface="Yu Gothic" pitchFamily="34" charset="0"/>
-                <a:ea typeface="Yu Gothic" pitchFamily="34" charset="-122"/>
-                <a:cs typeface="Yu Gothic" pitchFamily="34" charset="-120"/>
-              </a:rPr>
-              <a:t>15分で終わる大きさにしてあります。できなかった回があっても構いません。</a:t>
+              <a:rPr lang="en-US" sz="1450" b="1" dirty="0">
+                <a:solidFill>
+                  <a:srgbClr val="23201D"/>
+                </a:solidFill>
+                <a:latin typeface="Yu Gothic" pitchFamily="34" charset="0"/>
+                <a:ea typeface="Yu Gothic" pitchFamily="34" charset="-122"/>
+                <a:cs typeface="Yu Gothic" pitchFamily="34" charset="-120"/>
+              </a:rPr>
+              <a:t>作ったものをお見せする</a:t>
+            </a:r>
+            <a:endParaRPr lang="en-US" sz="1450" dirty="0"/>
+          </a:p>
+        </p:txBody>
+      </p:sp>
+      <p:sp>
+        <p:nvSpPr>
+          <p:cNvPr id="9" name="Text 7"/>
+          <p:cNvSpPr txBox="1"/>
+          <p:nvPr/>
+        </p:nvSpPr>
+        <p:spPr>
+          <a:xfrm>
+            <a:off x="1051560" y="3703320"/>
+            <a:ext cx="2834640" cy="1188720"/>
+          </a:xfrm>
+          <a:prstGeom prst="rect">
+            <a:avLst/>
+          </a:prstGeom>
+          <a:noFill/>
+          <a:ln/>
+        </p:spPr>
+        <p:txBody>
+          <a:bodyPr wrap="square" lIns="0" tIns="0" rIns="0" bIns="0" rtlCol="0" anchor="ctr"/>
+          <a:lstStyle/>
+          <a:p>
+            <a:pPr indent="0" marL="0">
+              <a:lnSpc>
+                <a:spcPct val="130000"/>
+              </a:lnSpc>
+              <a:buNone/>
+            </a:pPr>
+            <a:r>
+              <a:rPr lang="en-US" sz="1150" dirty="0">
+                <a:solidFill>
+                  <a:srgbClr val="5A534A"/>
+                </a:solidFill>
+                <a:latin typeface="Yu Gothic" pitchFamily="34" charset="0"/>
+                <a:ea typeface="Yu Gothic" pitchFamily="34" charset="-122"/>
+                <a:cs typeface="Yu Gothic" pitchFamily="34" charset="-120"/>
+              </a:rPr>
+              <a:t>実際に動かします。すでに使っている社員の方がいれば、その方に話していただきます</a:t>
+            </a:r>
+            <a:endParaRPr lang="en-US" sz="1150" dirty="0"/>
+          </a:p>
+        </p:txBody>
+      </p:sp>
+      <p:sp>
+        <p:nvSpPr>
+          <p:cNvPr id="10" name="Shape 8"/>
+          <p:cNvSpPr/>
+          <p:nvPr/>
+        </p:nvSpPr>
+        <p:spPr>
+          <a:xfrm>
+            <a:off x="4389120" y="2148840"/>
+            <a:ext cx="3383280" cy="2880360"/>
+          </a:xfrm>
+          <a:prstGeom prst="rect">
+            <a:avLst/>
+          </a:prstGeom>
+          <a:solidFill>
+            <a:srgbClr val="FFFFFF"/>
+          </a:solidFill>
+          <a:ln w="12700">
+            <a:solidFill>
+              <a:srgbClr val="EDE7DB"/>
+            </a:solidFill>
+            <a:prstDash val="solid"/>
+          </a:ln>
+        </p:spPr>
+      </p:sp>
+      <p:sp>
+        <p:nvSpPr>
+          <p:cNvPr id="11" name="Shape 9"/>
+          <p:cNvSpPr/>
+          <p:nvPr/>
+        </p:nvSpPr>
+        <p:spPr>
+          <a:xfrm>
+            <a:off x="4663440" y="2395728"/>
+            <a:ext cx="438912" cy="438912"/>
+          </a:xfrm>
+          <a:prstGeom prst="ellipse">
+            <a:avLst/>
+          </a:prstGeom>
+          <a:solidFill>
+            <a:srgbClr val="2F4F6B"/>
+          </a:solidFill>
+          <a:ln w="12700">
+            <a:solidFill>
+              <a:srgbClr val="333333"/>
+            </a:solidFill>
+            <a:prstDash val="solid"/>
+          </a:ln>
+        </p:spPr>
+      </p:sp>
+      <p:sp>
+        <p:nvSpPr>
+          <p:cNvPr id="12" name="Text 10"/>
+          <p:cNvSpPr txBox="1"/>
+          <p:nvPr/>
+        </p:nvSpPr>
+        <p:spPr>
+          <a:xfrm>
+            <a:off x="4663440" y="2395728"/>
+            <a:ext cx="438912" cy="438912"/>
+          </a:xfrm>
+          <a:prstGeom prst="rect">
+            <a:avLst/>
+          </a:prstGeom>
+          <a:noFill/>
+          <a:ln/>
+        </p:spPr>
+        <p:txBody>
+          <a:bodyPr wrap="square" lIns="0" tIns="0" rIns="0" bIns="0" rtlCol="0" anchor="ctr"/>
+          <a:lstStyle/>
+          <a:p>
+            <a:pPr algn="ctr" indent="0" marL="0">
+              <a:buNone/>
+            </a:pPr>
+            <a:r>
+              <a:rPr lang="en-US" sz="1300" b="1" dirty="0">
+                <a:solidFill>
+                  <a:srgbClr val="FFFFFF"/>
+                </a:solidFill>
+                <a:latin typeface="Yu Gothic" pitchFamily="34" charset="0"/>
+                <a:ea typeface="Yu Gothic" pitchFamily="34" charset="-122"/>
+                <a:cs typeface="Yu Gothic" pitchFamily="34" charset="-120"/>
+              </a:rPr>
+              <a:t>2</a:t>
             </a:r>
             <a:endParaRPr lang="en-US" sz="1300" dirty="0"/>
           </a:p>
+        </p:txBody>
+      </p:sp>
+      <p:sp>
+        <p:nvSpPr>
+          <p:cNvPr id="13" name="Text 11"/>
+          <p:cNvSpPr txBox="1"/>
+          <p:nvPr/>
+        </p:nvSpPr>
+        <p:spPr>
+          <a:xfrm>
+            <a:off x="4663440" y="2944368"/>
+            <a:ext cx="2834640" cy="731520"/>
+          </a:xfrm>
+          <a:prstGeom prst="rect">
+            <a:avLst/>
+          </a:prstGeom>
+          <a:noFill/>
+          <a:ln/>
+        </p:spPr>
+        <p:txBody>
+          <a:bodyPr wrap="square" lIns="0" tIns="0" rIns="0" bIns="0" rtlCol="0" anchor="ctr"/>
+          <a:lstStyle/>
           <a:p>
             <a:pPr indent="0" marL="0">
               <a:lnSpc>
-                <a:spcPct val="145000"/>
+                <a:spcPct val="125000"/>
               </a:lnSpc>
               <a:buNone/>
             </a:pPr>
             <a:r>
-              <a:rPr lang="en-US" sz="1300" dirty="0">
-                <a:solidFill>
-                  <a:srgbClr val="B9B0A4"/>
-                </a:solidFill>
-                <a:latin typeface="Yu Gothic" pitchFamily="34" charset="0"/>
-                <a:ea typeface="Yu Gothic" pitchFamily="34" charset="-122"/>
-                <a:cs typeface="Yu Gothic" pitchFamily="34" charset="-120"/>
-              </a:rPr>
-              <a:t>2回続いたら、宿題の出し方を見直します。</a:t>
+              <a:rPr lang="en-US" sz="1450" b="1" dirty="0">
+                <a:solidFill>
+                  <a:srgbClr val="23201D"/>
+                </a:solidFill>
+                <a:latin typeface="Yu Gothic" pitchFamily="34" charset="0"/>
+                <a:ea typeface="Yu Gothic" pitchFamily="34" charset="-122"/>
+                <a:cs typeface="Yu Gothic" pitchFamily="34" charset="-120"/>
+              </a:rPr>
+              <a:t>ご質問・ご意見をうかがう</a:t>
+            </a:r>
+            <a:endParaRPr lang="en-US" sz="1450" dirty="0"/>
+          </a:p>
+        </p:txBody>
+      </p:sp>
+      <p:sp>
+        <p:nvSpPr>
+          <p:cNvPr id="14" name="Text 12"/>
+          <p:cNvSpPr txBox="1"/>
+          <p:nvPr/>
+        </p:nvSpPr>
+        <p:spPr>
+          <a:xfrm>
+            <a:off x="4663440" y="3703320"/>
+            <a:ext cx="2834640" cy="1188720"/>
+          </a:xfrm>
+          <a:prstGeom prst="rect">
+            <a:avLst/>
+          </a:prstGeom>
+          <a:noFill/>
+          <a:ln/>
+        </p:spPr>
+        <p:txBody>
+          <a:bodyPr wrap="square" lIns="0" tIns="0" rIns="0" bIns="0" rtlCol="0" anchor="ctr"/>
+          <a:lstStyle/>
+          <a:p>
+            <a:pPr indent="0" marL="0">
+              <a:lnSpc>
+                <a:spcPct val="130000"/>
+              </a:lnSpc>
+              <a:buNone/>
+            </a:pPr>
+            <a:r>
+              <a:rPr lang="en-US" sz="1150" dirty="0">
+                <a:solidFill>
+                  <a:srgbClr val="5A534A"/>
+                </a:solidFill>
+                <a:latin typeface="Yu Gothic" pitchFamily="34" charset="0"/>
+                <a:ea typeface="Yu Gothic" pitchFamily="34" charset="-122"/>
+                <a:cs typeface="Yu Gothic" pitchFamily="34" charset="-120"/>
+              </a:rPr>
+              <a:t>否定的なご意見ほど、丁寧に記録します</a:t>
+            </a:r>
+            <a:endParaRPr lang="en-US" sz="1150" dirty="0"/>
+          </a:p>
+        </p:txBody>
+      </p:sp>
+      <p:sp>
+        <p:nvSpPr>
+          <p:cNvPr id="15" name="Shape 13"/>
+          <p:cNvSpPr/>
+          <p:nvPr/>
+        </p:nvSpPr>
+        <p:spPr>
+          <a:xfrm>
+            <a:off x="8001000" y="2148840"/>
+            <a:ext cx="3383280" cy="2880360"/>
+          </a:xfrm>
+          <a:prstGeom prst="rect">
+            <a:avLst/>
+          </a:prstGeom>
+          <a:solidFill>
+            <a:srgbClr val="FFFFFF"/>
+          </a:solidFill>
+          <a:ln w="12700">
+            <a:solidFill>
+              <a:srgbClr val="EDE7DB"/>
+            </a:solidFill>
+            <a:prstDash val="solid"/>
+          </a:ln>
+        </p:spPr>
+      </p:sp>
+      <p:sp>
+        <p:nvSpPr>
+          <p:cNvPr id="16" name="Shape 14"/>
+          <p:cNvSpPr/>
+          <p:nvPr/>
+        </p:nvSpPr>
+        <p:spPr>
+          <a:xfrm>
+            <a:off x="8275320" y="2395728"/>
+            <a:ext cx="438912" cy="438912"/>
+          </a:xfrm>
+          <a:prstGeom prst="ellipse">
+            <a:avLst/>
+          </a:prstGeom>
+          <a:solidFill>
+            <a:srgbClr val="2F4F6B"/>
+          </a:solidFill>
+          <a:ln w="12700">
+            <a:solidFill>
+              <a:srgbClr val="333333"/>
+            </a:solidFill>
+            <a:prstDash val="solid"/>
+          </a:ln>
+        </p:spPr>
+      </p:sp>
+      <p:sp>
+        <p:nvSpPr>
+          <p:cNvPr id="17" name="Text 15"/>
+          <p:cNvSpPr txBox="1"/>
+          <p:nvPr/>
+        </p:nvSpPr>
+        <p:spPr>
+          <a:xfrm>
+            <a:off x="8275320" y="2395728"/>
+            <a:ext cx="438912" cy="438912"/>
+          </a:xfrm>
+          <a:prstGeom prst="rect">
+            <a:avLst/>
+          </a:prstGeom>
+          <a:noFill/>
+          <a:ln/>
+        </p:spPr>
+        <p:txBody>
+          <a:bodyPr wrap="square" lIns="0" tIns="0" rIns="0" bIns="0" rtlCol="0" anchor="ctr"/>
+          <a:lstStyle/>
+          <a:p>
+            <a:pPr algn="ctr" indent="0" marL="0">
+              <a:buNone/>
+            </a:pPr>
+            <a:r>
+              <a:rPr lang="en-US" sz="1300" b="1" dirty="0">
+                <a:solidFill>
+                  <a:srgbClr val="FFFFFF"/>
+                </a:solidFill>
+                <a:latin typeface="Yu Gothic" pitchFamily="34" charset="0"/>
+                <a:ea typeface="Yu Gothic" pitchFamily="34" charset="-122"/>
+                <a:cs typeface="Yu Gothic" pitchFamily="34" charset="-120"/>
+              </a:rPr>
+              <a:t>3</a:t>
             </a:r>
             <a:endParaRPr lang="en-US" sz="1300" dirty="0"/>
           </a:p>
@@ -5260,14 +9001,98 @@
       </p:sp>
       <p:sp>
         <p:nvSpPr>
-          <p:cNvPr id="7" name="Text 5"/>
-          <p:cNvSpPr txBox="1"/>
-          <p:nvPr/>
-        </p:nvSpPr>
-        <p:spPr>
-          <a:xfrm>
-            <a:off x="777240" y="6355080"/>
-            <a:ext cx="10607040" cy="274320"/>
+          <p:cNvPr id="18" name="Text 16"/>
+          <p:cNvSpPr txBox="1"/>
+          <p:nvPr/>
+        </p:nvSpPr>
+        <p:spPr>
+          <a:xfrm>
+            <a:off x="8275320" y="2944368"/>
+            <a:ext cx="2834640" cy="731520"/>
+          </a:xfrm>
+          <a:prstGeom prst="rect">
+            <a:avLst/>
+          </a:prstGeom>
+          <a:noFill/>
+          <a:ln/>
+        </p:spPr>
+        <p:txBody>
+          <a:bodyPr wrap="square" lIns="0" tIns="0" rIns="0" bIns="0" rtlCol="0" anchor="ctr"/>
+          <a:lstStyle/>
+          <a:p>
+            <a:pPr indent="0" marL="0">
+              <a:lnSpc>
+                <a:spcPct val="125000"/>
+              </a:lnSpc>
+              <a:buNone/>
+            </a:pPr>
+            <a:r>
+              <a:rPr lang="en-US" sz="1450" b="1" dirty="0">
+                <a:solidFill>
+                  <a:srgbClr val="23201D"/>
+                </a:solidFill>
+                <a:latin typeface="Yu Gothic" pitchFamily="34" charset="0"/>
+                <a:ea typeface="Yu Gothic" pitchFamily="34" charset="-122"/>
+                <a:cs typeface="Yu Gothic" pitchFamily="34" charset="-120"/>
+              </a:rPr>
+              <a:t>12か月の方針を決める</a:t>
+            </a:r>
+            <a:endParaRPr lang="en-US" sz="1450" dirty="0"/>
+          </a:p>
+        </p:txBody>
+      </p:sp>
+      <p:sp>
+        <p:nvSpPr>
+          <p:cNvPr id="19" name="Text 17"/>
+          <p:cNvSpPr txBox="1"/>
+          <p:nvPr/>
+        </p:nvSpPr>
+        <p:spPr>
+          <a:xfrm>
+            <a:off x="8275320" y="3703320"/>
+            <a:ext cx="2834640" cy="1188720"/>
+          </a:xfrm>
+          <a:prstGeom prst="rect">
+            <a:avLst/>
+          </a:prstGeom>
+          <a:noFill/>
+          <a:ln/>
+        </p:spPr>
+        <p:txBody>
+          <a:bodyPr wrap="square" lIns="0" tIns="0" rIns="0" bIns="0" rtlCol="0" anchor="ctr"/>
+          <a:lstStyle/>
+          <a:p>
+            <a:pPr indent="0" marL="0">
+              <a:lnSpc>
+                <a:spcPct val="130000"/>
+              </a:lnSpc>
+              <a:buNone/>
+            </a:pPr>
+            <a:r>
+              <a:rPr lang="en-US" sz="1150" dirty="0">
+                <a:solidFill>
+                  <a:srgbClr val="5A534A"/>
+                </a:solidFill>
+                <a:latin typeface="Yu Gothic" pitchFamily="34" charset="0"/>
+                <a:ea typeface="Yu Gothic" pitchFamily="34" charset="-122"/>
+                <a:cs typeface="Yu Gothic" pitchFamily="34" charset="-120"/>
+              </a:rPr>
+              <a:t>社員退席後に、ロードマップをその場で完成させます</a:t>
+            </a:r>
+            <a:endParaRPr lang="en-US" sz="1150" dirty="0"/>
+          </a:p>
+        </p:txBody>
+      </p:sp>
+      <p:sp>
+        <p:nvSpPr>
+          <p:cNvPr id="20" name="Text 18"/>
+          <p:cNvSpPr txBox="1"/>
+          <p:nvPr/>
+        </p:nvSpPr>
+        <p:spPr>
+          <a:xfrm>
+            <a:off x="777240" y="6382512"/>
+            <a:ext cx="7424928" cy="256032"/>
           </a:xfrm>
           <a:prstGeom prst="rect">
             <a:avLst/>
@@ -5285,13 +9110,52 @@
             <a:r>
               <a:rPr lang="en-US" sz="900" dirty="0">
                 <a:solidFill>
-                  <a:srgbClr val="6E6558"/>
+                  <a:srgbClr val="8A8177"/>
                 </a:solidFill>
                 <a:latin typeface="Yu Gothic" pitchFamily="34" charset="0"/>
                 <a:ea typeface="Yu Gothic" pitchFamily="34" charset="-122"/>
                 <a:cs typeface="Yu Gothic" pitchFamily="34" charset="-120"/>
               </a:rPr>
               <a:t>第6回　社内へのお披露目と12か月計画</a:t>
+            </a:r>
+            <a:endParaRPr lang="en-US" sz="900" dirty="0"/>
+          </a:p>
+        </p:txBody>
+      </p:sp>
+      <p:sp>
+        <p:nvSpPr>
+          <p:cNvPr id="21" name="Text 19"/>
+          <p:cNvSpPr txBox="1"/>
+          <p:nvPr/>
+        </p:nvSpPr>
+        <p:spPr>
+          <a:xfrm>
+            <a:off x="8202168" y="6382512"/>
+            <a:ext cx="3182112" cy="256032"/>
+          </a:xfrm>
+          <a:prstGeom prst="rect">
+            <a:avLst/>
+          </a:prstGeom>
+          <a:noFill/>
+          <a:ln/>
+        </p:spPr>
+        <p:txBody>
+          <a:bodyPr wrap="square" lIns="0" tIns="0" rIns="0" bIns="0" rtlCol="0" anchor="ctr"/>
+          <a:lstStyle/>
+          <a:p>
+            <a:pPr algn="r" indent="0" marL="0">
+              <a:buNone/>
+            </a:pPr>
+            <a:r>
+              <a:rPr lang="en-US" sz="900" dirty="0">
+                <a:solidFill>
+                  <a:srgbClr val="8A8177"/>
+                </a:solidFill>
+                <a:latin typeface="Yu Gothic" pitchFamily="34" charset="0"/>
+                <a:ea typeface="Yu Gothic" pitchFamily="34" charset="-122"/>
+                <a:cs typeface="Yu Gothic" pitchFamily="34" charset="-120"/>
+              </a:rPr>
+              <a:t>演習</a:t>
             </a:r>
             <a:endParaRPr lang="en-US" sz="900" dirty="0"/>
           </a:p>

--- a/slides/pptx/第06回_社内へのお披露目と12か月計画.pptx
+++ b/slides/pptx/第06回_社内へのお披露目と12か月計画.pptx
@@ -17,9 +17,12 @@
     <p:sldId id="265" r:id="rId11"/>
     <p:sldId id="266" r:id="rId12"/>
     <p:sldId id="267" r:id="rId13"/>
+    <p:sldId id="268" r:id="rId14"/>
+    <p:sldId id="269" r:id="rId15"/>
+    <p:sldId id="270" r:id="rId16"/>
   </p:sldIdLst>
   <p:notesMasterIdLst>
-    <p:notesMasterId r:id="rId14"/>
+    <p:notesMasterId r:id="rId17"/>
   </p:notesMasterIdLst>
   <p:sldSz cx="12192000" cy="6858000"/>
   <p:notesSz cx="6858000" cy="12192000"/>
@@ -601,7 +604,7 @@
           <a:p>
             <a:r>
               <a:rPr lang="en-US" dirty="0"/>
-              <a:t>第12回の日程を、社員がいるこの場で押さえる。後から調整すると、また集まらない。</a:t>
+              <a:t>社員向けの言い換え。専門用語を使わない。ここで配る用語辞典は、受講者用のものと同じで構わない。</a:t>
             </a:r>
             <a:endParaRPr lang="en-US" dirty="0"/>
           </a:p>
@@ -689,7 +692,7 @@
           <a:p>
             <a:r>
               <a:rPr lang="en-US" dirty="0"/>
-              <a:t>事前の壁打ち（1週間前・別枠30分）を省略しない。ここを飛ばすと当日が崩れる。特にこの質問への答えは、必ず声に出して練習してもらう。</a:t>
+              <a:t>社員がいる時間は1時間強。ロードマップ作成は退席後。時間配分を間違えると、社員の前で内輪の作業を始めることになる。</a:t>
             </a:r>
             <a:endParaRPr lang="en-US" dirty="0"/>
           </a:p>
@@ -777,7 +780,7 @@
           <a:p>
             <a:r>
               <a:rPr lang="en-US" dirty="0"/>
-              <a:t>社長の宿題。1つだけ、を強調する。ロードマップ全部を動かそうとして、結局何も動かない会社が多い。</a:t>
+              <a:t>第12回の日程を、社員がいるこの場で押さえる。後から調整すると、また集まらない。</a:t>
             </a:r>
             <a:endParaRPr lang="en-US" dirty="0"/>
           </a:p>
@@ -801,6 +804,270 @@
             <a:fld id="{F7021451-1387-4CA6-816F-3879F97B5CBC}" type="slidenum">
               <a:rPr lang="en-US"/>
               <a:t>12</a:t>
+            </a:fld>
+            <a:endParaRPr lang="en-US"/>
+          </a:p>
+        </p:txBody>
+      </p:sp>
+    </p:spTree>
+    <p:extLst>
+      <p:ext uri="{BB962C8B-B14F-4D97-AF65-F5344CB8AC3E}">
+        <p14:creationId xmlns:p14="http://schemas.microsoft.com/office/powerpoint/2010/main" val="1024086991"/>
+      </p:ext>
+    </p:extLst>
+  </p:cSld>
+  <p:clrMapOvr>
+    <a:masterClrMapping/>
+  </p:clrMapOvr>
+</p:notes>
+</file>
+
+<file path=ppt/notesSlides/notesSlide13.xml><?xml version="1.0" encoding="utf-8"?>
+<p:notes xmlns:a="http://schemas.openxmlformats.org/drawingml/2006/main" xmlns:r="http://schemas.openxmlformats.org/officeDocument/2006/relationships" xmlns:p="http://schemas.openxmlformats.org/presentationml/2006/main">
+  <p:cSld>
+    <p:spTree>
+      <p:nvGrpSpPr>
+        <p:cNvPr id="1" name=""/>
+        <p:cNvGrpSpPr/>
+        <p:nvPr/>
+      </p:nvGrpSpPr>
+      <p:grpSpPr>
+        <a:xfrm>
+          <a:off x="0" y="0"/>
+          <a:ext cx="0" cy="0"/>
+          <a:chOff x="0" y="0"/>
+          <a:chExt cx="0" cy="0"/>
+        </a:xfrm>
+      </p:grpSpPr>
+      <p:sp>
+        <p:nvSpPr>
+          <p:cNvPr id="2" name="Slide Image Placeholder 1"/>
+          <p:cNvSpPr>
+            <a:spLocks noGrp="1" noRot="1" noChangeAspect="1"/>
+          </p:cNvSpPr>
+          <p:nvPr>
+            <p:ph type="sldImg"/>
+          </p:nvPr>
+        </p:nvSpPr>
+        <p:spPr/>
+      </p:sp>
+      <p:sp>
+        <p:nvSpPr>
+          <p:cNvPr id="3" name="Notes Placeholder 2"/>
+          <p:cNvSpPr>
+            <a:spLocks noGrp="1"/>
+          </p:cNvSpPr>
+          <p:nvPr>
+            <p:ph type="body" idx="1"/>
+          </p:nvPr>
+        </p:nvSpPr>
+        <p:spPr/>
+        <p:txBody>
+          <a:bodyPr/>
+          <a:lstStyle/>
+          <a:p>
+            <a:r>
+              <a:rPr lang="en-US" dirty="0"/>
+              <a:t>事前の壁打ち（1週間前・別枠30分）を省略しない。ここを飛ばすと当日が崩れる。特にこの質問への答えは、必ず声に出して練習してもらう。</a:t>
+            </a:r>
+            <a:endParaRPr lang="en-US" dirty="0"/>
+          </a:p>
+        </p:txBody>
+      </p:sp>
+      <p:sp>
+        <p:nvSpPr>
+          <p:cNvPr id="4" name="Slide Number Placeholder 3"/>
+          <p:cNvSpPr>
+            <a:spLocks noGrp="1"/>
+          </p:cNvSpPr>
+          <p:nvPr>
+            <p:ph type="sldNum" sz="quarter" idx="10"/>
+          </p:nvPr>
+        </p:nvSpPr>
+        <p:spPr/>
+        <p:txBody>
+          <a:bodyPr/>
+          <a:lstStyle/>
+          <a:p>
+            <a:fld id="{F7021451-1387-4CA6-816F-3879F97B5CBC}" type="slidenum">
+              <a:rPr lang="en-US"/>
+              <a:t>13</a:t>
+            </a:fld>
+            <a:endParaRPr lang="en-US"/>
+          </a:p>
+        </p:txBody>
+      </p:sp>
+    </p:spTree>
+    <p:extLst>
+      <p:ext uri="{BB962C8B-B14F-4D97-AF65-F5344CB8AC3E}">
+        <p14:creationId xmlns:p14="http://schemas.microsoft.com/office/powerpoint/2010/main" val="1024086991"/>
+      </p:ext>
+    </p:extLst>
+  </p:cSld>
+  <p:clrMapOvr>
+    <a:masterClrMapping/>
+  </p:clrMapOvr>
+</p:notes>
+</file>
+
+<file path=ppt/notesSlides/notesSlide14.xml><?xml version="1.0" encoding="utf-8"?>
+<p:notes xmlns:a="http://schemas.openxmlformats.org/drawingml/2006/main" xmlns:r="http://schemas.openxmlformats.org/officeDocument/2006/relationships" xmlns:p="http://schemas.openxmlformats.org/presentationml/2006/main">
+  <p:cSld>
+    <p:spTree>
+      <p:nvGrpSpPr>
+        <p:cNvPr id="1" name=""/>
+        <p:cNvGrpSpPr/>
+        <p:nvPr/>
+      </p:nvGrpSpPr>
+      <p:grpSpPr>
+        <a:xfrm>
+          <a:off x="0" y="0"/>
+          <a:ext cx="0" cy="0"/>
+          <a:chOff x="0" y="0"/>
+          <a:chExt cx="0" cy="0"/>
+        </a:xfrm>
+      </p:grpSpPr>
+      <p:sp>
+        <p:nvSpPr>
+          <p:cNvPr id="2" name="Slide Image Placeholder 1"/>
+          <p:cNvSpPr>
+            <a:spLocks noGrp="1" noRot="1" noChangeAspect="1"/>
+          </p:cNvSpPr>
+          <p:nvPr>
+            <p:ph type="sldImg"/>
+          </p:nvPr>
+        </p:nvSpPr>
+        <p:spPr/>
+      </p:sp>
+      <p:sp>
+        <p:nvSpPr>
+          <p:cNvPr id="3" name="Notes Placeholder 2"/>
+          <p:cNvSpPr>
+            <a:spLocks noGrp="1"/>
+          </p:cNvSpPr>
+          <p:nvPr>
+            <p:ph type="body" idx="1"/>
+          </p:nvPr>
+        </p:nvSpPr>
+        <p:spPr/>
+        <p:txBody>
+          <a:bodyPr/>
+          <a:lstStyle/>
+          <a:p>
+            <a:r>
+              <a:rPr lang="en-US" dirty="0"/>
+              <a:t>社員退席後に話す。上級編に進むかどうかの判断も、ここで確認する。</a:t>
+            </a:r>
+            <a:endParaRPr lang="en-US" dirty="0"/>
+          </a:p>
+        </p:txBody>
+      </p:sp>
+      <p:sp>
+        <p:nvSpPr>
+          <p:cNvPr id="4" name="Slide Number Placeholder 3"/>
+          <p:cNvSpPr>
+            <a:spLocks noGrp="1"/>
+          </p:cNvSpPr>
+          <p:nvPr>
+            <p:ph type="sldNum" sz="quarter" idx="10"/>
+          </p:nvPr>
+        </p:nvSpPr>
+        <p:spPr/>
+        <p:txBody>
+          <a:bodyPr/>
+          <a:lstStyle/>
+          <a:p>
+            <a:fld id="{F7021451-1387-4CA6-816F-3879F97B5CBC}" type="slidenum">
+              <a:rPr lang="en-US"/>
+              <a:t>14</a:t>
+            </a:fld>
+            <a:endParaRPr lang="en-US"/>
+          </a:p>
+        </p:txBody>
+      </p:sp>
+    </p:spTree>
+    <p:extLst>
+      <p:ext uri="{BB962C8B-B14F-4D97-AF65-F5344CB8AC3E}">
+        <p14:creationId xmlns:p14="http://schemas.microsoft.com/office/powerpoint/2010/main" val="1024086991"/>
+      </p:ext>
+    </p:extLst>
+  </p:cSld>
+  <p:clrMapOvr>
+    <a:masterClrMapping/>
+  </p:clrMapOvr>
+</p:notes>
+</file>
+
+<file path=ppt/notesSlides/notesSlide15.xml><?xml version="1.0" encoding="utf-8"?>
+<p:notes xmlns:a="http://schemas.openxmlformats.org/drawingml/2006/main" xmlns:r="http://schemas.openxmlformats.org/officeDocument/2006/relationships" xmlns:p="http://schemas.openxmlformats.org/presentationml/2006/main">
+  <p:cSld>
+    <p:spTree>
+      <p:nvGrpSpPr>
+        <p:cNvPr id="1" name=""/>
+        <p:cNvGrpSpPr/>
+        <p:nvPr/>
+      </p:nvGrpSpPr>
+      <p:grpSpPr>
+        <a:xfrm>
+          <a:off x="0" y="0"/>
+          <a:ext cx="0" cy="0"/>
+          <a:chOff x="0" y="0"/>
+          <a:chExt cx="0" cy="0"/>
+        </a:xfrm>
+      </p:grpSpPr>
+      <p:sp>
+        <p:nvSpPr>
+          <p:cNvPr id="2" name="Slide Image Placeholder 1"/>
+          <p:cNvSpPr>
+            <a:spLocks noGrp="1" noRot="1" noChangeAspect="1"/>
+          </p:cNvSpPr>
+          <p:nvPr>
+            <p:ph type="sldImg"/>
+          </p:nvPr>
+        </p:nvSpPr>
+        <p:spPr/>
+      </p:sp>
+      <p:sp>
+        <p:nvSpPr>
+          <p:cNvPr id="3" name="Notes Placeholder 2"/>
+          <p:cNvSpPr>
+            <a:spLocks noGrp="1"/>
+          </p:cNvSpPr>
+          <p:nvPr>
+            <p:ph type="body" idx="1"/>
+          </p:nvPr>
+        </p:nvSpPr>
+        <p:spPr/>
+        <p:txBody>
+          <a:bodyPr/>
+          <a:lstStyle/>
+          <a:p>
+            <a:r>
+              <a:rPr lang="en-US" dirty="0"/>
+              <a:t>社長の宿題。1つだけ、を強調する。ロードマップ全部を動かそうとして、結局何も動かない会社が多い。</a:t>
+            </a:r>
+            <a:endParaRPr lang="en-US" dirty="0"/>
+          </a:p>
+        </p:txBody>
+      </p:sp>
+      <p:sp>
+        <p:nvSpPr>
+          <p:cNvPr id="4" name="Slide Number Placeholder 3"/>
+          <p:cNvSpPr>
+            <a:spLocks noGrp="1"/>
+          </p:cNvSpPr>
+          <p:nvPr>
+            <p:ph type="sldNum" sz="quarter" idx="10"/>
+          </p:nvPr>
+        </p:nvSpPr>
+        <p:spPr/>
+        <p:txBody>
+          <a:bodyPr/>
+          <a:lstStyle/>
+          <a:p>
+            <a:fld id="{F7021451-1387-4CA6-816F-3879F97B5CBC}" type="slidenum">
+              <a:rPr lang="en-US"/>
+              <a:t>15</a:t>
             </a:fld>
             <a:endParaRPr lang="en-US"/>
           </a:p>
@@ -1481,7 +1748,7 @@
           <a:p>
             <a:r>
               <a:rPr lang="en-US" dirty="0"/>
-              <a:t>社員がいる時間は1時間強。ロードマップ作成は退席後。時間配分を間違えると、社員の前で内輪の作業を始めることになる。</a:t>
+              <a:t>3問とも社員向け。1つ目は社長に答えていただく。2つ目・3つ目は講師が答えてよい。特に3つ目は、負担が小さいことを具体的に示すと空気が変わる。</a:t>
             </a:r>
             <a:endParaRPr lang="en-US" dirty="0"/>
           </a:p>
@@ -2175,13 +2442,13 @@
             <a:r>
               <a:rPr lang="en-US" sz="1100" b="1" spc="250" kern="0" dirty="0">
                 <a:solidFill>
-                  <a:srgbClr val="3B6B4A"/>
-                </a:solidFill>
-                <a:latin typeface="Yu Gothic" pitchFamily="34" charset="0"/>
-                <a:ea typeface="Yu Gothic" pitchFamily="34" charset="-122"/>
-                <a:cs typeface="Yu Gothic" pitchFamily="34" charset="-120"/>
-              </a:rPr>
-              <a:t>業務への組み込み</a:t>
+                  <a:srgbClr val="8A8177"/>
+                </a:solidFill>
+                <a:latin typeface="Yu Gothic" pitchFamily="34" charset="0"/>
+                <a:ea typeface="Yu Gothic" pitchFamily="34" charset="-122"/>
+                <a:cs typeface="Yu Gothic" pitchFamily="34" charset="-120"/>
+              </a:rPr>
+              <a:t>用語</a:t>
             </a:r>
             <a:endParaRPr lang="en-US" sz="1100" dirty="0"/>
           </a:p>
@@ -2220,7 +2487,7 @@
                 <a:ea typeface="Yu Gothic" pitchFamily="34" charset="-122"/>
                 <a:cs typeface="Yu Gothic" pitchFamily="34" charset="-120"/>
               </a:rPr>
-              <a:t>この場で決めること</a:t>
+              <a:t>出てきた言葉（社員のみなさん向け）</a:t>
             </a:r>
             <a:endParaRPr lang="en-US" sz="2600" dirty="0"/>
           </a:p>
@@ -2228,53 +2495,14 @@
       </p:sp>
       <p:sp>
         <p:nvSpPr>
-          <p:cNvPr id="4" name="Text 2"/>
-          <p:cNvSpPr txBox="1"/>
-          <p:nvPr/>
-        </p:nvSpPr>
-        <p:spPr>
-          <a:xfrm>
-            <a:off x="777240" y="1572768"/>
-            <a:ext cx="10607040" cy="320040"/>
-          </a:xfrm>
-          <a:prstGeom prst="rect">
-            <a:avLst/>
-          </a:prstGeom>
-          <a:noFill/>
-          <a:ln/>
-        </p:spPr>
-        <p:txBody>
-          <a:bodyPr wrap="square" lIns="0" tIns="0" rIns="0" bIns="0" rtlCol="0" anchor="ctr"/>
-          <a:lstStyle/>
-          <a:p>
-            <a:pPr indent="0" marL="0">
-              <a:buNone/>
-            </a:pPr>
-            <a:r>
-              <a:rPr lang="en-US" sz="1250" b="1" dirty="0">
-                <a:solidFill>
-                  <a:srgbClr val="3B6B4A"/>
-                </a:solidFill>
-                <a:latin typeface="Yu Gothic" pitchFamily="34" charset="0"/>
-                <a:ea typeface="Yu Gothic" pitchFamily="34" charset="-122"/>
-                <a:cs typeface="Yu Gothic" pitchFamily="34" charset="-120"/>
-              </a:rPr>
-              <a:t>ここを決めないと、持ち帰っても使われません。紙に書きます。</a:t>
-            </a:r>
-            <a:endParaRPr lang="en-US" sz="1250" dirty="0"/>
-          </a:p>
-        </p:txBody>
-      </p:sp>
-      <p:sp>
-        <p:nvSpPr>
-          <p:cNvPr id="5" name="Shape 3"/>
+          <p:cNvPr id="4" name="Shape 2"/>
           <p:cNvSpPr/>
           <p:nvPr/>
         </p:nvSpPr>
         <p:spPr>
           <a:xfrm>
-            <a:off x="777240" y="2103120"/>
-            <a:ext cx="10607040" cy="914400"/>
+            <a:off x="777240" y="1828800"/>
+            <a:ext cx="10607040" cy="1078992"/>
           </a:xfrm>
           <a:prstGeom prst="rect">
             <a:avLst/>
@@ -2292,20 +2520,59 @@
       </p:sp>
       <p:sp>
         <p:nvSpPr>
+          <p:cNvPr id="5" name="Text 3"/>
+          <p:cNvSpPr txBox="1"/>
+          <p:nvPr/>
+        </p:nvSpPr>
+        <p:spPr>
+          <a:xfrm>
+            <a:off x="1097280" y="1920240"/>
+            <a:ext cx="2969971" cy="896112"/>
+          </a:xfrm>
+          <a:prstGeom prst="rect">
+            <a:avLst/>
+          </a:prstGeom>
+          <a:noFill/>
+          <a:ln/>
+        </p:spPr>
+        <p:txBody>
+          <a:bodyPr wrap="square" lIns="0" tIns="0" rIns="0" bIns="0" rtlCol="0" anchor="ctr"/>
+          <a:lstStyle/>
+          <a:p>
+            <a:pPr indent="0" marL="0">
+              <a:buNone/>
+            </a:pPr>
+            <a:r>
+              <a:rPr lang="en-US" sz="1500" b="1" dirty="0">
+                <a:solidFill>
+                  <a:srgbClr val="23201D"/>
+                </a:solidFill>
+                <a:latin typeface="Yu Gothic" pitchFamily="34" charset="0"/>
+                <a:ea typeface="Yu Gothic" pitchFamily="34" charset="-122"/>
+                <a:cs typeface="Yu Gothic" pitchFamily="34" charset="-120"/>
+              </a:rPr>
+              <a:t>テンプレート</a:t>
+            </a:r>
+            <a:endParaRPr lang="en-US" sz="1500" dirty="0"/>
+          </a:p>
+        </p:txBody>
+      </p:sp>
+      <p:sp>
+        <p:nvSpPr>
           <p:cNvPr id="6" name="Shape 4"/>
           <p:cNvSpPr/>
           <p:nvPr/>
         </p:nvSpPr>
         <p:spPr>
           <a:xfrm>
-            <a:off x="777240" y="2103120"/>
-            <a:ext cx="54864" cy="914400"/>
+            <a:off x="4065422" y="1956816"/>
+            <a:ext cx="18288" cy="822960"/>
           </a:xfrm>
           <a:prstGeom prst="rect">
             <a:avLst/>
           </a:prstGeom>
           <a:solidFill>
-            <a:srgbClr val="3B6B4A"/>
+            <a:srgbClr val="EDE7DB"/>
           </a:solidFill>
           <a:ln w="12700">
             <a:solidFill>
@@ -2323,47 +2590,8 @@
         </p:nvSpPr>
         <p:spPr>
           <a:xfrm>
-            <a:off x="1143000" y="2176272"/>
-            <a:ext cx="2757830" cy="768096"/>
-          </a:xfrm>
-          <a:prstGeom prst="rect">
-            <a:avLst/>
-          </a:prstGeom>
-          <a:noFill/>
-          <a:ln/>
-        </p:spPr>
-        <p:txBody>
-          <a:bodyPr wrap="square" lIns="0" tIns="0" rIns="0" bIns="0" rtlCol="0" anchor="ctr"/>
-          <a:lstStyle/>
-          <a:p>
-            <a:pPr indent="0" marL="0">
-              <a:buNone/>
-            </a:pPr>
-            <a:r>
-              <a:rPr lang="en-US" sz="1400" b="1" dirty="0">
-                <a:solidFill>
-                  <a:srgbClr val="3B6B4A"/>
-                </a:solidFill>
-                <a:latin typeface="Yu Gothic" pitchFamily="34" charset="0"/>
-                <a:ea typeface="Yu Gothic" pitchFamily="34" charset="-122"/>
-                <a:cs typeface="Yu Gothic" pitchFamily="34" charset="-120"/>
-              </a:rPr>
-              <a:t>次に渡す相手</a:t>
-            </a:r>
-            <a:endParaRPr lang="en-US" sz="1400" dirty="0"/>
-          </a:p>
-        </p:txBody>
-      </p:sp>
-      <p:sp>
-        <p:nvSpPr>
-          <p:cNvPr id="8" name="Text 6"/>
-          <p:cNvSpPr txBox="1"/>
-          <p:nvPr/>
-        </p:nvSpPr>
-        <p:spPr>
-          <a:xfrm>
-            <a:off x="4006901" y="2176272"/>
-            <a:ext cx="7011619" cy="768096"/>
+            <a:off x="4383634" y="1920240"/>
+            <a:ext cx="6682435" cy="896112"/>
           </a:xfrm>
           <a:prstGeom prst="rect">
             <a:avLst/>
@@ -2384,13 +2612,13 @@
             <a:r>
               <a:rPr lang="en-US" sz="1250" dirty="0">
                 <a:solidFill>
-                  <a:srgbClr val="3F3933"/>
-                </a:solidFill>
-                <a:latin typeface="Yu Gothic" pitchFamily="34" charset="0"/>
-                <a:ea typeface="Yu Gothic" pitchFamily="34" charset="-122"/>
-                <a:cs typeface="Yu Gothic" pitchFamily="34" charset="-120"/>
-              </a:rPr>
-              <a:t>0〜3か月で誰に広げるか。実名で決めます</a:t>
+                  <a:srgbClr val="5A534A"/>
+                </a:solidFill>
+                <a:latin typeface="Yu Gothic" pitchFamily="34" charset="0"/>
+                <a:ea typeface="Yu Gothic" pitchFamily="34" charset="-122"/>
+                <a:cs typeface="Yu Gothic" pitchFamily="34" charset="-120"/>
+              </a:rPr>
+              <a:t>差し替える箇所が【　】になっている定型文。そこだけ埋めれば使えます</a:t>
             </a:r>
             <a:endParaRPr lang="en-US" sz="1250" dirty="0"/>
           </a:p>
@@ -2398,14 +2626,14 @@
       </p:sp>
       <p:sp>
         <p:nvSpPr>
-          <p:cNvPr id="9" name="Shape 7"/>
+          <p:cNvPr id="8" name="Shape 6"/>
           <p:cNvSpPr/>
           <p:nvPr/>
         </p:nvSpPr>
         <p:spPr>
           <a:xfrm>
-            <a:off x="777240" y="3154680"/>
-            <a:ext cx="10607040" cy="914400"/>
+            <a:off x="777240" y="3063240"/>
+            <a:ext cx="10607040" cy="1078992"/>
           </a:xfrm>
           <a:prstGeom prst="rect">
             <a:avLst/>
@@ -2423,20 +2651,59 @@
       </p:sp>
       <p:sp>
         <p:nvSpPr>
+          <p:cNvPr id="9" name="Text 7"/>
+          <p:cNvSpPr txBox="1"/>
+          <p:nvPr/>
+        </p:nvSpPr>
+        <p:spPr>
+          <a:xfrm>
+            <a:off x="1097280" y="3154680"/>
+            <a:ext cx="2969971" cy="896112"/>
+          </a:xfrm>
+          <a:prstGeom prst="rect">
+            <a:avLst/>
+          </a:prstGeom>
+          <a:noFill/>
+          <a:ln/>
+        </p:spPr>
+        <p:txBody>
+          <a:bodyPr wrap="square" lIns="0" tIns="0" rIns="0" bIns="0" rtlCol="0" anchor="ctr"/>
+          <a:lstStyle/>
+          <a:p>
+            <a:pPr indent="0" marL="0">
+              <a:buNone/>
+            </a:pPr>
+            <a:r>
+              <a:rPr lang="en-US" sz="1500" b="1" dirty="0">
+                <a:solidFill>
+                  <a:srgbClr val="23201D"/>
+                </a:solidFill>
+                <a:latin typeface="Yu Gothic" pitchFamily="34" charset="0"/>
+                <a:ea typeface="Yu Gothic" pitchFamily="34" charset="-122"/>
+                <a:cs typeface="Yu Gothic" pitchFamily="34" charset="-120"/>
+              </a:rPr>
+              <a:t>専用AI</a:t>
+            </a:r>
+            <a:endParaRPr lang="en-US" sz="1500" dirty="0"/>
+          </a:p>
+        </p:txBody>
+      </p:sp>
+      <p:sp>
+        <p:nvSpPr>
           <p:cNvPr id="10" name="Shape 8"/>
           <p:cNvSpPr/>
           <p:nvPr/>
         </p:nvSpPr>
         <p:spPr>
           <a:xfrm>
-            <a:off x="777240" y="3154680"/>
-            <a:ext cx="54864" cy="914400"/>
+            <a:off x="4065422" y="3191256"/>
+            <a:ext cx="18288" cy="822960"/>
           </a:xfrm>
           <a:prstGeom prst="rect">
             <a:avLst/>
           </a:prstGeom>
           <a:solidFill>
-            <a:srgbClr val="3B6B4A"/>
+            <a:srgbClr val="EDE7DB"/>
           </a:solidFill>
           <a:ln w="12700">
             <a:solidFill>
@@ -2454,47 +2721,8 @@
         </p:nvSpPr>
         <p:spPr>
           <a:xfrm>
-            <a:off x="1143000" y="3227832"/>
-            <a:ext cx="2757830" cy="768096"/>
-          </a:xfrm>
-          <a:prstGeom prst="rect">
-            <a:avLst/>
-          </a:prstGeom>
-          <a:noFill/>
-          <a:ln/>
-        </p:spPr>
-        <p:txBody>
-          <a:bodyPr wrap="square" lIns="0" tIns="0" rIns="0" bIns="0" rtlCol="0" anchor="ctr"/>
-          <a:lstStyle/>
-          <a:p>
-            <a:pPr indent="0" marL="0">
-              <a:buNone/>
-            </a:pPr>
-            <a:r>
-              <a:rPr lang="en-US" sz="1400" b="1" dirty="0">
-                <a:solidFill>
-                  <a:srgbClr val="3B6B4A"/>
-                </a:solidFill>
-                <a:latin typeface="Yu Gothic" pitchFamily="34" charset="0"/>
-                <a:ea typeface="Yu Gothic" pitchFamily="34" charset="-122"/>
-                <a:cs typeface="Yu Gothic" pitchFamily="34" charset="-120"/>
-              </a:rPr>
-              <a:t>困ったときの相談先</a:t>
-            </a:r>
-            <a:endParaRPr lang="en-US" sz="1400" dirty="0"/>
-          </a:p>
-        </p:txBody>
-      </p:sp>
-      <p:sp>
-        <p:nvSpPr>
-          <p:cNvPr id="12" name="Text 10"/>
-          <p:cNvSpPr txBox="1"/>
-          <p:nvPr/>
-        </p:nvSpPr>
-        <p:spPr>
-          <a:xfrm>
-            <a:off x="4006901" y="3227832"/>
-            <a:ext cx="7011619" cy="768096"/>
+            <a:off x="4383634" y="3154680"/>
+            <a:ext cx="6682435" cy="896112"/>
           </a:xfrm>
           <a:prstGeom prst="rect">
             <a:avLst/>
@@ -2515,13 +2743,13 @@
             <a:r>
               <a:rPr lang="en-US" sz="1250" dirty="0">
                 <a:solidFill>
-                  <a:srgbClr val="3F3933"/>
-                </a:solidFill>
-                <a:latin typeface="Yu Gothic" pitchFamily="34" charset="0"/>
-                <a:ea typeface="Yu Gothic" pitchFamily="34" charset="-122"/>
-                <a:cs typeface="Yu Gothic" pitchFamily="34" charset="-120"/>
-              </a:rPr>
-              <a:t>社内の誰に聞けばよいかを、社員に明示します</a:t>
+                  <a:srgbClr val="5A534A"/>
+                </a:solidFill>
+                <a:latin typeface="Yu Gothic" pitchFamily="34" charset="0"/>
+                <a:ea typeface="Yu Gothic" pitchFamily="34" charset="-122"/>
+                <a:cs typeface="Yu Gothic" pitchFamily="34" charset="-120"/>
+              </a:rPr>
+              <a:t>自社の資料を読んで答えるAI。資料にないことは答えません</a:t>
             </a:r>
             <a:endParaRPr lang="en-US" sz="1250" dirty="0"/>
           </a:p>
@@ -2529,14 +2757,14 @@
       </p:sp>
       <p:sp>
         <p:nvSpPr>
-          <p:cNvPr id="13" name="Shape 11"/>
+          <p:cNvPr id="12" name="Shape 10"/>
           <p:cNvSpPr/>
           <p:nvPr/>
         </p:nvSpPr>
         <p:spPr>
           <a:xfrm>
-            <a:off x="777240" y="4206240"/>
-            <a:ext cx="10607040" cy="914400"/>
+            <a:off x="777240" y="4297680"/>
+            <a:ext cx="10607040" cy="1078992"/>
           </a:xfrm>
           <a:prstGeom prst="rect">
             <a:avLst/>
@@ -2554,20 +2782,59 @@
       </p:sp>
       <p:sp>
         <p:nvSpPr>
+          <p:cNvPr id="13" name="Text 11"/>
+          <p:cNvSpPr txBox="1"/>
+          <p:nvPr/>
+        </p:nvSpPr>
+        <p:spPr>
+          <a:xfrm>
+            <a:off x="1097280" y="4389120"/>
+            <a:ext cx="2969971" cy="896112"/>
+          </a:xfrm>
+          <a:prstGeom prst="rect">
+            <a:avLst/>
+          </a:prstGeom>
+          <a:noFill/>
+          <a:ln/>
+        </p:spPr>
+        <p:txBody>
+          <a:bodyPr wrap="square" lIns="0" tIns="0" rIns="0" bIns="0" rtlCol="0" anchor="ctr"/>
+          <a:lstStyle/>
+          <a:p>
+            <a:pPr indent="0" marL="0">
+              <a:buNone/>
+            </a:pPr>
+            <a:r>
+              <a:rPr lang="en-US" sz="1500" b="1" dirty="0">
+                <a:solidFill>
+                  <a:srgbClr val="23201D"/>
+                </a:solidFill>
+                <a:latin typeface="Yu Gothic" pitchFamily="34" charset="0"/>
+                <a:ea typeface="Yu Gothic" pitchFamily="34" charset="-122"/>
+                <a:cs typeface="Yu Gothic" pitchFamily="34" charset="-120"/>
+              </a:rPr>
+              <a:t>利用ルール</a:t>
+            </a:r>
+            <a:endParaRPr lang="en-US" sz="1500" dirty="0"/>
+          </a:p>
+        </p:txBody>
+      </p:sp>
+      <p:sp>
+        <p:nvSpPr>
           <p:cNvPr id="14" name="Shape 12"/>
           <p:cNvSpPr/>
           <p:nvPr/>
         </p:nvSpPr>
         <p:spPr>
           <a:xfrm>
-            <a:off x="777240" y="4206240"/>
-            <a:ext cx="54864" cy="914400"/>
+            <a:off x="4065422" y="4425696"/>
+            <a:ext cx="18288" cy="822960"/>
           </a:xfrm>
           <a:prstGeom prst="rect">
             <a:avLst/>
           </a:prstGeom>
           <a:solidFill>
-            <a:srgbClr val="3B6B4A"/>
+            <a:srgbClr val="EDE7DB"/>
           </a:solidFill>
           <a:ln w="12700">
             <a:solidFill>
@@ -2585,47 +2852,8 @@
         </p:nvSpPr>
         <p:spPr>
           <a:xfrm>
-            <a:off x="1143000" y="4279392"/>
-            <a:ext cx="2757830" cy="768096"/>
-          </a:xfrm>
-          <a:prstGeom prst="rect">
-            <a:avLst/>
-          </a:prstGeom>
-          <a:noFill/>
-          <a:ln/>
-        </p:spPr>
-        <p:txBody>
-          <a:bodyPr wrap="square" lIns="0" tIns="0" rIns="0" bIns="0" rtlCol="0" anchor="ctr"/>
-          <a:lstStyle/>
-          <a:p>
-            <a:pPr indent="0" marL="0">
-              <a:buNone/>
-            </a:pPr>
-            <a:r>
-              <a:rPr lang="en-US" sz="1400" b="1" dirty="0">
-                <a:solidFill>
-                  <a:srgbClr val="3B6B4A"/>
-                </a:solidFill>
-                <a:latin typeface="Yu Gothic" pitchFamily="34" charset="0"/>
-                <a:ea typeface="Yu Gothic" pitchFamily="34" charset="-122"/>
-                <a:cs typeface="Yu Gothic" pitchFamily="34" charset="-120"/>
-              </a:rPr>
-              <a:t>次に集まる日</a:t>
-            </a:r>
-            <a:endParaRPr lang="en-US" sz="1400" dirty="0"/>
-          </a:p>
-        </p:txBody>
-      </p:sp>
-      <p:sp>
-        <p:nvSpPr>
-          <p:cNvPr id="16" name="Text 14"/>
-          <p:cNvSpPr txBox="1"/>
-          <p:nvPr/>
-        </p:nvSpPr>
-        <p:spPr>
-          <a:xfrm>
-            <a:off x="4006901" y="4279392"/>
-            <a:ext cx="7011619" cy="768096"/>
+            <a:off x="4383634" y="4389120"/>
+            <a:ext cx="6682435" cy="896112"/>
           </a:xfrm>
           <a:prstGeom prst="rect">
             <a:avLst/>
@@ -2646,15 +2874,54 @@
             <a:r>
               <a:rPr lang="en-US" sz="1250" dirty="0">
                 <a:solidFill>
-                  <a:srgbClr val="3F3933"/>
-                </a:solidFill>
-                <a:latin typeface="Yu Gothic" pitchFamily="34" charset="0"/>
-                <a:ea typeface="Yu Gothic" pitchFamily="34" charset="-122"/>
-                <a:cs typeface="Yu Gothic" pitchFamily="34" charset="-120"/>
-              </a:rPr>
-              <a:t>第12回の社内お披露目の日程を、いまこの場で押さえます</a:t>
+                  <a:srgbClr val="5A534A"/>
+                </a:solidFill>
+                <a:latin typeface="Yu Gothic" pitchFamily="34" charset="0"/>
+                <a:ea typeface="Yu Gothic" pitchFamily="34" charset="-122"/>
+                <a:cs typeface="Yu Gothic" pitchFamily="34" charset="-120"/>
+              </a:rPr>
+              <a:t>入れてはいけない情報と、確認が必要な業務を書いたA4一枚。今日お配りします</a:t>
             </a:r>
             <a:endParaRPr lang="en-US" sz="1250" dirty="0"/>
+          </a:p>
+        </p:txBody>
+      </p:sp>
+      <p:sp>
+        <p:nvSpPr>
+          <p:cNvPr id="16" name="Text 14"/>
+          <p:cNvSpPr txBox="1"/>
+          <p:nvPr/>
+        </p:nvSpPr>
+        <p:spPr>
+          <a:xfrm>
+            <a:off x="777240" y="5623560"/>
+            <a:ext cx="10607040" cy="411480"/>
+          </a:xfrm>
+          <a:prstGeom prst="rect">
+            <a:avLst/>
+          </a:prstGeom>
+          <a:noFill/>
+          <a:ln/>
+        </p:spPr>
+        <p:txBody>
+          <a:bodyPr wrap="square" lIns="0" tIns="0" rIns="0" bIns="0" rtlCol="0" anchor="ctr"/>
+          <a:lstStyle/>
+          <a:p>
+            <a:pPr indent="0" marL="0">
+              <a:buNone/>
+            </a:pPr>
+            <a:r>
+              <a:rPr lang="en-US" sz="1150" dirty="0">
+                <a:solidFill>
+                  <a:srgbClr val="8A8177"/>
+                </a:solidFill>
+                <a:latin typeface="Yu Gothic" pitchFamily="34" charset="0"/>
+                <a:ea typeface="Yu Gothic" pitchFamily="34" charset="-122"/>
+                <a:cs typeface="Yu Gothic" pitchFamily="34" charset="-120"/>
+              </a:rPr>
+              <a:t>配布した用語辞典にも同じものが載っています。覚える必要はありません。</a:t>
+            </a:r>
+            <a:endParaRPr lang="en-US" sz="1150" dirty="0"/>
           </a:p>
         </p:txBody>
       </p:sp>
@@ -2730,7 +2997,7 @@
                 <a:ea typeface="Yu Gothic" pitchFamily="34" charset="-122"/>
                 <a:cs typeface="Yu Gothic" pitchFamily="34" charset="-120"/>
               </a:rPr>
-              <a:t>組み込み</a:t>
+              <a:t>用語</a:t>
             </a:r>
             <a:endParaRPr lang="en-US" sz="900" dirty="0"/>
           </a:p>
@@ -2795,13 +3062,13 @@
             <a:r>
               <a:rPr lang="en-US" sz="1100" b="1" spc="250" kern="0" dirty="0">
                 <a:solidFill>
-                  <a:srgbClr val="B04A2F"/>
-                </a:solidFill>
-                <a:latin typeface="Yu Gothic" pitchFamily="34" charset="0"/>
-                <a:ea typeface="Yu Gothic" pitchFamily="34" charset="-122"/>
-                <a:cs typeface="Yu Gothic" pitchFamily="34" charset="-120"/>
-              </a:rPr>
-              <a:t>ここだけは</a:t>
+                  <a:srgbClr val="2F4F6B"/>
+                </a:solidFill>
+                <a:latin typeface="Yu Gothic" pitchFamily="34" charset="0"/>
+                <a:ea typeface="Yu Gothic" pitchFamily="34" charset="-122"/>
+                <a:cs typeface="Yu Gothic" pitchFamily="34" charset="-120"/>
+              </a:rPr>
+              <a:t>演習</a:t>
             </a:r>
             <a:endParaRPr lang="en-US" sz="1100" dirty="0"/>
           </a:p>
@@ -2815,7 +3082,7 @@
         </p:nvSpPr>
         <p:spPr>
           <a:xfrm>
-            <a:off x="777240" y="1097280"/>
+            <a:off x="777240" y="896112"/>
             <a:ext cx="10607040" cy="640080"/>
           </a:xfrm>
           <a:prstGeom prst="rect">
@@ -2840,7 +3107,7 @@
                 <a:ea typeface="Yu Gothic" pitchFamily="34" charset="-122"/>
                 <a:cs typeface="Yu Gothic" pitchFamily="34" charset="-120"/>
               </a:rPr>
-              <a:t>「人が減らされるのか」に、講師が答えてはいけません</a:t>
+              <a:t>今日の流れ</a:t>
             </a:r>
             <a:endParaRPr lang="en-US" sz="2600" dirty="0"/>
           </a:p>
@@ -2848,20 +3115,84 @@
       </p:sp>
       <p:sp>
         <p:nvSpPr>
-          <p:cNvPr id="4" name="Shape 2"/>
+          <p:cNvPr id="4" name="Text 2"/>
+          <p:cNvSpPr txBox="1"/>
+          <p:nvPr/>
+        </p:nvSpPr>
+        <p:spPr>
+          <a:xfrm>
+            <a:off x="777240" y="1572768"/>
+            <a:ext cx="10607040" cy="320040"/>
+          </a:xfrm>
+          <a:prstGeom prst="rect">
+            <a:avLst/>
+          </a:prstGeom>
+          <a:noFill/>
+          <a:ln/>
+        </p:spPr>
+        <p:txBody>
+          <a:bodyPr wrap="square" lIns="0" tIns="0" rIns="0" bIns="0" rtlCol="0" anchor="ctr"/>
+          <a:lstStyle/>
+          <a:p>
+            <a:pPr indent="0" marL="0">
+              <a:buNone/>
+            </a:pPr>
+            <a:r>
+              <a:rPr lang="en-US" sz="1250" b="1" dirty="0">
+                <a:solidFill>
+                  <a:srgbClr val="2F4F6B"/>
+                </a:solidFill>
+                <a:latin typeface="Yu Gothic" pitchFamily="34" charset="0"/>
+                <a:ea typeface="Yu Gothic" pitchFamily="34" charset="-122"/>
+                <a:cs typeface="Yu Gothic" pitchFamily="34" charset="-120"/>
+              </a:rPr>
+              <a:t>55分。操作するのはご自身です。</a:t>
+            </a:r>
+            <a:endParaRPr lang="en-US" sz="1250" dirty="0"/>
+          </a:p>
+        </p:txBody>
+      </p:sp>
+      <p:sp>
+        <p:nvSpPr>
+          <p:cNvPr id="5" name="Shape 3"/>
           <p:cNvSpPr/>
           <p:nvPr/>
         </p:nvSpPr>
         <p:spPr>
           <a:xfrm>
             <a:off x="777240" y="2148840"/>
-            <a:ext cx="64008" cy="2194560"/>
+            <a:ext cx="3383280" cy="2880360"/>
           </a:xfrm>
           <a:prstGeom prst="rect">
             <a:avLst/>
           </a:prstGeom>
           <a:solidFill>
-            <a:srgbClr val="B04A2F"/>
+            <a:srgbClr val="FFFFFF"/>
+          </a:solidFill>
+          <a:ln w="12700">
+            <a:solidFill>
+              <a:srgbClr val="EDE7DB"/>
+            </a:solidFill>
+            <a:prstDash val="solid"/>
+          </a:ln>
+        </p:spPr>
+      </p:sp>
+      <p:sp>
+        <p:nvSpPr>
+          <p:cNvPr id="6" name="Shape 4"/>
+          <p:cNvSpPr/>
+          <p:nvPr/>
+        </p:nvSpPr>
+        <p:spPr>
+          <a:xfrm>
+            <a:off x="1051560" y="2395728"/>
+            <a:ext cx="438912" cy="438912"/>
+          </a:xfrm>
+          <a:prstGeom prst="ellipse">
+            <a:avLst/>
+          </a:prstGeom>
+          <a:solidFill>
+            <a:srgbClr val="2F4F6B"/>
           </a:solidFill>
           <a:ln w="12700">
             <a:solidFill>
@@ -2873,14 +3204,53 @@
       </p:sp>
       <p:sp>
         <p:nvSpPr>
-          <p:cNvPr id="5" name="Text 3"/>
-          <p:cNvSpPr txBox="1"/>
-          <p:nvPr/>
-        </p:nvSpPr>
-        <p:spPr>
-          <a:xfrm>
-            <a:off x="1188720" y="2148840"/>
-            <a:ext cx="9966960" cy="2194560"/>
+          <p:cNvPr id="7" name="Text 5"/>
+          <p:cNvSpPr txBox="1"/>
+          <p:nvPr/>
+        </p:nvSpPr>
+        <p:spPr>
+          <a:xfrm>
+            <a:off x="1051560" y="2395728"/>
+            <a:ext cx="438912" cy="438912"/>
+          </a:xfrm>
+          <a:prstGeom prst="rect">
+            <a:avLst/>
+          </a:prstGeom>
+          <a:noFill/>
+          <a:ln/>
+        </p:spPr>
+        <p:txBody>
+          <a:bodyPr wrap="square" lIns="0" tIns="0" rIns="0" bIns="0" rtlCol="0" anchor="ctr"/>
+          <a:lstStyle/>
+          <a:p>
+            <a:pPr algn="ctr" indent="0" marL="0">
+              <a:buNone/>
+            </a:pPr>
+            <a:r>
+              <a:rPr lang="en-US" sz="1300" b="1" dirty="0">
+                <a:solidFill>
+                  <a:srgbClr val="FFFFFF"/>
+                </a:solidFill>
+                <a:latin typeface="Yu Gothic" pitchFamily="34" charset="0"/>
+                <a:ea typeface="Yu Gothic" pitchFamily="34" charset="-122"/>
+                <a:cs typeface="Yu Gothic" pitchFamily="34" charset="-120"/>
+              </a:rPr>
+              <a:t>1</a:t>
+            </a:r>
+            <a:endParaRPr lang="en-US" sz="1300" dirty="0"/>
+          </a:p>
+        </p:txBody>
+      </p:sp>
+      <p:sp>
+        <p:nvSpPr>
+          <p:cNvPr id="8" name="Text 6"/>
+          <p:cNvSpPr txBox="1"/>
+          <p:nvPr/>
+        </p:nvSpPr>
+        <p:spPr>
+          <a:xfrm>
+            <a:off x="1051560" y="2944368"/>
+            <a:ext cx="2834640" cy="731520"/>
           </a:xfrm>
           <a:prstGeom prst="rect">
             <a:avLst/>
@@ -2894,41 +3264,108 @@
           <a:p>
             <a:pPr indent="0" marL="0">
               <a:lnSpc>
-                <a:spcPct val="160000"/>
+                <a:spcPct val="125000"/>
               </a:lnSpc>
               <a:buNone/>
             </a:pPr>
             <a:r>
-              <a:rPr lang="en-US" sz="1650" dirty="0">
-                <a:solidFill>
-                  <a:srgbClr val="3F3933"/>
-                </a:solidFill>
-                <a:latin typeface="Yu Gothic" pitchFamily="34" charset="0"/>
-                <a:ea typeface="Yu Gothic" pitchFamily="34" charset="-122"/>
-                <a:cs typeface="Yu Gothic" pitchFamily="34" charset="-120"/>
-              </a:rPr>
-              <a:t>この質問は必ず出ます。そして、社長ご自身が答えたかどうかを社員は見ています。講師が代わりに答えると、それは外部の人の言い分になり、誰も信じません。事前の壁打ちで、この質問への答えを必ず準備しておいてください。</a:t>
-            </a:r>
-            <a:endParaRPr lang="en-US" sz="1650" dirty="0"/>
-          </a:p>
-        </p:txBody>
-      </p:sp>
-      <p:sp>
-        <p:nvSpPr>
-          <p:cNvPr id="6" name="Shape 4"/>
+              <a:rPr lang="en-US" sz="1450" b="1" dirty="0">
+                <a:solidFill>
+                  <a:srgbClr val="23201D"/>
+                </a:solidFill>
+                <a:latin typeface="Yu Gothic" pitchFamily="34" charset="0"/>
+                <a:ea typeface="Yu Gothic" pitchFamily="34" charset="-122"/>
+                <a:cs typeface="Yu Gothic" pitchFamily="34" charset="-120"/>
+              </a:rPr>
+              <a:t>作ったものをお見せする</a:t>
+            </a:r>
+            <a:endParaRPr lang="en-US" sz="1450" dirty="0"/>
+          </a:p>
+        </p:txBody>
+      </p:sp>
+      <p:sp>
+        <p:nvSpPr>
+          <p:cNvPr id="9" name="Text 7"/>
+          <p:cNvSpPr txBox="1"/>
+          <p:nvPr/>
+        </p:nvSpPr>
+        <p:spPr>
+          <a:xfrm>
+            <a:off x="1051560" y="3703320"/>
+            <a:ext cx="2834640" cy="1188720"/>
+          </a:xfrm>
+          <a:prstGeom prst="rect">
+            <a:avLst/>
+          </a:prstGeom>
+          <a:noFill/>
+          <a:ln/>
+        </p:spPr>
+        <p:txBody>
+          <a:bodyPr wrap="square" lIns="0" tIns="0" rIns="0" bIns="0" rtlCol="0" anchor="ctr"/>
+          <a:lstStyle/>
+          <a:p>
+            <a:pPr indent="0" marL="0">
+              <a:lnSpc>
+                <a:spcPct val="130000"/>
+              </a:lnSpc>
+              <a:buNone/>
+            </a:pPr>
+            <a:r>
+              <a:rPr lang="en-US" sz="1150" dirty="0">
+                <a:solidFill>
+                  <a:srgbClr val="5A534A"/>
+                </a:solidFill>
+                <a:latin typeface="Yu Gothic" pitchFamily="34" charset="0"/>
+                <a:ea typeface="Yu Gothic" pitchFamily="34" charset="-122"/>
+                <a:cs typeface="Yu Gothic" pitchFamily="34" charset="-120"/>
+              </a:rPr>
+              <a:t>実際に動かします。すでに使っている社員の方がいれば、その方に話していただきます</a:t>
+            </a:r>
+            <a:endParaRPr lang="en-US" sz="1150" dirty="0"/>
+          </a:p>
+        </p:txBody>
+      </p:sp>
+      <p:sp>
+        <p:nvSpPr>
+          <p:cNvPr id="10" name="Shape 8"/>
           <p:cNvSpPr/>
           <p:nvPr/>
         </p:nvSpPr>
         <p:spPr>
           <a:xfrm>
-            <a:off x="777240" y="4709160"/>
-            <a:ext cx="10607040" cy="960120"/>
+            <a:off x="4389120" y="2148840"/>
+            <a:ext cx="3383280" cy="2880360"/>
           </a:xfrm>
           <a:prstGeom prst="rect">
             <a:avLst/>
           </a:prstGeom>
           <a:solidFill>
-            <a:srgbClr val="EDE7DB"/>
+            <a:srgbClr val="FFFFFF"/>
+          </a:solidFill>
+          <a:ln w="12700">
+            <a:solidFill>
+              <a:srgbClr val="EDE7DB"/>
+            </a:solidFill>
+            <a:prstDash val="solid"/>
+          </a:ln>
+        </p:spPr>
+      </p:sp>
+      <p:sp>
+        <p:nvSpPr>
+          <p:cNvPr id="11" name="Shape 9"/>
+          <p:cNvSpPr/>
+          <p:nvPr/>
+        </p:nvSpPr>
+        <p:spPr>
+          <a:xfrm>
+            <a:off x="4663440" y="2395728"/>
+            <a:ext cx="438912" cy="438912"/>
+          </a:xfrm>
+          <a:prstGeom prst="ellipse">
+            <a:avLst/>
+          </a:prstGeom>
+          <a:solidFill>
+            <a:srgbClr val="2F4F6B"/>
           </a:solidFill>
           <a:ln w="12700">
             <a:solidFill>
@@ -2940,53 +3377,95 @@
       </p:sp>
       <p:sp>
         <p:nvSpPr>
-          <p:cNvPr id="7" name="Text 5"/>
-          <p:cNvSpPr txBox="1"/>
-          <p:nvPr/>
-        </p:nvSpPr>
-        <p:spPr>
-          <a:xfrm>
-            <a:off x="1051560" y="4800600"/>
-            <a:ext cx="1463040" cy="256032"/>
-          </a:xfrm>
-          <a:prstGeom prst="rect">
-            <a:avLst/>
-          </a:prstGeom>
-          <a:noFill/>
-          <a:ln/>
-        </p:spPr>
-        <p:txBody>
-          <a:bodyPr wrap="square" lIns="0" tIns="0" rIns="0" bIns="0" rtlCol="0" anchor="ctr"/>
-          <a:lstStyle/>
-          <a:p>
-            <a:pPr indent="0" marL="0">
-              <a:buNone/>
-            </a:pPr>
-            <a:r>
-              <a:rPr lang="en-US" sz="900" b="1" spc="150" kern="0" dirty="0">
-                <a:solidFill>
-                  <a:srgbClr val="B04A2F"/>
-                </a:solidFill>
-                <a:latin typeface="Yu Gothic" pitchFamily="34" charset="0"/>
-                <a:ea typeface="Yu Gothic" pitchFamily="34" charset="-122"/>
-                <a:cs typeface="Yu Gothic" pitchFamily="34" charset="-120"/>
-              </a:rPr>
-              <a:t>他社では</a:t>
-            </a:r>
-            <a:endParaRPr lang="en-US" sz="900" dirty="0"/>
-          </a:p>
-        </p:txBody>
-      </p:sp>
-      <p:sp>
-        <p:nvSpPr>
-          <p:cNvPr id="8" name="Text 6"/>
-          <p:cNvSpPr txBox="1"/>
-          <p:nvPr/>
-        </p:nvSpPr>
-        <p:spPr>
-          <a:xfrm>
-            <a:off x="1051560" y="5029200"/>
-            <a:ext cx="10058400" cy="566928"/>
+          <p:cNvPr id="12" name="Text 10"/>
+          <p:cNvSpPr txBox="1"/>
+          <p:nvPr/>
+        </p:nvSpPr>
+        <p:spPr>
+          <a:xfrm>
+            <a:off x="4663440" y="2395728"/>
+            <a:ext cx="438912" cy="438912"/>
+          </a:xfrm>
+          <a:prstGeom prst="rect">
+            <a:avLst/>
+          </a:prstGeom>
+          <a:noFill/>
+          <a:ln/>
+        </p:spPr>
+        <p:txBody>
+          <a:bodyPr wrap="square" lIns="0" tIns="0" rIns="0" bIns="0" rtlCol="0" anchor="ctr"/>
+          <a:lstStyle/>
+          <a:p>
+            <a:pPr algn="ctr" indent="0" marL="0">
+              <a:buNone/>
+            </a:pPr>
+            <a:r>
+              <a:rPr lang="en-US" sz="1300" b="1" dirty="0">
+                <a:solidFill>
+                  <a:srgbClr val="FFFFFF"/>
+                </a:solidFill>
+                <a:latin typeface="Yu Gothic" pitchFamily="34" charset="0"/>
+                <a:ea typeface="Yu Gothic" pitchFamily="34" charset="-122"/>
+                <a:cs typeface="Yu Gothic" pitchFamily="34" charset="-120"/>
+              </a:rPr>
+              <a:t>2</a:t>
+            </a:r>
+            <a:endParaRPr lang="en-US" sz="1300" dirty="0"/>
+          </a:p>
+        </p:txBody>
+      </p:sp>
+      <p:sp>
+        <p:nvSpPr>
+          <p:cNvPr id="13" name="Text 11"/>
+          <p:cNvSpPr txBox="1"/>
+          <p:nvPr/>
+        </p:nvSpPr>
+        <p:spPr>
+          <a:xfrm>
+            <a:off x="4663440" y="2944368"/>
+            <a:ext cx="2834640" cy="731520"/>
+          </a:xfrm>
+          <a:prstGeom prst="rect">
+            <a:avLst/>
+          </a:prstGeom>
+          <a:noFill/>
+          <a:ln/>
+        </p:spPr>
+        <p:txBody>
+          <a:bodyPr wrap="square" lIns="0" tIns="0" rIns="0" bIns="0" rtlCol="0" anchor="ctr"/>
+          <a:lstStyle/>
+          <a:p>
+            <a:pPr indent="0" marL="0">
+              <a:lnSpc>
+                <a:spcPct val="125000"/>
+              </a:lnSpc>
+              <a:buNone/>
+            </a:pPr>
+            <a:r>
+              <a:rPr lang="en-US" sz="1450" b="1" dirty="0">
+                <a:solidFill>
+                  <a:srgbClr val="23201D"/>
+                </a:solidFill>
+                <a:latin typeface="Yu Gothic" pitchFamily="34" charset="0"/>
+                <a:ea typeface="Yu Gothic" pitchFamily="34" charset="-122"/>
+                <a:cs typeface="Yu Gothic" pitchFamily="34" charset="-120"/>
+              </a:rPr>
+              <a:t>ご質問・ご意見をうかがう</a:t>
+            </a:r>
+            <a:endParaRPr lang="en-US" sz="1450" dirty="0"/>
+          </a:p>
+        </p:txBody>
+      </p:sp>
+      <p:sp>
+        <p:nvSpPr>
+          <p:cNvPr id="14" name="Text 12"/>
+          <p:cNvSpPr txBox="1"/>
+          <p:nvPr/>
+        </p:nvSpPr>
+        <p:spPr>
+          <a:xfrm>
+            <a:off x="4663440" y="3703320"/>
+            <a:ext cx="2834640" cy="1188720"/>
           </a:xfrm>
           <a:prstGeom prst="rect">
             <a:avLst/>
@@ -3005,23 +3484,196 @@
               <a:buNone/>
             </a:pPr>
             <a:r>
-              <a:rPr lang="en-US" sz="1250" dirty="0">
-                <a:solidFill>
-                  <a:srgbClr val="3F3933"/>
-                </a:solidFill>
-                <a:latin typeface="Yu Gothic" pitchFamily="34" charset="0"/>
-                <a:ea typeface="Yu Gothic" pitchFamily="34" charset="-122"/>
-                <a:cs typeface="Yu Gothic" pitchFamily="34" charset="-120"/>
-              </a:rPr>
-              <a:t>お披露目で最も強く反対した社員を、後に推進担当にした会社があります。反対の理由がいちばん具体的だったため、設計が現実的になりました。</a:t>
-            </a:r>
-            <a:endParaRPr lang="en-US" sz="1250" dirty="0"/>
-          </a:p>
-        </p:txBody>
-      </p:sp>
-      <p:sp>
-        <p:nvSpPr>
-          <p:cNvPr id="9" name="Text 7"/>
+              <a:rPr lang="en-US" sz="1150" dirty="0">
+                <a:solidFill>
+                  <a:srgbClr val="5A534A"/>
+                </a:solidFill>
+                <a:latin typeface="Yu Gothic" pitchFamily="34" charset="0"/>
+                <a:ea typeface="Yu Gothic" pitchFamily="34" charset="-122"/>
+                <a:cs typeface="Yu Gothic" pitchFamily="34" charset="-120"/>
+              </a:rPr>
+              <a:t>否定的なご意見ほど、丁寧に記録します</a:t>
+            </a:r>
+            <a:endParaRPr lang="en-US" sz="1150" dirty="0"/>
+          </a:p>
+        </p:txBody>
+      </p:sp>
+      <p:sp>
+        <p:nvSpPr>
+          <p:cNvPr id="15" name="Shape 13"/>
+          <p:cNvSpPr/>
+          <p:nvPr/>
+        </p:nvSpPr>
+        <p:spPr>
+          <a:xfrm>
+            <a:off x="8001000" y="2148840"/>
+            <a:ext cx="3383280" cy="2880360"/>
+          </a:xfrm>
+          <a:prstGeom prst="rect">
+            <a:avLst/>
+          </a:prstGeom>
+          <a:solidFill>
+            <a:srgbClr val="FFFFFF"/>
+          </a:solidFill>
+          <a:ln w="12700">
+            <a:solidFill>
+              <a:srgbClr val="EDE7DB"/>
+            </a:solidFill>
+            <a:prstDash val="solid"/>
+          </a:ln>
+        </p:spPr>
+      </p:sp>
+      <p:sp>
+        <p:nvSpPr>
+          <p:cNvPr id="16" name="Shape 14"/>
+          <p:cNvSpPr/>
+          <p:nvPr/>
+        </p:nvSpPr>
+        <p:spPr>
+          <a:xfrm>
+            <a:off x="8275320" y="2395728"/>
+            <a:ext cx="438912" cy="438912"/>
+          </a:xfrm>
+          <a:prstGeom prst="ellipse">
+            <a:avLst/>
+          </a:prstGeom>
+          <a:solidFill>
+            <a:srgbClr val="2F4F6B"/>
+          </a:solidFill>
+          <a:ln w="12700">
+            <a:solidFill>
+              <a:srgbClr val="333333"/>
+            </a:solidFill>
+            <a:prstDash val="solid"/>
+          </a:ln>
+        </p:spPr>
+      </p:sp>
+      <p:sp>
+        <p:nvSpPr>
+          <p:cNvPr id="17" name="Text 15"/>
+          <p:cNvSpPr txBox="1"/>
+          <p:nvPr/>
+        </p:nvSpPr>
+        <p:spPr>
+          <a:xfrm>
+            <a:off x="8275320" y="2395728"/>
+            <a:ext cx="438912" cy="438912"/>
+          </a:xfrm>
+          <a:prstGeom prst="rect">
+            <a:avLst/>
+          </a:prstGeom>
+          <a:noFill/>
+          <a:ln/>
+        </p:spPr>
+        <p:txBody>
+          <a:bodyPr wrap="square" lIns="0" tIns="0" rIns="0" bIns="0" rtlCol="0" anchor="ctr"/>
+          <a:lstStyle/>
+          <a:p>
+            <a:pPr algn="ctr" indent="0" marL="0">
+              <a:buNone/>
+            </a:pPr>
+            <a:r>
+              <a:rPr lang="en-US" sz="1300" b="1" dirty="0">
+                <a:solidFill>
+                  <a:srgbClr val="FFFFFF"/>
+                </a:solidFill>
+                <a:latin typeface="Yu Gothic" pitchFamily="34" charset="0"/>
+                <a:ea typeface="Yu Gothic" pitchFamily="34" charset="-122"/>
+                <a:cs typeface="Yu Gothic" pitchFamily="34" charset="-120"/>
+              </a:rPr>
+              <a:t>3</a:t>
+            </a:r>
+            <a:endParaRPr lang="en-US" sz="1300" dirty="0"/>
+          </a:p>
+        </p:txBody>
+      </p:sp>
+      <p:sp>
+        <p:nvSpPr>
+          <p:cNvPr id="18" name="Text 16"/>
+          <p:cNvSpPr txBox="1"/>
+          <p:nvPr/>
+        </p:nvSpPr>
+        <p:spPr>
+          <a:xfrm>
+            <a:off x="8275320" y="2944368"/>
+            <a:ext cx="2834640" cy="731520"/>
+          </a:xfrm>
+          <a:prstGeom prst="rect">
+            <a:avLst/>
+          </a:prstGeom>
+          <a:noFill/>
+          <a:ln/>
+        </p:spPr>
+        <p:txBody>
+          <a:bodyPr wrap="square" lIns="0" tIns="0" rIns="0" bIns="0" rtlCol="0" anchor="ctr"/>
+          <a:lstStyle/>
+          <a:p>
+            <a:pPr indent="0" marL="0">
+              <a:lnSpc>
+                <a:spcPct val="125000"/>
+              </a:lnSpc>
+              <a:buNone/>
+            </a:pPr>
+            <a:r>
+              <a:rPr lang="en-US" sz="1450" b="1" dirty="0">
+                <a:solidFill>
+                  <a:srgbClr val="23201D"/>
+                </a:solidFill>
+                <a:latin typeface="Yu Gothic" pitchFamily="34" charset="0"/>
+                <a:ea typeface="Yu Gothic" pitchFamily="34" charset="-122"/>
+                <a:cs typeface="Yu Gothic" pitchFamily="34" charset="-120"/>
+              </a:rPr>
+              <a:t>12か月の方針を決める</a:t>
+            </a:r>
+            <a:endParaRPr lang="en-US" sz="1450" dirty="0"/>
+          </a:p>
+        </p:txBody>
+      </p:sp>
+      <p:sp>
+        <p:nvSpPr>
+          <p:cNvPr id="19" name="Text 17"/>
+          <p:cNvSpPr txBox="1"/>
+          <p:nvPr/>
+        </p:nvSpPr>
+        <p:spPr>
+          <a:xfrm>
+            <a:off x="8275320" y="3703320"/>
+            <a:ext cx="2834640" cy="1188720"/>
+          </a:xfrm>
+          <a:prstGeom prst="rect">
+            <a:avLst/>
+          </a:prstGeom>
+          <a:noFill/>
+          <a:ln/>
+        </p:spPr>
+        <p:txBody>
+          <a:bodyPr wrap="square" lIns="0" tIns="0" rIns="0" bIns="0" rtlCol="0" anchor="ctr"/>
+          <a:lstStyle/>
+          <a:p>
+            <a:pPr indent="0" marL="0">
+              <a:lnSpc>
+                <a:spcPct val="130000"/>
+              </a:lnSpc>
+              <a:buNone/>
+            </a:pPr>
+            <a:r>
+              <a:rPr lang="en-US" sz="1150" dirty="0">
+                <a:solidFill>
+                  <a:srgbClr val="5A534A"/>
+                </a:solidFill>
+                <a:latin typeface="Yu Gothic" pitchFamily="34" charset="0"/>
+                <a:ea typeface="Yu Gothic" pitchFamily="34" charset="-122"/>
+                <a:cs typeface="Yu Gothic" pitchFamily="34" charset="-120"/>
+              </a:rPr>
+              <a:t>社員退席後に、ロードマップをその場で完成させます</a:t>
+            </a:r>
+            <a:endParaRPr lang="en-US" sz="1150" dirty="0"/>
+          </a:p>
+        </p:txBody>
+      </p:sp>
+      <p:sp>
+        <p:nvSpPr>
+          <p:cNvPr id="20" name="Text 18"/>
           <p:cNvSpPr txBox="1"/>
           <p:nvPr/>
         </p:nvSpPr>
@@ -3060,7 +3712,7 @@
       </p:sp>
       <p:sp>
         <p:nvSpPr>
-          <p:cNvPr id="10" name="Text 8"/>
+          <p:cNvPr id="21" name="Text 19"/>
           <p:cNvSpPr txBox="1"/>
           <p:nvPr/>
         </p:nvSpPr>
@@ -3091,7 +3743,7 @@
                 <a:ea typeface="Yu Gothic" pitchFamily="34" charset="-122"/>
                 <a:cs typeface="Yu Gothic" pitchFamily="34" charset="-120"/>
               </a:rPr>
-              <a:t>ここだけは</a:t>
+              <a:t>演習</a:t>
             </a:r>
             <a:endParaRPr lang="en-US" sz="900" dirty="0"/>
           </a:p>
@@ -3108,6 +3760,1490 @@
 <file path=ppt/slides/slide12.xml><?xml version="1.0" encoding="utf-8"?>
 <p:sld xmlns:a="http://schemas.openxmlformats.org/drawingml/2006/main" xmlns:r="http://schemas.openxmlformats.org/officeDocument/2006/relationships" xmlns:p="http://schemas.openxmlformats.org/presentationml/2006/main">
   <p:cSld name="Slide 12">
+    <p:bg>
+      <p:bgPr>
+        <a:solidFill>
+          <a:srgbClr val="F6F2EA"/>
+        </a:solidFill>
+      </p:bgPr>
+    </p:bg>
+    <p:spTree>
+      <p:nvGrpSpPr>
+        <p:cNvPr id="1" name=""/>
+        <p:cNvGrpSpPr/>
+        <p:nvPr/>
+      </p:nvGrpSpPr>
+      <p:grpSpPr>
+        <a:xfrm>
+          <a:off x="0" y="0"/>
+          <a:ext cx="0" cy="0"/>
+          <a:chOff x="0" y="0"/>
+          <a:chExt cx="0" cy="0"/>
+        </a:xfrm>
+      </p:grpSpPr>
+      <p:sp>
+        <p:nvSpPr>
+          <p:cNvPr id="2" name="Text 0"/>
+          <p:cNvSpPr txBox="1"/>
+          <p:nvPr/>
+        </p:nvSpPr>
+        <p:spPr>
+          <a:xfrm>
+            <a:off x="777240" y="566928"/>
+            <a:ext cx="10607040" cy="274320"/>
+          </a:xfrm>
+          <a:prstGeom prst="rect">
+            <a:avLst/>
+          </a:prstGeom>
+          <a:noFill/>
+          <a:ln/>
+        </p:spPr>
+        <p:txBody>
+          <a:bodyPr wrap="square" lIns="0" tIns="0" rIns="0" bIns="0" rtlCol="0" anchor="ctr"/>
+          <a:lstStyle/>
+          <a:p>
+            <a:pPr indent="0" marL="0">
+              <a:buNone/>
+            </a:pPr>
+            <a:r>
+              <a:rPr lang="en-US" sz="1100" b="1" spc="250" kern="0" dirty="0">
+                <a:solidFill>
+                  <a:srgbClr val="3B6B4A"/>
+                </a:solidFill>
+                <a:latin typeface="Yu Gothic" pitchFamily="34" charset="0"/>
+                <a:ea typeface="Yu Gothic" pitchFamily="34" charset="-122"/>
+                <a:cs typeface="Yu Gothic" pitchFamily="34" charset="-120"/>
+              </a:rPr>
+              <a:t>業務への組み込み</a:t>
+            </a:r>
+            <a:endParaRPr lang="en-US" sz="1100" dirty="0"/>
+          </a:p>
+        </p:txBody>
+      </p:sp>
+      <p:sp>
+        <p:nvSpPr>
+          <p:cNvPr id="3" name="Text 1"/>
+          <p:cNvSpPr txBox="1"/>
+          <p:nvPr/>
+        </p:nvSpPr>
+        <p:spPr>
+          <a:xfrm>
+            <a:off x="777240" y="896112"/>
+            <a:ext cx="10607040" cy="640080"/>
+          </a:xfrm>
+          <a:prstGeom prst="rect">
+            <a:avLst/>
+          </a:prstGeom>
+          <a:noFill/>
+          <a:ln/>
+        </p:spPr>
+        <p:txBody>
+          <a:bodyPr wrap="square" lIns="0" tIns="0" rIns="0" bIns="0" rtlCol="0" anchor="ctr"/>
+          <a:lstStyle/>
+          <a:p>
+            <a:pPr indent="0" marL="0">
+              <a:buNone/>
+            </a:pPr>
+            <a:r>
+              <a:rPr lang="en-US" sz="2600" b="1" dirty="0">
+                <a:solidFill>
+                  <a:srgbClr val="23201D"/>
+                </a:solidFill>
+                <a:latin typeface="Yu Gothic" pitchFamily="34" charset="0"/>
+                <a:ea typeface="Yu Gothic" pitchFamily="34" charset="-122"/>
+                <a:cs typeface="Yu Gothic" pitchFamily="34" charset="-120"/>
+              </a:rPr>
+              <a:t>この場で決めること</a:t>
+            </a:r>
+            <a:endParaRPr lang="en-US" sz="2600" dirty="0"/>
+          </a:p>
+        </p:txBody>
+      </p:sp>
+      <p:sp>
+        <p:nvSpPr>
+          <p:cNvPr id="4" name="Text 2"/>
+          <p:cNvSpPr txBox="1"/>
+          <p:nvPr/>
+        </p:nvSpPr>
+        <p:spPr>
+          <a:xfrm>
+            <a:off x="777240" y="1572768"/>
+            <a:ext cx="10607040" cy="320040"/>
+          </a:xfrm>
+          <a:prstGeom prst="rect">
+            <a:avLst/>
+          </a:prstGeom>
+          <a:noFill/>
+          <a:ln/>
+        </p:spPr>
+        <p:txBody>
+          <a:bodyPr wrap="square" lIns="0" tIns="0" rIns="0" bIns="0" rtlCol="0" anchor="ctr"/>
+          <a:lstStyle/>
+          <a:p>
+            <a:pPr indent="0" marL="0">
+              <a:buNone/>
+            </a:pPr>
+            <a:r>
+              <a:rPr lang="en-US" sz="1250" b="1" dirty="0">
+                <a:solidFill>
+                  <a:srgbClr val="3B6B4A"/>
+                </a:solidFill>
+                <a:latin typeface="Yu Gothic" pitchFamily="34" charset="0"/>
+                <a:ea typeface="Yu Gothic" pitchFamily="34" charset="-122"/>
+                <a:cs typeface="Yu Gothic" pitchFamily="34" charset="-120"/>
+              </a:rPr>
+              <a:t>ここを決めないと、持ち帰っても使われません。紙に書きます。</a:t>
+            </a:r>
+            <a:endParaRPr lang="en-US" sz="1250" dirty="0"/>
+          </a:p>
+        </p:txBody>
+      </p:sp>
+      <p:sp>
+        <p:nvSpPr>
+          <p:cNvPr id="5" name="Shape 3"/>
+          <p:cNvSpPr/>
+          <p:nvPr/>
+        </p:nvSpPr>
+        <p:spPr>
+          <a:xfrm>
+            <a:off x="777240" y="2103120"/>
+            <a:ext cx="10607040" cy="914400"/>
+          </a:xfrm>
+          <a:prstGeom prst="rect">
+            <a:avLst/>
+          </a:prstGeom>
+          <a:solidFill>
+            <a:srgbClr val="FFFFFF"/>
+          </a:solidFill>
+          <a:ln w="12700">
+            <a:solidFill>
+              <a:srgbClr val="EDE7DB"/>
+            </a:solidFill>
+            <a:prstDash val="solid"/>
+          </a:ln>
+        </p:spPr>
+      </p:sp>
+      <p:sp>
+        <p:nvSpPr>
+          <p:cNvPr id="6" name="Shape 4"/>
+          <p:cNvSpPr/>
+          <p:nvPr/>
+        </p:nvSpPr>
+        <p:spPr>
+          <a:xfrm>
+            <a:off x="777240" y="2103120"/>
+            <a:ext cx="54864" cy="914400"/>
+          </a:xfrm>
+          <a:prstGeom prst="rect">
+            <a:avLst/>
+          </a:prstGeom>
+          <a:solidFill>
+            <a:srgbClr val="3B6B4A"/>
+          </a:solidFill>
+          <a:ln w="12700">
+            <a:solidFill>
+              <a:srgbClr val="333333"/>
+            </a:solidFill>
+            <a:prstDash val="solid"/>
+          </a:ln>
+        </p:spPr>
+      </p:sp>
+      <p:sp>
+        <p:nvSpPr>
+          <p:cNvPr id="7" name="Text 5"/>
+          <p:cNvSpPr txBox="1"/>
+          <p:nvPr/>
+        </p:nvSpPr>
+        <p:spPr>
+          <a:xfrm>
+            <a:off x="1143000" y="2176272"/>
+            <a:ext cx="2757830" cy="768096"/>
+          </a:xfrm>
+          <a:prstGeom prst="rect">
+            <a:avLst/>
+          </a:prstGeom>
+          <a:noFill/>
+          <a:ln/>
+        </p:spPr>
+        <p:txBody>
+          <a:bodyPr wrap="square" lIns="0" tIns="0" rIns="0" bIns="0" rtlCol="0" anchor="ctr"/>
+          <a:lstStyle/>
+          <a:p>
+            <a:pPr indent="0" marL="0">
+              <a:buNone/>
+            </a:pPr>
+            <a:r>
+              <a:rPr lang="en-US" sz="1400" b="1" dirty="0">
+                <a:solidFill>
+                  <a:srgbClr val="3B6B4A"/>
+                </a:solidFill>
+                <a:latin typeface="Yu Gothic" pitchFamily="34" charset="0"/>
+                <a:ea typeface="Yu Gothic" pitchFamily="34" charset="-122"/>
+                <a:cs typeface="Yu Gothic" pitchFamily="34" charset="-120"/>
+              </a:rPr>
+              <a:t>次に渡す相手</a:t>
+            </a:r>
+            <a:endParaRPr lang="en-US" sz="1400" dirty="0"/>
+          </a:p>
+        </p:txBody>
+      </p:sp>
+      <p:sp>
+        <p:nvSpPr>
+          <p:cNvPr id="8" name="Text 6"/>
+          <p:cNvSpPr txBox="1"/>
+          <p:nvPr/>
+        </p:nvSpPr>
+        <p:spPr>
+          <a:xfrm>
+            <a:off x="4006901" y="2176272"/>
+            <a:ext cx="7011619" cy="768096"/>
+          </a:xfrm>
+          <a:prstGeom prst="rect">
+            <a:avLst/>
+          </a:prstGeom>
+          <a:noFill/>
+          <a:ln/>
+        </p:spPr>
+        <p:txBody>
+          <a:bodyPr wrap="square" lIns="0" tIns="0" rIns="0" bIns="0" rtlCol="0" anchor="ctr"/>
+          <a:lstStyle/>
+          <a:p>
+            <a:pPr indent="0" marL="0">
+              <a:lnSpc>
+                <a:spcPct val="130000"/>
+              </a:lnSpc>
+              <a:buNone/>
+            </a:pPr>
+            <a:r>
+              <a:rPr lang="en-US" sz="1250" dirty="0">
+                <a:solidFill>
+                  <a:srgbClr val="3F3933"/>
+                </a:solidFill>
+                <a:latin typeface="Yu Gothic" pitchFamily="34" charset="0"/>
+                <a:ea typeface="Yu Gothic" pitchFamily="34" charset="-122"/>
+                <a:cs typeface="Yu Gothic" pitchFamily="34" charset="-120"/>
+              </a:rPr>
+              <a:t>0〜3か月で誰に広げるか。実名で決めます</a:t>
+            </a:r>
+            <a:endParaRPr lang="en-US" sz="1250" dirty="0"/>
+          </a:p>
+        </p:txBody>
+      </p:sp>
+      <p:sp>
+        <p:nvSpPr>
+          <p:cNvPr id="9" name="Shape 7"/>
+          <p:cNvSpPr/>
+          <p:nvPr/>
+        </p:nvSpPr>
+        <p:spPr>
+          <a:xfrm>
+            <a:off x="777240" y="3154680"/>
+            <a:ext cx="10607040" cy="914400"/>
+          </a:xfrm>
+          <a:prstGeom prst="rect">
+            <a:avLst/>
+          </a:prstGeom>
+          <a:solidFill>
+            <a:srgbClr val="FFFFFF"/>
+          </a:solidFill>
+          <a:ln w="12700">
+            <a:solidFill>
+              <a:srgbClr val="EDE7DB"/>
+            </a:solidFill>
+            <a:prstDash val="solid"/>
+          </a:ln>
+        </p:spPr>
+      </p:sp>
+      <p:sp>
+        <p:nvSpPr>
+          <p:cNvPr id="10" name="Shape 8"/>
+          <p:cNvSpPr/>
+          <p:nvPr/>
+        </p:nvSpPr>
+        <p:spPr>
+          <a:xfrm>
+            <a:off x="777240" y="3154680"/>
+            <a:ext cx="54864" cy="914400"/>
+          </a:xfrm>
+          <a:prstGeom prst="rect">
+            <a:avLst/>
+          </a:prstGeom>
+          <a:solidFill>
+            <a:srgbClr val="3B6B4A"/>
+          </a:solidFill>
+          <a:ln w="12700">
+            <a:solidFill>
+              <a:srgbClr val="333333"/>
+            </a:solidFill>
+            <a:prstDash val="solid"/>
+          </a:ln>
+        </p:spPr>
+      </p:sp>
+      <p:sp>
+        <p:nvSpPr>
+          <p:cNvPr id="11" name="Text 9"/>
+          <p:cNvSpPr txBox="1"/>
+          <p:nvPr/>
+        </p:nvSpPr>
+        <p:spPr>
+          <a:xfrm>
+            <a:off x="1143000" y="3227832"/>
+            <a:ext cx="2757830" cy="768096"/>
+          </a:xfrm>
+          <a:prstGeom prst="rect">
+            <a:avLst/>
+          </a:prstGeom>
+          <a:noFill/>
+          <a:ln/>
+        </p:spPr>
+        <p:txBody>
+          <a:bodyPr wrap="square" lIns="0" tIns="0" rIns="0" bIns="0" rtlCol="0" anchor="ctr"/>
+          <a:lstStyle/>
+          <a:p>
+            <a:pPr indent="0" marL="0">
+              <a:buNone/>
+            </a:pPr>
+            <a:r>
+              <a:rPr lang="en-US" sz="1400" b="1" dirty="0">
+                <a:solidFill>
+                  <a:srgbClr val="3B6B4A"/>
+                </a:solidFill>
+                <a:latin typeface="Yu Gothic" pitchFamily="34" charset="0"/>
+                <a:ea typeface="Yu Gothic" pitchFamily="34" charset="-122"/>
+                <a:cs typeface="Yu Gothic" pitchFamily="34" charset="-120"/>
+              </a:rPr>
+              <a:t>困ったときの相談先</a:t>
+            </a:r>
+            <a:endParaRPr lang="en-US" sz="1400" dirty="0"/>
+          </a:p>
+        </p:txBody>
+      </p:sp>
+      <p:sp>
+        <p:nvSpPr>
+          <p:cNvPr id="12" name="Text 10"/>
+          <p:cNvSpPr txBox="1"/>
+          <p:nvPr/>
+        </p:nvSpPr>
+        <p:spPr>
+          <a:xfrm>
+            <a:off x="4006901" y="3227832"/>
+            <a:ext cx="7011619" cy="768096"/>
+          </a:xfrm>
+          <a:prstGeom prst="rect">
+            <a:avLst/>
+          </a:prstGeom>
+          <a:noFill/>
+          <a:ln/>
+        </p:spPr>
+        <p:txBody>
+          <a:bodyPr wrap="square" lIns="0" tIns="0" rIns="0" bIns="0" rtlCol="0" anchor="ctr"/>
+          <a:lstStyle/>
+          <a:p>
+            <a:pPr indent="0" marL="0">
+              <a:lnSpc>
+                <a:spcPct val="130000"/>
+              </a:lnSpc>
+              <a:buNone/>
+            </a:pPr>
+            <a:r>
+              <a:rPr lang="en-US" sz="1250" dirty="0">
+                <a:solidFill>
+                  <a:srgbClr val="3F3933"/>
+                </a:solidFill>
+                <a:latin typeface="Yu Gothic" pitchFamily="34" charset="0"/>
+                <a:ea typeface="Yu Gothic" pitchFamily="34" charset="-122"/>
+                <a:cs typeface="Yu Gothic" pitchFamily="34" charset="-120"/>
+              </a:rPr>
+              <a:t>社内の誰に聞けばよいかを、社員に明示します</a:t>
+            </a:r>
+            <a:endParaRPr lang="en-US" sz="1250" dirty="0"/>
+          </a:p>
+        </p:txBody>
+      </p:sp>
+      <p:sp>
+        <p:nvSpPr>
+          <p:cNvPr id="13" name="Shape 11"/>
+          <p:cNvSpPr/>
+          <p:nvPr/>
+        </p:nvSpPr>
+        <p:spPr>
+          <a:xfrm>
+            <a:off x="777240" y="4206240"/>
+            <a:ext cx="10607040" cy="914400"/>
+          </a:xfrm>
+          <a:prstGeom prst="rect">
+            <a:avLst/>
+          </a:prstGeom>
+          <a:solidFill>
+            <a:srgbClr val="FFFFFF"/>
+          </a:solidFill>
+          <a:ln w="12700">
+            <a:solidFill>
+              <a:srgbClr val="EDE7DB"/>
+            </a:solidFill>
+            <a:prstDash val="solid"/>
+          </a:ln>
+        </p:spPr>
+      </p:sp>
+      <p:sp>
+        <p:nvSpPr>
+          <p:cNvPr id="14" name="Shape 12"/>
+          <p:cNvSpPr/>
+          <p:nvPr/>
+        </p:nvSpPr>
+        <p:spPr>
+          <a:xfrm>
+            <a:off x="777240" y="4206240"/>
+            <a:ext cx="54864" cy="914400"/>
+          </a:xfrm>
+          <a:prstGeom prst="rect">
+            <a:avLst/>
+          </a:prstGeom>
+          <a:solidFill>
+            <a:srgbClr val="3B6B4A"/>
+          </a:solidFill>
+          <a:ln w="12700">
+            <a:solidFill>
+              <a:srgbClr val="333333"/>
+            </a:solidFill>
+            <a:prstDash val="solid"/>
+          </a:ln>
+        </p:spPr>
+      </p:sp>
+      <p:sp>
+        <p:nvSpPr>
+          <p:cNvPr id="15" name="Text 13"/>
+          <p:cNvSpPr txBox="1"/>
+          <p:nvPr/>
+        </p:nvSpPr>
+        <p:spPr>
+          <a:xfrm>
+            <a:off x="1143000" y="4279392"/>
+            <a:ext cx="2757830" cy="768096"/>
+          </a:xfrm>
+          <a:prstGeom prst="rect">
+            <a:avLst/>
+          </a:prstGeom>
+          <a:noFill/>
+          <a:ln/>
+        </p:spPr>
+        <p:txBody>
+          <a:bodyPr wrap="square" lIns="0" tIns="0" rIns="0" bIns="0" rtlCol="0" anchor="ctr"/>
+          <a:lstStyle/>
+          <a:p>
+            <a:pPr indent="0" marL="0">
+              <a:buNone/>
+            </a:pPr>
+            <a:r>
+              <a:rPr lang="en-US" sz="1400" b="1" dirty="0">
+                <a:solidFill>
+                  <a:srgbClr val="3B6B4A"/>
+                </a:solidFill>
+                <a:latin typeface="Yu Gothic" pitchFamily="34" charset="0"/>
+                <a:ea typeface="Yu Gothic" pitchFamily="34" charset="-122"/>
+                <a:cs typeface="Yu Gothic" pitchFamily="34" charset="-120"/>
+              </a:rPr>
+              <a:t>次に集まる日</a:t>
+            </a:r>
+            <a:endParaRPr lang="en-US" sz="1400" dirty="0"/>
+          </a:p>
+        </p:txBody>
+      </p:sp>
+      <p:sp>
+        <p:nvSpPr>
+          <p:cNvPr id="16" name="Text 14"/>
+          <p:cNvSpPr txBox="1"/>
+          <p:nvPr/>
+        </p:nvSpPr>
+        <p:spPr>
+          <a:xfrm>
+            <a:off x="4006901" y="4279392"/>
+            <a:ext cx="7011619" cy="768096"/>
+          </a:xfrm>
+          <a:prstGeom prst="rect">
+            <a:avLst/>
+          </a:prstGeom>
+          <a:noFill/>
+          <a:ln/>
+        </p:spPr>
+        <p:txBody>
+          <a:bodyPr wrap="square" lIns="0" tIns="0" rIns="0" bIns="0" rtlCol="0" anchor="ctr"/>
+          <a:lstStyle/>
+          <a:p>
+            <a:pPr indent="0" marL="0">
+              <a:lnSpc>
+                <a:spcPct val="130000"/>
+              </a:lnSpc>
+              <a:buNone/>
+            </a:pPr>
+            <a:r>
+              <a:rPr lang="en-US" sz="1250" dirty="0">
+                <a:solidFill>
+                  <a:srgbClr val="3F3933"/>
+                </a:solidFill>
+                <a:latin typeface="Yu Gothic" pitchFamily="34" charset="0"/>
+                <a:ea typeface="Yu Gothic" pitchFamily="34" charset="-122"/>
+                <a:cs typeface="Yu Gothic" pitchFamily="34" charset="-120"/>
+              </a:rPr>
+              <a:t>第12回の社内お披露目の日程を、いまこの場で押さえます</a:t>
+            </a:r>
+            <a:endParaRPr lang="en-US" sz="1250" dirty="0"/>
+          </a:p>
+        </p:txBody>
+      </p:sp>
+      <p:sp>
+        <p:nvSpPr>
+          <p:cNvPr id="17" name="Text 15"/>
+          <p:cNvSpPr txBox="1"/>
+          <p:nvPr/>
+        </p:nvSpPr>
+        <p:spPr>
+          <a:xfrm>
+            <a:off x="777240" y="6382512"/>
+            <a:ext cx="7424928" cy="256032"/>
+          </a:xfrm>
+          <a:prstGeom prst="rect">
+            <a:avLst/>
+          </a:prstGeom>
+          <a:noFill/>
+          <a:ln/>
+        </p:spPr>
+        <p:txBody>
+          <a:bodyPr wrap="square" lIns="0" tIns="0" rIns="0" bIns="0" rtlCol="0" anchor="ctr"/>
+          <a:lstStyle/>
+          <a:p>
+            <a:pPr indent="0" marL="0">
+              <a:buNone/>
+            </a:pPr>
+            <a:r>
+              <a:rPr lang="en-US" sz="900" dirty="0">
+                <a:solidFill>
+                  <a:srgbClr val="8A8177"/>
+                </a:solidFill>
+                <a:latin typeface="Yu Gothic" pitchFamily="34" charset="0"/>
+                <a:ea typeface="Yu Gothic" pitchFamily="34" charset="-122"/>
+                <a:cs typeface="Yu Gothic" pitchFamily="34" charset="-120"/>
+              </a:rPr>
+              <a:t>第6回　社内へのお披露目と12か月計画</a:t>
+            </a:r>
+            <a:endParaRPr lang="en-US" sz="900" dirty="0"/>
+          </a:p>
+        </p:txBody>
+      </p:sp>
+      <p:sp>
+        <p:nvSpPr>
+          <p:cNvPr id="18" name="Text 16"/>
+          <p:cNvSpPr txBox="1"/>
+          <p:nvPr/>
+        </p:nvSpPr>
+        <p:spPr>
+          <a:xfrm>
+            <a:off x="8202168" y="6382512"/>
+            <a:ext cx="3182112" cy="256032"/>
+          </a:xfrm>
+          <a:prstGeom prst="rect">
+            <a:avLst/>
+          </a:prstGeom>
+          <a:noFill/>
+          <a:ln/>
+        </p:spPr>
+        <p:txBody>
+          <a:bodyPr wrap="square" lIns="0" tIns="0" rIns="0" bIns="0" rtlCol="0" anchor="ctr"/>
+          <a:lstStyle/>
+          <a:p>
+            <a:pPr algn="r" indent="0" marL="0">
+              <a:buNone/>
+            </a:pPr>
+            <a:r>
+              <a:rPr lang="en-US" sz="900" dirty="0">
+                <a:solidFill>
+                  <a:srgbClr val="8A8177"/>
+                </a:solidFill>
+                <a:latin typeface="Yu Gothic" pitchFamily="34" charset="0"/>
+                <a:ea typeface="Yu Gothic" pitchFamily="34" charset="-122"/>
+                <a:cs typeface="Yu Gothic" pitchFamily="34" charset="-120"/>
+              </a:rPr>
+              <a:t>組み込み</a:t>
+            </a:r>
+            <a:endParaRPr lang="en-US" sz="900" dirty="0"/>
+          </a:p>
+        </p:txBody>
+      </p:sp>
+    </p:spTree>
+  </p:cSld>
+  <p:clrMapOvr>
+    <a:masterClrMapping/>
+  </p:clrMapOvr>
+</p:sld>
+</file>
+
+<file path=ppt/slides/slide13.xml><?xml version="1.0" encoding="utf-8"?>
+<p:sld xmlns:a="http://schemas.openxmlformats.org/drawingml/2006/main" xmlns:r="http://schemas.openxmlformats.org/officeDocument/2006/relationships" xmlns:p="http://schemas.openxmlformats.org/presentationml/2006/main">
+  <p:cSld name="Slide 13">
+    <p:bg>
+      <p:bgPr>
+        <a:solidFill>
+          <a:srgbClr val="F6F2EA"/>
+        </a:solidFill>
+      </p:bgPr>
+    </p:bg>
+    <p:spTree>
+      <p:nvGrpSpPr>
+        <p:cNvPr id="1" name=""/>
+        <p:cNvGrpSpPr/>
+        <p:nvPr/>
+      </p:nvGrpSpPr>
+      <p:grpSpPr>
+        <a:xfrm>
+          <a:off x="0" y="0"/>
+          <a:ext cx="0" cy="0"/>
+          <a:chOff x="0" y="0"/>
+          <a:chExt cx="0" cy="0"/>
+        </a:xfrm>
+      </p:grpSpPr>
+      <p:sp>
+        <p:nvSpPr>
+          <p:cNvPr id="2" name="Text 0"/>
+          <p:cNvSpPr txBox="1"/>
+          <p:nvPr/>
+        </p:nvSpPr>
+        <p:spPr>
+          <a:xfrm>
+            <a:off x="777240" y="566928"/>
+            <a:ext cx="10607040" cy="274320"/>
+          </a:xfrm>
+          <a:prstGeom prst="rect">
+            <a:avLst/>
+          </a:prstGeom>
+          <a:noFill/>
+          <a:ln/>
+        </p:spPr>
+        <p:txBody>
+          <a:bodyPr wrap="square" lIns="0" tIns="0" rIns="0" bIns="0" rtlCol="0" anchor="ctr"/>
+          <a:lstStyle/>
+          <a:p>
+            <a:pPr indent="0" marL="0">
+              <a:buNone/>
+            </a:pPr>
+            <a:r>
+              <a:rPr lang="en-US" sz="1100" b="1" spc="250" kern="0" dirty="0">
+                <a:solidFill>
+                  <a:srgbClr val="B04A2F"/>
+                </a:solidFill>
+                <a:latin typeface="Yu Gothic" pitchFamily="34" charset="0"/>
+                <a:ea typeface="Yu Gothic" pitchFamily="34" charset="-122"/>
+                <a:cs typeface="Yu Gothic" pitchFamily="34" charset="-120"/>
+              </a:rPr>
+              <a:t>ここだけは</a:t>
+            </a:r>
+            <a:endParaRPr lang="en-US" sz="1100" dirty="0"/>
+          </a:p>
+        </p:txBody>
+      </p:sp>
+      <p:sp>
+        <p:nvSpPr>
+          <p:cNvPr id="3" name="Text 1"/>
+          <p:cNvSpPr txBox="1"/>
+          <p:nvPr/>
+        </p:nvSpPr>
+        <p:spPr>
+          <a:xfrm>
+            <a:off x="777240" y="1097280"/>
+            <a:ext cx="10607040" cy="640080"/>
+          </a:xfrm>
+          <a:prstGeom prst="rect">
+            <a:avLst/>
+          </a:prstGeom>
+          <a:noFill/>
+          <a:ln/>
+        </p:spPr>
+        <p:txBody>
+          <a:bodyPr wrap="square" lIns="0" tIns="0" rIns="0" bIns="0" rtlCol="0" anchor="ctr"/>
+          <a:lstStyle/>
+          <a:p>
+            <a:pPr indent="0" marL="0">
+              <a:buNone/>
+            </a:pPr>
+            <a:r>
+              <a:rPr lang="en-US" sz="2600" b="1" dirty="0">
+                <a:solidFill>
+                  <a:srgbClr val="23201D"/>
+                </a:solidFill>
+                <a:latin typeface="Yu Gothic" pitchFamily="34" charset="0"/>
+                <a:ea typeface="Yu Gothic" pitchFamily="34" charset="-122"/>
+                <a:cs typeface="Yu Gothic" pitchFamily="34" charset="-120"/>
+              </a:rPr>
+              <a:t>「人が減らされるのか」に、講師が答えてはいけません</a:t>
+            </a:r>
+            <a:endParaRPr lang="en-US" sz="2600" dirty="0"/>
+          </a:p>
+        </p:txBody>
+      </p:sp>
+      <p:sp>
+        <p:nvSpPr>
+          <p:cNvPr id="4" name="Shape 2"/>
+          <p:cNvSpPr/>
+          <p:nvPr/>
+        </p:nvSpPr>
+        <p:spPr>
+          <a:xfrm>
+            <a:off x="777240" y="2148840"/>
+            <a:ext cx="64008" cy="2194560"/>
+          </a:xfrm>
+          <a:prstGeom prst="rect">
+            <a:avLst/>
+          </a:prstGeom>
+          <a:solidFill>
+            <a:srgbClr val="B04A2F"/>
+          </a:solidFill>
+          <a:ln w="12700">
+            <a:solidFill>
+              <a:srgbClr val="333333"/>
+            </a:solidFill>
+            <a:prstDash val="solid"/>
+          </a:ln>
+        </p:spPr>
+      </p:sp>
+      <p:sp>
+        <p:nvSpPr>
+          <p:cNvPr id="5" name="Text 3"/>
+          <p:cNvSpPr txBox="1"/>
+          <p:nvPr/>
+        </p:nvSpPr>
+        <p:spPr>
+          <a:xfrm>
+            <a:off x="1188720" y="2148840"/>
+            <a:ext cx="9966960" cy="2194560"/>
+          </a:xfrm>
+          <a:prstGeom prst="rect">
+            <a:avLst/>
+          </a:prstGeom>
+          <a:noFill/>
+          <a:ln/>
+        </p:spPr>
+        <p:txBody>
+          <a:bodyPr wrap="square" lIns="0" tIns="0" rIns="0" bIns="0" rtlCol="0" anchor="ctr"/>
+          <a:lstStyle/>
+          <a:p>
+            <a:pPr indent="0" marL="0">
+              <a:lnSpc>
+                <a:spcPct val="160000"/>
+              </a:lnSpc>
+              <a:buNone/>
+            </a:pPr>
+            <a:r>
+              <a:rPr lang="en-US" sz="1650" dirty="0">
+                <a:solidFill>
+                  <a:srgbClr val="3F3933"/>
+                </a:solidFill>
+                <a:latin typeface="Yu Gothic" pitchFamily="34" charset="0"/>
+                <a:ea typeface="Yu Gothic" pitchFamily="34" charset="-122"/>
+                <a:cs typeface="Yu Gothic" pitchFamily="34" charset="-120"/>
+              </a:rPr>
+              <a:t>この質問は必ず出ます。そして、社長ご自身が答えたかどうかを社員は見ています。講師が代わりに答えると、それは外部の人の言い分になり、誰も信じません。事前の壁打ちで、この質問への答えを必ず準備しておいてください。</a:t>
+            </a:r>
+            <a:endParaRPr lang="en-US" sz="1650" dirty="0"/>
+          </a:p>
+        </p:txBody>
+      </p:sp>
+      <p:sp>
+        <p:nvSpPr>
+          <p:cNvPr id="6" name="Shape 4"/>
+          <p:cNvSpPr/>
+          <p:nvPr/>
+        </p:nvSpPr>
+        <p:spPr>
+          <a:xfrm>
+            <a:off x="777240" y="4709160"/>
+            <a:ext cx="10607040" cy="960120"/>
+          </a:xfrm>
+          <a:prstGeom prst="rect">
+            <a:avLst/>
+          </a:prstGeom>
+          <a:solidFill>
+            <a:srgbClr val="EDE7DB"/>
+          </a:solidFill>
+          <a:ln w="12700">
+            <a:solidFill>
+              <a:srgbClr val="333333"/>
+            </a:solidFill>
+            <a:prstDash val="solid"/>
+          </a:ln>
+        </p:spPr>
+      </p:sp>
+      <p:sp>
+        <p:nvSpPr>
+          <p:cNvPr id="7" name="Text 5"/>
+          <p:cNvSpPr txBox="1"/>
+          <p:nvPr/>
+        </p:nvSpPr>
+        <p:spPr>
+          <a:xfrm>
+            <a:off x="1051560" y="4800600"/>
+            <a:ext cx="1463040" cy="256032"/>
+          </a:xfrm>
+          <a:prstGeom prst="rect">
+            <a:avLst/>
+          </a:prstGeom>
+          <a:noFill/>
+          <a:ln/>
+        </p:spPr>
+        <p:txBody>
+          <a:bodyPr wrap="square" lIns="0" tIns="0" rIns="0" bIns="0" rtlCol="0" anchor="ctr"/>
+          <a:lstStyle/>
+          <a:p>
+            <a:pPr indent="0" marL="0">
+              <a:buNone/>
+            </a:pPr>
+            <a:r>
+              <a:rPr lang="en-US" sz="900" b="1" spc="150" kern="0" dirty="0">
+                <a:solidFill>
+                  <a:srgbClr val="B04A2F"/>
+                </a:solidFill>
+                <a:latin typeface="Yu Gothic" pitchFamily="34" charset="0"/>
+                <a:ea typeface="Yu Gothic" pitchFamily="34" charset="-122"/>
+                <a:cs typeface="Yu Gothic" pitchFamily="34" charset="-120"/>
+              </a:rPr>
+              <a:t>他社では</a:t>
+            </a:r>
+            <a:endParaRPr lang="en-US" sz="900" dirty="0"/>
+          </a:p>
+        </p:txBody>
+      </p:sp>
+      <p:sp>
+        <p:nvSpPr>
+          <p:cNvPr id="8" name="Text 6"/>
+          <p:cNvSpPr txBox="1"/>
+          <p:nvPr/>
+        </p:nvSpPr>
+        <p:spPr>
+          <a:xfrm>
+            <a:off x="1051560" y="5029200"/>
+            <a:ext cx="10058400" cy="566928"/>
+          </a:xfrm>
+          <a:prstGeom prst="rect">
+            <a:avLst/>
+          </a:prstGeom>
+          <a:noFill/>
+          <a:ln/>
+        </p:spPr>
+        <p:txBody>
+          <a:bodyPr wrap="square" lIns="0" tIns="0" rIns="0" bIns="0" rtlCol="0" anchor="ctr"/>
+          <a:lstStyle/>
+          <a:p>
+            <a:pPr indent="0" marL="0">
+              <a:lnSpc>
+                <a:spcPct val="130000"/>
+              </a:lnSpc>
+              <a:buNone/>
+            </a:pPr>
+            <a:r>
+              <a:rPr lang="en-US" sz="1250" dirty="0">
+                <a:solidFill>
+                  <a:srgbClr val="3F3933"/>
+                </a:solidFill>
+                <a:latin typeface="Yu Gothic" pitchFamily="34" charset="0"/>
+                <a:ea typeface="Yu Gothic" pitchFamily="34" charset="-122"/>
+                <a:cs typeface="Yu Gothic" pitchFamily="34" charset="-120"/>
+              </a:rPr>
+              <a:t>お披露目で最も強く反対した社員を、後に推進担当にした会社があります。反対の理由がいちばん具体的だったため、設計が現実的になりました。</a:t>
+            </a:r>
+            <a:endParaRPr lang="en-US" sz="1250" dirty="0"/>
+          </a:p>
+        </p:txBody>
+      </p:sp>
+      <p:sp>
+        <p:nvSpPr>
+          <p:cNvPr id="9" name="Text 7"/>
+          <p:cNvSpPr txBox="1"/>
+          <p:nvPr/>
+        </p:nvSpPr>
+        <p:spPr>
+          <a:xfrm>
+            <a:off x="777240" y="6382512"/>
+            <a:ext cx="7424928" cy="256032"/>
+          </a:xfrm>
+          <a:prstGeom prst="rect">
+            <a:avLst/>
+          </a:prstGeom>
+          <a:noFill/>
+          <a:ln/>
+        </p:spPr>
+        <p:txBody>
+          <a:bodyPr wrap="square" lIns="0" tIns="0" rIns="0" bIns="0" rtlCol="0" anchor="ctr"/>
+          <a:lstStyle/>
+          <a:p>
+            <a:pPr indent="0" marL="0">
+              <a:buNone/>
+            </a:pPr>
+            <a:r>
+              <a:rPr lang="en-US" sz="900" dirty="0">
+                <a:solidFill>
+                  <a:srgbClr val="8A8177"/>
+                </a:solidFill>
+                <a:latin typeface="Yu Gothic" pitchFamily="34" charset="0"/>
+                <a:ea typeface="Yu Gothic" pitchFamily="34" charset="-122"/>
+                <a:cs typeface="Yu Gothic" pitchFamily="34" charset="-120"/>
+              </a:rPr>
+              <a:t>第6回　社内へのお披露目と12か月計画</a:t>
+            </a:r>
+            <a:endParaRPr lang="en-US" sz="900" dirty="0"/>
+          </a:p>
+        </p:txBody>
+      </p:sp>
+      <p:sp>
+        <p:nvSpPr>
+          <p:cNvPr id="10" name="Text 8"/>
+          <p:cNvSpPr txBox="1"/>
+          <p:nvPr/>
+        </p:nvSpPr>
+        <p:spPr>
+          <a:xfrm>
+            <a:off x="8202168" y="6382512"/>
+            <a:ext cx="3182112" cy="256032"/>
+          </a:xfrm>
+          <a:prstGeom prst="rect">
+            <a:avLst/>
+          </a:prstGeom>
+          <a:noFill/>
+          <a:ln/>
+        </p:spPr>
+        <p:txBody>
+          <a:bodyPr wrap="square" lIns="0" tIns="0" rIns="0" bIns="0" rtlCol="0" anchor="ctr"/>
+          <a:lstStyle/>
+          <a:p>
+            <a:pPr algn="r" indent="0" marL="0">
+              <a:buNone/>
+            </a:pPr>
+            <a:r>
+              <a:rPr lang="en-US" sz="900" dirty="0">
+                <a:solidFill>
+                  <a:srgbClr val="8A8177"/>
+                </a:solidFill>
+                <a:latin typeface="Yu Gothic" pitchFamily="34" charset="0"/>
+                <a:ea typeface="Yu Gothic" pitchFamily="34" charset="-122"/>
+                <a:cs typeface="Yu Gothic" pitchFamily="34" charset="-120"/>
+              </a:rPr>
+              <a:t>ここだけは</a:t>
+            </a:r>
+            <a:endParaRPr lang="en-US" sz="900" dirty="0"/>
+          </a:p>
+        </p:txBody>
+      </p:sp>
+    </p:spTree>
+  </p:cSld>
+  <p:clrMapOvr>
+    <a:masterClrMapping/>
+  </p:clrMapOvr>
+</p:sld>
+</file>
+
+<file path=ppt/slides/slide14.xml><?xml version="1.0" encoding="utf-8"?>
+<p:sld xmlns:a="http://schemas.openxmlformats.org/drawingml/2006/main" xmlns:r="http://schemas.openxmlformats.org/officeDocument/2006/relationships" xmlns:p="http://schemas.openxmlformats.org/presentationml/2006/main">
+  <p:cSld name="Slide 14">
+    <p:bg>
+      <p:bgPr>
+        <a:solidFill>
+          <a:srgbClr val="F6F2EA"/>
+        </a:solidFill>
+      </p:bgPr>
+    </p:bg>
+    <p:spTree>
+      <p:nvGrpSpPr>
+        <p:cNvPr id="1" name=""/>
+        <p:cNvGrpSpPr/>
+        <p:nvPr/>
+      </p:nvGrpSpPr>
+      <p:grpSpPr>
+        <a:xfrm>
+          <a:off x="0" y="0"/>
+          <a:ext cx="0" cy="0"/>
+          <a:chOff x="0" y="0"/>
+          <a:chExt cx="0" cy="0"/>
+        </a:xfrm>
+      </p:grpSpPr>
+      <p:sp>
+        <p:nvSpPr>
+          <p:cNvPr id="2" name="Text 0"/>
+          <p:cNvSpPr txBox="1"/>
+          <p:nvPr/>
+        </p:nvSpPr>
+        <p:spPr>
+          <a:xfrm>
+            <a:off x="777240" y="566928"/>
+            <a:ext cx="10607040" cy="274320"/>
+          </a:xfrm>
+          <a:prstGeom prst="rect">
+            <a:avLst/>
+          </a:prstGeom>
+          <a:noFill/>
+          <a:ln/>
+        </p:spPr>
+        <p:txBody>
+          <a:bodyPr wrap="square" lIns="0" tIns="0" rIns="0" bIns="0" rtlCol="0" anchor="ctr"/>
+          <a:lstStyle/>
+          <a:p>
+            <a:pPr indent="0" marL="0">
+              <a:buNone/>
+            </a:pPr>
+            <a:r>
+              <a:rPr lang="en-US" sz="1100" b="1" spc="250" kern="0" dirty="0">
+                <a:solidFill>
+                  <a:srgbClr val="3B6B4A"/>
+                </a:solidFill>
+                <a:latin typeface="Yu Gothic" pitchFamily="34" charset="0"/>
+                <a:ea typeface="Yu Gothic" pitchFamily="34" charset="-122"/>
+                <a:cs typeface="Yu Gothic" pitchFamily="34" charset="-120"/>
+              </a:rPr>
+              <a:t>次回まで</a:t>
+            </a:r>
+            <a:endParaRPr lang="en-US" sz="1100" dirty="0"/>
+          </a:p>
+        </p:txBody>
+      </p:sp>
+      <p:sp>
+        <p:nvSpPr>
+          <p:cNvPr id="3" name="Text 1"/>
+          <p:cNvSpPr txBox="1"/>
+          <p:nvPr/>
+        </p:nvSpPr>
+        <p:spPr>
+          <a:xfrm>
+            <a:off x="777240" y="896112"/>
+            <a:ext cx="10607040" cy="640080"/>
+          </a:xfrm>
+          <a:prstGeom prst="rect">
+            <a:avLst/>
+          </a:prstGeom>
+          <a:noFill/>
+          <a:ln/>
+        </p:spPr>
+        <p:txBody>
+          <a:bodyPr wrap="square" lIns="0" tIns="0" rIns="0" bIns="0" rtlCol="0" anchor="ctr"/>
+          <a:lstStyle/>
+          <a:p>
+            <a:pPr indent="0" marL="0">
+              <a:buNone/>
+            </a:pPr>
+            <a:r>
+              <a:rPr lang="en-US" sz="2600" b="1" dirty="0">
+                <a:solidFill>
+                  <a:srgbClr val="23201D"/>
+                </a:solidFill>
+                <a:latin typeface="Yu Gothic" pitchFamily="34" charset="0"/>
+                <a:ea typeface="Yu Gothic" pitchFamily="34" charset="-122"/>
+                <a:cs typeface="Yu Gothic" pitchFamily="34" charset="-120"/>
+              </a:rPr>
+              <a:t>次回は「手作業のつなぎ目をなくす（上級編）」</a:t>
+            </a:r>
+            <a:endParaRPr lang="en-US" sz="2600" dirty="0"/>
+          </a:p>
+        </p:txBody>
+      </p:sp>
+      <p:sp>
+        <p:nvSpPr>
+          <p:cNvPr id="4" name="Text 2"/>
+          <p:cNvSpPr txBox="1"/>
+          <p:nvPr/>
+        </p:nvSpPr>
+        <p:spPr>
+          <a:xfrm>
+            <a:off x="777240" y="1572768"/>
+            <a:ext cx="9546336" cy="457200"/>
+          </a:xfrm>
+          <a:prstGeom prst="rect">
+            <a:avLst/>
+          </a:prstGeom>
+          <a:noFill/>
+          <a:ln/>
+        </p:spPr>
+        <p:txBody>
+          <a:bodyPr wrap="square" lIns="0" tIns="0" rIns="0" bIns="0" rtlCol="0" anchor="ctr"/>
+          <a:lstStyle/>
+          <a:p>
+            <a:pPr indent="0" marL="0">
+              <a:buNone/>
+            </a:pPr>
+            <a:r>
+              <a:rPr lang="en-US" sz="1400" b="1" dirty="0">
+                <a:solidFill>
+                  <a:srgbClr val="3B6B4A"/>
+                </a:solidFill>
+                <a:latin typeface="Yu Gothic" pitchFamily="34" charset="0"/>
+                <a:ea typeface="Yu Gothic" pitchFamily="34" charset="-122"/>
+                <a:cs typeface="Yu Gothic" pitchFamily="34" charset="-120"/>
+              </a:rPr>
+              <a:t>上級編に進みます。人が手で運んでいる部分を、自動で流れるようにします。</a:t>
+            </a:r>
+            <a:endParaRPr lang="en-US" sz="1400" dirty="0"/>
+          </a:p>
+        </p:txBody>
+      </p:sp>
+      <p:sp>
+        <p:nvSpPr>
+          <p:cNvPr id="5" name="Shape 3"/>
+          <p:cNvSpPr/>
+          <p:nvPr/>
+        </p:nvSpPr>
+        <p:spPr>
+          <a:xfrm>
+            <a:off x="777240" y="2240280"/>
+            <a:ext cx="4985309" cy="2286000"/>
+          </a:xfrm>
+          <a:prstGeom prst="rect">
+            <a:avLst/>
+          </a:prstGeom>
+          <a:solidFill>
+            <a:srgbClr val="FFFFFF"/>
+          </a:solidFill>
+          <a:ln w="12700">
+            <a:solidFill>
+              <a:srgbClr val="EDE7DB"/>
+            </a:solidFill>
+            <a:prstDash val="solid"/>
+          </a:ln>
+        </p:spPr>
+      </p:sp>
+      <p:sp>
+        <p:nvSpPr>
+          <p:cNvPr id="6" name="Text 4"/>
+          <p:cNvSpPr txBox="1"/>
+          <p:nvPr/>
+        </p:nvSpPr>
+        <p:spPr>
+          <a:xfrm>
+            <a:off x="1051560" y="2377440"/>
+            <a:ext cx="4242816" cy="274320"/>
+          </a:xfrm>
+          <a:prstGeom prst="rect">
+            <a:avLst/>
+          </a:prstGeom>
+          <a:noFill/>
+          <a:ln/>
+        </p:spPr>
+        <p:txBody>
+          <a:bodyPr wrap="square" lIns="0" tIns="0" rIns="0" bIns="0" rtlCol="0" anchor="ctr"/>
+          <a:lstStyle/>
+          <a:p>
+            <a:pPr indent="0" marL="0">
+              <a:buNone/>
+            </a:pPr>
+            <a:r>
+              <a:rPr lang="en-US" sz="1000" b="1" spc="150" kern="0" dirty="0">
+                <a:solidFill>
+                  <a:srgbClr val="B04A2F"/>
+                </a:solidFill>
+                <a:latin typeface="Yu Gothic" pitchFamily="34" charset="0"/>
+                <a:ea typeface="Yu Gothic" pitchFamily="34" charset="-122"/>
+                <a:cs typeface="Yu Gothic" pitchFamily="34" charset="-120"/>
+              </a:rPr>
+              <a:t>次回までにやること</a:t>
+            </a:r>
+            <a:endParaRPr lang="en-US" sz="1000" dirty="0"/>
+          </a:p>
+        </p:txBody>
+      </p:sp>
+      <p:sp>
+        <p:nvSpPr>
+          <p:cNvPr id="7" name="Text 5"/>
+          <p:cNvSpPr txBox="1"/>
+          <p:nvPr/>
+        </p:nvSpPr>
+        <p:spPr>
+          <a:xfrm>
+            <a:off x="1051560" y="2743200"/>
+            <a:ext cx="4436669" cy="1554480"/>
+          </a:xfrm>
+          <a:prstGeom prst="rect">
+            <a:avLst/>
+          </a:prstGeom>
+          <a:noFill/>
+          <a:ln/>
+        </p:spPr>
+        <p:txBody>
+          <a:bodyPr wrap="square" lIns="0" tIns="0" rIns="0" bIns="0" rtlCol="0" anchor="ctr"/>
+          <a:lstStyle/>
+          <a:p>
+            <a:pPr indent="0" marL="0">
+              <a:lnSpc>
+                <a:spcPct val="140000"/>
+              </a:lnSpc>
+              <a:buNone/>
+            </a:pPr>
+            <a:r>
+              <a:rPr lang="en-US" sz="1400" dirty="0">
+                <a:solidFill>
+                  <a:srgbClr val="23201D"/>
+                </a:solidFill>
+                <a:latin typeface="Yu Gothic" pitchFamily="34" charset="0"/>
+                <a:ea typeface="Yu Gothic" pitchFamily="34" charset="-122"/>
+                <a:cs typeface="Yu Gothic" pitchFamily="34" charset="-120"/>
+              </a:rPr>
+              <a:t>12か月ロードマップの0〜3か月を、1つだけ着手する</a:t>
+            </a:r>
+            <a:endParaRPr lang="en-US" sz="1400" dirty="0"/>
+          </a:p>
+        </p:txBody>
+      </p:sp>
+      <p:sp>
+        <p:nvSpPr>
+          <p:cNvPr id="8" name="Shape 6"/>
+          <p:cNvSpPr/>
+          <p:nvPr/>
+        </p:nvSpPr>
+        <p:spPr>
+          <a:xfrm>
+            <a:off x="6398971" y="2240280"/>
+            <a:ext cx="4985309" cy="2286000"/>
+          </a:xfrm>
+          <a:prstGeom prst="rect">
+            <a:avLst/>
+          </a:prstGeom>
+          <a:solidFill>
+            <a:srgbClr val="FFFFFF"/>
+          </a:solidFill>
+          <a:ln w="12700">
+            <a:solidFill>
+              <a:srgbClr val="EDE7DB"/>
+            </a:solidFill>
+            <a:prstDash val="solid"/>
+          </a:ln>
+        </p:spPr>
+      </p:sp>
+      <p:sp>
+        <p:nvSpPr>
+          <p:cNvPr id="9" name="Text 7"/>
+          <p:cNvSpPr txBox="1"/>
+          <p:nvPr/>
+        </p:nvSpPr>
+        <p:spPr>
+          <a:xfrm>
+            <a:off x="6673291" y="2377440"/>
+            <a:ext cx="4242816" cy="274320"/>
+          </a:xfrm>
+          <a:prstGeom prst="rect">
+            <a:avLst/>
+          </a:prstGeom>
+          <a:noFill/>
+          <a:ln/>
+        </p:spPr>
+        <p:txBody>
+          <a:bodyPr wrap="square" lIns="0" tIns="0" rIns="0" bIns="0" rtlCol="0" anchor="ctr"/>
+          <a:lstStyle/>
+          <a:p>
+            <a:pPr indent="0" marL="0">
+              <a:buNone/>
+            </a:pPr>
+            <a:r>
+              <a:rPr lang="en-US" sz="1000" b="1" spc="150" kern="0" dirty="0">
+                <a:solidFill>
+                  <a:srgbClr val="3B6B4A"/>
+                </a:solidFill>
+                <a:latin typeface="Yu Gothic" pitchFamily="34" charset="0"/>
+                <a:ea typeface="Yu Gothic" pitchFamily="34" charset="-122"/>
+                <a:cs typeface="Yu Gothic" pitchFamily="34" charset="-120"/>
+              </a:rPr>
+              <a:t>次回の持ち物</a:t>
+            </a:r>
+            <a:endParaRPr lang="en-US" sz="1000" dirty="0"/>
+          </a:p>
+        </p:txBody>
+      </p:sp>
+      <p:sp>
+        <p:nvSpPr>
+          <p:cNvPr id="10" name="Text 8"/>
+          <p:cNvSpPr txBox="1"/>
+          <p:nvPr/>
+        </p:nvSpPr>
+        <p:spPr>
+          <a:xfrm>
+            <a:off x="6673291" y="2743200"/>
+            <a:ext cx="4436669" cy="694944"/>
+          </a:xfrm>
+          <a:prstGeom prst="rect">
+            <a:avLst/>
+          </a:prstGeom>
+          <a:noFill/>
+          <a:ln/>
+        </p:spPr>
+        <p:txBody>
+          <a:bodyPr wrap="square" lIns="0" tIns="0" rIns="0" bIns="0" rtlCol="0" anchor="ctr"/>
+          <a:lstStyle/>
+          <a:p>
+            <a:pPr indent="0" marL="0">
+              <a:lnSpc>
+                <a:spcPct val="130000"/>
+              </a:lnSpc>
+              <a:buNone/>
+            </a:pPr>
+            <a:r>
+              <a:rPr lang="en-US" sz="1250" dirty="0">
+                <a:solidFill>
+                  <a:srgbClr val="23201D"/>
+                </a:solidFill>
+                <a:latin typeface="Yu Gothic" pitchFamily="34" charset="0"/>
+                <a:ea typeface="Yu Gothic" pitchFamily="34" charset="-122"/>
+                <a:cs typeface="Yu Gothic" pitchFamily="34" charset="-120"/>
+              </a:rPr>
+              <a:t>・社内のメール・ファイル共有の管理担当がどなたかを確認してくる</a:t>
+            </a:r>
+            <a:endParaRPr lang="en-US" sz="1250" dirty="0"/>
+          </a:p>
+        </p:txBody>
+      </p:sp>
+      <p:sp>
+        <p:nvSpPr>
+          <p:cNvPr id="11" name="Shape 9"/>
+          <p:cNvSpPr/>
+          <p:nvPr/>
+        </p:nvSpPr>
+        <p:spPr>
+          <a:xfrm>
+            <a:off x="777240" y="4800600"/>
+            <a:ext cx="10607040" cy="777240"/>
+          </a:xfrm>
+          <a:prstGeom prst="rect">
+            <a:avLst/>
+          </a:prstGeom>
+          <a:solidFill>
+            <a:srgbClr val="EDE7DB"/>
+          </a:solidFill>
+          <a:ln w="12700">
+            <a:solidFill>
+              <a:srgbClr val="333333"/>
+            </a:solidFill>
+            <a:prstDash val="solid"/>
+          </a:ln>
+        </p:spPr>
+      </p:sp>
+      <p:sp>
+        <p:nvSpPr>
+          <p:cNvPr id="12" name="Text 10"/>
+          <p:cNvSpPr txBox="1"/>
+          <p:nvPr/>
+        </p:nvSpPr>
+        <p:spPr>
+          <a:xfrm>
+            <a:off x="1097280" y="4800600"/>
+            <a:ext cx="9966960" cy="777240"/>
+          </a:xfrm>
+          <a:prstGeom prst="rect">
+            <a:avLst/>
+          </a:prstGeom>
+          <a:noFill/>
+          <a:ln/>
+        </p:spPr>
+        <p:txBody>
+          <a:bodyPr wrap="square" lIns="0" tIns="0" rIns="0" bIns="0" rtlCol="0" anchor="ctr"/>
+          <a:lstStyle/>
+          <a:p>
+            <a:pPr indent="0" marL="0">
+              <a:buNone/>
+            </a:pPr>
+            <a:r>
+              <a:rPr lang="en-US" sz="1250" dirty="0">
+                <a:solidFill>
+                  <a:srgbClr val="5A534A"/>
+                </a:solidFill>
+                <a:latin typeface="Yu Gothic" pitchFamily="34" charset="0"/>
+                <a:ea typeface="Yu Gothic" pitchFamily="34" charset="-122"/>
+                <a:cs typeface="Yu Gothic" pitchFamily="34" charset="-120"/>
+              </a:rPr>
+              <a:t>この内容は、次回の3日前にあらためてお送りします。</a:t>
+            </a:r>
+            <a:endParaRPr lang="en-US" sz="1250" dirty="0"/>
+          </a:p>
+        </p:txBody>
+      </p:sp>
+      <p:sp>
+        <p:nvSpPr>
+          <p:cNvPr id="13" name="Text 11"/>
+          <p:cNvSpPr txBox="1"/>
+          <p:nvPr/>
+        </p:nvSpPr>
+        <p:spPr>
+          <a:xfrm>
+            <a:off x="777240" y="6382512"/>
+            <a:ext cx="7424928" cy="256032"/>
+          </a:xfrm>
+          <a:prstGeom prst="rect">
+            <a:avLst/>
+          </a:prstGeom>
+          <a:noFill/>
+          <a:ln/>
+        </p:spPr>
+        <p:txBody>
+          <a:bodyPr wrap="square" lIns="0" tIns="0" rIns="0" bIns="0" rtlCol="0" anchor="ctr"/>
+          <a:lstStyle/>
+          <a:p>
+            <a:pPr indent="0" marL="0">
+              <a:buNone/>
+            </a:pPr>
+            <a:r>
+              <a:rPr lang="en-US" sz="900" dirty="0">
+                <a:solidFill>
+                  <a:srgbClr val="8A8177"/>
+                </a:solidFill>
+                <a:latin typeface="Yu Gothic" pitchFamily="34" charset="0"/>
+                <a:ea typeface="Yu Gothic" pitchFamily="34" charset="-122"/>
+                <a:cs typeface="Yu Gothic" pitchFamily="34" charset="-120"/>
+              </a:rPr>
+              <a:t>第6回　社内へのお披露目と12か月計画</a:t>
+            </a:r>
+            <a:endParaRPr lang="en-US" sz="900" dirty="0"/>
+          </a:p>
+        </p:txBody>
+      </p:sp>
+      <p:sp>
+        <p:nvSpPr>
+          <p:cNvPr id="14" name="Text 12"/>
+          <p:cNvSpPr txBox="1"/>
+          <p:nvPr/>
+        </p:nvSpPr>
+        <p:spPr>
+          <a:xfrm>
+            <a:off x="8202168" y="6382512"/>
+            <a:ext cx="3182112" cy="256032"/>
+          </a:xfrm>
+          <a:prstGeom prst="rect">
+            <a:avLst/>
+          </a:prstGeom>
+          <a:noFill/>
+          <a:ln/>
+        </p:spPr>
+        <p:txBody>
+          <a:bodyPr wrap="square" lIns="0" tIns="0" rIns="0" bIns="0" rtlCol="0" anchor="ctr"/>
+          <a:lstStyle/>
+          <a:p>
+            <a:pPr algn="r" indent="0" marL="0">
+              <a:buNone/>
+            </a:pPr>
+            <a:r>
+              <a:rPr lang="en-US" sz="900" dirty="0">
+                <a:solidFill>
+                  <a:srgbClr val="8A8177"/>
+                </a:solidFill>
+                <a:latin typeface="Yu Gothic" pitchFamily="34" charset="0"/>
+                <a:ea typeface="Yu Gothic" pitchFamily="34" charset="-122"/>
+                <a:cs typeface="Yu Gothic" pitchFamily="34" charset="-120"/>
+              </a:rPr>
+              <a:t>次回まで</a:t>
+            </a:r>
+            <a:endParaRPr lang="en-US" sz="900" dirty="0"/>
+          </a:p>
+        </p:txBody>
+      </p:sp>
+    </p:spTree>
+  </p:cSld>
+  <p:clrMapOvr>
+    <a:masterClrMapping/>
+  </p:clrMapOvr>
+</p:sld>
+</file>
+
+<file path=ppt/slides/slide15.xml><?xml version="1.0" encoding="utf-8"?>
+<p:sld xmlns:a="http://schemas.openxmlformats.org/drawingml/2006/main" xmlns:r="http://schemas.openxmlformats.org/officeDocument/2006/relationships" xmlns:p="http://schemas.openxmlformats.org/presentationml/2006/main">
+  <p:cSld name="Slide 15">
     <p:bg>
       <p:bgPr>
         <a:solidFill>
@@ -8474,13 +10610,13 @@
             <a:r>
               <a:rPr lang="en-US" sz="1100" b="1" spc="250" kern="0" dirty="0">
                 <a:solidFill>
-                  <a:srgbClr val="2F4F6B"/>
-                </a:solidFill>
-                <a:latin typeface="Yu Gothic" pitchFamily="34" charset="0"/>
-                <a:ea typeface="Yu Gothic" pitchFamily="34" charset="-122"/>
-                <a:cs typeface="Yu Gothic" pitchFamily="34" charset="-120"/>
-              </a:rPr>
-              <a:t>演習</a:t>
+                  <a:srgbClr val="B04A2F"/>
+                </a:solidFill>
+                <a:latin typeface="Yu Gothic" pitchFamily="34" charset="0"/>
+                <a:ea typeface="Yu Gothic" pitchFamily="34" charset="-122"/>
+                <a:cs typeface="Yu Gothic" pitchFamily="34" charset="-120"/>
+              </a:rPr>
+              <a:t>想定問答</a:t>
             </a:r>
             <a:endParaRPr lang="en-US" sz="1100" dirty="0"/>
           </a:p>
@@ -8519,7 +10655,7 @@
                 <a:ea typeface="Yu Gothic" pitchFamily="34" charset="-122"/>
                 <a:cs typeface="Yu Gothic" pitchFamily="34" charset="-120"/>
               </a:rPr>
-              <a:t>今日の流れ</a:t>
+              <a:t>みなさんから、よくいただくご質問</a:t>
             </a:r>
             <a:endParaRPr lang="en-US" sz="2600" dirty="0"/>
           </a:p>
@@ -8527,53 +10663,14 @@
       </p:sp>
       <p:sp>
         <p:nvSpPr>
-          <p:cNvPr id="4" name="Text 2"/>
-          <p:cNvSpPr txBox="1"/>
-          <p:nvPr/>
-        </p:nvSpPr>
-        <p:spPr>
-          <a:xfrm>
-            <a:off x="777240" y="1572768"/>
-            <a:ext cx="10607040" cy="320040"/>
-          </a:xfrm>
-          <a:prstGeom prst="rect">
-            <a:avLst/>
-          </a:prstGeom>
-          <a:noFill/>
-          <a:ln/>
-        </p:spPr>
-        <p:txBody>
-          <a:bodyPr wrap="square" lIns="0" tIns="0" rIns="0" bIns="0" rtlCol="0" anchor="ctr"/>
-          <a:lstStyle/>
-          <a:p>
-            <a:pPr indent="0" marL="0">
-              <a:buNone/>
-            </a:pPr>
-            <a:r>
-              <a:rPr lang="en-US" sz="1250" b="1" dirty="0">
-                <a:solidFill>
-                  <a:srgbClr val="2F4F6B"/>
-                </a:solidFill>
-                <a:latin typeface="Yu Gothic" pitchFamily="34" charset="0"/>
-                <a:ea typeface="Yu Gothic" pitchFamily="34" charset="-122"/>
-                <a:cs typeface="Yu Gothic" pitchFamily="34" charset="-120"/>
-              </a:rPr>
-              <a:t>55分。操作するのはご自身です。</a:t>
-            </a:r>
-            <a:endParaRPr lang="en-US" sz="1250" dirty="0"/>
-          </a:p>
-        </p:txBody>
-      </p:sp>
-      <p:sp>
-        <p:nvSpPr>
-          <p:cNvPr id="5" name="Shape 3"/>
+          <p:cNvPr id="4" name="Shape 2"/>
           <p:cNvSpPr/>
           <p:nvPr/>
         </p:nvSpPr>
         <p:spPr>
           <a:xfrm>
-            <a:off x="777240" y="2148840"/>
-            <a:ext cx="3383280" cy="2880360"/>
+            <a:off x="777240" y="1737360"/>
+            <a:ext cx="10607040" cy="1170432"/>
           </a:xfrm>
           <a:prstGeom prst="rect">
             <a:avLst/>
@@ -8591,16 +10688,16 @@
       </p:sp>
       <p:sp>
         <p:nvSpPr>
-          <p:cNvPr id="6" name="Shape 4"/>
+          <p:cNvPr id="5" name="Shape 3"/>
           <p:cNvSpPr/>
           <p:nvPr/>
         </p:nvSpPr>
         <p:spPr>
           <a:xfrm>
-            <a:off x="1051560" y="2395728"/>
-            <a:ext cx="438912" cy="438912"/>
-          </a:xfrm>
-          <a:prstGeom prst="ellipse">
+            <a:off x="777240" y="1737360"/>
+            <a:ext cx="54864" cy="1170432"/>
+          </a:xfrm>
+          <a:prstGeom prst="rect">
             <a:avLst/>
           </a:prstGeom>
           <a:solidFill>
@@ -8616,95 +10713,53 @@
       </p:sp>
       <p:sp>
         <p:nvSpPr>
+          <p:cNvPr id="6" name="Text 4"/>
+          <p:cNvSpPr txBox="1"/>
+          <p:nvPr/>
+        </p:nvSpPr>
+        <p:spPr>
+          <a:xfrm>
+            <a:off x="1097280" y="1828800"/>
+            <a:ext cx="9966960" cy="384048"/>
+          </a:xfrm>
+          <a:prstGeom prst="rect">
+            <a:avLst/>
+          </a:prstGeom>
+          <a:noFill/>
+          <a:ln/>
+        </p:spPr>
+        <p:txBody>
+          <a:bodyPr wrap="square" lIns="0" tIns="0" rIns="0" bIns="0" rtlCol="0" anchor="ctr"/>
+          <a:lstStyle/>
+          <a:p>
+            <a:pPr indent="0" marL="0">
+              <a:buNone/>
+            </a:pPr>
+            <a:r>
+              <a:rPr lang="en-US" sz="1400" b="1" dirty="0">
+                <a:solidFill>
+                  <a:srgbClr val="2F4F6B"/>
+                </a:solidFill>
+                <a:latin typeface="Yu Gothic" pitchFamily="34" charset="0"/>
+                <a:ea typeface="Yu Gothic" pitchFamily="34" charset="-122"/>
+                <a:cs typeface="Yu Gothic" pitchFamily="34" charset="-120"/>
+              </a:rPr>
+              <a:t>「自分の仕事は、いつAIに置き換わりますか」</a:t>
+            </a:r>
+            <a:endParaRPr lang="en-US" sz="1400" dirty="0"/>
+          </a:p>
+        </p:txBody>
+      </p:sp>
+      <p:sp>
+        <p:nvSpPr>
           <p:cNvPr id="7" name="Text 5"/>
           <p:cNvSpPr txBox="1"/>
           <p:nvPr/>
         </p:nvSpPr>
         <p:spPr>
           <a:xfrm>
-            <a:off x="1051560" y="2395728"/>
-            <a:ext cx="438912" cy="438912"/>
-          </a:xfrm>
-          <a:prstGeom prst="rect">
-            <a:avLst/>
-          </a:prstGeom>
-          <a:noFill/>
-          <a:ln/>
-        </p:spPr>
-        <p:txBody>
-          <a:bodyPr wrap="square" lIns="0" tIns="0" rIns="0" bIns="0" rtlCol="0" anchor="ctr"/>
-          <a:lstStyle/>
-          <a:p>
-            <a:pPr algn="ctr" indent="0" marL="0">
-              <a:buNone/>
-            </a:pPr>
-            <a:r>
-              <a:rPr lang="en-US" sz="1300" b="1" dirty="0">
-                <a:solidFill>
-                  <a:srgbClr val="FFFFFF"/>
-                </a:solidFill>
-                <a:latin typeface="Yu Gothic" pitchFamily="34" charset="0"/>
-                <a:ea typeface="Yu Gothic" pitchFamily="34" charset="-122"/>
-                <a:cs typeface="Yu Gothic" pitchFamily="34" charset="-120"/>
-              </a:rPr>
-              <a:t>1</a:t>
-            </a:r>
-            <a:endParaRPr lang="en-US" sz="1300" dirty="0"/>
-          </a:p>
-        </p:txBody>
-      </p:sp>
-      <p:sp>
-        <p:nvSpPr>
-          <p:cNvPr id="8" name="Text 6"/>
-          <p:cNvSpPr txBox="1"/>
-          <p:nvPr/>
-        </p:nvSpPr>
-        <p:spPr>
-          <a:xfrm>
-            <a:off x="1051560" y="2944368"/>
-            <a:ext cx="2834640" cy="731520"/>
-          </a:xfrm>
-          <a:prstGeom prst="rect">
-            <a:avLst/>
-          </a:prstGeom>
-          <a:noFill/>
-          <a:ln/>
-        </p:spPr>
-        <p:txBody>
-          <a:bodyPr wrap="square" lIns="0" tIns="0" rIns="0" bIns="0" rtlCol="0" anchor="ctr"/>
-          <a:lstStyle/>
-          <a:p>
-            <a:pPr indent="0" marL="0">
-              <a:lnSpc>
-                <a:spcPct val="125000"/>
-              </a:lnSpc>
-              <a:buNone/>
-            </a:pPr>
-            <a:r>
-              <a:rPr lang="en-US" sz="1450" b="1" dirty="0">
-                <a:solidFill>
-                  <a:srgbClr val="23201D"/>
-                </a:solidFill>
-                <a:latin typeface="Yu Gothic" pitchFamily="34" charset="0"/>
-                <a:ea typeface="Yu Gothic" pitchFamily="34" charset="-122"/>
-                <a:cs typeface="Yu Gothic" pitchFamily="34" charset="-120"/>
-              </a:rPr>
-              <a:t>作ったものをお見せする</a:t>
-            </a:r>
-            <a:endParaRPr lang="en-US" sz="1450" dirty="0"/>
-          </a:p>
-        </p:txBody>
-      </p:sp>
-      <p:sp>
-        <p:nvSpPr>
-          <p:cNvPr id="9" name="Text 7"/>
-          <p:cNvSpPr txBox="1"/>
-          <p:nvPr/>
-        </p:nvSpPr>
-        <p:spPr>
-          <a:xfrm>
-            <a:off x="1051560" y="3703320"/>
-            <a:ext cx="2834640" cy="1188720"/>
+            <a:off x="1097280" y="2231136"/>
+            <a:ext cx="9966960" cy="603504"/>
           </a:xfrm>
           <a:prstGeom prst="rect">
             <a:avLst/>
@@ -8723,30 +10778,30 @@
               <a:buNone/>
             </a:pPr>
             <a:r>
-              <a:rPr lang="en-US" sz="1150" dirty="0">
-                <a:solidFill>
-                  <a:srgbClr val="5A534A"/>
-                </a:solidFill>
-                <a:latin typeface="Yu Gothic" pitchFamily="34" charset="0"/>
-                <a:ea typeface="Yu Gothic" pitchFamily="34" charset="-122"/>
-                <a:cs typeface="Yu Gothic" pitchFamily="34" charset="-120"/>
-              </a:rPr>
-              <a:t>実際に動かします。すでに使っている社員の方がいれば、その方に話していただきます</a:t>
-            </a:r>
-            <a:endParaRPr lang="en-US" sz="1150" dirty="0"/>
-          </a:p>
-        </p:txBody>
-      </p:sp>
-      <p:sp>
-        <p:nvSpPr>
-          <p:cNvPr id="10" name="Shape 8"/>
+              <a:rPr lang="en-US" sz="1250" dirty="0">
+                <a:solidFill>
+                  <a:srgbClr val="3F3933"/>
+                </a:solidFill>
+                <a:latin typeface="Yu Gothic" pitchFamily="34" charset="0"/>
+                <a:ea typeface="Yu Gothic" pitchFamily="34" charset="-122"/>
+                <a:cs typeface="Yu Gothic" pitchFamily="34" charset="-120"/>
+              </a:rPr>
+              <a:t>置き換える予定はありません。今日お見せしたのは、下書きと転記の部分です。判断と交渉は、これまで通りみなさんの仕事です。</a:t>
+            </a:r>
+            <a:endParaRPr lang="en-US" sz="1250" dirty="0"/>
+          </a:p>
+        </p:txBody>
+      </p:sp>
+      <p:sp>
+        <p:nvSpPr>
+          <p:cNvPr id="8" name="Shape 6"/>
           <p:cNvSpPr/>
           <p:nvPr/>
         </p:nvSpPr>
         <p:spPr>
           <a:xfrm>
-            <a:off x="4389120" y="2148840"/>
-            <a:ext cx="3383280" cy="2880360"/>
+            <a:off x="777240" y="3035808"/>
+            <a:ext cx="10607040" cy="1170432"/>
           </a:xfrm>
           <a:prstGeom prst="rect">
             <a:avLst/>
@@ -8764,16 +10819,16 @@
       </p:sp>
       <p:sp>
         <p:nvSpPr>
-          <p:cNvPr id="11" name="Shape 9"/>
+          <p:cNvPr id="9" name="Shape 7"/>
           <p:cNvSpPr/>
           <p:nvPr/>
         </p:nvSpPr>
         <p:spPr>
           <a:xfrm>
-            <a:off x="4663440" y="2395728"/>
-            <a:ext cx="438912" cy="438912"/>
-          </a:xfrm>
-          <a:prstGeom prst="ellipse">
+            <a:off x="777240" y="3035808"/>
+            <a:ext cx="54864" cy="1170432"/>
+          </a:xfrm>
+          <a:prstGeom prst="rect">
             <a:avLst/>
           </a:prstGeom>
           <a:solidFill>
@@ -8789,95 +10844,53 @@
       </p:sp>
       <p:sp>
         <p:nvSpPr>
-          <p:cNvPr id="12" name="Text 10"/>
-          <p:cNvSpPr txBox="1"/>
-          <p:nvPr/>
-        </p:nvSpPr>
-        <p:spPr>
-          <a:xfrm>
-            <a:off x="4663440" y="2395728"/>
-            <a:ext cx="438912" cy="438912"/>
-          </a:xfrm>
-          <a:prstGeom prst="rect">
-            <a:avLst/>
-          </a:prstGeom>
-          <a:noFill/>
-          <a:ln/>
-        </p:spPr>
-        <p:txBody>
-          <a:bodyPr wrap="square" lIns="0" tIns="0" rIns="0" bIns="0" rtlCol="0" anchor="ctr"/>
-          <a:lstStyle/>
-          <a:p>
-            <a:pPr algn="ctr" indent="0" marL="0">
-              <a:buNone/>
-            </a:pPr>
-            <a:r>
-              <a:rPr lang="en-US" sz="1300" b="1" dirty="0">
-                <a:solidFill>
-                  <a:srgbClr val="FFFFFF"/>
-                </a:solidFill>
-                <a:latin typeface="Yu Gothic" pitchFamily="34" charset="0"/>
-                <a:ea typeface="Yu Gothic" pitchFamily="34" charset="-122"/>
-                <a:cs typeface="Yu Gothic" pitchFamily="34" charset="-120"/>
-              </a:rPr>
-              <a:t>2</a:t>
-            </a:r>
-            <a:endParaRPr lang="en-US" sz="1300" dirty="0"/>
-          </a:p>
-        </p:txBody>
-      </p:sp>
-      <p:sp>
-        <p:nvSpPr>
-          <p:cNvPr id="13" name="Text 11"/>
-          <p:cNvSpPr txBox="1"/>
-          <p:nvPr/>
-        </p:nvSpPr>
-        <p:spPr>
-          <a:xfrm>
-            <a:off x="4663440" y="2944368"/>
-            <a:ext cx="2834640" cy="731520"/>
-          </a:xfrm>
-          <a:prstGeom prst="rect">
-            <a:avLst/>
-          </a:prstGeom>
-          <a:noFill/>
-          <a:ln/>
-        </p:spPr>
-        <p:txBody>
-          <a:bodyPr wrap="square" lIns="0" tIns="0" rIns="0" bIns="0" rtlCol="0" anchor="ctr"/>
-          <a:lstStyle/>
-          <a:p>
-            <a:pPr indent="0" marL="0">
-              <a:lnSpc>
-                <a:spcPct val="125000"/>
-              </a:lnSpc>
-              <a:buNone/>
-            </a:pPr>
-            <a:r>
-              <a:rPr lang="en-US" sz="1450" b="1" dirty="0">
-                <a:solidFill>
-                  <a:srgbClr val="23201D"/>
-                </a:solidFill>
-                <a:latin typeface="Yu Gothic" pitchFamily="34" charset="0"/>
-                <a:ea typeface="Yu Gothic" pitchFamily="34" charset="-122"/>
-                <a:cs typeface="Yu Gothic" pitchFamily="34" charset="-120"/>
-              </a:rPr>
-              <a:t>ご質問・ご意見をうかがう</a:t>
-            </a:r>
-            <a:endParaRPr lang="en-US" sz="1450" dirty="0"/>
-          </a:p>
-        </p:txBody>
-      </p:sp>
-      <p:sp>
-        <p:nvSpPr>
-          <p:cNvPr id="14" name="Text 12"/>
-          <p:cNvSpPr txBox="1"/>
-          <p:nvPr/>
-        </p:nvSpPr>
-        <p:spPr>
-          <a:xfrm>
-            <a:off x="4663440" y="3703320"/>
-            <a:ext cx="2834640" cy="1188720"/>
+          <p:cNvPr id="10" name="Text 8"/>
+          <p:cNvSpPr txBox="1"/>
+          <p:nvPr/>
+        </p:nvSpPr>
+        <p:spPr>
+          <a:xfrm>
+            <a:off x="1097280" y="3127248"/>
+            <a:ext cx="9966960" cy="384048"/>
+          </a:xfrm>
+          <a:prstGeom prst="rect">
+            <a:avLst/>
+          </a:prstGeom>
+          <a:noFill/>
+          <a:ln/>
+        </p:spPr>
+        <p:txBody>
+          <a:bodyPr wrap="square" lIns="0" tIns="0" rIns="0" bIns="0" rtlCol="0" anchor="ctr"/>
+          <a:lstStyle/>
+          <a:p>
+            <a:pPr indent="0" marL="0">
+              <a:buNone/>
+            </a:pPr>
+            <a:r>
+              <a:rPr lang="en-US" sz="1400" b="1" dirty="0">
+                <a:solidFill>
+                  <a:srgbClr val="2F4F6B"/>
+                </a:solidFill>
+                <a:latin typeface="Yu Gothic" pitchFamily="34" charset="0"/>
+                <a:ea typeface="Yu Gothic" pitchFamily="34" charset="-122"/>
+                <a:cs typeface="Yu Gothic" pitchFamily="34" charset="-120"/>
+              </a:rPr>
+              <a:t>「間違った答えが出たら、どう見分ければいいですか」</a:t>
+            </a:r>
+            <a:endParaRPr lang="en-US" sz="1400" dirty="0"/>
+          </a:p>
+        </p:txBody>
+      </p:sp>
+      <p:sp>
+        <p:nvSpPr>
+          <p:cNvPr id="11" name="Text 9"/>
+          <p:cNvSpPr txBox="1"/>
+          <p:nvPr/>
+        </p:nvSpPr>
+        <p:spPr>
+          <a:xfrm>
+            <a:off x="1097280" y="3529584"/>
+            <a:ext cx="9966960" cy="603504"/>
           </a:xfrm>
           <a:prstGeom prst="rect">
             <a:avLst/>
@@ -8896,30 +10909,30 @@
               <a:buNone/>
             </a:pPr>
             <a:r>
-              <a:rPr lang="en-US" sz="1150" dirty="0">
-                <a:solidFill>
-                  <a:srgbClr val="5A534A"/>
-                </a:solidFill>
-                <a:latin typeface="Yu Gothic" pitchFamily="34" charset="0"/>
-                <a:ea typeface="Yu Gothic" pitchFamily="34" charset="-122"/>
-                <a:cs typeface="Yu Gothic" pitchFamily="34" charset="-120"/>
-              </a:rPr>
-              <a:t>否定的なご意見ほど、丁寧に記録します</a:t>
-            </a:r>
-            <a:endParaRPr lang="en-US" sz="1150" dirty="0"/>
-          </a:p>
-        </p:txBody>
-      </p:sp>
-      <p:sp>
-        <p:nvSpPr>
-          <p:cNvPr id="15" name="Shape 13"/>
+              <a:rPr lang="en-US" sz="1250" dirty="0">
+                <a:solidFill>
+                  <a:srgbClr val="3F3933"/>
+                </a:solidFill>
+                <a:latin typeface="Yu Gothic" pitchFamily="34" charset="0"/>
+                <a:ea typeface="Yu Gothic" pitchFamily="34" charset="-122"/>
+                <a:cs typeface="Yu Gothic" pitchFamily="34" charset="-120"/>
+              </a:rPr>
+              <a:t>資料にないことは『記載がありません』と答える設定にしてあります。金額と日付だけは、必ず人が確認する決まりです。</a:t>
+            </a:r>
+            <a:endParaRPr lang="en-US" sz="1250" dirty="0"/>
+          </a:p>
+        </p:txBody>
+      </p:sp>
+      <p:sp>
+        <p:nvSpPr>
+          <p:cNvPr id="12" name="Shape 10"/>
           <p:cNvSpPr/>
           <p:nvPr/>
         </p:nvSpPr>
         <p:spPr>
           <a:xfrm>
-            <a:off x="8001000" y="2148840"/>
-            <a:ext cx="3383280" cy="2880360"/>
+            <a:off x="777240" y="4334256"/>
+            <a:ext cx="10607040" cy="1170432"/>
           </a:xfrm>
           <a:prstGeom prst="rect">
             <a:avLst/>
@@ -8937,16 +10950,16 @@
       </p:sp>
       <p:sp>
         <p:nvSpPr>
-          <p:cNvPr id="16" name="Shape 14"/>
+          <p:cNvPr id="13" name="Shape 11"/>
           <p:cNvSpPr/>
           <p:nvPr/>
         </p:nvSpPr>
         <p:spPr>
           <a:xfrm>
-            <a:off x="8275320" y="2395728"/>
-            <a:ext cx="438912" cy="438912"/>
-          </a:xfrm>
-          <a:prstGeom prst="ellipse">
+            <a:off x="777240" y="4334256"/>
+            <a:ext cx="54864" cy="1170432"/>
+          </a:xfrm>
+          <a:prstGeom prst="rect">
             <a:avLst/>
           </a:prstGeom>
           <a:solidFill>
@@ -8962,95 +10975,53 @@
       </p:sp>
       <p:sp>
         <p:nvSpPr>
-          <p:cNvPr id="17" name="Text 15"/>
-          <p:cNvSpPr txBox="1"/>
-          <p:nvPr/>
-        </p:nvSpPr>
-        <p:spPr>
-          <a:xfrm>
-            <a:off x="8275320" y="2395728"/>
-            <a:ext cx="438912" cy="438912"/>
-          </a:xfrm>
-          <a:prstGeom prst="rect">
-            <a:avLst/>
-          </a:prstGeom>
-          <a:noFill/>
-          <a:ln/>
-        </p:spPr>
-        <p:txBody>
-          <a:bodyPr wrap="square" lIns="0" tIns="0" rIns="0" bIns="0" rtlCol="0" anchor="ctr"/>
-          <a:lstStyle/>
-          <a:p>
-            <a:pPr algn="ctr" indent="0" marL="0">
-              <a:buNone/>
-            </a:pPr>
-            <a:r>
-              <a:rPr lang="en-US" sz="1300" b="1" dirty="0">
-                <a:solidFill>
-                  <a:srgbClr val="FFFFFF"/>
-                </a:solidFill>
-                <a:latin typeface="Yu Gothic" pitchFamily="34" charset="0"/>
-                <a:ea typeface="Yu Gothic" pitchFamily="34" charset="-122"/>
-                <a:cs typeface="Yu Gothic" pitchFamily="34" charset="-120"/>
-              </a:rPr>
-              <a:t>3</a:t>
-            </a:r>
-            <a:endParaRPr lang="en-US" sz="1300" dirty="0"/>
-          </a:p>
-        </p:txBody>
-      </p:sp>
-      <p:sp>
-        <p:nvSpPr>
-          <p:cNvPr id="18" name="Text 16"/>
-          <p:cNvSpPr txBox="1"/>
-          <p:nvPr/>
-        </p:nvSpPr>
-        <p:spPr>
-          <a:xfrm>
-            <a:off x="8275320" y="2944368"/>
-            <a:ext cx="2834640" cy="731520"/>
-          </a:xfrm>
-          <a:prstGeom prst="rect">
-            <a:avLst/>
-          </a:prstGeom>
-          <a:noFill/>
-          <a:ln/>
-        </p:spPr>
-        <p:txBody>
-          <a:bodyPr wrap="square" lIns="0" tIns="0" rIns="0" bIns="0" rtlCol="0" anchor="ctr"/>
-          <a:lstStyle/>
-          <a:p>
-            <a:pPr indent="0" marL="0">
-              <a:lnSpc>
-                <a:spcPct val="125000"/>
-              </a:lnSpc>
-              <a:buNone/>
-            </a:pPr>
-            <a:r>
-              <a:rPr lang="en-US" sz="1450" b="1" dirty="0">
-                <a:solidFill>
-                  <a:srgbClr val="23201D"/>
-                </a:solidFill>
-                <a:latin typeface="Yu Gothic" pitchFamily="34" charset="0"/>
-                <a:ea typeface="Yu Gothic" pitchFamily="34" charset="-122"/>
-                <a:cs typeface="Yu Gothic" pitchFamily="34" charset="-120"/>
-              </a:rPr>
-              <a:t>12か月の方針を決める</a:t>
-            </a:r>
-            <a:endParaRPr lang="en-US" sz="1450" dirty="0"/>
-          </a:p>
-        </p:txBody>
-      </p:sp>
-      <p:sp>
-        <p:nvSpPr>
-          <p:cNvPr id="19" name="Text 17"/>
-          <p:cNvSpPr txBox="1"/>
-          <p:nvPr/>
-        </p:nvSpPr>
-        <p:spPr>
-          <a:xfrm>
-            <a:off x="8275320" y="3703320"/>
-            <a:ext cx="2834640" cy="1188720"/>
+          <p:cNvPr id="14" name="Text 12"/>
+          <p:cNvSpPr txBox="1"/>
+          <p:nvPr/>
+        </p:nvSpPr>
+        <p:spPr>
+          <a:xfrm>
+            <a:off x="1097280" y="4425696"/>
+            <a:ext cx="9966960" cy="384048"/>
+          </a:xfrm>
+          <a:prstGeom prst="rect">
+            <a:avLst/>
+          </a:prstGeom>
+          <a:noFill/>
+          <a:ln/>
+        </p:spPr>
+        <p:txBody>
+          <a:bodyPr wrap="square" lIns="0" tIns="0" rIns="0" bIns="0" rtlCol="0" anchor="ctr"/>
+          <a:lstStyle/>
+          <a:p>
+            <a:pPr indent="0" marL="0">
+              <a:buNone/>
+            </a:pPr>
+            <a:r>
+              <a:rPr lang="en-US" sz="1400" b="1" dirty="0">
+                <a:solidFill>
+                  <a:srgbClr val="2F4F6B"/>
+                </a:solidFill>
+                <a:latin typeface="Yu Gothic" pitchFamily="34" charset="0"/>
+                <a:ea typeface="Yu Gothic" pitchFamily="34" charset="-122"/>
+                <a:cs typeface="Yu Gothic" pitchFamily="34" charset="-120"/>
+              </a:rPr>
+              <a:t>「使い方を覚える時間がありません」</a:t>
+            </a:r>
+            <a:endParaRPr lang="en-US" sz="1400" dirty="0"/>
+          </a:p>
+        </p:txBody>
+      </p:sp>
+      <p:sp>
+        <p:nvSpPr>
+          <p:cNvPr id="15" name="Text 13"/>
+          <p:cNvSpPr txBox="1"/>
+          <p:nvPr/>
+        </p:nvSpPr>
+        <p:spPr>
+          <a:xfrm>
+            <a:off x="1097280" y="4828032"/>
+            <a:ext cx="9966960" cy="603504"/>
           </a:xfrm>
           <a:prstGeom prst="rect">
             <a:avLst/>
@@ -9069,23 +11040,23 @@
               <a:buNone/>
             </a:pPr>
             <a:r>
-              <a:rPr lang="en-US" sz="1150" dirty="0">
-                <a:solidFill>
-                  <a:srgbClr val="5A534A"/>
-                </a:solidFill>
-                <a:latin typeface="Yu Gothic" pitchFamily="34" charset="0"/>
-                <a:ea typeface="Yu Gothic" pitchFamily="34" charset="-122"/>
-                <a:cs typeface="Yu Gothic" pitchFamily="34" charset="-120"/>
-              </a:rPr>
-              <a:t>社員退席後に、ロードマップをその場で完成させます</a:t>
-            </a:r>
-            <a:endParaRPr lang="en-US" sz="1150" dirty="0"/>
-          </a:p>
-        </p:txBody>
-      </p:sp>
-      <p:sp>
-        <p:nvSpPr>
-          <p:cNvPr id="20" name="Text 18"/>
+              <a:rPr lang="en-US" sz="1250" dirty="0">
+                <a:solidFill>
+                  <a:srgbClr val="3F3933"/>
+                </a:solidFill>
+                <a:latin typeface="Yu Gothic" pitchFamily="34" charset="0"/>
+                <a:ea typeface="Yu Gothic" pitchFamily="34" charset="-122"/>
+                <a:cs typeface="Yu Gothic" pitchFamily="34" charset="-120"/>
+              </a:rPr>
+              <a:t>覚えることはほとんどありません。テンプレートの【　】を埋めるだけです。最初の1回だけ、隣で一緒にやります。</a:t>
+            </a:r>
+            <a:endParaRPr lang="en-US" sz="1250" dirty="0"/>
+          </a:p>
+        </p:txBody>
+      </p:sp>
+      <p:sp>
+        <p:nvSpPr>
+          <p:cNvPr id="16" name="Text 14"/>
           <p:cNvSpPr txBox="1"/>
           <p:nvPr/>
         </p:nvSpPr>
@@ -9124,7 +11095,7 @@
       </p:sp>
       <p:sp>
         <p:nvSpPr>
-          <p:cNvPr id="21" name="Text 19"/>
+          <p:cNvPr id="17" name="Text 15"/>
           <p:cNvSpPr txBox="1"/>
           <p:nvPr/>
         </p:nvSpPr>
@@ -9155,7 +11126,7 @@
                 <a:ea typeface="Yu Gothic" pitchFamily="34" charset="-122"/>
                 <a:cs typeface="Yu Gothic" pitchFamily="34" charset="-120"/>
               </a:rPr>
-              <a:t>演習</a:t>
+              <a:t>想定問答</a:t>
             </a:r>
             <a:endParaRPr lang="en-US" sz="900" dirty="0"/>
           </a:p>

--- a/slides/pptx/第06回_社内へのお披露目と12か月計画.pptx
+++ b/slides/pptx/第06回_社内へのお披露目と12か月計画.pptx
@@ -4604,7 +4604,7 @@
                 <a:ea typeface="Yu Gothic" pitchFamily="34" charset="-122"/>
                 <a:cs typeface="Yu Gothic" pitchFamily="34" charset="-120"/>
               </a:rPr>
-              <a:t>他社では</a:t>
+              <a:t>よくある型</a:t>
             </a:r>
             <a:endParaRPr lang="en-US" sz="900" dirty="0"/>
           </a:p>
@@ -4646,7 +4646,7 @@
                 <a:ea typeface="Yu Gothic" pitchFamily="34" charset="-122"/>
                 <a:cs typeface="Yu Gothic" pitchFamily="34" charset="-120"/>
               </a:rPr>
-              <a:t>お披露目で最も強く反対した社員を、後に推進担当にした会社があります。反対の理由がいちばん具体的だったため、設計が現実的になりました。</a:t>
+              <a:t>お披露目で最も強く反対する人は、たいてい理由がいちばん具体的。推進役の候補として見ておくと、設計が現実的になる。</a:t>
             </a:r>
             <a:endParaRPr lang="en-US" sz="1250" dirty="0"/>
           </a:p>

--- a/slides/pptx/第06回_社内へのお披露目と12か月計画.pptx
+++ b/slides/pptx/第06回_社内へのお披露目と12か月計画.pptx
@@ -3146,7 +3146,7 @@
                 <a:ea typeface="Yu Gothic" pitchFamily="34" charset="-122"/>
                 <a:cs typeface="Yu Gothic" pitchFamily="34" charset="-120"/>
               </a:rPr>
-              <a:t>55分。操作するのはご自身です。</a:t>
+              <a:t>社員同席・発表を含む。操作するのはご自身です。</a:t>
             </a:r>
             <a:endParaRPr lang="en-US" sz="1250" dirty="0"/>
           </a:p>

--- a/slides/pptx/第06回_社内へのお披露目と12か月計画.pptx
+++ b/slides/pptx/第06回_社内へのお披露目と12か月計画.pptx
@@ -6308,7 +6308,7 @@
         <p:spPr>
           <a:xfrm>
             <a:off x="960120" y="4873752"/>
-            <a:ext cx="1956816" cy="237744"/>
+            <a:ext cx="1615440" cy="237744"/>
           </a:xfrm>
           <a:prstGeom prst="rect">
             <a:avLst/>
@@ -6332,7 +6332,7 @@
                 <a:ea typeface="Yu Gothic" pitchFamily="34" charset="-122"/>
                 <a:cs typeface="Yu Gothic" pitchFamily="34" charset="-120"/>
               </a:rPr>
-              <a:t>0-15分</a:t>
+              <a:t>0-5分</a:t>
             </a:r>
             <a:endParaRPr lang="en-US" sz="900" dirty="0"/>
           </a:p>
@@ -6347,7 +6347,7 @@
         <p:spPr>
           <a:xfrm>
             <a:off x="960120" y="5111496"/>
-            <a:ext cx="1956816" cy="384048"/>
+            <a:ext cx="1615440" cy="384048"/>
           </a:xfrm>
           <a:prstGeom prst="rect">
             <a:avLst/>
@@ -6371,7 +6371,7 @@
                 <a:ea typeface="Yu Gothic" pitchFamily="34" charset="-122"/>
                 <a:cs typeface="Yu Gothic" pitchFamily="34" charset="-120"/>
               </a:rPr>
-              <a:t>前回の宿題を実物で</a:t>
+              <a:t>趣旨説明</a:t>
             </a:r>
             <a:endParaRPr lang="en-US" sz="1100" dirty="0"/>
           </a:p>
@@ -6385,8 +6385,8 @@
         </p:nvSpPr>
         <p:spPr>
           <a:xfrm>
-            <a:off x="3008376" y="4873752"/>
-            <a:ext cx="1956816" cy="237744"/>
+            <a:off x="2667000" y="4873752"/>
+            <a:ext cx="1615440" cy="237744"/>
           </a:xfrm>
           <a:prstGeom prst="rect">
             <a:avLst/>
@@ -6410,7 +6410,7 @@
                 <a:ea typeface="Yu Gothic" pitchFamily="34" charset="-122"/>
                 <a:cs typeface="Yu Gothic" pitchFamily="34" charset="-120"/>
               </a:rPr>
-              <a:t>15-35分</a:t>
+              <a:t>5-20分</a:t>
             </a:r>
             <a:endParaRPr lang="en-US" sz="900" dirty="0"/>
           </a:p>
@@ -6424,8 +6424,8 @@
         </p:nvSpPr>
         <p:spPr>
           <a:xfrm>
-            <a:off x="3008376" y="5111496"/>
-            <a:ext cx="1956816" cy="384048"/>
+            <a:off x="2667000" y="5111496"/>
+            <a:ext cx="1615440" cy="384048"/>
           </a:xfrm>
           <a:prstGeom prst="rect">
             <a:avLst/>
@@ -6449,7 +6449,7 @@
                 <a:ea typeface="Yu Gothic" pitchFamily="34" charset="-122"/>
                 <a:cs typeface="Yu Gothic" pitchFamily="34" charset="-120"/>
               </a:rPr>
-              <a:t>テーマとデモ</a:t>
+              <a:t>社長からの発表</a:t>
             </a:r>
             <a:endParaRPr lang="en-US" sz="1100" dirty="0"/>
           </a:p>
@@ -6463,8 +6463,8 @@
         </p:nvSpPr>
         <p:spPr>
           <a:xfrm>
-            <a:off x="5056632" y="4873752"/>
-            <a:ext cx="1956816" cy="237744"/>
+            <a:off x="4373880" y="4873752"/>
+            <a:ext cx="1615440" cy="237744"/>
           </a:xfrm>
           <a:prstGeom prst="rect">
             <a:avLst/>
@@ -6488,7 +6488,7 @@
                 <a:ea typeface="Yu Gothic" pitchFamily="34" charset="-122"/>
                 <a:cs typeface="Yu Gothic" pitchFamily="34" charset="-120"/>
               </a:rPr>
-              <a:t>35-90分</a:t>
+              <a:t>20-45分</a:t>
             </a:r>
             <a:endParaRPr lang="en-US" sz="900" dirty="0"/>
           </a:p>
@@ -6502,8 +6502,8 @@
         </p:nvSpPr>
         <p:spPr>
           <a:xfrm>
-            <a:off x="5056632" y="5111496"/>
-            <a:ext cx="1956816" cy="384048"/>
+            <a:off x="4373880" y="5111496"/>
+            <a:ext cx="1615440" cy="384048"/>
           </a:xfrm>
           <a:prstGeom prst="rect">
             <a:avLst/>
@@ -6527,7 +6527,7 @@
                 <a:ea typeface="Yu Gothic" pitchFamily="34" charset="-122"/>
                 <a:cs typeface="Yu Gothic" pitchFamily="34" charset="-120"/>
               </a:rPr>
-              <a:t>一緒に手を動かす</a:t>
+              <a:t>実物のデモ</a:t>
             </a:r>
             <a:endParaRPr lang="en-US" sz="1100" dirty="0"/>
           </a:p>
@@ -6541,8 +6541,8 @@
         </p:nvSpPr>
         <p:spPr>
           <a:xfrm>
-            <a:off x="7104888" y="4873752"/>
-            <a:ext cx="1956816" cy="237744"/>
+            <a:off x="6080760" y="4873752"/>
+            <a:ext cx="1615440" cy="237744"/>
           </a:xfrm>
           <a:prstGeom prst="rect">
             <a:avLst/>
@@ -6566,7 +6566,7 @@
                 <a:ea typeface="Yu Gothic" pitchFamily="34" charset="-122"/>
                 <a:cs typeface="Yu Gothic" pitchFamily="34" charset="-120"/>
               </a:rPr>
-              <a:t>90-105分</a:t>
+              <a:t>45-75分</a:t>
             </a:r>
             <a:endParaRPr lang="en-US" sz="900" dirty="0"/>
           </a:p>
@@ -6580,8 +6580,8 @@
         </p:nvSpPr>
         <p:spPr>
           <a:xfrm>
-            <a:off x="7104888" y="5111496"/>
-            <a:ext cx="1956816" cy="384048"/>
+            <a:off x="6080760" y="5111496"/>
+            <a:ext cx="1615440" cy="384048"/>
           </a:xfrm>
           <a:prstGeom prst="rect">
             <a:avLst/>
@@ -6605,7 +6605,7 @@
                 <a:ea typeface="Yu Gothic" pitchFamily="34" charset="-122"/>
                 <a:cs typeface="Yu Gothic" pitchFamily="34" charset="-120"/>
               </a:rPr>
-              <a:t>業務への組み込み</a:t>
+              <a:t>社員との質疑</a:t>
             </a:r>
             <a:endParaRPr lang="en-US" sz="1100" dirty="0"/>
           </a:p>
@@ -6619,8 +6619,8 @@
         </p:nvSpPr>
         <p:spPr>
           <a:xfrm>
-            <a:off x="9153144" y="4873752"/>
-            <a:ext cx="1956816" cy="237744"/>
+            <a:off x="7787640" y="4873752"/>
+            <a:ext cx="1615440" cy="237744"/>
           </a:xfrm>
           <a:prstGeom prst="rect">
             <a:avLst/>
@@ -6644,6 +6644,84 @@
                 <a:ea typeface="Yu Gothic" pitchFamily="34" charset="-122"/>
                 <a:cs typeface="Yu Gothic" pitchFamily="34" charset="-120"/>
               </a:rPr>
+              <a:t>75-105分</a:t>
+            </a:r>
+            <a:endParaRPr lang="en-US" sz="900" dirty="0"/>
+          </a:p>
+        </p:txBody>
+      </p:sp>
+      <p:sp>
+        <p:nvSpPr>
+          <p:cNvPr id="16" name="Text 14"/>
+          <p:cNvSpPr txBox="1"/>
+          <p:nvPr/>
+        </p:nvSpPr>
+        <p:spPr>
+          <a:xfrm>
+            <a:off x="7787640" y="5111496"/>
+            <a:ext cx="1615440" cy="384048"/>
+          </a:xfrm>
+          <a:prstGeom prst="rect">
+            <a:avLst/>
+          </a:prstGeom>
+          <a:noFill/>
+          <a:ln/>
+        </p:spPr>
+        <p:txBody>
+          <a:bodyPr wrap="square" lIns="0" tIns="0" rIns="0" bIns="0" rtlCol="0" anchor="ctr"/>
+          <a:lstStyle/>
+          <a:p>
+            <a:pPr indent="0" marL="0">
+              <a:buNone/>
+            </a:pPr>
+            <a:r>
+              <a:rPr lang="en-US" sz="1100" dirty="0">
+                <a:solidFill>
+                  <a:srgbClr val="23201D"/>
+                </a:solidFill>
+                <a:latin typeface="Yu Gothic" pitchFamily="34" charset="0"/>
+                <a:ea typeface="Yu Gothic" pitchFamily="34" charset="-122"/>
+                <a:cs typeface="Yu Gothic" pitchFamily="34" charset="-120"/>
+              </a:rPr>
+              <a:t>12か月ロードマップ</a:t>
+            </a:r>
+            <a:endParaRPr lang="en-US" sz="1100" dirty="0"/>
+          </a:p>
+        </p:txBody>
+      </p:sp>
+      <p:sp>
+        <p:nvSpPr>
+          <p:cNvPr id="17" name="Text 15"/>
+          <p:cNvSpPr txBox="1"/>
+          <p:nvPr/>
+        </p:nvSpPr>
+        <p:spPr>
+          <a:xfrm>
+            <a:off x="9494520" y="4873752"/>
+            <a:ext cx="1615440" cy="237744"/>
+          </a:xfrm>
+          <a:prstGeom prst="rect">
+            <a:avLst/>
+          </a:prstGeom>
+          <a:noFill/>
+          <a:ln/>
+        </p:spPr>
+        <p:txBody>
+          <a:bodyPr wrap="square" lIns="0" tIns="0" rIns="0" bIns="0" rtlCol="0" anchor="ctr"/>
+          <a:lstStyle/>
+          <a:p>
+            <a:pPr indent="0" marL="0">
+              <a:buNone/>
+            </a:pPr>
+            <a:r>
+              <a:rPr lang="en-US" sz="900" b="1" dirty="0">
+                <a:solidFill>
+                  <a:srgbClr val="B04A2F"/>
+                </a:solidFill>
+                <a:latin typeface="Yu Gothic" pitchFamily="34" charset="0"/>
+                <a:ea typeface="Yu Gothic" pitchFamily="34" charset="-122"/>
+                <a:cs typeface="Yu Gothic" pitchFamily="34" charset="-120"/>
+              </a:rPr>
               <a:t>105-120分</a:t>
             </a:r>
             <a:endParaRPr lang="en-US" sz="900" dirty="0"/>
@@ -6652,14 +6730,14 @@
       </p:sp>
       <p:sp>
         <p:nvSpPr>
-          <p:cNvPr id="16" name="Text 14"/>
-          <p:cNvSpPr txBox="1"/>
-          <p:nvPr/>
-        </p:nvSpPr>
-        <p:spPr>
-          <a:xfrm>
-            <a:off x="9153144" y="5111496"/>
-            <a:ext cx="1956816" cy="384048"/>
+          <p:cNvPr id="18" name="Text 16"/>
+          <p:cNvSpPr txBox="1"/>
+          <p:nvPr/>
+        </p:nvSpPr>
+        <p:spPr>
+          <a:xfrm>
+            <a:off x="9494520" y="5111496"/>
+            <a:ext cx="1615440" cy="384048"/>
           </a:xfrm>
           <a:prstGeom prst="rect">
             <a:avLst/>
@@ -6691,7 +6769,7 @@
       </p:sp>
       <p:sp>
         <p:nvSpPr>
-          <p:cNvPr id="17" name="Text 15"/>
+          <p:cNvPr id="19" name="Text 17"/>
           <p:cNvSpPr txBox="1"/>
           <p:nvPr/>
         </p:nvSpPr>
@@ -6730,7 +6808,7 @@
       </p:sp>
       <p:sp>
         <p:nvSpPr>
-          <p:cNvPr id="18" name="Text 16"/>
+          <p:cNvPr id="20" name="Text 18"/>
           <p:cNvSpPr txBox="1"/>
           <p:nvPr/>
         </p:nvSpPr>

--- a/slides/pptx/第06回_社内へのお披露目と12か月計画.pptx
+++ b/slides/pptx/第06回_社内へのお披露目と12か月計画.pptx
@@ -2304,6 +2304,10 @@
             <a:prstDash val="solid"/>
           </a:ln>
         </p:spPr>
+        <p:txBody>
+          <a:bodyPr/>
+          <a:p/>
+        </p:txBody>
       </p:sp>
       <p:sp>
         <p:nvSpPr>
@@ -2517,6 +2521,10 @@
             <a:prstDash val="solid"/>
           </a:ln>
         </p:spPr>
+        <p:txBody>
+          <a:bodyPr/>
+          <a:p/>
+        </p:txBody>
       </p:sp>
       <p:sp>
         <p:nvSpPr>
@@ -2581,6 +2589,10 @@
             <a:prstDash val="solid"/>
           </a:ln>
         </p:spPr>
+        <p:txBody>
+          <a:bodyPr/>
+          <a:p/>
+        </p:txBody>
       </p:sp>
       <p:sp>
         <p:nvSpPr>
@@ -2648,6 +2660,10 @@
             <a:prstDash val="solid"/>
           </a:ln>
         </p:spPr>
+        <p:txBody>
+          <a:bodyPr/>
+          <a:p/>
+        </p:txBody>
       </p:sp>
       <p:sp>
         <p:nvSpPr>
@@ -2712,6 +2728,10 @@
             <a:prstDash val="solid"/>
           </a:ln>
         </p:spPr>
+        <p:txBody>
+          <a:bodyPr/>
+          <a:p/>
+        </p:txBody>
       </p:sp>
       <p:sp>
         <p:nvSpPr>
@@ -2779,6 +2799,10 @@
             <a:prstDash val="solid"/>
           </a:ln>
         </p:spPr>
+        <p:txBody>
+          <a:bodyPr/>
+          <a:p/>
+        </p:txBody>
       </p:sp>
       <p:sp>
         <p:nvSpPr>
@@ -2843,6 +2867,10 @@
             <a:prstDash val="solid"/>
           </a:ln>
         </p:spPr>
+        <p:txBody>
+          <a:bodyPr/>
+          <a:p/>
+        </p:txBody>
       </p:sp>
       <p:sp>
         <p:nvSpPr>
@@ -3068,7 +3096,7 @@
                 <a:ea typeface="Yu Gothic" pitchFamily="34" charset="-122"/>
                 <a:cs typeface="Yu Gothic" pitchFamily="34" charset="-120"/>
               </a:rPr>
-              <a:t>演習</a:t>
+              <a:t>実演</a:t>
             </a:r>
             <a:endParaRPr lang="en-US" sz="1100" dirty="0"/>
           </a:p>
@@ -3146,7 +3174,7 @@
                 <a:ea typeface="Yu Gothic" pitchFamily="34" charset="-122"/>
                 <a:cs typeface="Yu Gothic" pitchFamily="34" charset="-120"/>
               </a:rPr>
-              <a:t>社員同席・発表を含む。操作するのはご自身です。</a:t>
+              <a:t>社員同席・発表を含む。発表するのは社長ご自身です。</a:t>
             </a:r>
             <a:endParaRPr lang="en-US" sz="1250" dirty="0"/>
           </a:p>
@@ -3176,6 +3204,10 @@
             <a:prstDash val="solid"/>
           </a:ln>
         </p:spPr>
+        <p:txBody>
+          <a:bodyPr/>
+          <a:p/>
+        </p:txBody>
       </p:sp>
       <p:sp>
         <p:nvSpPr>
@@ -3201,6 +3233,10 @@
             <a:prstDash val="solid"/>
           </a:ln>
         </p:spPr>
+        <p:txBody>
+          <a:bodyPr/>
+          <a:p/>
+        </p:txBody>
       </p:sp>
       <p:sp>
         <p:nvSpPr>
@@ -3349,6 +3385,10 @@
             <a:prstDash val="solid"/>
           </a:ln>
         </p:spPr>
+        <p:txBody>
+          <a:bodyPr/>
+          <a:p/>
+        </p:txBody>
       </p:sp>
       <p:sp>
         <p:nvSpPr>
@@ -3374,6 +3414,10 @@
             <a:prstDash val="solid"/>
           </a:ln>
         </p:spPr>
+        <p:txBody>
+          <a:bodyPr/>
+          <a:p/>
+        </p:txBody>
       </p:sp>
       <p:sp>
         <p:nvSpPr>
@@ -3522,6 +3566,10 @@
             <a:prstDash val="solid"/>
           </a:ln>
         </p:spPr>
+        <p:txBody>
+          <a:bodyPr/>
+          <a:p/>
+        </p:txBody>
       </p:sp>
       <p:sp>
         <p:nvSpPr>
@@ -3547,6 +3595,10 @@
             <a:prstDash val="solid"/>
           </a:ln>
         </p:spPr>
+        <p:txBody>
+          <a:bodyPr/>
+          <a:p/>
+        </p:txBody>
       </p:sp>
       <p:sp>
         <p:nvSpPr>
@@ -3743,7 +3795,7 @@
                 <a:ea typeface="Yu Gothic" pitchFamily="34" charset="-122"/>
                 <a:cs typeface="Yu Gothic" pitchFamily="34" charset="-120"/>
               </a:rPr>
-              <a:t>演習</a:t>
+              <a:t>実演</a:t>
             </a:r>
             <a:endParaRPr lang="en-US" sz="900" dirty="0"/>
           </a:p>
@@ -3922,6 +3974,10 @@
             <a:prstDash val="solid"/>
           </a:ln>
         </p:spPr>
+        <p:txBody>
+          <a:bodyPr/>
+          <a:p/>
+        </p:txBody>
       </p:sp>
       <p:sp>
         <p:nvSpPr>
@@ -3947,6 +4003,10 @@
             <a:prstDash val="solid"/>
           </a:ln>
         </p:spPr>
+        <p:txBody>
+          <a:bodyPr/>
+          <a:p/>
+        </p:txBody>
       </p:sp>
       <p:sp>
         <p:nvSpPr>
@@ -4053,6 +4113,10 @@
             <a:prstDash val="solid"/>
           </a:ln>
         </p:spPr>
+        <p:txBody>
+          <a:bodyPr/>
+          <a:p/>
+        </p:txBody>
       </p:sp>
       <p:sp>
         <p:nvSpPr>
@@ -4078,6 +4142,10 @@
             <a:prstDash val="solid"/>
           </a:ln>
         </p:spPr>
+        <p:txBody>
+          <a:bodyPr/>
+          <a:p/>
+        </p:txBody>
       </p:sp>
       <p:sp>
         <p:nvSpPr>
@@ -4184,6 +4252,10 @@
             <a:prstDash val="solid"/>
           </a:ln>
         </p:spPr>
+        <p:txBody>
+          <a:bodyPr/>
+          <a:p/>
+        </p:txBody>
       </p:sp>
       <p:sp>
         <p:nvSpPr>
@@ -4209,6 +4281,10 @@
             <a:prstDash val="solid"/>
           </a:ln>
         </p:spPr>
+        <p:txBody>
+          <a:bodyPr/>
+          <a:p/>
+        </p:txBody>
       </p:sp>
       <p:sp>
         <p:nvSpPr>
@@ -4503,6 +4579,10 @@
             <a:prstDash val="solid"/>
           </a:ln>
         </p:spPr>
+        <p:txBody>
+          <a:bodyPr/>
+          <a:p/>
+        </p:txBody>
       </p:sp>
       <p:sp>
         <p:nvSpPr>
@@ -4570,6 +4650,10 @@
             <a:prstDash val="solid"/>
           </a:ln>
         </p:spPr>
+        <p:txBody>
+          <a:bodyPr/>
+          <a:p/>
+        </p:txBody>
       </p:sp>
       <p:sp>
         <p:nvSpPr>
@@ -4903,6 +4987,10 @@
             <a:prstDash val="solid"/>
           </a:ln>
         </p:spPr>
+        <p:txBody>
+          <a:bodyPr/>
+          <a:p/>
+        </p:txBody>
       </p:sp>
       <p:sp>
         <p:nvSpPr>
@@ -5009,6 +5097,10 @@
             <a:prstDash val="solid"/>
           </a:ln>
         </p:spPr>
+        <p:txBody>
+          <a:bodyPr/>
+          <a:p/>
+        </p:txBody>
       </p:sp>
       <p:sp>
         <p:nvSpPr>
@@ -5115,6 +5207,10 @@
             <a:prstDash val="solid"/>
           </a:ln>
         </p:spPr>
+        <p:txBody>
+          <a:bodyPr/>
+          <a:p/>
+        </p:txBody>
       </p:sp>
       <p:sp>
         <p:nvSpPr>
@@ -5367,6 +5463,10 @@
             <a:prstDash val="solid"/>
           </a:ln>
         </p:spPr>
+        <p:txBody>
+          <a:bodyPr/>
+          <a:p/>
+        </p:txBody>
       </p:sp>
       <p:sp>
         <p:nvSpPr>
@@ -5664,6 +5764,10 @@
             <a:prstDash val="solid"/>
           </a:ln>
         </p:spPr>
+        <p:txBody>
+          <a:bodyPr/>
+          <a:p/>
+        </p:txBody>
       </p:sp>
       <p:sp>
         <p:nvSpPr>
@@ -5767,6 +5871,10 @@
             <a:prstDash val="solid"/>
           </a:ln>
         </p:spPr>
+        <p:txBody>
+          <a:bodyPr/>
+          <a:p/>
+        </p:txBody>
       </p:sp>
       <p:sp>
         <p:nvSpPr>
@@ -5870,6 +5978,10 @@
             <a:prstDash val="solid"/>
           </a:ln>
         </p:spPr>
+        <p:txBody>
+          <a:bodyPr/>
+          <a:p/>
+        </p:txBody>
       </p:sp>
       <p:sp>
         <p:nvSpPr>
@@ -5973,6 +6085,10 @@
             <a:prstDash val="solid"/>
           </a:ln>
         </p:spPr>
+        <p:txBody>
+          <a:bodyPr/>
+          <a:p/>
+        </p:txBody>
       </p:sp>
       <p:sp>
         <p:nvSpPr>
@@ -6231,6 +6347,10 @@
             <a:prstDash val="solid"/>
           </a:ln>
         </p:spPr>
+        <p:txBody>
+          <a:bodyPr/>
+          <a:p/>
+        </p:txBody>
       </p:sp>
       <p:sp>
         <p:nvSpPr>
@@ -6298,6 +6418,10 @@
             <a:prstDash val="solid"/>
           </a:ln>
         </p:spPr>
+        <p:txBody>
+          <a:bodyPr/>
+          <a:p/>
+        </p:txBody>
       </p:sp>
       <p:sp>
         <p:nvSpPr>
@@ -6979,6 +7103,10 @@
             <a:prstDash val="solid"/>
           </a:ln>
         </p:spPr>
+        <p:txBody>
+          <a:bodyPr/>
+          <a:p/>
+        </p:txBody>
       </p:sp>
       <p:sp>
         <p:nvSpPr>
@@ -7004,6 +7132,10 @@
             <a:prstDash val="solid"/>
           </a:ln>
         </p:spPr>
+        <p:txBody>
+          <a:bodyPr/>
+          <a:p/>
+        </p:txBody>
       </p:sp>
       <p:sp>
         <p:nvSpPr>
@@ -7149,6 +7281,10 @@
             <a:prstDash val="solid"/>
           </a:ln>
         </p:spPr>
+        <p:txBody>
+          <a:bodyPr/>
+          <a:p/>
+        </p:txBody>
       </p:sp>
       <p:sp>
         <p:nvSpPr>
@@ -7174,6 +7310,10 @@
             <a:prstDash val="solid"/>
           </a:ln>
         </p:spPr>
+        <p:txBody>
+          <a:bodyPr/>
+          <a:p/>
+        </p:txBody>
       </p:sp>
       <p:sp>
         <p:nvSpPr>
@@ -7319,6 +7459,10 @@
             <a:prstDash val="solid"/>
           </a:ln>
         </p:spPr>
+        <p:txBody>
+          <a:bodyPr/>
+          <a:p/>
+        </p:txBody>
       </p:sp>
       <p:sp>
         <p:nvSpPr>
@@ -7344,6 +7488,10 @@
             <a:prstDash val="solid"/>
           </a:ln>
         </p:spPr>
+        <p:txBody>
+          <a:bodyPr/>
+          <a:p/>
+        </p:txBody>
       </p:sp>
       <p:sp>
         <p:nvSpPr>
@@ -7489,6 +7637,10 @@
             <a:prstDash val="solid"/>
           </a:ln>
         </p:spPr>
+        <p:txBody>
+          <a:bodyPr/>
+          <a:p/>
+        </p:txBody>
       </p:sp>
       <p:sp>
         <p:nvSpPr>
@@ -7514,6 +7666,10 @@
             <a:prstDash val="solid"/>
           </a:ln>
         </p:spPr>
+        <p:txBody>
+          <a:bodyPr/>
+          <a:p/>
+        </p:txBody>
       </p:sp>
       <p:sp>
         <p:nvSpPr>
@@ -7886,6 +8042,10 @@
             <a:prstDash val="solid"/>
           </a:ln>
         </p:spPr>
+        <p:txBody>
+          <a:bodyPr/>
+          <a:p/>
+        </p:txBody>
       </p:sp>
       <p:sp>
         <p:nvSpPr>
@@ -7911,6 +8071,10 @@
             <a:prstDash val="solid"/>
           </a:ln>
         </p:spPr>
+        <p:txBody>
+          <a:bodyPr/>
+          <a:p/>
+        </p:txBody>
       </p:sp>
       <p:sp>
         <p:nvSpPr>
@@ -8625,6 +8789,10 @@
             <a:prstDash val="solid"/>
           </a:ln>
         </p:spPr>
+        <p:txBody>
+          <a:bodyPr/>
+          <a:p/>
+        </p:txBody>
       </p:sp>
       <p:sp>
         <p:nvSpPr>
@@ -8731,6 +8899,10 @@
             <a:prstDash val="solid"/>
           </a:ln>
         </p:spPr>
+        <p:txBody>
+          <a:bodyPr/>
+          <a:p/>
+        </p:txBody>
       </p:sp>
       <p:sp>
         <p:nvSpPr>
@@ -8963,6 +9135,10 @@
             <a:prstDash val="solid"/>
           </a:ln>
         </p:spPr>
+        <p:txBody>
+          <a:bodyPr/>
+          <a:p/>
+        </p:txBody>
       </p:sp>
       <p:sp>
         <p:nvSpPr>
@@ -9030,6 +9206,10 @@
             <a:prstDash val="solid"/>
           </a:ln>
         </p:spPr>
+        <p:txBody>
+          <a:bodyPr/>
+          <a:p/>
+        </p:txBody>
       </p:sp>
       <p:sp>
         <p:nvSpPr>
@@ -9282,6 +9462,10 @@
             <a:prstDash val="solid"/>
           </a:ln>
         </p:spPr>
+        <p:txBody>
+          <a:bodyPr/>
+          <a:p/>
+        </p:txBody>
       </p:sp>
       <p:sp>
         <p:nvSpPr>
@@ -9388,6 +9572,10 @@
             <a:prstDash val="solid"/>
           </a:ln>
         </p:spPr>
+        <p:txBody>
+          <a:bodyPr/>
+          <a:p/>
+        </p:txBody>
       </p:sp>
       <p:sp>
         <p:nvSpPr>
@@ -9620,6 +9808,10 @@
             <a:prstDash val="solid"/>
           </a:ln>
         </p:spPr>
+        <p:txBody>
+          <a:bodyPr/>
+          <a:p/>
+        </p:txBody>
       </p:sp>
       <p:sp>
         <p:nvSpPr>
@@ -9687,6 +9879,10 @@
             <a:prstDash val="solid"/>
           </a:ln>
         </p:spPr>
+        <p:txBody>
+          <a:bodyPr/>
+          <a:p/>
+        </p:txBody>
       </p:sp>
       <p:sp>
         <p:nvSpPr>
@@ -9939,6 +10135,10 @@
             <a:prstDash val="solid"/>
           </a:ln>
         </p:spPr>
+        <p:txBody>
+          <a:bodyPr/>
+          <a:p/>
+        </p:txBody>
       </p:sp>
       <p:sp>
         <p:nvSpPr>
@@ -10045,6 +10245,10 @@
             <a:prstDash val="solid"/>
           </a:ln>
         </p:spPr>
+        <p:txBody>
+          <a:bodyPr/>
+          <a:p/>
+        </p:txBody>
       </p:sp>
       <p:sp>
         <p:nvSpPr>
@@ -10151,6 +10355,10 @@
             <a:prstDash val="solid"/>
           </a:ln>
         </p:spPr>
+        <p:txBody>
+          <a:bodyPr/>
+          <a:p/>
+        </p:txBody>
       </p:sp>
       <p:sp>
         <p:nvSpPr>
@@ -10257,6 +10465,10 @@
             <a:prstDash val="solid"/>
           </a:ln>
         </p:spPr>
+        <p:txBody>
+          <a:bodyPr/>
+          <a:p/>
+        </p:txBody>
       </p:sp>
       <p:sp>
         <p:nvSpPr>
@@ -10363,6 +10575,10 @@
             <a:prstDash val="solid"/>
           </a:ln>
         </p:spPr>
+        <p:txBody>
+          <a:bodyPr/>
+          <a:p/>
+        </p:txBody>
       </p:sp>
       <p:sp>
         <p:nvSpPr>
@@ -10469,6 +10685,10 @@
             <a:prstDash val="solid"/>
           </a:ln>
         </p:spPr>
+        <p:txBody>
+          <a:bodyPr/>
+          <a:p/>
+        </p:txBody>
       </p:sp>
       <p:sp>
         <p:nvSpPr>
@@ -10763,6 +10983,10 @@
             <a:prstDash val="solid"/>
           </a:ln>
         </p:spPr>
+        <p:txBody>
+          <a:bodyPr/>
+          <a:p/>
+        </p:txBody>
       </p:sp>
       <p:sp>
         <p:nvSpPr>
@@ -10788,6 +11012,10 @@
             <a:prstDash val="solid"/>
           </a:ln>
         </p:spPr>
+        <p:txBody>
+          <a:bodyPr/>
+          <a:p/>
+        </p:txBody>
       </p:sp>
       <p:sp>
         <p:nvSpPr>
@@ -10894,6 +11122,10 @@
             <a:prstDash val="solid"/>
           </a:ln>
         </p:spPr>
+        <p:txBody>
+          <a:bodyPr/>
+          <a:p/>
+        </p:txBody>
       </p:sp>
       <p:sp>
         <p:nvSpPr>
@@ -10919,6 +11151,10 @@
             <a:prstDash val="solid"/>
           </a:ln>
         </p:spPr>
+        <p:txBody>
+          <a:bodyPr/>
+          <a:p/>
+        </p:txBody>
       </p:sp>
       <p:sp>
         <p:nvSpPr>
@@ -11025,6 +11261,10 @@
             <a:prstDash val="solid"/>
           </a:ln>
         </p:spPr>
+        <p:txBody>
+          <a:bodyPr/>
+          <a:p/>
+        </p:txBody>
       </p:sp>
       <p:sp>
         <p:nvSpPr>
@@ -11050,6 +11290,10 @@
             <a:prstDash val="solid"/>
           </a:ln>
         </p:spPr>
+        <p:txBody>
+          <a:bodyPr/>
+          <a:p/>
+        </p:txBody>
       </p:sp>
       <p:sp>
         <p:nvSpPr>
